--- a/Bases de Datos II/Clases/Clase 3 - Procedimientos almacenados/Presentacion.pptx
+++ b/Bases de Datos II/Clases/Clase 3 - Procedimientos almacenados/Presentacion.pptx
@@ -21,8 +21,6 @@
     <p:sldId id="269" r:id="rId20"/>
     <p:sldId id="270" r:id="rId21"/>
     <p:sldId id="271" r:id="rId22"/>
-    <p:sldId id="272" r:id="rId23"/>
-    <p:sldId id="273" r:id="rId24"/>
   </p:sldIdLst>
   <p:sldSz cx="12191695" cy="6858000" type="screen4x3"/>
   <p:notesSz cx="6858000" cy="9144000"/>
@@ -6503,1017 +6501,6 @@
         <p:spPr>
           <a:xfrm>
             <a:off x="0" y="0"/>
-            <a:ext cx="12191695" cy="1170432"/>
-          </a:xfrm>
-          <a:prstGeom prst="rect">
-            <a:avLst/>
-          </a:prstGeom>
-          <a:solidFill>
-            <a:srgbClr val="095292"/>
-          </a:solidFill>
-          <a:ln>
-            <a:noFill/>
-          </a:ln>
-        </p:spPr>
-        <p:style>
-          <a:lnRef idx="1">
-            <a:schemeClr val="accent1"/>
-          </a:lnRef>
-          <a:fillRef idx="3">
-            <a:schemeClr val="accent1"/>
-          </a:fillRef>
-          <a:effectRef idx="2">
-            <a:schemeClr val="accent1"/>
-          </a:effectRef>
-          <a:fontRef idx="minor">
-            <a:schemeClr val="lt1"/>
-          </a:fontRef>
-        </p:style>
-        <p:txBody>
-          <a:bodyPr rtlCol="0" anchor="ctr"/>
-          <a:lstStyle/>
-          <a:p>
-            <a:pPr algn="ctr"/>
-          </a:p>
-        </p:txBody>
-      </p:sp>
-      <p:sp>
-        <p:nvSpPr>
-          <p:cNvPr id="3" name="Rectangle 2"/>
-          <p:cNvSpPr/>
-          <p:nvPr/>
-        </p:nvSpPr>
-        <p:spPr>
-          <a:xfrm>
-            <a:off x="0" y="1170432"/>
-            <a:ext cx="12191695" cy="41148"/>
-          </a:xfrm>
-          <a:prstGeom prst="rect">
-            <a:avLst/>
-          </a:prstGeom>
-          <a:solidFill>
-            <a:srgbClr val="FFD000"/>
-          </a:solidFill>
-          <a:ln>
-            <a:noFill/>
-          </a:ln>
-        </p:spPr>
-        <p:style>
-          <a:lnRef idx="1">
-            <a:schemeClr val="accent1"/>
-          </a:lnRef>
-          <a:fillRef idx="3">
-            <a:schemeClr val="accent1"/>
-          </a:fillRef>
-          <a:effectRef idx="2">
-            <a:schemeClr val="accent1"/>
-          </a:effectRef>
-          <a:fontRef idx="minor">
-            <a:schemeClr val="lt1"/>
-          </a:fontRef>
-        </p:style>
-        <p:txBody>
-          <a:bodyPr rtlCol="0" anchor="ctr"/>
-          <a:lstStyle/>
-          <a:p>
-            <a:pPr algn="ctr"/>
-          </a:p>
-        </p:txBody>
-      </p:sp>
-      <p:sp>
-        <p:nvSpPr>
-          <p:cNvPr id="4" name="TextBox 3"/>
-          <p:cNvSpPr txBox="1"/>
-          <p:nvPr/>
-        </p:nvSpPr>
-        <p:spPr>
-          <a:xfrm>
-            <a:off x="457200" y="164592"/>
-            <a:ext cx="11277295" cy="384048"/>
-          </a:xfrm>
-          <a:prstGeom prst="rect">
-            <a:avLst/>
-          </a:prstGeom>
-          <a:noFill/>
-        </p:spPr>
-        <p:txBody>
-          <a:bodyPr wrap="square">
-            <a:spAutoFit/>
-          </a:bodyPr>
-          <a:lstStyle/>
-          <a:p>
-            <a:r>
-              <a:rPr sz="2600" b="1" i="0">
-                <a:solidFill>
-                  <a:srgbClr val="FFFFFF"/>
-                </a:solidFill>
-                <a:latin typeface="Calibri"/>
-              </a:rPr>
-              <a:t>Quiz rapido (cierre)</a:t>
-            </a:r>
-          </a:p>
-        </p:txBody>
-      </p:sp>
-      <p:sp>
-        <p:nvSpPr>
-          <p:cNvPr id="5" name="TextBox 4"/>
-          <p:cNvSpPr txBox="1"/>
-          <p:nvPr/>
-        </p:nvSpPr>
-        <p:spPr>
-          <a:xfrm>
-            <a:off x="457200" y="566928"/>
-            <a:ext cx="11277295" cy="411480"/>
-          </a:xfrm>
-          <a:prstGeom prst="rect">
-            <a:avLst/>
-          </a:prstGeom>
-          <a:noFill/>
-        </p:spPr>
-        <p:txBody>
-          <a:bodyPr wrap="square">
-            <a:spAutoFit/>
-          </a:bodyPr>
-          <a:lstStyle/>
-          <a:p>
-            <a:r>
-              <a:rPr sz="1400" b="0" i="0">
-                <a:solidFill>
-                  <a:srgbClr val="B8D8EE"/>
-                </a:solidFill>
-                <a:latin typeface="Calibri"/>
-              </a:rPr>
-              <a:t>Individual · 8–10 min</a:t>
-            </a:r>
-          </a:p>
-        </p:txBody>
-      </p:sp>
-      <p:sp>
-        <p:nvSpPr>
-          <p:cNvPr id="6" name="TextBox 5"/>
-          <p:cNvSpPr txBox="1"/>
-          <p:nvPr/>
-        </p:nvSpPr>
-        <p:spPr>
-          <a:xfrm>
-            <a:off x="457200" y="1380744"/>
-            <a:ext cx="11277295" cy="5020056"/>
-          </a:xfrm>
-          <a:prstGeom prst="rect">
-            <a:avLst/>
-          </a:prstGeom>
-          <a:noFill/>
-        </p:spPr>
-        <p:txBody>
-          <a:bodyPr wrap="square">
-            <a:spAutoFit/>
-          </a:bodyPr>
-          <a:lstStyle/>
-          <a:p>
-            <a:pPr>
-              <a:spcAft>
-                <a:spcPts val="800"/>
-              </a:spcAft>
-            </a:pPr>
-            <a:r>
-              <a:rPr sz="1200" b="1" i="0">
-                <a:solidFill>
-                  <a:srgbClr val="333333"/>
-                </a:solidFill>
-                <a:latin typeface="Calibri"/>
-              </a:rPr>
-              <a:t>1.</a:t>
-            </a:r>
-            <a:r>
-              <a:rPr sz="1200" b="0" i="0">
-                <a:solidFill>
-                  <a:srgbClr val="333333"/>
-                </a:solidFill>
-                <a:latin typeface="Calibri"/>
-              </a:rPr>
-              <a:t> ¿Para qué sirve un procedimiento almacenado en VetCare?</a:t>
-            </a:r>
-          </a:p>
-          <a:p>
-            <a:pPr>
-              <a:spcAft>
-                <a:spcPts val="800"/>
-              </a:spcAft>
-            </a:pPr>
-            <a:r>
-              <a:rPr sz="1200" b="0" i="0">
-                <a:solidFill>
-                  <a:srgbClr val="333333"/>
-                </a:solidFill>
-                <a:latin typeface="Calibri"/>
-              </a:rPr>
-              <a:t>–   ('A) Solo formatear texto', 1)</a:t>
-            </a:r>
-          </a:p>
-          <a:p>
-            <a:pPr>
-              <a:spcAft>
-                <a:spcPts val="800"/>
-              </a:spcAft>
-            </a:pPr>
-            <a:r>
-              <a:rPr sz="1200" b="0" i="0">
-                <a:solidFill>
-                  <a:srgbClr val="333333"/>
-                </a:solidFill>
-                <a:latin typeface="Calibri"/>
-              </a:rPr>
-              <a:t>–   ('B) Centralizar regla de negocio invocable desde la app', 1)</a:t>
-            </a:r>
-          </a:p>
-          <a:p>
-            <a:pPr>
-              <a:spcAft>
-                <a:spcPts val="800"/>
-              </a:spcAft>
-            </a:pPr>
-            <a:r>
-              <a:rPr sz="1200" b="0" i="0">
-                <a:solidFill>
-                  <a:srgbClr val="333333"/>
-                </a:solidFill>
-                <a:latin typeface="Calibri"/>
-              </a:rPr>
-              <a:t>–   ('C) Reemplazar el ER', 1)</a:t>
-            </a:r>
-          </a:p>
-          <a:p>
-            <a:pPr>
-              <a:spcAft>
-                <a:spcPts val="800"/>
-              </a:spcAft>
-            </a:pPr>
-            <a:r>
-              <a:rPr sz="1200" b="0" i="0">
-                <a:solidFill>
-                  <a:srgbClr val="333333"/>
-                </a:solidFill>
-                <a:latin typeface="Calibri"/>
-              </a:rPr>
-              <a:t>–   ('D) Dibujar el diagrama', 1)</a:t>
-            </a:r>
-          </a:p>
-          <a:p>
-            <a:pPr>
-              <a:spcAft>
-                <a:spcPts val="800"/>
-              </a:spcAft>
-            </a:pPr>
-            <a:r>
-              <a:rPr sz="1200" b="0" i="0">
-                <a:solidFill>
-                  <a:srgbClr val="333333"/>
-                </a:solidFill>
-                <a:latin typeface="Calibri"/>
-              </a:rPr>
-              <a:t>–   </a:t>
-            </a:r>
-            <a:r>
-              <a:rPr sz="1200" b="1" i="0">
-                <a:solidFill>
-                  <a:srgbClr val="333333"/>
-                </a:solidFill>
-                <a:latin typeface="Calibri"/>
-              </a:rPr>
-              <a:t>2.</a:t>
-            </a:r>
-            <a:r>
-              <a:rPr sz="1200" b="0" i="0">
-                <a:solidFill>
-                  <a:srgbClr val="333333"/>
-                </a:solidFill>
-                <a:latin typeface="Calibri"/>
-              </a:rPr>
-              <a:t> Validación mínima de sp_agendar_cita:</a:t>
-            </a:r>
-          </a:p>
-          <a:p>
-            <a:pPr>
-              <a:spcAft>
-                <a:spcPts val="800"/>
-              </a:spcAft>
-            </a:pPr>
-            <a:r>
-              <a:rPr sz="1200" b="0" i="0">
-                <a:solidFill>
-                  <a:srgbClr val="333333"/>
-                </a:solidFill>
-                <a:latin typeface="Calibri"/>
-              </a:rPr>
-              <a:t>–   ('A) Ninguna', 1)</a:t>
-            </a:r>
-          </a:p>
-          <a:p>
-            <a:pPr>
-              <a:spcAft>
-                <a:spcPts val="800"/>
-              </a:spcAft>
-            </a:pPr>
-            <a:r>
-              <a:rPr sz="1200" b="0" i="0">
-                <a:solidFill>
-                  <a:srgbClr val="333333"/>
-                </a:solidFill>
-                <a:latin typeface="Calibri"/>
-              </a:rPr>
-              <a:t>–   ('B) Que la mascota exista y esté activa', 1)</a:t>
-            </a:r>
-          </a:p>
-          <a:p>
-            <a:pPr>
-              <a:spcAft>
-                <a:spcPts val="800"/>
-              </a:spcAft>
-            </a:pPr>
-            <a:r>
-              <a:rPr sz="1200" b="0" i="0">
-                <a:solidFill>
-                  <a:srgbClr val="333333"/>
-                </a:solidFill>
-                <a:latin typeface="Calibri"/>
-              </a:rPr>
-              <a:t>–   ('C) Solo validar el color del logo', 1)</a:t>
-            </a:r>
-          </a:p>
-          <a:p>
-            <a:pPr>
-              <a:spcAft>
-                <a:spcPts val="800"/>
-              </a:spcAft>
-            </a:pPr>
-            <a:r>
-              <a:rPr sz="1200" b="0" i="0">
-                <a:solidFill>
-                  <a:srgbClr val="333333"/>
-                </a:solidFill>
-                <a:latin typeface="Calibri"/>
-              </a:rPr>
-              <a:t>–   ('D) Borrar stock', 1)</a:t>
-            </a:r>
-          </a:p>
-          <a:p>
-            <a:pPr>
-              <a:spcAft>
-                <a:spcPts val="800"/>
-              </a:spcAft>
-            </a:pPr>
-            <a:r>
-              <a:rPr sz="1200" b="0" i="0">
-                <a:solidFill>
-                  <a:srgbClr val="333333"/>
-                </a:solidFill>
-                <a:latin typeface="Calibri"/>
-              </a:rPr>
-              <a:t>–   </a:t>
-            </a:r>
-            <a:r>
-              <a:rPr sz="1200" b="1" i="0">
-                <a:solidFill>
-                  <a:srgbClr val="333333"/>
-                </a:solidFill>
-                <a:latin typeface="Calibri"/>
-              </a:rPr>
-              <a:t>3.</a:t>
-            </a:r>
-            <a:r>
-              <a:rPr sz="1200" b="0" i="0">
-                <a:solidFill>
-                  <a:srgbClr val="333333"/>
-                </a:solidFill>
-                <a:latin typeface="Calibri"/>
-              </a:rPr>
-              <a:t> IN entra al procedimiento; OUT/devuelve resultado al llamador.</a:t>
-            </a:r>
-          </a:p>
-          <a:p>
-            <a:pPr>
-              <a:spcAft>
-                <a:spcPts val="800"/>
-              </a:spcAft>
-            </a:pPr>
-            <a:r>
-              <a:rPr sz="1200" b="0" i="0">
-                <a:solidFill>
-                  <a:srgbClr val="333333"/>
-                </a:solidFill>
-                <a:latin typeface="Calibri"/>
-              </a:rPr>
-              <a:t>–   ('( ) Verdadero    ( ) Falso', 1)</a:t>
-            </a:r>
-          </a:p>
-          <a:p>
-            <a:pPr>
-              <a:spcAft>
-                <a:spcPts val="800"/>
-              </a:spcAft>
-            </a:pPr>
-            <a:r>
-              <a:rPr sz="1200" b="0" i="0">
-                <a:solidFill>
-                  <a:srgbClr val="333333"/>
-                </a:solidFill>
-                <a:latin typeface="Calibri"/>
-              </a:rPr>
-              <a:t>–   </a:t>
-            </a:r>
-            <a:r>
-              <a:rPr sz="1200" b="1" i="0">
-                <a:solidFill>
-                  <a:srgbClr val="333333"/>
-                </a:solidFill>
-                <a:latin typeface="Calibri"/>
-              </a:rPr>
-              <a:t>4.</a:t>
-            </a:r>
-            <a:r>
-              <a:rPr sz="1200" b="0" i="0">
-                <a:solidFill>
-                  <a:srgbClr val="333333"/>
-                </a:solidFill>
-                <a:latin typeface="Calibri"/>
-              </a:rPr>
-              <a:t> Es correcto duplicar la validación de negocio solo en la UI y nunca en la BD del PI.</a:t>
-            </a:r>
-          </a:p>
-          <a:p>
-            <a:pPr>
-              <a:spcAft>
-                <a:spcPts val="800"/>
-              </a:spcAft>
-            </a:pPr>
-            <a:r>
-              <a:rPr sz="1200" b="0" i="0">
-                <a:solidFill>
-                  <a:srgbClr val="333333"/>
-                </a:solidFill>
-                <a:latin typeface="Calibri"/>
-              </a:rPr>
-              <a:t>–   ('( ) Verdadero    ( ) Falso', 1)</a:t>
-            </a:r>
-          </a:p>
-        </p:txBody>
-      </p:sp>
-      <p:sp>
-        <p:nvSpPr>
-          <p:cNvPr id="7" name="TextBox 6"/>
-          <p:cNvSpPr txBox="1"/>
-          <p:nvPr/>
-        </p:nvSpPr>
-        <p:spPr>
-          <a:xfrm>
-            <a:off x="11185855" y="6473952"/>
-            <a:ext cx="640080" cy="274320"/>
-          </a:xfrm>
-          <a:prstGeom prst="rect">
-            <a:avLst/>
-          </a:prstGeom>
-          <a:noFill/>
-        </p:spPr>
-        <p:txBody>
-          <a:bodyPr wrap="square">
-            <a:spAutoFit/>
-          </a:bodyPr>
-          <a:lstStyle/>
-          <a:p>
-            <a:pPr algn="r"/>
-            <a:r>
-              <a:rPr sz="1100" b="0" i="0">
-                <a:solidFill>
-                  <a:srgbClr val="666666"/>
-                </a:solidFill>
-                <a:latin typeface="Calibri"/>
-              </a:rPr>
-              <a:t>16</a:t>
-            </a:r>
-          </a:p>
-        </p:txBody>
-      </p:sp>
-    </p:spTree>
-  </p:cSld>
-  <p:clrMapOvr>
-    <a:masterClrMapping/>
-  </p:clrMapOvr>
-</p:sld>
-</file>
-
-<file path=ppt/slides/slide17.xml><?xml version="1.0" encoding="utf-8"?>
-<p:sld xmlns:a="http://schemas.openxmlformats.org/drawingml/2006/main" xmlns:p="http://schemas.openxmlformats.org/presentationml/2006/main" xmlns:r="http://schemas.openxmlformats.org/officeDocument/2006/relationships">
-  <p:cSld>
-    <p:bg>
-      <p:bgPr>
-        <a:solidFill>
-          <a:srgbClr val="FFFFFF"/>
-        </a:solidFill>
-        <a:effectLst/>
-      </p:bgPr>
-    </p:bg>
-    <p:spTree>
-      <p:nvGrpSpPr>
-        <p:cNvPr id="1" name=""/>
-        <p:cNvGrpSpPr/>
-        <p:nvPr/>
-      </p:nvGrpSpPr>
-      <p:grpSpPr/>
-      <p:sp>
-        <p:nvSpPr>
-          <p:cNvPr id="2" name="Rectangle 1"/>
-          <p:cNvSpPr/>
-          <p:nvPr/>
-        </p:nvSpPr>
-        <p:spPr>
-          <a:xfrm>
-            <a:off x="0" y="0"/>
-            <a:ext cx="12191695" cy="1170432"/>
-          </a:xfrm>
-          <a:prstGeom prst="rect">
-            <a:avLst/>
-          </a:prstGeom>
-          <a:solidFill>
-            <a:srgbClr val="095292"/>
-          </a:solidFill>
-          <a:ln>
-            <a:noFill/>
-          </a:ln>
-        </p:spPr>
-        <p:style>
-          <a:lnRef idx="1">
-            <a:schemeClr val="accent1"/>
-          </a:lnRef>
-          <a:fillRef idx="3">
-            <a:schemeClr val="accent1"/>
-          </a:fillRef>
-          <a:effectRef idx="2">
-            <a:schemeClr val="accent1"/>
-          </a:effectRef>
-          <a:fontRef idx="minor">
-            <a:schemeClr val="lt1"/>
-          </a:fontRef>
-        </p:style>
-        <p:txBody>
-          <a:bodyPr rtlCol="0" anchor="ctr"/>
-          <a:lstStyle/>
-          <a:p>
-            <a:pPr algn="ctr"/>
-          </a:p>
-        </p:txBody>
-      </p:sp>
-      <p:sp>
-        <p:nvSpPr>
-          <p:cNvPr id="3" name="Rectangle 2"/>
-          <p:cNvSpPr/>
-          <p:nvPr/>
-        </p:nvSpPr>
-        <p:spPr>
-          <a:xfrm>
-            <a:off x="0" y="1170432"/>
-            <a:ext cx="12191695" cy="41148"/>
-          </a:xfrm>
-          <a:prstGeom prst="rect">
-            <a:avLst/>
-          </a:prstGeom>
-          <a:solidFill>
-            <a:srgbClr val="FFD000"/>
-          </a:solidFill>
-          <a:ln>
-            <a:noFill/>
-          </a:ln>
-        </p:spPr>
-        <p:style>
-          <a:lnRef idx="1">
-            <a:schemeClr val="accent1"/>
-          </a:lnRef>
-          <a:fillRef idx="3">
-            <a:schemeClr val="accent1"/>
-          </a:fillRef>
-          <a:effectRef idx="2">
-            <a:schemeClr val="accent1"/>
-          </a:effectRef>
-          <a:fontRef idx="minor">
-            <a:schemeClr val="lt1"/>
-          </a:fontRef>
-        </p:style>
-        <p:txBody>
-          <a:bodyPr rtlCol="0" anchor="ctr"/>
-          <a:lstStyle/>
-          <a:p>
-            <a:pPr algn="ctr"/>
-          </a:p>
-        </p:txBody>
-      </p:sp>
-      <p:sp>
-        <p:nvSpPr>
-          <p:cNvPr id="4" name="TextBox 3"/>
-          <p:cNvSpPr txBox="1"/>
-          <p:nvPr/>
-        </p:nvSpPr>
-        <p:spPr>
-          <a:xfrm>
-            <a:off x="457200" y="164592"/>
-            <a:ext cx="11277295" cy="384048"/>
-          </a:xfrm>
-          <a:prstGeom prst="rect">
-            <a:avLst/>
-          </a:prstGeom>
-          <a:noFill/>
-        </p:spPr>
-        <p:txBody>
-          <a:bodyPr wrap="square">
-            <a:spAutoFit/>
-          </a:bodyPr>
-          <a:lstStyle/>
-          <a:p>
-            <a:r>
-              <a:rPr sz="2600" b="1" i="0">
-                <a:solidFill>
-                  <a:srgbClr val="FFFFFF"/>
-                </a:solidFill>
-                <a:latin typeface="Calibri"/>
-              </a:rPr>
-              <a:t>Quiz rapido (cierre) · cont. 2</a:t>
-            </a:r>
-          </a:p>
-        </p:txBody>
-      </p:sp>
-      <p:sp>
-        <p:nvSpPr>
-          <p:cNvPr id="5" name="TextBox 4"/>
-          <p:cNvSpPr txBox="1"/>
-          <p:nvPr/>
-        </p:nvSpPr>
-        <p:spPr>
-          <a:xfrm>
-            <a:off x="457200" y="566928"/>
-            <a:ext cx="11277295" cy="411480"/>
-          </a:xfrm>
-          <a:prstGeom prst="rect">
-            <a:avLst/>
-          </a:prstGeom>
-          <a:noFill/>
-        </p:spPr>
-        <p:txBody>
-          <a:bodyPr wrap="square">
-            <a:spAutoFit/>
-          </a:bodyPr>
-          <a:lstStyle/>
-          <a:p>
-            <a:r>
-              <a:rPr sz="1400" b="0" i="0">
-                <a:solidFill>
-                  <a:srgbClr val="B8D8EE"/>
-                </a:solidFill>
-                <a:latin typeface="Calibri"/>
-              </a:rPr>
-              <a:t>Individual · 8–10 min</a:t>
-            </a:r>
-          </a:p>
-        </p:txBody>
-      </p:sp>
-      <p:sp>
-        <p:nvSpPr>
-          <p:cNvPr id="6" name="TextBox 5"/>
-          <p:cNvSpPr txBox="1"/>
-          <p:nvPr/>
-        </p:nvSpPr>
-        <p:spPr>
-          <a:xfrm>
-            <a:off x="457200" y="1380744"/>
-            <a:ext cx="11277295" cy="5020056"/>
-          </a:xfrm>
-          <a:prstGeom prst="rect">
-            <a:avLst/>
-          </a:prstGeom>
-          <a:noFill/>
-        </p:spPr>
-        <p:txBody>
-          <a:bodyPr wrap="square">
-            <a:spAutoFit/>
-          </a:bodyPr>
-          <a:lstStyle/>
-          <a:p>
-            <a:pPr>
-              <a:spcAft>
-                <a:spcPts val="800"/>
-              </a:spcAft>
-            </a:pPr>
-            <a:r>
-              <a:rPr sz="1200" b="0" i="0">
-                <a:solidFill>
-                  <a:srgbClr val="333333"/>
-                </a:solidFill>
-                <a:latin typeface="Calibri"/>
-              </a:rPr>
-              <a:t>–   </a:t>
-            </a:r>
-            <a:r>
-              <a:rPr sz="1200" b="1" i="0">
-                <a:solidFill>
-                  <a:srgbClr val="333333"/>
-                </a:solidFill>
-                <a:latin typeface="Calibri"/>
-              </a:rPr>
-              <a:t>5.</a:t>
-            </a:r>
-            <a:r>
-              <a:rPr sz="1200" b="0" i="0">
-                <a:solidFill>
-                  <a:srgbClr val="333333"/>
-                </a:solidFill>
-                <a:latin typeface="Calibri"/>
-              </a:rPr>
-              <a:t> Ventaja de invocar un proc desde la app VetCare:</a:t>
-            </a:r>
-          </a:p>
-          <a:p>
-            <a:pPr>
-              <a:spcAft>
-                <a:spcPts val="800"/>
-              </a:spcAft>
-            </a:pPr>
-            <a:r>
-              <a:rPr sz="1200" b="0" i="0">
-                <a:solidFill>
-                  <a:srgbClr val="333333"/>
-                </a:solidFill>
-                <a:latin typeface="Calibri"/>
-              </a:rPr>
-              <a:t>–   ('A) Oculta reglas y evita SQL suelto inconsistente', 1)</a:t>
-            </a:r>
-          </a:p>
-          <a:p>
-            <a:pPr>
-              <a:spcAft>
-                <a:spcPts val="800"/>
-              </a:spcAft>
-            </a:pPr>
-            <a:r>
-              <a:rPr sz="1200" b="0" i="0">
-                <a:solidFill>
-                  <a:srgbClr val="333333"/>
-                </a:solidFill>
-                <a:latin typeface="Calibri"/>
-              </a:rPr>
-              <a:t>–   ('B) Impide transacciones', 1)</a:t>
-            </a:r>
-          </a:p>
-          <a:p>
-            <a:pPr>
-              <a:spcAft>
-                <a:spcPts val="800"/>
-              </a:spcAft>
-            </a:pPr>
-            <a:r>
-              <a:rPr sz="1200" b="0" i="0">
-                <a:solidFill>
-                  <a:srgbClr val="333333"/>
-                </a:solidFill>
-                <a:latin typeface="Calibri"/>
-              </a:rPr>
-              <a:t>–   ('C) Elimina índices', 1)</a:t>
-            </a:r>
-          </a:p>
-          <a:p>
-            <a:pPr>
-              <a:spcAft>
-                <a:spcPts val="800"/>
-              </a:spcAft>
-            </a:pPr>
-            <a:r>
-              <a:rPr sz="1200" b="0" i="0">
-                <a:solidFill>
-                  <a:srgbClr val="333333"/>
-                </a:solidFill>
-                <a:latin typeface="Calibri"/>
-              </a:rPr>
-              <a:t>–   ('D) Obliga a SELECT *', 1)</a:t>
-            </a:r>
-          </a:p>
-          <a:p>
-            <a:pPr>
-              <a:spcAft>
-                <a:spcPts val="800"/>
-              </a:spcAft>
-            </a:pPr>
-            <a:r>
-              <a:rPr sz="1200" b="0" i="0">
-                <a:solidFill>
-                  <a:srgbClr val="333333"/>
-                </a:solidFill>
-                <a:latin typeface="Calibri"/>
-              </a:rPr>
-              <a:t>–   </a:t>
-            </a:r>
-            <a:r>
-              <a:rPr sz="1200" b="1" i="0">
-                <a:solidFill>
-                  <a:srgbClr val="333333"/>
-                </a:solidFill>
-                <a:latin typeface="Calibri"/>
-              </a:rPr>
-              <a:t>6.</a:t>
-            </a:r>
-            <a:r>
-              <a:rPr sz="1200" b="0" i="0">
-                <a:solidFill>
-                  <a:srgbClr val="333333"/>
-                </a:solidFill>
-                <a:latin typeface="Calibri"/>
-              </a:rPr>
-              <a:t> Un procedimiento puede validar reglas y devolver mensaje/código de error controlado.</a:t>
-            </a:r>
-          </a:p>
-          <a:p>
-            <a:pPr>
-              <a:spcAft>
-                <a:spcPts val="800"/>
-              </a:spcAft>
-            </a:pPr>
-            <a:r>
-              <a:rPr sz="1200" b="0" i="0">
-                <a:solidFill>
-                  <a:srgbClr val="333333"/>
-                </a:solidFill>
-                <a:latin typeface="Calibri"/>
-              </a:rPr>
-              <a:t>–   ('( ) Verdadero    ( ) Falso', 1)</a:t>
-            </a:r>
-          </a:p>
-          <a:p>
-            <a:pPr>
-              <a:spcAft>
-                <a:spcPts val="800"/>
-              </a:spcAft>
-            </a:pPr>
-            <a:r>
-              <a:rPr sz="1200" b="0" i="0">
-                <a:solidFill>
-                  <a:srgbClr val="333333"/>
-                </a:solidFill>
-                <a:latin typeface="Calibri"/>
-              </a:rPr>
-              <a:t>–   </a:t>
-            </a:r>
-            <a:r>
-              <a:rPr sz="1200" b="1" i="0">
-                <a:solidFill>
-                  <a:srgbClr val="333333"/>
-                </a:solidFill>
-                <a:latin typeface="Calibri"/>
-              </a:rPr>
-              <a:t>7.</a:t>
-            </a:r>
-            <a:r>
-              <a:rPr sz="1200" b="0" i="0">
-                <a:solidFill>
-                  <a:srgbClr val="333333"/>
-                </a:solidFill>
-                <a:latin typeface="Calibri"/>
-              </a:rPr>
-              <a:t> Escriba la firma (nombre + 2 parámetros) de su sp_agendar_cita.</a:t>
-            </a:r>
-          </a:p>
-          <a:p>
-            <a:pPr>
-              <a:spcAft>
-                <a:spcPts val="800"/>
-              </a:spcAft>
-            </a:pPr>
-            <a:r>
-              <a:rPr sz="1200" b="0" i="0">
-                <a:solidFill>
-                  <a:srgbClr val="333333"/>
-                </a:solidFill>
-                <a:latin typeface="Calibri"/>
-              </a:rPr>
-              <a:t>–   ('Respuesta corta: ____________________________', 1)</a:t>
-            </a:r>
-          </a:p>
-          <a:p>
-            <a:pPr>
-              <a:spcAft>
-                <a:spcPts val="800"/>
-              </a:spcAft>
-            </a:pPr>
-            <a:r>
-              <a:rPr sz="1200" b="0" i="0">
-                <a:solidFill>
-                  <a:srgbClr val="333333"/>
-                </a:solidFill>
-                <a:latin typeface="Calibri"/>
-              </a:rPr>
-              <a:t>–   </a:t>
-            </a:r>
-            <a:r>
-              <a:rPr sz="1200" b="1" i="0">
-                <a:solidFill>
-                  <a:srgbClr val="333333"/>
-                </a:solidFill>
-                <a:latin typeface="Calibri"/>
-              </a:rPr>
-              <a:t>8.</a:t>
-            </a:r>
-            <a:r>
-              <a:rPr sz="1200" b="0" i="0">
-                <a:solidFill>
-                  <a:srgbClr val="333333"/>
-                </a:solidFill>
-                <a:latin typeface="Calibri"/>
-              </a:rPr>
-              <a:t> ¿Qué pasa si intentan agendar una mascota inactiva? (comportamiento esperado)</a:t>
-            </a:r>
-          </a:p>
-          <a:p>
-            <a:pPr>
-              <a:spcAft>
-                <a:spcPts val="800"/>
-              </a:spcAft>
-            </a:pPr>
-            <a:r>
-              <a:rPr sz="1200" b="0" i="0">
-                <a:solidFill>
-                  <a:srgbClr val="333333"/>
-                </a:solidFill>
-                <a:latin typeface="Calibri"/>
-              </a:rPr>
-              <a:t>–   ('Respuesta corta: ____________________________', 1)</a:t>
-            </a:r>
-          </a:p>
-        </p:txBody>
-      </p:sp>
-      <p:sp>
-        <p:nvSpPr>
-          <p:cNvPr id="7" name="TextBox 6"/>
-          <p:cNvSpPr txBox="1"/>
-          <p:nvPr/>
-        </p:nvSpPr>
-        <p:spPr>
-          <a:xfrm>
-            <a:off x="11185855" y="6473952"/>
-            <a:ext cx="640080" cy="274320"/>
-          </a:xfrm>
-          <a:prstGeom prst="rect">
-            <a:avLst/>
-          </a:prstGeom>
-          <a:noFill/>
-        </p:spPr>
-        <p:txBody>
-          <a:bodyPr wrap="square">
-            <a:spAutoFit/>
-          </a:bodyPr>
-          <a:lstStyle/>
-          <a:p>
-            <a:pPr algn="r"/>
-            <a:r>
-              <a:rPr sz="1100" b="0" i="0">
-                <a:solidFill>
-                  <a:srgbClr val="666666"/>
-                </a:solidFill>
-                <a:latin typeface="Calibri"/>
-              </a:rPr>
-              <a:t>17</a:t>
-            </a:r>
-          </a:p>
-        </p:txBody>
-      </p:sp>
-    </p:spTree>
-  </p:cSld>
-  <p:clrMapOvr>
-    <a:masterClrMapping/>
-  </p:clrMapOvr>
-</p:sld>
-</file>
-
-<file path=ppt/slides/slide18.xml><?xml version="1.0" encoding="utf-8"?>
-<p:sld xmlns:a="http://schemas.openxmlformats.org/drawingml/2006/main" xmlns:p="http://schemas.openxmlformats.org/presentationml/2006/main" xmlns:r="http://schemas.openxmlformats.org/officeDocument/2006/relationships">
-  <p:cSld>
-    <p:bg>
-      <p:bgPr>
-        <a:solidFill>
-          <a:srgbClr val="FFFFFF"/>
-        </a:solidFill>
-        <a:effectLst/>
-      </p:bgPr>
-    </p:bg>
-    <p:spTree>
-      <p:nvGrpSpPr>
-        <p:cNvPr id="1" name=""/>
-        <p:cNvGrpSpPr/>
-        <p:nvPr/>
-      </p:nvGrpSpPr>
-      <p:grpSpPr/>
-      <p:sp>
-        <p:nvSpPr>
-          <p:cNvPr id="2" name="Rectangle 1"/>
-          <p:cNvSpPr/>
-          <p:nvPr/>
-        </p:nvSpPr>
-        <p:spPr>
-          <a:xfrm>
-            <a:off x="0" y="0"/>
             <a:ext cx="12191695" cy="164592"/>
           </a:xfrm>
           <a:prstGeom prst="rect">
@@ -8842,7 +7829,7 @@
                 </a:solidFill>
                 <a:latin typeface="Calibri"/>
               </a:rPr>
-              <a:t>Criterios · quiz/cierre · duda PI</a:t>
+              <a:t>Criterios de exito · cierre · dudas del PI</a:t>
             </a:r>
           </a:p>
         </p:txBody>

--- a/Bases de Datos II/Clases/Clase 3 - Procedimientos almacenados/Presentacion.pptx
+++ b/Bases de Datos II/Clases/Clase 3 - Procedimientos almacenados/Presentacion.pptx
@@ -5831,7 +5831,7 @@
                 </a:solidFill>
                 <a:latin typeface="Calibri"/>
               </a:rPr>
-              <a:t> (Talleres) — domingo 23:59 cuando aplique taller.</a:t>
+              <a:t> (https://examlab.lovable.app/) — domingo 23:59 cuando aplique taller.</a:t>
             </a:r>
           </a:p>
         </p:txBody>
@@ -6426,7 +6426,7 @@
                 </a:solidFill>
                 <a:latin typeface="Calibri"/>
               </a:rPr>
-              <a:t>Taller de la semana en ExamLab: domingo 23:59 (regla del Acuerdo) cuando aplique.</a:t>
+              <a:t>Taller de la semana en ExamLab (https://examlab.lovable.app/): domingo 23:59 (regla del Acuerdo) cuando aplique.</a:t>
             </a:r>
           </a:p>
         </p:txBody>

--- a/Bases de Datos II/Clases/Clase 3 - Procedimientos almacenados/Presentacion.pptx
+++ b/Bases de Datos II/Clases/Clase 3 - Procedimientos almacenados/Presentacion.pptx
@@ -8167,22 +8167,6 @@
                 <a:latin typeface="Calibri"/>
               </a:rPr>
               <a:t>–   Diferencia con una funcion (se vera en Clase 4): el procedimiento se ejecuta como una accion (CALL sp_algo)…</a:t>
-            </a:r>
-          </a:p>
-          <a:p>
-            <a:pPr>
-              <a:spcAft>
-                <a:spcPts val="800"/>
-              </a:spcAft>
-            </a:pPr>
-            <a:r>
-              <a:rPr sz="1500" b="0" i="0">
-                <a:solidFill>
-                  <a:srgbClr val="333333"/>
-                </a:solidFill>
-                <a:latin typeface="Calibri"/>
-              </a:rPr>
-              <a:t>–   Error de docente que no domina el tema: escribir el proc sin validar nada (solo el INSERT) y llamarlo 'logica…</a:t>
             </a:r>
           </a:p>
         </p:txBody>

--- a/Bases de Datos II/Clases/Clase 3 - Procedimientos almacenados/Presentacion.pptx
+++ b/Bases de Datos II/Clases/Clase 3 - Procedimientos almacenados/Presentacion.pptx
@@ -4034,7 +4034,7 @@
                 </a:solidFill>
                 <a:latin typeface="Calibri"/>
               </a:rPr>
-              <a:t>–   DDL VetCare del equipo.</a:t>
+              <a:t>–   Tu DDL de VetCare.</a:t>
             </a:r>
           </a:p>
           <a:p>
@@ -5781,7 +5781,7 @@
                 </a:solidFill>
                 <a:latin typeface="Calibri"/>
               </a:rPr>
-              <a:t>–   Evidencia en playground (enlace) o archivo SQL/PNG del equipo.</a:t>
+              <a:t>–   Evidencia en playground (enlace) o archivo SQL/PNG propio.</a:t>
             </a:r>
           </a:p>
           <a:p>
@@ -7030,7 +7030,7 @@
                 </a:solidFill>
                 <a:latin typeface="Calibri"/>
               </a:rPr>
-              <a:t>–   Al salir: avance concreto en el paquete VetCare del equipo.</a:t>
+              <a:t>–   Al salir: avance concreto en su paquete VetCare.</a:t>
             </a:r>
           </a:p>
         </p:txBody>
@@ -8134,7 +8134,7 @@
                 </a:solidFill>
                 <a:latin typeface="Calibri"/>
               </a:rPr>
-              <a:t>–   Ventaja central para el PI: sin proc, cada pantalla de la futura app (o cada integrante del equipo)…</a:t>
+              <a:t>–   Ventaja central para el PI: sin proc, cada pantalla de la futura app (o cada persona que toque el codigo)…</a:t>
             </a:r>
           </a:p>
           <a:p>
@@ -9570,7 +9570,7 @@
                 </a:solidFill>
                 <a:latin typeface="Calibri"/>
               </a:rPr>
-              <a:t>–   Al final de la demo: dejar enlace/script compartible al equipo.</a:t>
+              <a:t>–   Al final de la demo: dejar enlace/script compartible al grupo.</a:t>
             </a:r>
           </a:p>
         </p:txBody>

--- a/Bases de Datos II/Clases/Clase 3 - Procedimientos almacenados/Presentacion.pptx
+++ b/Bases de Datos II/Clases/Clase 3 - Procedimientos almacenados/Presentacion.pptx
@@ -5831,7 +5831,7 @@
                 </a:solidFill>
                 <a:latin typeface="Calibri"/>
               </a:rPr>
-              <a:t> (https://examlab.lovable.app/) — domingo 23:59 cuando aplique taller.</a:t>
+              <a:t> (https://uniaj.examlab.workers.dev/) — domingo 23:59 cuando aplique taller.</a:t>
             </a:r>
           </a:p>
         </p:txBody>
@@ -6426,7 +6426,7 @@
                 </a:solidFill>
                 <a:latin typeface="Calibri"/>
               </a:rPr>
-              <a:t>Taller de la semana en ExamLab (https://examlab.lovable.app/): domingo 23:59 (regla del Acuerdo) cuando aplique.</a:t>
+              <a:t>Taller de la semana en ExamLab (https://uniaj.examlab.workers.dev/): domingo 23:59 (regla del Acuerdo) cuando aplique.</a:t>
             </a:r>
           </a:p>
         </p:txBody>

--- a/Bases de Datos II/Clases/Clase 3 - Procedimientos almacenados/Presentacion.pptx
+++ b/Bases de Datos II/Clases/Clase 3 - Procedimientos almacenados/Presentacion.pptx
@@ -4244,8 +4244,8 @@
         </p:nvSpPr>
         <p:spPr>
           <a:xfrm>
-            <a:off x="457200" y="1234440"/>
-            <a:ext cx="11277295" cy="777240"/>
+            <a:off x="457200" y="1554480"/>
+            <a:ext cx="11277295" cy="1051560"/>
           </a:xfrm>
           <a:prstGeom prst="roundRect">
             <a:avLst>
@@ -4289,7 +4289,7 @@
         </p:nvSpPr>
         <p:spPr>
           <a:xfrm>
-            <a:off x="594360" y="1403604"/>
+            <a:off x="594360" y="1860804"/>
             <a:ext cx="438912" cy="438912"/>
           </a:xfrm>
           <a:prstGeom prst="roundRect">
@@ -4334,7 +4334,7 @@
         </p:nvSpPr>
         <p:spPr>
           <a:xfrm>
-            <a:off x="594360" y="1403604"/>
+            <a:off x="594360" y="1860804"/>
             <a:ext cx="438912" cy="438912"/>
           </a:xfrm>
           <a:prstGeom prst="rect">
@@ -4367,8 +4367,8 @@
         </p:nvSpPr>
         <p:spPr>
           <a:xfrm>
-            <a:off x="1188720" y="1325880"/>
-            <a:ext cx="10271455" cy="612647"/>
+            <a:off x="1188720" y="1645920"/>
+            <a:ext cx="10271455" cy="886968"/>
           </a:xfrm>
           <a:prstGeom prst="rect">
             <a:avLst/>
@@ -4399,8 +4399,8 @@
         </p:nvSpPr>
         <p:spPr>
           <a:xfrm>
-            <a:off x="457200" y="2103120"/>
-            <a:ext cx="11277295" cy="777240"/>
+            <a:off x="457200" y="2697480"/>
+            <a:ext cx="11277295" cy="1051560"/>
           </a:xfrm>
           <a:prstGeom prst="roundRect">
             <a:avLst>
@@ -4444,7 +4444,7 @@
         </p:nvSpPr>
         <p:spPr>
           <a:xfrm>
-            <a:off x="594360" y="2272284"/>
+            <a:off x="594360" y="3003804"/>
             <a:ext cx="438912" cy="438912"/>
           </a:xfrm>
           <a:prstGeom prst="roundRect">
@@ -4489,7 +4489,7 @@
         </p:nvSpPr>
         <p:spPr>
           <a:xfrm>
-            <a:off x="594360" y="2272284"/>
+            <a:off x="594360" y="3003804"/>
             <a:ext cx="438912" cy="438912"/>
           </a:xfrm>
           <a:prstGeom prst="rect">
@@ -4522,8 +4522,8 @@
         </p:nvSpPr>
         <p:spPr>
           <a:xfrm>
-            <a:off x="1188720" y="2194560"/>
-            <a:ext cx="10271455" cy="612647"/>
+            <a:off x="1188720" y="2788920"/>
+            <a:ext cx="10271455" cy="886968"/>
           </a:xfrm>
           <a:prstGeom prst="rect">
             <a:avLst/>
@@ -4554,8 +4554,8 @@
         </p:nvSpPr>
         <p:spPr>
           <a:xfrm>
-            <a:off x="457200" y="2971800"/>
-            <a:ext cx="11277295" cy="777240"/>
+            <a:off x="457200" y="3840480"/>
+            <a:ext cx="11277295" cy="1051560"/>
           </a:xfrm>
           <a:prstGeom prst="roundRect">
             <a:avLst>
@@ -4599,7 +4599,7 @@
         </p:nvSpPr>
         <p:spPr>
           <a:xfrm>
-            <a:off x="594360" y="3140964"/>
+            <a:off x="594360" y="4146804"/>
             <a:ext cx="438912" cy="438912"/>
           </a:xfrm>
           <a:prstGeom prst="roundRect">
@@ -4644,7 +4644,7 @@
         </p:nvSpPr>
         <p:spPr>
           <a:xfrm>
-            <a:off x="594360" y="3140964"/>
+            <a:off x="594360" y="4146804"/>
             <a:ext cx="438912" cy="438912"/>
           </a:xfrm>
           <a:prstGeom prst="rect">
@@ -4677,8 +4677,8 @@
         </p:nvSpPr>
         <p:spPr>
           <a:xfrm>
-            <a:off x="1188720" y="3063240"/>
-            <a:ext cx="10271455" cy="612647"/>
+            <a:off x="1188720" y="3931920"/>
+            <a:ext cx="10271455" cy="886968"/>
           </a:xfrm>
           <a:prstGeom prst="rect">
             <a:avLst/>
@@ -4709,8 +4709,8 @@
         </p:nvSpPr>
         <p:spPr>
           <a:xfrm>
-            <a:off x="457200" y="3840479"/>
-            <a:ext cx="11277295" cy="777240"/>
+            <a:off x="457200" y="4983480"/>
+            <a:ext cx="11277295" cy="1051560"/>
           </a:xfrm>
           <a:prstGeom prst="roundRect">
             <a:avLst>
@@ -4754,7 +4754,7 @@
         </p:nvSpPr>
         <p:spPr>
           <a:xfrm>
-            <a:off x="594360" y="4009643"/>
+            <a:off x="594360" y="5289804"/>
             <a:ext cx="438912" cy="438912"/>
           </a:xfrm>
           <a:prstGeom prst="roundRect">
@@ -4799,7 +4799,7 @@
         </p:nvSpPr>
         <p:spPr>
           <a:xfrm>
-            <a:off x="594360" y="4009643"/>
+            <a:off x="594360" y="5289804"/>
             <a:ext cx="438912" cy="438912"/>
           </a:xfrm>
           <a:prstGeom prst="rect">
@@ -4832,8 +4832,8 @@
         </p:nvSpPr>
         <p:spPr>
           <a:xfrm>
-            <a:off x="1188720" y="3931919"/>
-            <a:ext cx="10271455" cy="612647"/>
+            <a:off x="1188720" y="5074920"/>
+            <a:ext cx="10271455" cy="886968"/>
           </a:xfrm>
           <a:prstGeom prst="rect">
             <a:avLst/>
@@ -9937,8 +9937,8 @@
         </p:blipFill>
         <p:spPr>
           <a:xfrm>
-            <a:off x="1743913" y="1792224"/>
-            <a:ext cx="1051560" cy="1051560"/>
+            <a:off x="1643329" y="1847087"/>
+            <a:ext cx="1252728" cy="1252728"/>
           </a:xfrm>
           <a:prstGeom prst="rect">
             <a:avLst/>
@@ -9953,8 +9953,8 @@
         </p:nvSpPr>
         <p:spPr>
           <a:xfrm>
-            <a:off x="530352" y="2916936"/>
-            <a:ext cx="3478682" cy="502920"/>
+            <a:off x="530352" y="3191256"/>
+            <a:ext cx="3478682" cy="621792"/>
           </a:xfrm>
           <a:prstGeom prst="rect">
             <a:avLst/>
@@ -10141,8 +10141,8 @@
         </p:blipFill>
         <p:spPr>
           <a:xfrm>
-            <a:off x="5570067" y="1792224"/>
-            <a:ext cx="1051560" cy="1051560"/>
+            <a:off x="5469483" y="1847087"/>
+            <a:ext cx="1252728" cy="1252728"/>
           </a:xfrm>
           <a:prstGeom prst="rect">
             <a:avLst/>
@@ -10157,8 +10157,8 @@
         </p:nvSpPr>
         <p:spPr>
           <a:xfrm>
-            <a:off x="4356506" y="2916936"/>
-            <a:ext cx="3478682" cy="502920"/>
+            <a:off x="4356506" y="3191256"/>
+            <a:ext cx="3478682" cy="621792"/>
           </a:xfrm>
           <a:prstGeom prst="rect">
             <a:avLst/>
@@ -10345,8 +10345,8 @@
         </p:blipFill>
         <p:spPr>
           <a:xfrm>
-            <a:off x="9396222" y="1792224"/>
-            <a:ext cx="1051560" cy="1051560"/>
+            <a:off x="9295638" y="1847087"/>
+            <a:ext cx="1252728" cy="1252728"/>
           </a:xfrm>
           <a:prstGeom prst="rect">
             <a:avLst/>
@@ -10361,8 +10361,8 @@
         </p:nvSpPr>
         <p:spPr>
           <a:xfrm>
-            <a:off x="8182660" y="2916936"/>
-            <a:ext cx="3478682" cy="502920"/>
+            <a:off x="8182660" y="3191256"/>
+            <a:ext cx="3478682" cy="621792"/>
           </a:xfrm>
           <a:prstGeom prst="rect">
             <a:avLst/>

--- a/Bases de Datos II/Clases/Clase 3 - Procedimientos almacenados/Presentacion.pptx
+++ b/Bases de Datos II/Clases/Clase 3 - Procedimientos almacenados/Presentacion.pptx
@@ -21,6 +21,9 @@
     <p:sldId id="269" r:id="rId20"/>
     <p:sldId id="270" r:id="rId21"/>
     <p:sldId id="271" r:id="rId22"/>
+    <p:sldId id="272" r:id="rId23"/>
+    <p:sldId id="273" r:id="rId24"/>
+    <p:sldId id="274" r:id="rId25"/>
   </p:sldIdLst>
   <p:sldSz cx="12191695" cy="6858000" type="screen4x3"/>
   <p:notesSz cx="6858000" cy="9144000"/>
@@ -3621,7 +3624,7 @@
                 </a:solidFill>
                 <a:latin typeface="Calibri"/>
               </a:rPr>
-              <a:t>Taller PI VetCare — objetivo y criterios</a:t>
+              <a:t>Demo del dia</a:t>
             </a:r>
           </a:p>
         </p:txBody>
@@ -3654,7 +3657,7 @@
               </a:spcAft>
             </a:pPr>
             <a:r>
-              <a:rPr sz="1500" b="0" i="0">
+              <a:rPr sz="1600" b="0" i="0">
                 <a:solidFill>
                   <a:srgbClr val="333333"/>
                 </a:solidFill>
@@ -3663,22 +3666,22 @@
               <a:t>–   </a:t>
             </a:r>
             <a:r>
-              <a:rPr sz="1500" b="1" i="0">
-                <a:solidFill>
-                  <a:srgbClr val="333333"/>
-                </a:solidFill>
-                <a:latin typeface="Calibri"/>
-              </a:rPr>
-              <a:t>Objetivo:</a:t>
-            </a:r>
-            <a:r>
-              <a:rPr sz="1500" b="0" i="0">
-                <a:solidFill>
-                  <a:srgbClr val="333333"/>
-                </a:solidFill>
-                <a:latin typeface="Calibri"/>
-              </a:rPr>
-              <a:t> &gt;=1 procedimiento con validación + 2 pruebas.</a:t>
+              <a:rPr sz="1600" b="1" i="0">
+                <a:solidFill>
+                  <a:srgbClr val="333333"/>
+                </a:solidFill>
+                <a:latin typeface="Calibri"/>
+              </a:rPr>
+              <a:t>Herramienta:</a:t>
+            </a:r>
+            <a:r>
+              <a:rPr sz="1600" b="0" i="0">
+                <a:solidFill>
+                  <a:srgbClr val="333333"/>
+                </a:solidFill>
+                <a:latin typeface="Calibri"/>
+              </a:rPr>
+              <a:t> ExamLab (PostgreSQL) + Google Docs</a:t>
             </a:r>
           </a:p>
           <a:p>
@@ -3688,7 +3691,7 @@
               </a:spcAft>
             </a:pPr>
             <a:r>
-              <a:rPr sz="1500" b="0" i="0">
+              <a:rPr sz="1600" b="0" i="0">
                 <a:solidFill>
                   <a:srgbClr val="333333"/>
                 </a:solidFill>
@@ -3697,22 +3700,22 @@
               <a:t>–   </a:t>
             </a:r>
             <a:r>
-              <a:rPr sz="1500" b="1" i="0">
-                <a:solidFill>
-                  <a:srgbClr val="333333"/>
-                </a:solidFill>
-                <a:latin typeface="Calibri"/>
-              </a:rPr>
-              <a:t>Exito:</a:t>
-            </a:r>
-            <a:r>
-              <a:rPr sz="1500" b="0" i="0">
-                <a:solidFill>
-                  <a:srgbClr val="333333"/>
-                </a:solidFill>
-                <a:latin typeface="Calibri"/>
-              </a:rPr>
-              <a:t> Proc en Live SQL.</a:t>
+              <a:rPr sz="1600" b="1" i="0">
+                <a:solidFill>
+                  <a:srgbClr val="333333"/>
+                </a:solidFill>
+                <a:latin typeface="Calibri"/>
+              </a:rPr>
+              <a:t>Demo:</a:t>
+            </a:r>
+            <a:r>
+              <a:rPr sz="1600" b="0" i="0">
+                <a:solidFill>
+                  <a:srgbClr val="333333"/>
+                </a:solidFill>
+                <a:latin typeface="Calibri"/>
+              </a:rPr>
+              <a:t> sp_agendar_cita en PL/pgSQL dentro de ExamLab: las 3 validaciones con RAISE EXCEPTION y la bateria de bloques DO que las prueba.</a:t>
             </a:r>
           </a:p>
           <a:p>
@@ -3722,31 +3725,13 @@
               </a:spcAft>
             </a:pPr>
             <a:r>
-              <a:rPr sz="1500" b="0" i="0">
-                <a:solidFill>
-                  <a:srgbClr val="333333"/>
-                </a:solidFill>
-                <a:latin typeface="Calibri"/>
-              </a:rPr>
-              <a:t>–   </a:t>
-            </a:r>
-            <a:r>
-              <a:rPr sz="1500" b="1" i="0">
-                <a:solidFill>
-                  <a:srgbClr val="333333"/>
-                </a:solidFill>
-                <a:latin typeface="Calibri"/>
-              </a:rPr>
-              <a:t>Exito:</a:t>
-            </a:r>
-            <a:r>
-              <a:rPr sz="1500" b="0" i="0">
-                <a:solidFill>
-                  <a:srgbClr val="333333"/>
-                </a:solidFill>
-                <a:latin typeface="Calibri"/>
-              </a:rPr>
-              <a:t> Validación negocio.</a:t>
+              <a:rPr sz="1600" b="0" i="0">
+                <a:solidFill>
+                  <a:srgbClr val="333333"/>
+                </a:solidFill>
+                <a:latin typeface="Calibri"/>
+              </a:rPr>
+              <a:t>–   Sigan el mismo dominio VetCare (no inventen otro caso).</a:t>
             </a:r>
           </a:p>
           <a:p>
@@ -3756,65 +3741,13 @@
               </a:spcAft>
             </a:pPr>
             <a:r>
-              <a:rPr sz="1500" b="0" i="0">
-                <a:solidFill>
-                  <a:srgbClr val="333333"/>
-                </a:solidFill>
-                <a:latin typeface="Calibri"/>
-              </a:rPr>
-              <a:t>–   </a:t>
-            </a:r>
-            <a:r>
-              <a:rPr sz="1500" b="1" i="0">
-                <a:solidFill>
-                  <a:srgbClr val="333333"/>
-                </a:solidFill>
-                <a:latin typeface="Calibri"/>
-              </a:rPr>
-              <a:t>Exito:</a:t>
-            </a:r>
-            <a:r>
-              <a:rPr sz="1500" b="0" i="0">
-                <a:solidFill>
-                  <a:srgbClr val="333333"/>
-                </a:solidFill>
-                <a:latin typeface="Calibri"/>
-              </a:rPr>
-              <a:t> Prueba OK + error.</a:t>
-            </a:r>
-          </a:p>
-          <a:p>
-            <a:pPr>
-              <a:spcAft>
-                <a:spcPts val="800"/>
-              </a:spcAft>
-            </a:pPr>
-            <a:r>
-              <a:rPr sz="1500" b="0" i="0">
-                <a:solidFill>
-                  <a:srgbClr val="333333"/>
-                </a:solidFill>
-                <a:latin typeface="Calibri"/>
-              </a:rPr>
-              <a:t>–   </a:t>
-            </a:r>
-            <a:r>
-              <a:rPr sz="1500" b="1" i="0">
-                <a:solidFill>
-                  <a:srgbClr val="333333"/>
-                </a:solidFill>
-                <a:latin typeface="Calibri"/>
-              </a:rPr>
-              <a:t>Exito:</a:t>
-            </a:r>
-            <a:r>
-              <a:rPr sz="1500" b="0" i="0">
-                <a:solidFill>
-                  <a:srgbClr val="333333"/>
-                </a:solidFill>
-                <a:latin typeface="Calibri"/>
-              </a:rPr>
-              <a:t> Contrato documentado.</a:t>
+              <a:rPr sz="1600" b="0" i="0">
+                <a:solidFill>
+                  <a:srgbClr val="333333"/>
+                </a:solidFill>
+                <a:latin typeface="Calibri"/>
+              </a:rPr>
+              <a:t>–   Al final de la demo: dejar enlace/script compartible al grupo.</a:t>
             </a:r>
           </a:p>
         </p:txBody>
@@ -3889,7 +3822,7 @@
         <p:spPr>
           <a:xfrm>
             <a:off x="0" y="0"/>
-            <a:ext cx="12191695" cy="960120"/>
+            <a:ext cx="12191695" cy="1170432"/>
           </a:xfrm>
           <a:prstGeom prst="rect">
             <a:avLst/>
@@ -3931,7 +3864,7 @@
         </p:nvSpPr>
         <p:spPr>
           <a:xfrm>
-            <a:off x="0" y="960120"/>
+            <a:off x="0" y="1170432"/>
             <a:ext cx="12191695" cy="41148"/>
           </a:xfrm>
           <a:prstGeom prst="rect">
@@ -3975,7 +3908,7 @@
         <p:spPr>
           <a:xfrm>
             <a:off x="457200" y="164592"/>
-            <a:ext cx="11277295" cy="502920"/>
+            <a:ext cx="11277295" cy="384048"/>
           </a:xfrm>
           <a:prstGeom prst="rect">
             <a:avLst/>
@@ -3995,7 +3928,7 @@
                 </a:solidFill>
                 <a:latin typeface="Calibri"/>
               </a:rPr>
-              <a:t>Taller PI VetCare — escenario / datos de partida</a:t>
+              <a:t>Herramientas de hoy</a:t>
             </a:r>
           </a:p>
         </p:txBody>
@@ -4008,8 +3941,8 @@
         </p:nvSpPr>
         <p:spPr>
           <a:xfrm>
-            <a:off x="457200" y="1170432"/>
-            <a:ext cx="11277295" cy="5230368"/>
+            <a:off x="457200" y="566928"/>
+            <a:ext cx="11277295" cy="411480"/>
           </a:xfrm>
           <a:prstGeom prst="rect">
             <a:avLst/>
@@ -4022,42 +3955,837 @@
           </a:bodyPr>
           <a:lstStyle/>
           <a:p>
-            <a:pPr>
-              <a:spcAft>
-                <a:spcPts val="800"/>
-              </a:spcAft>
+            <a:r>
+              <a:rPr sz="1400" b="0" i="0">
+                <a:solidFill>
+                  <a:srgbClr val="B8D8EE"/>
+                </a:solidFill>
+                <a:latin typeface="Calibri"/>
+              </a:rPr>
+              <a:t>Gratis · navegador o free tier</a:t>
+            </a:r>
+          </a:p>
+        </p:txBody>
+      </p:sp>
+      <p:sp>
+        <p:nvSpPr>
+          <p:cNvPr id="6" name="Rounded Rectangle 5"/>
+          <p:cNvSpPr/>
+          <p:nvPr/>
+        </p:nvSpPr>
+        <p:spPr>
+          <a:xfrm>
+            <a:off x="457200" y="1591056"/>
+            <a:ext cx="3624986" cy="2299716"/>
+          </a:xfrm>
+          <a:prstGeom prst="roundRect">
+            <a:avLst>
+              <a:gd name="adj" fmla="val 12000"/>
+            </a:avLst>
+          </a:prstGeom>
+          <a:solidFill>
+            <a:srgbClr val="F2F2F2"/>
+          </a:solidFill>
+          <a:ln>
+            <a:noFill/>
+          </a:ln>
+        </p:spPr>
+        <p:style>
+          <a:lnRef idx="1">
+            <a:schemeClr val="accent1"/>
+          </a:lnRef>
+          <a:fillRef idx="3">
+            <a:schemeClr val="accent1"/>
+          </a:fillRef>
+          <a:effectRef idx="2">
+            <a:schemeClr val="accent1"/>
+          </a:effectRef>
+          <a:fontRef idx="minor">
+            <a:schemeClr val="lt1"/>
+          </a:fontRef>
+        </p:style>
+        <p:txBody>
+          <a:bodyPr rtlCol="0" anchor="ctr"/>
+          <a:lstStyle/>
+          <a:p>
+            <a:pPr algn="ctr"/>
+          </a:p>
+        </p:txBody>
+      </p:sp>
+      <p:sp>
+        <p:nvSpPr>
+          <p:cNvPr id="7" name="Rectangle 6"/>
+          <p:cNvSpPr/>
+          <p:nvPr/>
+        </p:nvSpPr>
+        <p:spPr>
+          <a:xfrm>
+            <a:off x="457200" y="1591056"/>
+            <a:ext cx="3624986" cy="64008"/>
+          </a:xfrm>
+          <a:prstGeom prst="rect">
+            <a:avLst/>
+          </a:prstGeom>
+          <a:solidFill>
+            <a:srgbClr val="095292"/>
+          </a:solidFill>
+          <a:ln>
+            <a:noFill/>
+          </a:ln>
+        </p:spPr>
+        <p:style>
+          <a:lnRef idx="1">
+            <a:schemeClr val="accent1"/>
+          </a:lnRef>
+          <a:fillRef idx="3">
+            <a:schemeClr val="accent1"/>
+          </a:fillRef>
+          <a:effectRef idx="2">
+            <a:schemeClr val="accent1"/>
+          </a:effectRef>
+          <a:fontRef idx="minor">
+            <a:schemeClr val="lt1"/>
+          </a:fontRef>
+        </p:style>
+        <p:txBody>
+          <a:bodyPr rtlCol="0" anchor="ctr"/>
+          <a:lstStyle/>
+          <a:p>
+            <a:pPr algn="ctr"/>
+          </a:p>
+        </p:txBody>
+      </p:sp>
+      <p:sp>
+        <p:nvSpPr>
+          <p:cNvPr id="8" name="Rectangle 7"/>
+          <p:cNvSpPr/>
+          <p:nvPr/>
+        </p:nvSpPr>
+        <p:spPr>
+          <a:xfrm>
+            <a:off x="457200" y="1655064"/>
+            <a:ext cx="3624986" cy="27432"/>
+          </a:xfrm>
+          <a:prstGeom prst="rect">
+            <a:avLst/>
+          </a:prstGeom>
+          <a:solidFill>
+            <a:srgbClr val="FFD000"/>
+          </a:solidFill>
+          <a:ln>
+            <a:noFill/>
+          </a:ln>
+        </p:spPr>
+        <p:style>
+          <a:lnRef idx="1">
+            <a:schemeClr val="accent1"/>
+          </a:lnRef>
+          <a:fillRef idx="3">
+            <a:schemeClr val="accent1"/>
+          </a:fillRef>
+          <a:effectRef idx="2">
+            <a:schemeClr val="accent1"/>
+          </a:effectRef>
+          <a:fontRef idx="minor">
+            <a:schemeClr val="lt1"/>
+          </a:fontRef>
+        </p:style>
+        <p:txBody>
+          <a:bodyPr rtlCol="0" anchor="ctr"/>
+          <a:lstStyle/>
+          <a:p>
+            <a:pPr algn="ctr"/>
+          </a:p>
+        </p:txBody>
+      </p:sp>
+      <p:pic>
+        <p:nvPicPr>
+          <p:cNvPr id="9" name="Picture 8" descr="examlab.png"/>
+          <p:cNvPicPr>
+            <a:picLocks noChangeAspect="1"/>
+          </p:cNvPicPr>
+          <p:nvPr/>
+        </p:nvPicPr>
+        <p:blipFill>
+          <a:blip r:embed="rId2"/>
+          <a:stretch>
+            <a:fillRect/>
+          </a:stretch>
+        </p:blipFill>
+        <p:spPr>
+          <a:xfrm>
+            <a:off x="1659331" y="1847087"/>
+            <a:ext cx="1220724" cy="1220724"/>
+          </a:xfrm>
+          <a:prstGeom prst="rect">
+            <a:avLst/>
+          </a:prstGeom>
+        </p:spPr>
+      </p:pic>
+      <p:sp>
+        <p:nvSpPr>
+          <p:cNvPr id="10" name="TextBox 9"/>
+          <p:cNvSpPr txBox="1"/>
+          <p:nvPr/>
+        </p:nvSpPr>
+        <p:spPr>
+          <a:xfrm>
+            <a:off x="530352" y="3159251"/>
+            <a:ext cx="3478682" cy="621792"/>
+          </a:xfrm>
+          <a:prstGeom prst="rect">
+            <a:avLst/>
+          </a:prstGeom>
+          <a:noFill/>
+        </p:spPr>
+        <p:txBody>
+          <a:bodyPr wrap="square" anchor="t"/>
+          <a:lstStyle/>
+          <a:p>
+            <a:pPr algn="ctr"/>
+            <a:r>
+              <a:rPr sz="1300" b="1" i="0">
+                <a:solidFill>
+                  <a:srgbClr val="095292"/>
+                </a:solidFill>
+                <a:latin typeface="Calibri"/>
+              </a:rPr>
+              <a:t>ExamLab</a:t>
+            </a:r>
+          </a:p>
+          <a:p>
+            <a:pPr algn="ctr">
+              <a:spcBef>
+                <a:spcPts val="200"/>
+              </a:spcBef>
             </a:pPr>
             <a:r>
-              <a:rPr sz="1600" b="0" i="0">
-                <a:solidFill>
-                  <a:srgbClr val="333333"/>
-                </a:solidFill>
-                <a:latin typeface="Calibri"/>
-              </a:rPr>
-              <a:t>–   Tu DDL de VetCare.</a:t>
-            </a:r>
-          </a:p>
-          <a:p>
-            <a:pPr>
-              <a:spcAft>
-                <a:spcPts val="800"/>
-              </a:spcAft>
+              <a:rPr sz="1000" b="0" i="0">
+                <a:solidFill>
+                  <a:srgbClr val="666666"/>
+                </a:solidFill>
+                <a:latin typeface="Calibri"/>
+              </a:rPr>
+              <a:t>PL/pgSQL: aqui corre</a:t>
+            </a:r>
+          </a:p>
+        </p:txBody>
+      </p:sp>
+      <p:sp>
+        <p:nvSpPr>
+          <p:cNvPr id="11" name="Rounded Rectangle 10"/>
+          <p:cNvSpPr/>
+          <p:nvPr/>
+        </p:nvSpPr>
+        <p:spPr>
+          <a:xfrm>
+            <a:off x="4283354" y="1591056"/>
+            <a:ext cx="3624986" cy="2299716"/>
+          </a:xfrm>
+          <a:prstGeom prst="roundRect">
+            <a:avLst>
+              <a:gd name="adj" fmla="val 12000"/>
+            </a:avLst>
+          </a:prstGeom>
+          <a:solidFill>
+            <a:srgbClr val="F2F2F2"/>
+          </a:solidFill>
+          <a:ln>
+            <a:noFill/>
+          </a:ln>
+        </p:spPr>
+        <p:style>
+          <a:lnRef idx="1">
+            <a:schemeClr val="accent1"/>
+          </a:lnRef>
+          <a:fillRef idx="3">
+            <a:schemeClr val="accent1"/>
+          </a:fillRef>
+          <a:effectRef idx="2">
+            <a:schemeClr val="accent1"/>
+          </a:effectRef>
+          <a:fontRef idx="minor">
+            <a:schemeClr val="lt1"/>
+          </a:fontRef>
+        </p:style>
+        <p:txBody>
+          <a:bodyPr rtlCol="0" anchor="ctr"/>
+          <a:lstStyle/>
+          <a:p>
+            <a:pPr algn="ctr"/>
+          </a:p>
+        </p:txBody>
+      </p:sp>
+      <p:sp>
+        <p:nvSpPr>
+          <p:cNvPr id="12" name="Rectangle 11"/>
+          <p:cNvSpPr/>
+          <p:nvPr/>
+        </p:nvSpPr>
+        <p:spPr>
+          <a:xfrm>
+            <a:off x="4283354" y="1591056"/>
+            <a:ext cx="3624986" cy="64008"/>
+          </a:xfrm>
+          <a:prstGeom prst="rect">
+            <a:avLst/>
+          </a:prstGeom>
+          <a:solidFill>
+            <a:srgbClr val="095292"/>
+          </a:solidFill>
+          <a:ln>
+            <a:noFill/>
+          </a:ln>
+        </p:spPr>
+        <p:style>
+          <a:lnRef idx="1">
+            <a:schemeClr val="accent1"/>
+          </a:lnRef>
+          <a:fillRef idx="3">
+            <a:schemeClr val="accent1"/>
+          </a:fillRef>
+          <a:effectRef idx="2">
+            <a:schemeClr val="accent1"/>
+          </a:effectRef>
+          <a:fontRef idx="minor">
+            <a:schemeClr val="lt1"/>
+          </a:fontRef>
+        </p:style>
+        <p:txBody>
+          <a:bodyPr rtlCol="0" anchor="ctr"/>
+          <a:lstStyle/>
+          <a:p>
+            <a:pPr algn="ctr"/>
+          </a:p>
+        </p:txBody>
+      </p:sp>
+      <p:sp>
+        <p:nvSpPr>
+          <p:cNvPr id="13" name="Rectangle 12"/>
+          <p:cNvSpPr/>
+          <p:nvPr/>
+        </p:nvSpPr>
+        <p:spPr>
+          <a:xfrm>
+            <a:off x="4283354" y="1655064"/>
+            <a:ext cx="3624986" cy="27432"/>
+          </a:xfrm>
+          <a:prstGeom prst="rect">
+            <a:avLst/>
+          </a:prstGeom>
+          <a:solidFill>
+            <a:srgbClr val="FFD000"/>
+          </a:solidFill>
+          <a:ln>
+            <a:noFill/>
+          </a:ln>
+        </p:spPr>
+        <p:style>
+          <a:lnRef idx="1">
+            <a:schemeClr val="accent1"/>
+          </a:lnRef>
+          <a:fillRef idx="3">
+            <a:schemeClr val="accent1"/>
+          </a:fillRef>
+          <a:effectRef idx="2">
+            <a:schemeClr val="accent1"/>
+          </a:effectRef>
+          <a:fontRef idx="minor">
+            <a:schemeClr val="lt1"/>
+          </a:fontRef>
+        </p:style>
+        <p:txBody>
+          <a:bodyPr rtlCol="0" anchor="ctr"/>
+          <a:lstStyle/>
+          <a:p>
+            <a:pPr algn="ctr"/>
+          </a:p>
+        </p:txBody>
+      </p:sp>
+      <p:pic>
+        <p:nvPicPr>
+          <p:cNvPr id="14" name="Picture 13" descr="google_docs.png"/>
+          <p:cNvPicPr>
+            <a:picLocks noChangeAspect="1"/>
+          </p:cNvPicPr>
+          <p:nvPr/>
+        </p:nvPicPr>
+        <p:blipFill>
+          <a:blip r:embed="rId3"/>
+          <a:stretch>
+            <a:fillRect/>
+          </a:stretch>
+        </p:blipFill>
+        <p:spPr>
+          <a:xfrm>
+            <a:off x="5485485" y="1847087"/>
+            <a:ext cx="1220724" cy="1220724"/>
+          </a:xfrm>
+          <a:prstGeom prst="rect">
+            <a:avLst/>
+          </a:prstGeom>
+        </p:spPr>
+      </p:pic>
+      <p:sp>
+        <p:nvSpPr>
+          <p:cNvPr id="15" name="TextBox 14"/>
+          <p:cNvSpPr txBox="1"/>
+          <p:nvPr/>
+        </p:nvSpPr>
+        <p:spPr>
+          <a:xfrm>
+            <a:off x="4356506" y="3159251"/>
+            <a:ext cx="3478682" cy="621792"/>
+          </a:xfrm>
+          <a:prstGeom prst="rect">
+            <a:avLst/>
+          </a:prstGeom>
+          <a:noFill/>
+        </p:spPr>
+        <p:txBody>
+          <a:bodyPr wrap="square" anchor="t"/>
+          <a:lstStyle/>
+          <a:p>
+            <a:pPr algn="ctr"/>
+            <a:r>
+              <a:rPr sz="1300" b="1" i="0">
+                <a:solidFill>
+                  <a:srgbClr val="095292"/>
+                </a:solidFill>
+                <a:latin typeface="Calibri"/>
+              </a:rPr>
+              <a:t>Google Docs</a:t>
+            </a:r>
+          </a:p>
+          <a:p>
+            <a:pPr algn="ctr">
+              <a:spcBef>
+                <a:spcPts val="200"/>
+              </a:spcBef>
             </a:pPr>
             <a:r>
-              <a:rPr sz="1600" b="0" i="0">
-                <a:solidFill>
-                  <a:srgbClr val="333333"/>
-                </a:solidFill>
-                <a:latin typeface="Calibri"/>
-              </a:rPr>
-              <a:t>–   Validación típica: mascota activa.</a:t>
-            </a:r>
-          </a:p>
-        </p:txBody>
-      </p:sp>
-      <p:sp>
-        <p:nvSpPr>
-          <p:cNvPr id="6" name="TextBox 5"/>
+              <a:rPr sz="1000" b="0" i="0">
+                <a:solidFill>
+                  <a:srgbClr val="666666"/>
+                </a:solidFill>
+                <a:latin typeface="Calibri"/>
+              </a:rPr>
+              <a:t>Contrato del proc</a:t>
+            </a:r>
+          </a:p>
+        </p:txBody>
+      </p:sp>
+      <p:sp>
+        <p:nvSpPr>
+          <p:cNvPr id="16" name="Rounded Rectangle 15"/>
+          <p:cNvSpPr/>
+          <p:nvPr/>
+        </p:nvSpPr>
+        <p:spPr>
+          <a:xfrm>
+            <a:off x="8109508" y="1591056"/>
+            <a:ext cx="3624986" cy="2299716"/>
+          </a:xfrm>
+          <a:prstGeom prst="roundRect">
+            <a:avLst>
+              <a:gd name="adj" fmla="val 12000"/>
+            </a:avLst>
+          </a:prstGeom>
+          <a:solidFill>
+            <a:srgbClr val="F2F2F2"/>
+          </a:solidFill>
+          <a:ln>
+            <a:noFill/>
+          </a:ln>
+        </p:spPr>
+        <p:style>
+          <a:lnRef idx="1">
+            <a:schemeClr val="accent1"/>
+          </a:lnRef>
+          <a:fillRef idx="3">
+            <a:schemeClr val="accent1"/>
+          </a:fillRef>
+          <a:effectRef idx="2">
+            <a:schemeClr val="accent1"/>
+          </a:effectRef>
+          <a:fontRef idx="minor">
+            <a:schemeClr val="lt1"/>
+          </a:fontRef>
+        </p:style>
+        <p:txBody>
+          <a:bodyPr rtlCol="0" anchor="ctr"/>
+          <a:lstStyle/>
+          <a:p>
+            <a:pPr algn="ctr"/>
+          </a:p>
+        </p:txBody>
+      </p:sp>
+      <p:sp>
+        <p:nvSpPr>
+          <p:cNvPr id="17" name="Rectangle 16"/>
+          <p:cNvSpPr/>
+          <p:nvPr/>
+        </p:nvSpPr>
+        <p:spPr>
+          <a:xfrm>
+            <a:off x="8109508" y="1591056"/>
+            <a:ext cx="3624986" cy="64008"/>
+          </a:xfrm>
+          <a:prstGeom prst="rect">
+            <a:avLst/>
+          </a:prstGeom>
+          <a:solidFill>
+            <a:srgbClr val="095292"/>
+          </a:solidFill>
+          <a:ln>
+            <a:noFill/>
+          </a:ln>
+        </p:spPr>
+        <p:style>
+          <a:lnRef idx="1">
+            <a:schemeClr val="accent1"/>
+          </a:lnRef>
+          <a:fillRef idx="3">
+            <a:schemeClr val="accent1"/>
+          </a:fillRef>
+          <a:effectRef idx="2">
+            <a:schemeClr val="accent1"/>
+          </a:effectRef>
+          <a:fontRef idx="minor">
+            <a:schemeClr val="lt1"/>
+          </a:fontRef>
+        </p:style>
+        <p:txBody>
+          <a:bodyPr rtlCol="0" anchor="ctr"/>
+          <a:lstStyle/>
+          <a:p>
+            <a:pPr algn="ctr"/>
+          </a:p>
+        </p:txBody>
+      </p:sp>
+      <p:sp>
+        <p:nvSpPr>
+          <p:cNvPr id="18" name="Rectangle 17"/>
+          <p:cNvSpPr/>
+          <p:nvPr/>
+        </p:nvSpPr>
+        <p:spPr>
+          <a:xfrm>
+            <a:off x="8109508" y="1655064"/>
+            <a:ext cx="3624986" cy="27432"/>
+          </a:xfrm>
+          <a:prstGeom prst="rect">
+            <a:avLst/>
+          </a:prstGeom>
+          <a:solidFill>
+            <a:srgbClr val="FFD000"/>
+          </a:solidFill>
+          <a:ln>
+            <a:noFill/>
+          </a:ln>
+        </p:spPr>
+        <p:style>
+          <a:lnRef idx="1">
+            <a:schemeClr val="accent1"/>
+          </a:lnRef>
+          <a:fillRef idx="3">
+            <a:schemeClr val="accent1"/>
+          </a:fillRef>
+          <a:effectRef idx="2">
+            <a:schemeClr val="accent1"/>
+          </a:effectRef>
+          <a:fontRef idx="minor">
+            <a:schemeClr val="lt1"/>
+          </a:fontRef>
+        </p:style>
+        <p:txBody>
+          <a:bodyPr rtlCol="0" anchor="ctr"/>
+          <a:lstStyle/>
+          <a:p>
+            <a:pPr algn="ctr"/>
+          </a:p>
+        </p:txBody>
+      </p:sp>
+      <p:pic>
+        <p:nvPicPr>
+          <p:cNvPr id="19" name="Picture 18" descr="dbfiddle.png"/>
+          <p:cNvPicPr>
+            <a:picLocks noChangeAspect="1"/>
+          </p:cNvPicPr>
+          <p:nvPr/>
+        </p:nvPicPr>
+        <p:blipFill>
+          <a:blip r:embed="rId4"/>
+          <a:stretch>
+            <a:fillRect/>
+          </a:stretch>
+        </p:blipFill>
+        <p:spPr>
+          <a:xfrm>
+            <a:off x="9311640" y="1847087"/>
+            <a:ext cx="1220724" cy="1220724"/>
+          </a:xfrm>
+          <a:prstGeom prst="rect">
+            <a:avLst/>
+          </a:prstGeom>
+        </p:spPr>
+      </p:pic>
+      <p:sp>
+        <p:nvSpPr>
+          <p:cNvPr id="20" name="TextBox 19"/>
+          <p:cNvSpPr txBox="1"/>
+          <p:nvPr/>
+        </p:nvSpPr>
+        <p:spPr>
+          <a:xfrm>
+            <a:off x="8182660" y="3159251"/>
+            <a:ext cx="3478682" cy="621792"/>
+          </a:xfrm>
+          <a:prstGeom prst="rect">
+            <a:avLst/>
+          </a:prstGeom>
+          <a:noFill/>
+        </p:spPr>
+        <p:txBody>
+          <a:bodyPr wrap="square" anchor="t"/>
+          <a:lstStyle/>
+          <a:p>
+            <a:pPr algn="ctr"/>
+            <a:r>
+              <a:rPr sz="1300" b="1" i="0">
+                <a:solidFill>
+                  <a:srgbClr val="095292"/>
+                </a:solidFill>
+                <a:latin typeface="Calibri"/>
+              </a:rPr>
+              <a:t>DB Fiddle</a:t>
+            </a:r>
+          </a:p>
+          <a:p>
+            <a:pPr algn="ctr">
+              <a:spcBef>
+                <a:spcPts val="200"/>
+              </a:spcBef>
+            </a:pPr>
+            <a:r>
+              <a:rPr sz="1000" b="0" i="0">
+                <a:solidFill>
+                  <a:srgbClr val="666666"/>
+                </a:solidFill>
+                <a:latin typeface="Calibri"/>
+              </a:rPr>
+              <a:t>Alterno: PostgreSQL</a:t>
+            </a:r>
+          </a:p>
+        </p:txBody>
+      </p:sp>
+      <p:sp>
+        <p:nvSpPr>
+          <p:cNvPr id="21" name="Rounded Rectangle 20"/>
+          <p:cNvSpPr/>
+          <p:nvPr/>
+        </p:nvSpPr>
+        <p:spPr>
+          <a:xfrm>
+            <a:off x="4283354" y="4055364"/>
+            <a:ext cx="3624986" cy="2299716"/>
+          </a:xfrm>
+          <a:prstGeom prst="roundRect">
+            <a:avLst>
+              <a:gd name="adj" fmla="val 12000"/>
+            </a:avLst>
+          </a:prstGeom>
+          <a:solidFill>
+            <a:srgbClr val="F2F2F2"/>
+          </a:solidFill>
+          <a:ln>
+            <a:noFill/>
+          </a:ln>
+        </p:spPr>
+        <p:style>
+          <a:lnRef idx="1">
+            <a:schemeClr val="accent1"/>
+          </a:lnRef>
+          <a:fillRef idx="3">
+            <a:schemeClr val="accent1"/>
+          </a:fillRef>
+          <a:effectRef idx="2">
+            <a:schemeClr val="accent1"/>
+          </a:effectRef>
+          <a:fontRef idx="minor">
+            <a:schemeClr val="lt1"/>
+          </a:fontRef>
+        </p:style>
+        <p:txBody>
+          <a:bodyPr rtlCol="0" anchor="ctr"/>
+          <a:lstStyle/>
+          <a:p>
+            <a:pPr algn="ctr"/>
+          </a:p>
+        </p:txBody>
+      </p:sp>
+      <p:sp>
+        <p:nvSpPr>
+          <p:cNvPr id="22" name="Rectangle 21"/>
+          <p:cNvSpPr/>
+          <p:nvPr/>
+        </p:nvSpPr>
+        <p:spPr>
+          <a:xfrm>
+            <a:off x="4283354" y="4055364"/>
+            <a:ext cx="3624986" cy="64008"/>
+          </a:xfrm>
+          <a:prstGeom prst="rect">
+            <a:avLst/>
+          </a:prstGeom>
+          <a:solidFill>
+            <a:srgbClr val="095292"/>
+          </a:solidFill>
+          <a:ln>
+            <a:noFill/>
+          </a:ln>
+        </p:spPr>
+        <p:style>
+          <a:lnRef idx="1">
+            <a:schemeClr val="accent1"/>
+          </a:lnRef>
+          <a:fillRef idx="3">
+            <a:schemeClr val="accent1"/>
+          </a:fillRef>
+          <a:effectRef idx="2">
+            <a:schemeClr val="accent1"/>
+          </a:effectRef>
+          <a:fontRef idx="minor">
+            <a:schemeClr val="lt1"/>
+          </a:fontRef>
+        </p:style>
+        <p:txBody>
+          <a:bodyPr rtlCol="0" anchor="ctr"/>
+          <a:lstStyle/>
+          <a:p>
+            <a:pPr algn="ctr"/>
+          </a:p>
+        </p:txBody>
+      </p:sp>
+      <p:sp>
+        <p:nvSpPr>
+          <p:cNvPr id="23" name="Rectangle 22"/>
+          <p:cNvSpPr/>
+          <p:nvPr/>
+        </p:nvSpPr>
+        <p:spPr>
+          <a:xfrm>
+            <a:off x="4283354" y="4119372"/>
+            <a:ext cx="3624986" cy="27432"/>
+          </a:xfrm>
+          <a:prstGeom prst="rect">
+            <a:avLst/>
+          </a:prstGeom>
+          <a:solidFill>
+            <a:srgbClr val="FFD000"/>
+          </a:solidFill>
+          <a:ln>
+            <a:noFill/>
+          </a:ln>
+        </p:spPr>
+        <p:style>
+          <a:lnRef idx="1">
+            <a:schemeClr val="accent1"/>
+          </a:lnRef>
+          <a:fillRef idx="3">
+            <a:schemeClr val="accent1"/>
+          </a:fillRef>
+          <a:effectRef idx="2">
+            <a:schemeClr val="accent1"/>
+          </a:effectRef>
+          <a:fontRef idx="minor">
+            <a:schemeClr val="lt1"/>
+          </a:fontRef>
+        </p:style>
+        <p:txBody>
+          <a:bodyPr rtlCol="0" anchor="ctr"/>
+          <a:lstStyle/>
+          <a:p>
+            <a:pPr algn="ctr"/>
+          </a:p>
+        </p:txBody>
+      </p:sp>
+      <p:pic>
+        <p:nvPicPr>
+          <p:cNvPr id="24" name="Picture 23" descr="oracle_livesql.png"/>
+          <p:cNvPicPr>
+            <a:picLocks noChangeAspect="1"/>
+          </p:cNvPicPr>
+          <p:nvPr/>
+        </p:nvPicPr>
+        <p:blipFill>
+          <a:blip r:embed="rId5"/>
+          <a:stretch>
+            <a:fillRect/>
+          </a:stretch>
+        </p:blipFill>
+        <p:spPr>
+          <a:xfrm>
+            <a:off x="5485485" y="4311396"/>
+            <a:ext cx="1220724" cy="1220724"/>
+          </a:xfrm>
+          <a:prstGeom prst="rect">
+            <a:avLst/>
+          </a:prstGeom>
+        </p:spPr>
+      </p:pic>
+      <p:sp>
+        <p:nvSpPr>
+          <p:cNvPr id="25" name="TextBox 24"/>
+          <p:cNvSpPr txBox="1"/>
+          <p:nvPr/>
+        </p:nvSpPr>
+        <p:spPr>
+          <a:xfrm>
+            <a:off x="4356506" y="5623560"/>
+            <a:ext cx="3478682" cy="621792"/>
+          </a:xfrm>
+          <a:prstGeom prst="rect">
+            <a:avLst/>
+          </a:prstGeom>
+          <a:noFill/>
+        </p:spPr>
+        <p:txBody>
+          <a:bodyPr wrap="square" anchor="t"/>
+          <a:lstStyle/>
+          <a:p>
+            <a:pPr algn="ctr"/>
+            <a:r>
+              <a:rPr sz="1300" b="1" i="0">
+                <a:solidFill>
+                  <a:srgbClr val="095292"/>
+                </a:solidFill>
+                <a:latin typeface="Calibri"/>
+              </a:rPr>
+              <a:t>Oracle Live SQL</a:t>
+            </a:r>
+          </a:p>
+          <a:p>
+            <a:pPr algn="ctr">
+              <a:spcBef>
+                <a:spcPts val="200"/>
+              </a:spcBef>
+            </a:pPr>
+            <a:r>
+              <a:rPr sz="1000" b="0" i="0">
+                <a:solidFill>
+                  <a:srgbClr val="666666"/>
+                </a:solidFill>
+                <a:latin typeface="Calibri"/>
+              </a:rPr>
+              <a:t>Solo contraste</a:t>
+            </a:r>
+          </a:p>
+        </p:txBody>
+      </p:sp>
+      <p:sp>
+        <p:nvSpPr>
+          <p:cNvPr id="26" name="TextBox 25"/>
           <p:cNvSpPr txBox="1"/>
           <p:nvPr/>
         </p:nvSpPr>
@@ -4231,111 +4959,21 @@
                 </a:solidFill>
                 <a:latin typeface="Calibri"/>
               </a:rPr>
-              <a:t>Taller PI VetCare — pasos guiados</a:t>
-            </a:r>
-          </a:p>
-        </p:txBody>
-      </p:sp>
-      <p:sp>
-        <p:nvSpPr>
-          <p:cNvPr id="5" name="Rounded Rectangle 4"/>
-          <p:cNvSpPr/>
-          <p:nvPr/>
-        </p:nvSpPr>
-        <p:spPr>
-          <a:xfrm>
-            <a:off x="457200" y="1554480"/>
-            <a:ext cx="11277295" cy="1051560"/>
-          </a:xfrm>
-          <a:prstGeom prst="roundRect">
-            <a:avLst>
-              <a:gd name="adj" fmla="val 12000"/>
-            </a:avLst>
-          </a:prstGeom>
-          <a:solidFill>
-            <a:srgbClr val="F2F2F2"/>
-          </a:solidFill>
-          <a:ln>
-            <a:noFill/>
-          </a:ln>
-        </p:spPr>
-        <p:style>
-          <a:lnRef idx="1">
-            <a:schemeClr val="accent1"/>
-          </a:lnRef>
-          <a:fillRef idx="3">
-            <a:schemeClr val="accent1"/>
-          </a:fillRef>
-          <a:effectRef idx="2">
-            <a:schemeClr val="accent1"/>
-          </a:effectRef>
-          <a:fontRef idx="minor">
-            <a:schemeClr val="lt1"/>
-          </a:fontRef>
-        </p:style>
-        <p:txBody>
-          <a:bodyPr rtlCol="0" anchor="ctr"/>
-          <a:lstStyle/>
-          <a:p>
-            <a:pPr algn="ctr"/>
-          </a:p>
-        </p:txBody>
-      </p:sp>
-      <p:sp>
-        <p:nvSpPr>
-          <p:cNvPr id="6" name="Rounded Rectangle 5"/>
-          <p:cNvSpPr/>
-          <p:nvPr/>
-        </p:nvSpPr>
-        <p:spPr>
-          <a:xfrm>
-            <a:off x="594360" y="1860804"/>
-            <a:ext cx="438912" cy="438912"/>
-          </a:xfrm>
-          <a:prstGeom prst="roundRect">
-            <a:avLst>
-              <a:gd name="adj" fmla="val 12000"/>
-            </a:avLst>
-          </a:prstGeom>
-          <a:solidFill>
-            <a:srgbClr val="095292"/>
-          </a:solidFill>
-          <a:ln>
-            <a:noFill/>
-          </a:ln>
-        </p:spPr>
-        <p:style>
-          <a:lnRef idx="1">
-            <a:schemeClr val="accent1"/>
-          </a:lnRef>
-          <a:fillRef idx="3">
-            <a:schemeClr val="accent1"/>
-          </a:fillRef>
-          <a:effectRef idx="2">
-            <a:schemeClr val="accent1"/>
-          </a:effectRef>
-          <a:fontRef idx="minor">
-            <a:schemeClr val="lt1"/>
-          </a:fontRef>
-        </p:style>
-        <p:txBody>
-          <a:bodyPr rtlCol="0" anchor="ctr"/>
-          <a:lstStyle/>
-          <a:p>
-            <a:pPr algn="ctr"/>
-          </a:p>
-        </p:txBody>
-      </p:sp>
-      <p:sp>
-        <p:nvSpPr>
-          <p:cNvPr id="7" name="TextBox 6"/>
+              <a:t>Taller PI VetCare — contexto / por que importa</a:t>
+            </a:r>
+          </a:p>
+        </p:txBody>
+      </p:sp>
+      <p:sp>
+        <p:nvSpPr>
+          <p:cNvPr id="5" name="TextBox 4"/>
           <p:cNvSpPr txBox="1"/>
           <p:nvPr/>
         </p:nvSpPr>
         <p:spPr>
           <a:xfrm>
-            <a:off x="594360" y="1860804"/>
-            <a:ext cx="438912" cy="438912"/>
+            <a:off x="457200" y="1170432"/>
+            <a:ext cx="11277295" cy="5230368"/>
           </a:xfrm>
           <a:prstGeom prst="rect">
             <a:avLst/>
@@ -4343,522 +4981,99 @@
           <a:noFill/>
         </p:spPr>
         <p:txBody>
-          <a:bodyPr wrap="square" anchor="ctr"/>
-          <a:lstStyle/>
-          <a:p>
-            <a:pPr algn="ctr"/>
+          <a:bodyPr wrap="square">
+            <a:spAutoFit/>
+          </a:bodyPr>
+          <a:lstStyle/>
+          <a:p>
+            <a:pPr>
+              <a:spcAft>
+                <a:spcPts val="800"/>
+              </a:spcAft>
+            </a:pPr>
+            <a:r>
+              <a:rPr sz="1600" b="0" i="0">
+                <a:solidFill>
+                  <a:srgbClr val="333333"/>
+                </a:solidFill>
+                <a:latin typeface="Calibri"/>
+              </a:rPr>
+              <a:t>–   </a:t>
+            </a:r>
             <a:r>
               <a:rPr sz="1600" b="1" i="0">
                 <a:solidFill>
-                  <a:srgbClr val="FFFFFF"/>
-                </a:solidFill>
-                <a:latin typeface="Calibri"/>
-              </a:rPr>
-              <a:t>1</a:t>
-            </a:r>
-          </a:p>
-        </p:txBody>
-      </p:sp>
-      <p:sp>
-        <p:nvSpPr>
-          <p:cNvPr id="8" name="TextBox 7"/>
-          <p:cNvSpPr txBox="1"/>
-          <p:nvPr/>
-        </p:nvSpPr>
-        <p:spPr>
-          <a:xfrm>
-            <a:off x="1188720" y="1645920"/>
-            <a:ext cx="10271455" cy="886968"/>
-          </a:xfrm>
-          <a:prstGeom prst="rect">
-            <a:avLst/>
-          </a:prstGeom>
-          <a:noFill/>
-        </p:spPr>
-        <p:txBody>
-          <a:bodyPr wrap="square" anchor="ctr"/>
-          <a:lstStyle/>
-          <a:p>
-            <a:r>
-              <a:rPr sz="1500" b="1" i="0">
-                <a:solidFill>
-                  <a:srgbClr val="095292"/>
-                </a:solidFill>
-                <a:latin typeface="Calibri"/>
-              </a:rPr>
-              <a:t>Implementar sp_agendar_cita o sp_registrar_consulta en Live SQL.</a:t>
-            </a:r>
-          </a:p>
-        </p:txBody>
-      </p:sp>
-      <p:sp>
-        <p:nvSpPr>
-          <p:cNvPr id="9" name="Rounded Rectangle 8"/>
-          <p:cNvSpPr/>
-          <p:nvPr/>
-        </p:nvSpPr>
-        <p:spPr>
-          <a:xfrm>
-            <a:off x="457200" y="2697480"/>
-            <a:ext cx="11277295" cy="1051560"/>
-          </a:xfrm>
-          <a:prstGeom prst="roundRect">
-            <a:avLst>
-              <a:gd name="adj" fmla="val 12000"/>
-            </a:avLst>
-          </a:prstGeom>
-          <a:solidFill>
-            <a:srgbClr val="E8F4FA"/>
-          </a:solidFill>
-          <a:ln>
-            <a:noFill/>
-          </a:ln>
-        </p:spPr>
-        <p:style>
-          <a:lnRef idx="1">
-            <a:schemeClr val="accent1"/>
-          </a:lnRef>
-          <a:fillRef idx="3">
-            <a:schemeClr val="accent1"/>
-          </a:fillRef>
-          <a:effectRef idx="2">
-            <a:schemeClr val="accent1"/>
-          </a:effectRef>
-          <a:fontRef idx="minor">
-            <a:schemeClr val="lt1"/>
-          </a:fontRef>
-        </p:style>
-        <p:txBody>
-          <a:bodyPr rtlCol="0" anchor="ctr"/>
-          <a:lstStyle/>
-          <a:p>
-            <a:pPr algn="ctr"/>
-          </a:p>
-        </p:txBody>
-      </p:sp>
-      <p:sp>
-        <p:nvSpPr>
-          <p:cNvPr id="10" name="Rounded Rectangle 9"/>
-          <p:cNvSpPr/>
-          <p:nvPr/>
-        </p:nvSpPr>
-        <p:spPr>
-          <a:xfrm>
-            <a:off x="594360" y="3003804"/>
-            <a:ext cx="438912" cy="438912"/>
-          </a:xfrm>
-          <a:prstGeom prst="roundRect">
-            <a:avLst>
-              <a:gd name="adj" fmla="val 12000"/>
-            </a:avLst>
-          </a:prstGeom>
-          <a:solidFill>
-            <a:srgbClr val="095292"/>
-          </a:solidFill>
-          <a:ln>
-            <a:noFill/>
-          </a:ln>
-        </p:spPr>
-        <p:style>
-          <a:lnRef idx="1">
-            <a:schemeClr val="accent1"/>
-          </a:lnRef>
-          <a:fillRef idx="3">
-            <a:schemeClr val="accent1"/>
-          </a:fillRef>
-          <a:effectRef idx="2">
-            <a:schemeClr val="accent1"/>
-          </a:effectRef>
-          <a:fontRef idx="minor">
-            <a:schemeClr val="lt1"/>
-          </a:fontRef>
-        </p:style>
-        <p:txBody>
-          <a:bodyPr rtlCol="0" anchor="ctr"/>
-          <a:lstStyle/>
-          <a:p>
-            <a:pPr algn="ctr"/>
-          </a:p>
-        </p:txBody>
-      </p:sp>
-      <p:sp>
-        <p:nvSpPr>
-          <p:cNvPr id="11" name="TextBox 10"/>
-          <p:cNvSpPr txBox="1"/>
-          <p:nvPr/>
-        </p:nvSpPr>
-        <p:spPr>
-          <a:xfrm>
-            <a:off x="594360" y="3003804"/>
-            <a:ext cx="438912" cy="438912"/>
-          </a:xfrm>
-          <a:prstGeom prst="rect">
-            <a:avLst/>
-          </a:prstGeom>
-          <a:noFill/>
-        </p:spPr>
-        <p:txBody>
-          <a:bodyPr wrap="square" anchor="ctr"/>
-          <a:lstStyle/>
-          <a:p>
-            <a:pPr algn="ctr"/>
+                  <a:srgbClr val="333333"/>
+                </a:solidFill>
+                <a:latin typeface="Calibri"/>
+              </a:rPr>
+              <a:t>Por qué importa al PI:</a:t>
+            </a:r>
+            <a:r>
+              <a:rPr sz="1600" b="0" i="0">
+                <a:solidFill>
+                  <a:srgbClr val="333333"/>
+                </a:solidFill>
+                <a:latin typeface="Calibri"/>
+              </a:rPr>
+              <a:t> la regla de negocio deja de vivir en la pantalla y queda dentro de la base, donde vale para </a:t>
+            </a:r>
             <a:r>
               <a:rPr sz="1600" b="1" i="0">
                 <a:solidFill>
-                  <a:srgbClr val="FFFFFF"/>
-                </a:solidFill>
-                <a:latin typeface="Calibri"/>
-              </a:rPr>
-              <a:t>2</a:t>
-            </a:r>
-          </a:p>
-        </p:txBody>
-      </p:sp>
-      <p:sp>
-        <p:nvSpPr>
-          <p:cNvPr id="12" name="TextBox 11"/>
-          <p:cNvSpPr txBox="1"/>
-          <p:nvPr/>
-        </p:nvSpPr>
-        <p:spPr>
-          <a:xfrm>
-            <a:off x="1188720" y="2788920"/>
-            <a:ext cx="10271455" cy="886968"/>
-          </a:xfrm>
-          <a:prstGeom prst="rect">
-            <a:avLst/>
-          </a:prstGeom>
-          <a:noFill/>
-        </p:spPr>
-        <p:txBody>
-          <a:bodyPr wrap="square" anchor="ctr"/>
-          <a:lstStyle/>
-          <a:p>
-            <a:r>
-              <a:rPr sz="1500" b="1" i="0">
-                <a:solidFill>
-                  <a:srgbClr val="095292"/>
-                </a:solidFill>
-                <a:latin typeface="Calibri"/>
-              </a:rPr>
-              <a:t>Incluir validacion de negocio del PI (&gt;=1).</a:t>
-            </a:r>
-          </a:p>
-        </p:txBody>
-      </p:sp>
-      <p:sp>
-        <p:nvSpPr>
-          <p:cNvPr id="13" name="Rounded Rectangle 12"/>
-          <p:cNvSpPr/>
-          <p:nvPr/>
-        </p:nvSpPr>
-        <p:spPr>
-          <a:xfrm>
-            <a:off x="457200" y="3840480"/>
-            <a:ext cx="11277295" cy="1051560"/>
-          </a:xfrm>
-          <a:prstGeom prst="roundRect">
-            <a:avLst>
-              <a:gd name="adj" fmla="val 12000"/>
-            </a:avLst>
-          </a:prstGeom>
-          <a:solidFill>
-            <a:srgbClr val="F2F2F2"/>
-          </a:solidFill>
-          <a:ln>
-            <a:noFill/>
-          </a:ln>
-        </p:spPr>
-        <p:style>
-          <a:lnRef idx="1">
-            <a:schemeClr val="accent1"/>
-          </a:lnRef>
-          <a:fillRef idx="3">
-            <a:schemeClr val="accent1"/>
-          </a:fillRef>
-          <a:effectRef idx="2">
-            <a:schemeClr val="accent1"/>
-          </a:effectRef>
-          <a:fontRef idx="minor">
-            <a:schemeClr val="lt1"/>
-          </a:fontRef>
-        </p:style>
-        <p:txBody>
-          <a:bodyPr rtlCol="0" anchor="ctr"/>
-          <a:lstStyle/>
-          <a:p>
-            <a:pPr algn="ctr"/>
-          </a:p>
-        </p:txBody>
-      </p:sp>
-      <p:sp>
-        <p:nvSpPr>
-          <p:cNvPr id="14" name="Rounded Rectangle 13"/>
-          <p:cNvSpPr/>
-          <p:nvPr/>
-        </p:nvSpPr>
-        <p:spPr>
-          <a:xfrm>
-            <a:off x="594360" y="4146804"/>
-            <a:ext cx="438912" cy="438912"/>
-          </a:xfrm>
-          <a:prstGeom prst="roundRect">
-            <a:avLst>
-              <a:gd name="adj" fmla="val 12000"/>
-            </a:avLst>
-          </a:prstGeom>
-          <a:solidFill>
-            <a:srgbClr val="095292"/>
-          </a:solidFill>
-          <a:ln>
-            <a:noFill/>
-          </a:ln>
-        </p:spPr>
-        <p:style>
-          <a:lnRef idx="1">
-            <a:schemeClr val="accent1"/>
-          </a:lnRef>
-          <a:fillRef idx="3">
-            <a:schemeClr val="accent1"/>
-          </a:fillRef>
-          <a:effectRef idx="2">
-            <a:schemeClr val="accent1"/>
-          </a:effectRef>
-          <a:fontRef idx="minor">
-            <a:schemeClr val="lt1"/>
-          </a:fontRef>
-        </p:style>
-        <p:txBody>
-          <a:bodyPr rtlCol="0" anchor="ctr"/>
-          <a:lstStyle/>
-          <a:p>
-            <a:pPr algn="ctr"/>
-          </a:p>
-        </p:txBody>
-      </p:sp>
-      <p:sp>
-        <p:nvSpPr>
-          <p:cNvPr id="15" name="TextBox 14"/>
-          <p:cNvSpPr txBox="1"/>
-          <p:nvPr/>
-        </p:nvSpPr>
-        <p:spPr>
-          <a:xfrm>
-            <a:off x="594360" y="4146804"/>
-            <a:ext cx="438912" cy="438912"/>
-          </a:xfrm>
-          <a:prstGeom prst="rect">
-            <a:avLst/>
-          </a:prstGeom>
-          <a:noFill/>
-        </p:spPr>
-        <p:txBody>
-          <a:bodyPr wrap="square" anchor="ctr"/>
-          <a:lstStyle/>
-          <a:p>
-            <a:pPr algn="ctr"/>
-            <a:r>
-              <a:rPr sz="1600" b="1" i="0">
-                <a:solidFill>
-                  <a:srgbClr val="FFFFFF"/>
-                </a:solidFill>
-                <a:latin typeface="Calibri"/>
-              </a:rPr>
-              <a:t>3</a:t>
-            </a:r>
-          </a:p>
-        </p:txBody>
-      </p:sp>
-      <p:sp>
-        <p:nvSpPr>
-          <p:cNvPr id="16" name="TextBox 15"/>
-          <p:cNvSpPr txBox="1"/>
-          <p:nvPr/>
-        </p:nvSpPr>
-        <p:spPr>
-          <a:xfrm>
-            <a:off x="1188720" y="3931920"/>
-            <a:ext cx="10271455" cy="886968"/>
-          </a:xfrm>
-          <a:prstGeom prst="rect">
-            <a:avLst/>
-          </a:prstGeom>
-          <a:noFill/>
-        </p:spPr>
-        <p:txBody>
-          <a:bodyPr wrap="square" anchor="ctr"/>
-          <a:lstStyle/>
-          <a:p>
-            <a:r>
-              <a:rPr sz="1500" b="1" i="0">
-                <a:solidFill>
-                  <a:srgbClr val="095292"/>
-                </a:solidFill>
-                <a:latin typeface="Calibri"/>
-              </a:rPr>
-              <a:t>Ejecutar 2 pruebas: caso OK + caso error.</a:t>
-            </a:r>
-          </a:p>
-        </p:txBody>
-      </p:sp>
-      <p:sp>
-        <p:nvSpPr>
-          <p:cNvPr id="17" name="Rounded Rectangle 16"/>
-          <p:cNvSpPr/>
-          <p:nvPr/>
-        </p:nvSpPr>
-        <p:spPr>
-          <a:xfrm>
-            <a:off x="457200" y="4983480"/>
-            <a:ext cx="11277295" cy="1051560"/>
-          </a:xfrm>
-          <a:prstGeom prst="roundRect">
-            <a:avLst>
-              <a:gd name="adj" fmla="val 12000"/>
-            </a:avLst>
-          </a:prstGeom>
-          <a:solidFill>
-            <a:srgbClr val="E8F4FA"/>
-          </a:solidFill>
-          <a:ln>
-            <a:noFill/>
-          </a:ln>
-        </p:spPr>
-        <p:style>
-          <a:lnRef idx="1">
-            <a:schemeClr val="accent1"/>
-          </a:lnRef>
-          <a:fillRef idx="3">
-            <a:schemeClr val="accent1"/>
-          </a:fillRef>
-          <a:effectRef idx="2">
-            <a:schemeClr val="accent1"/>
-          </a:effectRef>
-          <a:fontRef idx="minor">
-            <a:schemeClr val="lt1"/>
-          </a:fontRef>
-        </p:style>
-        <p:txBody>
-          <a:bodyPr rtlCol="0" anchor="ctr"/>
-          <a:lstStyle/>
-          <a:p>
-            <a:pPr algn="ctr"/>
-          </a:p>
-        </p:txBody>
-      </p:sp>
-      <p:sp>
-        <p:nvSpPr>
-          <p:cNvPr id="18" name="Rounded Rectangle 17"/>
-          <p:cNvSpPr/>
-          <p:nvPr/>
-        </p:nvSpPr>
-        <p:spPr>
-          <a:xfrm>
-            <a:off x="594360" y="5289804"/>
-            <a:ext cx="438912" cy="438912"/>
-          </a:xfrm>
-          <a:prstGeom prst="roundRect">
-            <a:avLst>
-              <a:gd name="adj" fmla="val 12000"/>
-            </a:avLst>
-          </a:prstGeom>
-          <a:solidFill>
-            <a:srgbClr val="095292"/>
-          </a:solidFill>
-          <a:ln>
-            <a:noFill/>
-          </a:ln>
-        </p:spPr>
-        <p:style>
-          <a:lnRef idx="1">
-            <a:schemeClr val="accent1"/>
-          </a:lnRef>
-          <a:fillRef idx="3">
-            <a:schemeClr val="accent1"/>
-          </a:fillRef>
-          <a:effectRef idx="2">
-            <a:schemeClr val="accent1"/>
-          </a:effectRef>
-          <a:fontRef idx="minor">
-            <a:schemeClr val="lt1"/>
-          </a:fontRef>
-        </p:style>
-        <p:txBody>
-          <a:bodyPr rtlCol="0" anchor="ctr"/>
-          <a:lstStyle/>
-          <a:p>
-            <a:pPr algn="ctr"/>
-          </a:p>
-        </p:txBody>
-      </p:sp>
-      <p:sp>
-        <p:nvSpPr>
-          <p:cNvPr id="19" name="TextBox 18"/>
-          <p:cNvSpPr txBox="1"/>
-          <p:nvPr/>
-        </p:nvSpPr>
-        <p:spPr>
-          <a:xfrm>
-            <a:off x="594360" y="5289804"/>
-            <a:ext cx="438912" cy="438912"/>
-          </a:xfrm>
-          <a:prstGeom prst="rect">
-            <a:avLst/>
-          </a:prstGeom>
-          <a:noFill/>
-        </p:spPr>
-        <p:txBody>
-          <a:bodyPr wrap="square" anchor="ctr"/>
-          <a:lstStyle/>
-          <a:p>
-            <a:pPr algn="ctr"/>
-            <a:r>
-              <a:rPr sz="1600" b="1" i="0">
-                <a:solidFill>
-                  <a:srgbClr val="FFFFFF"/>
-                </a:solidFill>
-                <a:latin typeface="Calibri"/>
-              </a:rPr>
-              <a:t>4</a:t>
-            </a:r>
-          </a:p>
-        </p:txBody>
-      </p:sp>
-      <p:sp>
-        <p:nvSpPr>
-          <p:cNvPr id="20" name="TextBox 19"/>
-          <p:cNvSpPr txBox="1"/>
-          <p:nvPr/>
-        </p:nvSpPr>
-        <p:spPr>
-          <a:xfrm>
-            <a:off x="1188720" y="5074920"/>
-            <a:ext cx="10271455" cy="886968"/>
-          </a:xfrm>
-          <a:prstGeom prst="rect">
-            <a:avLst/>
-          </a:prstGeom>
-          <a:noFill/>
-        </p:spPr>
-        <p:txBody>
-          <a:bodyPr wrap="square" anchor="ctr"/>
-          <a:lstStyle/>
-          <a:p>
-            <a:r>
-              <a:rPr sz="1500" b="1" i="0">
-                <a:solidFill>
-                  <a:srgbClr val="095292"/>
-                </a:solidFill>
-                <a:latin typeface="Calibri"/>
-              </a:rPr>
-              <a:t>Documentar firma del proc (contrato para la futura app).</a:t>
-            </a:r>
-          </a:p>
-        </p:txBody>
-      </p:sp>
-      <p:sp>
-        <p:nvSpPr>
-          <p:cNvPr id="21" name="TextBox 20"/>
+                  <a:srgbClr val="333333"/>
+                </a:solidFill>
+                <a:latin typeface="Calibri"/>
+              </a:rPr>
+              <a:t>cualquier</a:t>
+            </a:r>
+            <a:r>
+              <a:rPr sz="1600" b="0" i="0">
+                <a:solidFill>
+                  <a:srgbClr val="333333"/>
+                </a:solidFill>
+                <a:latin typeface="Calibri"/>
+              </a:rPr>
+              <a:t> cliente que se conecte.</a:t>
+            </a:r>
+          </a:p>
+          <a:p>
+            <a:pPr>
+              <a:spcAft>
+                <a:spcPts val="800"/>
+              </a:spcAft>
+            </a:pPr>
+            <a:r>
+              <a:rPr sz="1600" b="0" i="0">
+                <a:solidFill>
+                  <a:srgbClr val="333333"/>
+                </a:solidFill>
+                <a:latin typeface="Calibri"/>
+              </a:rPr>
+              <a:t>–   Un procedimiento probado es la única forma de que «una mascota inactiva no agenda» siga siendo cierto cuando aparezcan la app, un script de carga y soporte.</a:t>
+            </a:r>
+          </a:p>
+          <a:p>
+            <a:pPr>
+              <a:spcAft>
+                <a:spcPts val="800"/>
+              </a:spcAft>
+            </a:pPr>
+            <a:r>
+              <a:rPr sz="1600" b="0" i="0">
+                <a:solidFill>
+                  <a:srgbClr val="333333"/>
+                </a:solidFill>
+                <a:latin typeface="Calibri"/>
+              </a:rPr>
+              <a:t>–   El contrato que escribes hoy es lo que la Clase 12 le entrega a quien programe la aplicación: firma, errores y qué hacer con cada uno.</a:t>
+            </a:r>
+          </a:p>
+        </p:txBody>
+      </p:sp>
+      <p:sp>
+        <p:nvSpPr>
+          <p:cNvPr id="6" name="TextBox 5"/>
           <p:cNvSpPr txBox="1"/>
           <p:nvPr/>
         </p:nvSpPr>
@@ -5032,154 +5247,21 @@
                 </a:solidFill>
                 <a:latin typeface="Calibri"/>
               </a:rPr>
-              <a:t>Taller PI VetCare — pistas (checklist vacio)</a:t>
-            </a:r>
-          </a:p>
-        </p:txBody>
-      </p:sp>
-      <p:sp>
-        <p:nvSpPr>
-          <p:cNvPr id="5" name="Rounded Rectangle 4"/>
-          <p:cNvSpPr/>
-          <p:nvPr/>
-        </p:nvSpPr>
-        <p:spPr>
-          <a:xfrm>
-            <a:off x="457200" y="1261872"/>
-            <a:ext cx="11277295" cy="566928"/>
-          </a:xfrm>
-          <a:prstGeom prst="roundRect">
-            <a:avLst>
-              <a:gd name="adj" fmla="val 12000"/>
-            </a:avLst>
-          </a:prstGeom>
-          <a:solidFill>
-            <a:srgbClr val="F2F2F2"/>
-          </a:solidFill>
-          <a:ln>
-            <a:noFill/>
-          </a:ln>
-        </p:spPr>
-        <p:style>
-          <a:lnRef idx="1">
-            <a:schemeClr val="accent1"/>
-          </a:lnRef>
-          <a:fillRef idx="3">
-            <a:schemeClr val="accent1"/>
-          </a:fillRef>
-          <a:effectRef idx="2">
-            <a:schemeClr val="accent1"/>
-          </a:effectRef>
-          <a:fontRef idx="minor">
-            <a:schemeClr val="lt1"/>
-          </a:fontRef>
-        </p:style>
-        <p:txBody>
-          <a:bodyPr rtlCol="0" anchor="ctr"/>
-          <a:lstStyle/>
-          <a:p>
-            <a:pPr algn="ctr"/>
-          </a:p>
-        </p:txBody>
-      </p:sp>
-      <p:sp>
-        <p:nvSpPr>
-          <p:cNvPr id="6" name="Rectangle 5"/>
-          <p:cNvSpPr/>
-          <p:nvPr/>
-        </p:nvSpPr>
-        <p:spPr>
-          <a:xfrm>
-            <a:off x="640080" y="1408175"/>
-            <a:ext cx="274320" cy="274320"/>
-          </a:xfrm>
-          <a:prstGeom prst="rect">
-            <a:avLst/>
-          </a:prstGeom>
-          <a:solidFill>
-            <a:srgbClr val="FFFFFF"/>
-          </a:solidFill>
-          <a:ln>
-            <a:solidFill>
-              <a:srgbClr val="333333"/>
-            </a:solidFill>
-          </a:ln>
-        </p:spPr>
-        <p:style>
-          <a:lnRef idx="1">
-            <a:schemeClr val="accent1"/>
-          </a:lnRef>
-          <a:fillRef idx="3">
-            <a:schemeClr val="accent1"/>
-          </a:fillRef>
-          <a:effectRef idx="2">
-            <a:schemeClr val="accent1"/>
-          </a:effectRef>
-          <a:fontRef idx="minor">
-            <a:schemeClr val="lt1"/>
-          </a:fontRef>
-        </p:style>
-        <p:txBody>
-          <a:bodyPr rtlCol="0" anchor="ctr"/>
-          <a:lstStyle/>
-          <a:p>
-            <a:pPr algn="ctr"/>
-          </a:p>
-        </p:txBody>
-      </p:sp>
-      <p:sp>
-        <p:nvSpPr>
-          <p:cNvPr id="7" name="Rectangle 6"/>
-          <p:cNvSpPr/>
-          <p:nvPr/>
-        </p:nvSpPr>
-        <p:spPr>
-          <a:xfrm>
-            <a:off x="640080" y="1408175"/>
-            <a:ext cx="73152" cy="274320"/>
-          </a:xfrm>
-          <a:prstGeom prst="rect">
-            <a:avLst/>
-          </a:prstGeom>
-          <a:solidFill>
-            <a:srgbClr val="269CCB"/>
-          </a:solidFill>
-          <a:ln>
-            <a:noFill/>
-          </a:ln>
-        </p:spPr>
-        <p:style>
-          <a:lnRef idx="1">
-            <a:schemeClr val="accent1"/>
-          </a:lnRef>
-          <a:fillRef idx="3">
-            <a:schemeClr val="accent1"/>
-          </a:fillRef>
-          <a:effectRef idx="2">
-            <a:schemeClr val="accent1"/>
-          </a:effectRef>
-          <a:fontRef idx="minor">
-            <a:schemeClr val="lt1"/>
-          </a:fontRef>
-        </p:style>
-        <p:txBody>
-          <a:bodyPr rtlCol="0" anchor="ctr"/>
-          <a:lstStyle/>
-          <a:p>
-            <a:pPr algn="ctr"/>
-          </a:p>
-        </p:txBody>
-      </p:sp>
-      <p:sp>
-        <p:nvSpPr>
-          <p:cNvPr id="8" name="TextBox 7"/>
+              <a:t>Taller PI VetCare — objetivo y criterios</a:t>
+            </a:r>
+          </a:p>
+        </p:txBody>
+      </p:sp>
+      <p:sp>
+        <p:nvSpPr>
+          <p:cNvPr id="5" name="TextBox 4"/>
           <p:cNvSpPr txBox="1"/>
           <p:nvPr/>
         </p:nvSpPr>
         <p:spPr>
           <a:xfrm>
-            <a:off x="1097280" y="1353312"/>
-            <a:ext cx="10362895" cy="402336"/>
+            <a:off x="457200" y="1170432"/>
+            <a:ext cx="11277295" cy="5230368"/>
           </a:xfrm>
           <a:prstGeom prst="rect">
             <a:avLst/>
@@ -5187,9 +5269,16 @@
           <a:noFill/>
         </p:spPr>
         <p:txBody>
-          <a:bodyPr wrap="square" anchor="ctr"/>
-          <a:lstStyle/>
-          <a:p>
+          <a:bodyPr wrap="square">
+            <a:spAutoFit/>
+          </a:bodyPr>
+          <a:lstStyle/>
+          <a:p>
+            <a:pPr>
+              <a:spcAft>
+                <a:spcPts val="800"/>
+              </a:spcAft>
+            </a:pPr>
             <a:r>
               <a:rPr sz="1500" b="0" i="0">
                 <a:solidFill>
@@ -5197,164 +5286,17 @@
                 </a:solidFill>
                 <a:latin typeface="Calibri"/>
               </a:rPr>
-              <a:t>□ Error controlado?</a:t>
-            </a:r>
-          </a:p>
-        </p:txBody>
-      </p:sp>
-      <p:sp>
-        <p:nvSpPr>
-          <p:cNvPr id="9" name="Rounded Rectangle 8"/>
-          <p:cNvSpPr/>
-          <p:nvPr/>
-        </p:nvSpPr>
-        <p:spPr>
-          <a:xfrm>
-            <a:off x="457200" y="1938528"/>
-            <a:ext cx="11277295" cy="566928"/>
-          </a:xfrm>
-          <a:prstGeom prst="roundRect">
-            <a:avLst>
-              <a:gd name="adj" fmla="val 12000"/>
-            </a:avLst>
-          </a:prstGeom>
-          <a:solidFill>
-            <a:srgbClr val="F2F2F2"/>
-          </a:solidFill>
-          <a:ln>
-            <a:noFill/>
-          </a:ln>
-        </p:spPr>
-        <p:style>
-          <a:lnRef idx="1">
-            <a:schemeClr val="accent1"/>
-          </a:lnRef>
-          <a:fillRef idx="3">
-            <a:schemeClr val="accent1"/>
-          </a:fillRef>
-          <a:effectRef idx="2">
-            <a:schemeClr val="accent1"/>
-          </a:effectRef>
-          <a:fontRef idx="minor">
-            <a:schemeClr val="lt1"/>
-          </a:fontRef>
-        </p:style>
-        <p:txBody>
-          <a:bodyPr rtlCol="0" anchor="ctr"/>
-          <a:lstStyle/>
-          <a:p>
-            <a:pPr algn="ctr"/>
-          </a:p>
-        </p:txBody>
-      </p:sp>
-      <p:sp>
-        <p:nvSpPr>
-          <p:cNvPr id="10" name="Rectangle 9"/>
-          <p:cNvSpPr/>
-          <p:nvPr/>
-        </p:nvSpPr>
-        <p:spPr>
-          <a:xfrm>
-            <a:off x="640080" y="2084832"/>
-            <a:ext cx="274320" cy="274320"/>
-          </a:xfrm>
-          <a:prstGeom prst="rect">
-            <a:avLst/>
-          </a:prstGeom>
-          <a:solidFill>
-            <a:srgbClr val="FFFFFF"/>
-          </a:solidFill>
-          <a:ln>
-            <a:solidFill>
-              <a:srgbClr val="333333"/>
-            </a:solidFill>
-          </a:ln>
-        </p:spPr>
-        <p:style>
-          <a:lnRef idx="1">
-            <a:schemeClr val="accent1"/>
-          </a:lnRef>
-          <a:fillRef idx="3">
-            <a:schemeClr val="accent1"/>
-          </a:fillRef>
-          <a:effectRef idx="2">
-            <a:schemeClr val="accent1"/>
-          </a:effectRef>
-          <a:fontRef idx="minor">
-            <a:schemeClr val="lt1"/>
-          </a:fontRef>
-        </p:style>
-        <p:txBody>
-          <a:bodyPr rtlCol="0" anchor="ctr"/>
-          <a:lstStyle/>
-          <a:p>
-            <a:pPr algn="ctr"/>
-          </a:p>
-        </p:txBody>
-      </p:sp>
-      <p:sp>
-        <p:nvSpPr>
-          <p:cNvPr id="11" name="Rectangle 10"/>
-          <p:cNvSpPr/>
-          <p:nvPr/>
-        </p:nvSpPr>
-        <p:spPr>
-          <a:xfrm>
-            <a:off x="640080" y="2084832"/>
-            <a:ext cx="73152" cy="274320"/>
-          </a:xfrm>
-          <a:prstGeom prst="rect">
-            <a:avLst/>
-          </a:prstGeom>
-          <a:solidFill>
-            <a:srgbClr val="269CCB"/>
-          </a:solidFill>
-          <a:ln>
-            <a:noFill/>
-          </a:ln>
-        </p:spPr>
-        <p:style>
-          <a:lnRef idx="1">
-            <a:schemeClr val="accent1"/>
-          </a:lnRef>
-          <a:fillRef idx="3">
-            <a:schemeClr val="accent1"/>
-          </a:fillRef>
-          <a:effectRef idx="2">
-            <a:schemeClr val="accent1"/>
-          </a:effectRef>
-          <a:fontRef idx="minor">
-            <a:schemeClr val="lt1"/>
-          </a:fontRef>
-        </p:style>
-        <p:txBody>
-          <a:bodyPr rtlCol="0" anchor="ctr"/>
-          <a:lstStyle/>
-          <a:p>
-            <a:pPr algn="ctr"/>
-          </a:p>
-        </p:txBody>
-      </p:sp>
-      <p:sp>
-        <p:nvSpPr>
-          <p:cNvPr id="12" name="TextBox 11"/>
-          <p:cNvSpPr txBox="1"/>
-          <p:nvPr/>
-        </p:nvSpPr>
-        <p:spPr>
-          <a:xfrm>
-            <a:off x="1097280" y="2029968"/>
-            <a:ext cx="10362895" cy="402336"/>
-          </a:xfrm>
-          <a:prstGeom prst="rect">
-            <a:avLst/>
-          </a:prstGeom>
-          <a:noFill/>
-        </p:spPr>
-        <p:txBody>
-          <a:bodyPr wrap="square" anchor="ctr"/>
-          <a:lstStyle/>
-          <a:p>
+              <a:t>–   </a:t>
+            </a:r>
+            <a:r>
+              <a:rPr sz="1500" b="1" i="0">
+                <a:solidFill>
+                  <a:srgbClr val="333333"/>
+                </a:solidFill>
+                <a:latin typeface="Calibri"/>
+              </a:rPr>
+              <a:t>Objetivo:</a:t>
+            </a:r>
             <a:r>
               <a:rPr sz="1500" b="0" i="0">
                 <a:solidFill>
@@ -5362,164 +5304,15 @@
                 </a:solidFill>
                 <a:latin typeface="Calibri"/>
               </a:rPr>
-              <a:t>□ Captura/enlace?</a:t>
-            </a:r>
-          </a:p>
-        </p:txBody>
-      </p:sp>
-      <p:sp>
-        <p:nvSpPr>
-          <p:cNvPr id="13" name="Rounded Rectangle 12"/>
-          <p:cNvSpPr/>
-          <p:nvPr/>
-        </p:nvSpPr>
-        <p:spPr>
-          <a:xfrm>
-            <a:off x="457200" y="2615184"/>
-            <a:ext cx="11277295" cy="566928"/>
-          </a:xfrm>
-          <a:prstGeom prst="roundRect">
-            <a:avLst>
-              <a:gd name="adj" fmla="val 12000"/>
-            </a:avLst>
-          </a:prstGeom>
-          <a:solidFill>
-            <a:srgbClr val="F2F2F2"/>
-          </a:solidFill>
-          <a:ln>
-            <a:noFill/>
-          </a:ln>
-        </p:spPr>
-        <p:style>
-          <a:lnRef idx="1">
-            <a:schemeClr val="accent1"/>
-          </a:lnRef>
-          <a:fillRef idx="3">
-            <a:schemeClr val="accent1"/>
-          </a:fillRef>
-          <a:effectRef idx="2">
-            <a:schemeClr val="accent1"/>
-          </a:effectRef>
-          <a:fontRef idx="minor">
-            <a:schemeClr val="lt1"/>
-          </a:fontRef>
-        </p:style>
-        <p:txBody>
-          <a:bodyPr rtlCol="0" anchor="ctr"/>
-          <a:lstStyle/>
-          <a:p>
-            <a:pPr algn="ctr"/>
-          </a:p>
-        </p:txBody>
-      </p:sp>
-      <p:sp>
-        <p:nvSpPr>
-          <p:cNvPr id="14" name="Rectangle 13"/>
-          <p:cNvSpPr/>
-          <p:nvPr/>
-        </p:nvSpPr>
-        <p:spPr>
-          <a:xfrm>
-            <a:off x="640080" y="2761488"/>
-            <a:ext cx="274320" cy="274320"/>
-          </a:xfrm>
-          <a:prstGeom prst="rect">
-            <a:avLst/>
-          </a:prstGeom>
-          <a:solidFill>
-            <a:srgbClr val="FFFFFF"/>
-          </a:solidFill>
-          <a:ln>
-            <a:solidFill>
-              <a:srgbClr val="333333"/>
-            </a:solidFill>
-          </a:ln>
-        </p:spPr>
-        <p:style>
-          <a:lnRef idx="1">
-            <a:schemeClr val="accent1"/>
-          </a:lnRef>
-          <a:fillRef idx="3">
-            <a:schemeClr val="accent1"/>
-          </a:fillRef>
-          <a:effectRef idx="2">
-            <a:schemeClr val="accent1"/>
-          </a:effectRef>
-          <a:fontRef idx="minor">
-            <a:schemeClr val="lt1"/>
-          </a:fontRef>
-        </p:style>
-        <p:txBody>
-          <a:bodyPr rtlCol="0" anchor="ctr"/>
-          <a:lstStyle/>
-          <a:p>
-            <a:pPr algn="ctr"/>
-          </a:p>
-        </p:txBody>
-      </p:sp>
-      <p:sp>
-        <p:nvSpPr>
-          <p:cNvPr id="15" name="Rectangle 14"/>
-          <p:cNvSpPr/>
-          <p:nvPr/>
-        </p:nvSpPr>
-        <p:spPr>
-          <a:xfrm>
-            <a:off x="640080" y="2761488"/>
-            <a:ext cx="73152" cy="274320"/>
-          </a:xfrm>
-          <a:prstGeom prst="rect">
-            <a:avLst/>
-          </a:prstGeom>
-          <a:solidFill>
-            <a:srgbClr val="269CCB"/>
-          </a:solidFill>
-          <a:ln>
-            <a:noFill/>
-          </a:ln>
-        </p:spPr>
-        <p:style>
-          <a:lnRef idx="1">
-            <a:schemeClr val="accent1"/>
-          </a:lnRef>
-          <a:fillRef idx="3">
-            <a:schemeClr val="accent1"/>
-          </a:fillRef>
-          <a:effectRef idx="2">
-            <a:schemeClr val="accent1"/>
-          </a:effectRef>
-          <a:fontRef idx="minor">
-            <a:schemeClr val="lt1"/>
-          </a:fontRef>
-        </p:style>
-        <p:txBody>
-          <a:bodyPr rtlCol="0" anchor="ctr"/>
-          <a:lstStyle/>
-          <a:p>
-            <a:pPr algn="ctr"/>
-          </a:p>
-        </p:txBody>
-      </p:sp>
-      <p:sp>
-        <p:nvSpPr>
-          <p:cNvPr id="16" name="TextBox 15"/>
-          <p:cNvSpPr txBox="1"/>
-          <p:nvPr/>
-        </p:nvSpPr>
-        <p:spPr>
-          <a:xfrm>
-            <a:off x="1097280" y="2706624"/>
-            <a:ext cx="10362895" cy="402336"/>
-          </a:xfrm>
-          <a:prstGeom prst="rect">
-            <a:avLst/>
-          </a:prstGeom>
-          <a:noFill/>
-        </p:spPr>
-        <p:txBody>
-          <a:bodyPr wrap="square" anchor="ctr"/>
-          <a:lstStyle/>
-          <a:p>
+              <a:t> Dos procedimientos de negocio en PL/pgSQL corriendo en ExamLab, su batería de pruebas con evidencia, y el contrato de los dos documentado.</a:t>
+            </a:r>
+          </a:p>
+          <a:p>
+            <a:pPr>
+              <a:spcAft>
+                <a:spcPts val="800"/>
+              </a:spcAft>
+            </a:pPr>
             <a:r>
               <a:rPr sz="1500" b="0" i="0">
                 <a:solidFill>
@@ -5527,14 +5320,256 @@
                 </a:solidFill>
                 <a:latin typeface="Calibri"/>
               </a:rPr>
-              <a:t>□ Firma clara?</a:t>
-            </a:r>
-          </a:p>
-        </p:txBody>
-      </p:sp>
-      <p:sp>
-        <p:nvSpPr>
-          <p:cNvPr id="17" name="TextBox 16"/>
+              <a:t>–   </a:t>
+            </a:r>
+            <a:r>
+              <a:rPr sz="1500" b="1" i="0">
+                <a:solidFill>
+                  <a:srgbClr val="333333"/>
+                </a:solidFill>
+                <a:latin typeface="Calibri"/>
+              </a:rPr>
+              <a:t>Exito:</a:t>
+            </a:r>
+            <a:r>
+              <a:rPr sz="1500" b="0" i="0">
+                <a:solidFill>
+                  <a:srgbClr val="333333"/>
+                </a:solidFill>
+                <a:latin typeface="Calibri"/>
+              </a:rPr>
+              <a:t> «sp_agendar_cita» con sus 3 parámetros y sus 3 validaciones, cada una con su «RAISE EXCEPTION» y su mensaje literal.</a:t>
+            </a:r>
+          </a:p>
+          <a:p>
+            <a:pPr>
+              <a:spcAft>
+                <a:spcPts val="800"/>
+              </a:spcAft>
+            </a:pPr>
+            <a:r>
+              <a:rPr sz="1500" b="0" i="0">
+                <a:solidFill>
+                  <a:srgbClr val="333333"/>
+                </a:solidFill>
+                <a:latin typeface="Calibri"/>
+              </a:rPr>
+              <a:t>–   </a:t>
+            </a:r>
+            <a:r>
+              <a:rPr sz="1500" b="1" i="0">
+                <a:solidFill>
+                  <a:srgbClr val="333333"/>
+                </a:solidFill>
+                <a:latin typeface="Calibri"/>
+              </a:rPr>
+              <a:t>Exito:</a:t>
+            </a:r>
+            <a:r>
+              <a:rPr sz="1500" b="0" i="0">
+                <a:solidFill>
+                  <a:srgbClr val="333333"/>
+                </a:solidFill>
+                <a:latin typeface="Calibri"/>
+              </a:rPr>
+              <a:t> Batería de 4 bloques «DO» que </a:t>
+            </a:r>
+            <a:r>
+              <a:rPr sz="1500" b="1" i="0">
+                <a:solidFill>
+                  <a:srgbClr val="333333"/>
+                </a:solidFill>
+                <a:latin typeface="Calibri"/>
+              </a:rPr>
+              <a:t>no aborta el script</a:t>
+            </a:r>
+            <a:r>
+              <a:rPr sz="1500" b="0" i="0">
+                <a:solidFill>
+                  <a:srgbClr val="333333"/>
+                </a:solidFill>
+                <a:latin typeface="Calibri"/>
+              </a:rPr>
+              <a:t> y escribe 4 filas en «resultado_prueba» con el «SQLERRM» real.</a:t>
+            </a:r>
+          </a:p>
+          <a:p>
+            <a:pPr>
+              <a:spcAft>
+                <a:spcPts val="800"/>
+              </a:spcAft>
+            </a:pPr>
+            <a:r>
+              <a:rPr sz="1500" b="0" i="0">
+                <a:solidFill>
+                  <a:srgbClr val="333333"/>
+                </a:solidFill>
+                <a:latin typeface="Calibri"/>
+              </a:rPr>
+              <a:t>–   </a:t>
+            </a:r>
+            <a:r>
+              <a:rPr sz="1500" b="1" i="0">
+                <a:solidFill>
+                  <a:srgbClr val="333333"/>
+                </a:solidFill>
+                <a:latin typeface="Calibri"/>
+              </a:rPr>
+              <a:t>Exito:</a:t>
+            </a:r>
+            <a:r>
+              <a:rPr sz="1500" b="0" i="0">
+                <a:solidFill>
+                  <a:srgbClr val="333333"/>
+                </a:solidFill>
+                <a:latin typeface="Calibri"/>
+              </a:rPr>
+              <a:t> El «COUNT(*)» de «cita» demuestra que pasó de </a:t>
+            </a:r>
+            <a:r>
+              <a:rPr sz="1500" b="1" i="0">
+                <a:solidFill>
+                  <a:srgbClr val="333333"/>
+                </a:solidFill>
+                <a:latin typeface="Calibri"/>
+              </a:rPr>
+              <a:t>10 a 11</a:t>
+            </a:r>
+            <a:r>
+              <a:rPr sz="1500" b="0" i="0">
+                <a:solidFill>
+                  <a:srgbClr val="333333"/>
+                </a:solidFill>
+                <a:latin typeface="Calibri"/>
+              </a:rPr>
+              <a:t> filas: las tres validaciones no insertaron nada.</a:t>
+            </a:r>
+          </a:p>
+          <a:p>
+            <a:pPr>
+              <a:spcAft>
+                <a:spcPts val="800"/>
+              </a:spcAft>
+            </a:pPr>
+            <a:r>
+              <a:rPr sz="1500" b="0" i="0">
+                <a:solidFill>
+                  <a:srgbClr val="333333"/>
+                </a:solidFill>
+                <a:latin typeface="Calibri"/>
+              </a:rPr>
+              <a:t>–   </a:t>
+            </a:r>
+            <a:r>
+              <a:rPr sz="1500" b="1" i="0">
+                <a:solidFill>
+                  <a:srgbClr val="333333"/>
+                </a:solidFill>
+                <a:latin typeface="Calibri"/>
+              </a:rPr>
+              <a:t>Exito:</a:t>
+            </a:r>
+            <a:r>
+              <a:rPr sz="1500" b="0" i="0">
+                <a:solidFill>
+                  <a:srgbClr val="333333"/>
+                </a:solidFill>
+                <a:latin typeface="Calibri"/>
+              </a:rPr>
+              <a:t> «sp_registrar_consulta» detectando la consulta duplicada con «EXISTS» </a:t>
+            </a:r>
+            <a:r>
+              <a:rPr sz="1500" b="1" i="0">
+                <a:solidFill>
+                  <a:srgbClr val="333333"/>
+                </a:solidFill>
+                <a:latin typeface="Calibri"/>
+              </a:rPr>
+              <a:t>antes</a:t>
+            </a:r>
+            <a:r>
+              <a:rPr sz="1500" b="0" i="0">
+                <a:solidFill>
+                  <a:srgbClr val="333333"/>
+                </a:solidFill>
+                <a:latin typeface="Calibri"/>
+              </a:rPr>
+              <a:t> de chocar contra el «UNIQUE».</a:t>
+            </a:r>
+          </a:p>
+          <a:p>
+            <a:pPr>
+              <a:spcAft>
+                <a:spcPts val="800"/>
+              </a:spcAft>
+            </a:pPr>
+            <a:r>
+              <a:rPr sz="1500" b="0" i="0">
+                <a:solidFill>
+                  <a:srgbClr val="333333"/>
+                </a:solidFill>
+                <a:latin typeface="Calibri"/>
+              </a:rPr>
+              <a:t>–   </a:t>
+            </a:r>
+            <a:r>
+              <a:rPr sz="1500" b="1" i="0">
+                <a:solidFill>
+                  <a:srgbClr val="333333"/>
+                </a:solidFill>
+                <a:latin typeface="Calibri"/>
+              </a:rPr>
+              <a:t>Exito:</a:t>
+            </a:r>
+            <a:r>
+              <a:rPr sz="1500" b="0" i="0">
+                <a:solidFill>
+                  <a:srgbClr val="333333"/>
+                </a:solidFill>
+                <a:latin typeface="Calibri"/>
+              </a:rPr>
+              <a:t> Contrato de los dos procedimientos con sus 6 bloques y la tabla de errores completa (7 filas); las firmas coinciden con el código entregado.</a:t>
+            </a:r>
+          </a:p>
+          <a:p>
+            <a:pPr>
+              <a:spcAft>
+                <a:spcPts val="800"/>
+              </a:spcAft>
+            </a:pPr>
+            <a:r>
+              <a:rPr sz="1500" b="0" i="0">
+                <a:solidFill>
+                  <a:srgbClr val="333333"/>
+                </a:solidFill>
+                <a:latin typeface="Calibri"/>
+              </a:rPr>
+              <a:t>–   </a:t>
+            </a:r>
+            <a:r>
+              <a:rPr sz="1500" b="1" i="0">
+                <a:solidFill>
+                  <a:srgbClr val="333333"/>
+                </a:solidFill>
+                <a:latin typeface="Calibri"/>
+              </a:rPr>
+              <a:t>Exito:</a:t>
+            </a:r>
+            <a:r>
+              <a:rPr sz="1500" b="0" i="0">
+                <a:solidFill>
+                  <a:srgbClr val="333333"/>
+                </a:solidFill>
+                <a:latin typeface="Calibri"/>
+              </a:rPr>
+              <a:t> Entrega domingo 23:59.</a:t>
+            </a:r>
+          </a:p>
+        </p:txBody>
+      </p:sp>
+      <p:sp>
+        <p:nvSpPr>
+          <p:cNvPr id="6" name="TextBox 5"/>
           <p:cNvSpPr txBox="1"/>
           <p:nvPr/>
         </p:nvSpPr>
@@ -5708,7 +5743,7 @@
                 </a:solidFill>
                 <a:latin typeface="Calibri"/>
               </a:rPr>
-              <a:t>Criterios de exito / entregable</a:t>
+              <a:t>Taller PI VetCare — escenario / datos de partida</a:t>
             </a:r>
           </a:p>
         </p:txBody>
@@ -5747,7 +5782,7 @@
                 </a:solidFill>
                 <a:latin typeface="Calibri"/>
               </a:rPr>
-              <a:t>–   </a:t>
+              <a:t>–   Esquema de VetCare ya creado y poblado: </a:t>
             </a:r>
             <a:r>
               <a:rPr sz="1600" b="1" i="0">
@@ -5756,7 +5791,7 @@
                 </a:solidFill>
                 <a:latin typeface="Calibri"/>
               </a:rPr>
-              <a:t>Entregable:</a:t>
+              <a:t>8 mascotas</a:t>
             </a:r>
             <a:r>
               <a:rPr sz="1600" b="0" i="0">
@@ -5765,7 +5800,61 @@
                 </a:solidFill>
                 <a:latin typeface="Calibri"/>
               </a:rPr>
-              <a:t> Script proc + casos de prueba (captura o enlace Live SQL)</a:t>
+              <a:t> —la </a:t>
+            </a:r>
+            <a:r>
+              <a:rPr sz="1600" b="1" i="0">
+                <a:solidFill>
+                  <a:srgbClr val="333333"/>
+                </a:solidFill>
+                <a:latin typeface="Calibri"/>
+              </a:rPr>
+              <a:t>3 (Rocky)</a:t>
+            </a:r>
+            <a:r>
+              <a:rPr sz="1600" b="0" i="0">
+                <a:solidFill>
+                  <a:srgbClr val="333333"/>
+                </a:solidFill>
+                <a:latin typeface="Calibri"/>
+              </a:rPr>
+              <a:t> y la </a:t>
+            </a:r>
+            <a:r>
+              <a:rPr sz="1600" b="1" i="0">
+                <a:solidFill>
+                  <a:srgbClr val="333333"/>
+                </a:solidFill>
+                <a:latin typeface="Calibri"/>
+              </a:rPr>
+              <a:t>8 (Kiara)</a:t>
+            </a:r>
+            <a:r>
+              <a:rPr sz="1600" b="0" i="0">
+                <a:solidFill>
+                  <a:srgbClr val="333333"/>
+                </a:solidFill>
+                <a:latin typeface="Calibri"/>
+              </a:rPr>
+              <a:t> están </a:t>
+            </a:r>
+            <a:r>
+              <a:rPr sz="1600" b="1" i="0">
+                <a:solidFill>
+                  <a:srgbClr val="333333"/>
+                </a:solidFill>
+                <a:latin typeface="Calibri"/>
+              </a:rPr>
+              <a:t>INACTIVAS</a:t>
+            </a:r>
+            <a:r>
+              <a:rPr sz="1600" b="0" i="0">
+                <a:solidFill>
+                  <a:srgbClr val="333333"/>
+                </a:solidFill>
+                <a:latin typeface="Calibri"/>
+              </a:rPr>
+              <a:t>—, 4 veterinarios y 10 citas.</a:t>
             </a:r>
           </a:p>
           <a:p>
@@ -5781,7 +5870,25 @@
                 </a:solidFill>
                 <a:latin typeface="Calibri"/>
               </a:rPr>
-              <a:t>–   Evidencia en playground (enlace) o archivo SQL/PNG propio.</a:t>
+              <a:t>–   Ya existe una cita del </a:t>
+            </a:r>
+            <a:r>
+              <a:rPr sz="1600" b="1" i="0">
+                <a:solidFill>
+                  <a:srgbClr val="333333"/>
+                </a:solidFill>
+                <a:latin typeface="Calibri"/>
+              </a:rPr>
+              <a:t>veterinario 1</a:t>
+            </a:r>
+            <a:r>
+              <a:rPr sz="1600" b="0" i="0">
+                <a:solidFill>
+                  <a:srgbClr val="333333"/>
+                </a:solidFill>
+                <a:latin typeface="Calibri"/>
+              </a:rPr>
+              <a:t> el «2026-09-01 08:00:00»: es la que dispara la validación de veterinario ocupado.</a:t>
             </a:r>
           </a:p>
           <a:p>
@@ -5797,7 +5904,25 @@
                 </a:solidFill>
                 <a:latin typeface="Calibri"/>
               </a:rPr>
-              <a:t>–   Actualizar checklist PI (que criterio de rubrica avanzo).</a:t>
+              <a:t>–   </a:t>
+            </a:r>
+            <a:r>
+              <a:rPr sz="1600" b="1" i="0">
+                <a:solidFill>
+                  <a:srgbClr val="333333"/>
+                </a:solidFill>
+                <a:latin typeface="Calibri"/>
+              </a:rPr>
+              <a:t>Motor:</a:t>
+            </a:r>
+            <a:r>
+              <a:rPr sz="1600" b="0" i="0">
+                <a:solidFill>
+                  <a:srgbClr val="333333"/>
+                </a:solidFill>
+                <a:latin typeface="Calibri"/>
+              </a:rPr>
+              <a:t> PostgreSQL dentro de ExamLab. El molde es «CREATE PROCEDURE ... LANGUAGE plpgsql AS $proc$ ... $proc$;» — no hay «IS», ni «VARCHAR2», ni «/» final.</a:t>
             </a:r>
           </a:p>
           <a:p>
@@ -5813,25 +5938,7 @@
                 </a:solidFill>
                 <a:latin typeface="Calibri"/>
               </a:rPr>
-              <a:t>–   </a:t>
-            </a:r>
-            <a:r>
-              <a:rPr sz="1600" b="1" i="0">
-                <a:solidFill>
-                  <a:srgbClr val="333333"/>
-                </a:solidFill>
-                <a:latin typeface="Calibri"/>
-              </a:rPr>
-              <a:t>Entrega en ExamLab</a:t>
-            </a:r>
-            <a:r>
-              <a:rPr sz="1600" b="0" i="0">
-                <a:solidFill>
-                  <a:srgbClr val="333333"/>
-                </a:solidFill>
-                <a:latin typeface="Calibri"/>
-              </a:rPr>
-              <a:t> (https://uniaj.examlab.workers.dev/) — domingo 23:59 cuando aplique taller.</a:t>
+              <a:t>–   El contrato se escribe en Google Docs y se pega en la pregunta 5; la plantilla en blanco de sus 6 bloques y de la tabla de errores está en este documento.</a:t>
             </a:r>
           </a:p>
         </p:txBody>
@@ -6012,7 +6119,7 @@
                 </a:solidFill>
                 <a:latin typeface="Calibri"/>
               </a:rPr>
-              <a:t>Para el PI esta semana</a:t>
+              <a:t>Taller PI VetCare — pasos guiados</a:t>
             </a:r>
           </a:p>
         </p:txBody>
@@ -6025,8 +6132,163 @@
         </p:nvSpPr>
         <p:spPr>
           <a:xfrm>
-            <a:off x="457200" y="1261872"/>
-            <a:ext cx="11277295" cy="1051560"/>
+            <a:off x="457200" y="1234440"/>
+            <a:ext cx="11277295" cy="950976"/>
+          </a:xfrm>
+          <a:prstGeom prst="roundRect">
+            <a:avLst>
+              <a:gd name="adj" fmla="val 12000"/>
+            </a:avLst>
+          </a:prstGeom>
+          <a:solidFill>
+            <a:srgbClr val="F2F2F2"/>
+          </a:solidFill>
+          <a:ln>
+            <a:noFill/>
+          </a:ln>
+        </p:spPr>
+        <p:style>
+          <a:lnRef idx="1">
+            <a:schemeClr val="accent1"/>
+          </a:lnRef>
+          <a:fillRef idx="3">
+            <a:schemeClr val="accent1"/>
+          </a:fillRef>
+          <a:effectRef idx="2">
+            <a:schemeClr val="accent1"/>
+          </a:effectRef>
+          <a:fontRef idx="minor">
+            <a:schemeClr val="lt1"/>
+          </a:fontRef>
+        </p:style>
+        <p:txBody>
+          <a:bodyPr rtlCol="0" anchor="ctr"/>
+          <a:lstStyle/>
+          <a:p>
+            <a:pPr algn="ctr"/>
+          </a:p>
+        </p:txBody>
+      </p:sp>
+      <p:sp>
+        <p:nvSpPr>
+          <p:cNvPr id="6" name="Rounded Rectangle 5"/>
+          <p:cNvSpPr/>
+          <p:nvPr/>
+        </p:nvSpPr>
+        <p:spPr>
+          <a:xfrm>
+            <a:off x="594360" y="1490472"/>
+            <a:ext cx="438912" cy="438912"/>
+          </a:xfrm>
+          <a:prstGeom prst="roundRect">
+            <a:avLst>
+              <a:gd name="adj" fmla="val 12000"/>
+            </a:avLst>
+          </a:prstGeom>
+          <a:solidFill>
+            <a:srgbClr val="095292"/>
+          </a:solidFill>
+          <a:ln>
+            <a:noFill/>
+          </a:ln>
+        </p:spPr>
+        <p:style>
+          <a:lnRef idx="1">
+            <a:schemeClr val="accent1"/>
+          </a:lnRef>
+          <a:fillRef idx="3">
+            <a:schemeClr val="accent1"/>
+          </a:fillRef>
+          <a:effectRef idx="2">
+            <a:schemeClr val="accent1"/>
+          </a:effectRef>
+          <a:fontRef idx="minor">
+            <a:schemeClr val="lt1"/>
+          </a:fontRef>
+        </p:style>
+        <p:txBody>
+          <a:bodyPr rtlCol="0" anchor="ctr"/>
+          <a:lstStyle/>
+          <a:p>
+            <a:pPr algn="ctr"/>
+          </a:p>
+        </p:txBody>
+      </p:sp>
+      <p:sp>
+        <p:nvSpPr>
+          <p:cNvPr id="7" name="TextBox 6"/>
+          <p:cNvSpPr txBox="1"/>
+          <p:nvPr/>
+        </p:nvSpPr>
+        <p:spPr>
+          <a:xfrm>
+            <a:off x="594360" y="1490472"/>
+            <a:ext cx="438912" cy="438912"/>
+          </a:xfrm>
+          <a:prstGeom prst="rect">
+            <a:avLst/>
+          </a:prstGeom>
+          <a:noFill/>
+        </p:spPr>
+        <p:txBody>
+          <a:bodyPr wrap="square" anchor="ctr"/>
+          <a:lstStyle/>
+          <a:p>
+            <a:pPr algn="ctr"/>
+            <a:r>
+              <a:rPr sz="1600" b="1" i="0">
+                <a:solidFill>
+                  <a:srgbClr val="FFFFFF"/>
+                </a:solidFill>
+                <a:latin typeface="Calibri"/>
+              </a:rPr>
+              <a:t>1</a:t>
+            </a:r>
+          </a:p>
+        </p:txBody>
+      </p:sp>
+      <p:sp>
+        <p:nvSpPr>
+          <p:cNvPr id="8" name="TextBox 7"/>
+          <p:cNvSpPr txBox="1"/>
+          <p:nvPr/>
+        </p:nvSpPr>
+        <p:spPr>
+          <a:xfrm>
+            <a:off x="1188720" y="1325880"/>
+            <a:ext cx="10271455" cy="786384"/>
+          </a:xfrm>
+          <a:prstGeom prst="rect">
+            <a:avLst/>
+          </a:prstGeom>
+          <a:noFill/>
+        </p:spPr>
+        <p:txBody>
+          <a:bodyPr wrap="square" anchor="ctr"/>
+          <a:lstStyle/>
+          <a:p>
+            <a:r>
+              <a:rPr sz="1500" b="1" i="0">
+                <a:solidFill>
+                  <a:srgbClr val="095292"/>
+                </a:solidFill>
+                <a:latin typeface="Calibri"/>
+              </a:rPr>
+              <a:t>Escribir sp_agendar_cita en PL/pgSQL y ejecutarlo en ExamLab (LANGUAGE plpgsql, dollar-quoting, sin sintaxis de Oracle).</a:t>
+            </a:r>
+          </a:p>
+        </p:txBody>
+      </p:sp>
+      <p:sp>
+        <p:nvSpPr>
+          <p:cNvPr id="9" name="Rounded Rectangle 8"/>
+          <p:cNvSpPr/>
+          <p:nvPr/>
+        </p:nvSpPr>
+        <p:spPr>
+          <a:xfrm>
+            <a:off x="457200" y="2276856"/>
+            <a:ext cx="11277295" cy="950976"/>
           </a:xfrm>
           <a:prstGeom prst="roundRect">
             <a:avLst>
@@ -6064,20 +6326,22 @@
       </p:sp>
       <p:sp>
         <p:nvSpPr>
-          <p:cNvPr id="6" name="Rectangle 5"/>
+          <p:cNvPr id="10" name="Rounded Rectangle 9"/>
           <p:cNvSpPr/>
           <p:nvPr/>
         </p:nvSpPr>
         <p:spPr>
           <a:xfrm>
-            <a:off x="457200" y="1261872"/>
-            <a:ext cx="128016" cy="1051560"/>
-          </a:xfrm>
-          <a:prstGeom prst="rect">
-            <a:avLst/>
+            <a:off x="594360" y="2532888"/>
+            <a:ext cx="438912" cy="438912"/>
+          </a:xfrm>
+          <a:prstGeom prst="roundRect">
+            <a:avLst>
+              <a:gd name="adj" fmla="val 12000"/>
+            </a:avLst>
           </a:prstGeom>
           <a:solidFill>
-            <a:srgbClr val="269CCB"/>
+            <a:srgbClr val="095292"/>
           </a:solidFill>
           <a:ln>
             <a:noFill/>
@@ -6107,14 +6371,14 @@
       </p:sp>
       <p:sp>
         <p:nvSpPr>
-          <p:cNvPr id="7" name="TextBox 6"/>
+          <p:cNvPr id="11" name="TextBox 10"/>
           <p:cNvSpPr txBox="1"/>
           <p:nvPr/>
         </p:nvSpPr>
         <p:spPr>
           <a:xfrm>
-            <a:off x="777240" y="1399031"/>
-            <a:ext cx="10774375" cy="822959"/>
+            <a:off x="594360" y="2532888"/>
+            <a:ext cx="438912" cy="438912"/>
           </a:xfrm>
           <a:prstGeom prst="rect">
             <a:avLst/>
@@ -6122,49 +6386,64 @@
           <a:noFill/>
         </p:spPr>
         <p:txBody>
-          <a:bodyPr wrap="square">
-            <a:spAutoFit/>
-          </a:bodyPr>
-          <a:lstStyle/>
-          <a:p>
-            <a:r>
-              <a:rPr sz="1200" b="1" i="0">
-                <a:solidFill>
-                  <a:srgbClr val="269CCB"/>
-                </a:solidFill>
-                <a:latin typeface="Calibri"/>
-              </a:rPr>
-              <a:t>Info</a:t>
-            </a:r>
-          </a:p>
-          <a:p>
-            <a:pPr>
-              <a:spcBef>
-                <a:spcPts val="400"/>
-              </a:spcBef>
-            </a:pPr>
-            <a:r>
-              <a:rPr sz="1400" b="0" i="0">
-                <a:solidFill>
-                  <a:srgbClr val="333333"/>
-                </a:solidFill>
-                <a:latin typeface="Calibri"/>
-              </a:rPr>
-              <a:t>Hito: &gt;=1 procedimiento de negocio (agendar cita / registrar consulta)</a:t>
-            </a:r>
-          </a:p>
-        </p:txBody>
-      </p:sp>
-      <p:sp>
-        <p:nvSpPr>
-          <p:cNvPr id="8" name="Rounded Rectangle 7"/>
+          <a:bodyPr wrap="square" anchor="ctr"/>
+          <a:lstStyle/>
+          <a:p>
+            <a:pPr algn="ctr"/>
+            <a:r>
+              <a:rPr sz="1600" b="1" i="0">
+                <a:solidFill>
+                  <a:srgbClr val="FFFFFF"/>
+                </a:solidFill>
+                <a:latin typeface="Calibri"/>
+              </a:rPr>
+              <a:t>2</a:t>
+            </a:r>
+          </a:p>
+        </p:txBody>
+      </p:sp>
+      <p:sp>
+        <p:nvSpPr>
+          <p:cNvPr id="12" name="TextBox 11"/>
+          <p:cNvSpPr txBox="1"/>
+          <p:nvPr/>
+        </p:nvSpPr>
+        <p:spPr>
+          <a:xfrm>
+            <a:off x="1188720" y="2368296"/>
+            <a:ext cx="10271455" cy="786384"/>
+          </a:xfrm>
+          <a:prstGeom prst="rect">
+            <a:avLst/>
+          </a:prstGeom>
+          <a:noFill/>
+        </p:spPr>
+        <p:txBody>
+          <a:bodyPr wrap="square" anchor="ctr"/>
+          <a:lstStyle/>
+          <a:p>
+            <a:r>
+              <a:rPr sz="1500" b="1" i="0">
+                <a:solidFill>
+                  <a:srgbClr val="095292"/>
+                </a:solidFill>
+                <a:latin typeface="Calibri"/>
+              </a:rPr>
+              <a:t>Incluir las 3 validaciones de negocio del PI, cada una con su RAISE EXCEPTION y su mensaje literal.</a:t>
+            </a:r>
+          </a:p>
+        </p:txBody>
+      </p:sp>
+      <p:sp>
+        <p:nvSpPr>
+          <p:cNvPr id="13" name="Rounded Rectangle 12"/>
           <p:cNvSpPr/>
           <p:nvPr/>
         </p:nvSpPr>
         <p:spPr>
           <a:xfrm>
-            <a:off x="457200" y="2478024"/>
-            <a:ext cx="11277295" cy="1051560"/>
+            <a:off x="457200" y="3319272"/>
+            <a:ext cx="11277295" cy="950976"/>
           </a:xfrm>
           <a:prstGeom prst="roundRect">
             <a:avLst>
@@ -6172,7 +6451,7 @@
             </a:avLst>
           </a:prstGeom>
           <a:solidFill>
-            <a:srgbClr val="FFF8E1"/>
+            <a:srgbClr val="F2F2F2"/>
           </a:solidFill>
           <a:ln>
             <a:noFill/>
@@ -6202,20 +6481,22 @@
       </p:sp>
       <p:sp>
         <p:nvSpPr>
-          <p:cNvPr id="9" name="Rectangle 8"/>
+          <p:cNvPr id="14" name="Rounded Rectangle 13"/>
           <p:cNvSpPr/>
           <p:nvPr/>
         </p:nvSpPr>
         <p:spPr>
           <a:xfrm>
-            <a:off x="457200" y="2478024"/>
-            <a:ext cx="128016" cy="1051560"/>
-          </a:xfrm>
-          <a:prstGeom prst="rect">
-            <a:avLst/>
+            <a:off x="594360" y="3575304"/>
+            <a:ext cx="438912" cy="438912"/>
+          </a:xfrm>
+          <a:prstGeom prst="roundRect">
+            <a:avLst>
+              <a:gd name="adj" fmla="val 12000"/>
+            </a:avLst>
           </a:prstGeom>
           <a:solidFill>
-            <a:srgbClr val="FFD000"/>
+            <a:srgbClr val="095292"/>
           </a:solidFill>
           <a:ln>
             <a:noFill/>
@@ -6245,14 +6526,14 @@
       </p:sp>
       <p:sp>
         <p:nvSpPr>
-          <p:cNvPr id="10" name="TextBox 9"/>
+          <p:cNvPr id="15" name="TextBox 14"/>
           <p:cNvSpPr txBox="1"/>
           <p:nvPr/>
         </p:nvSpPr>
         <p:spPr>
           <a:xfrm>
-            <a:off x="777240" y="2615184"/>
-            <a:ext cx="10774375" cy="822959"/>
+            <a:off x="594360" y="3575304"/>
+            <a:ext cx="438912" cy="438912"/>
           </a:xfrm>
           <a:prstGeom prst="rect">
             <a:avLst/>
@@ -6260,49 +6541,64 @@
           <a:noFill/>
         </p:spPr>
         <p:txBody>
-          <a:bodyPr wrap="square">
-            <a:spAutoFit/>
-          </a:bodyPr>
-          <a:lstStyle/>
-          <a:p>
-            <a:r>
-              <a:rPr sz="1200" b="1" i="0">
-                <a:solidFill>
-                  <a:srgbClr val="FFD000"/>
-                </a:solidFill>
-                <a:latin typeface="Calibri"/>
-              </a:rPr>
-              <a:t>Aclaración</a:t>
-            </a:r>
-          </a:p>
-          <a:p>
-            <a:pPr>
-              <a:spcBef>
-                <a:spcPts val="400"/>
-              </a:spcBef>
-            </a:pPr>
-            <a:r>
-              <a:rPr sz="1400" b="0" i="0">
-                <a:solidFill>
-                  <a:srgbClr val="333333"/>
-                </a:solidFill>
-                <a:latin typeface="Calibri"/>
-              </a:rPr>
-              <a:t>Enunciado completo: Clases/Proyecto Integrador/ (VetCare DB).</a:t>
-            </a:r>
-          </a:p>
-        </p:txBody>
-      </p:sp>
-      <p:sp>
-        <p:nvSpPr>
-          <p:cNvPr id="11" name="Rounded Rectangle 10"/>
+          <a:bodyPr wrap="square" anchor="ctr"/>
+          <a:lstStyle/>
+          <a:p>
+            <a:pPr algn="ctr"/>
+            <a:r>
+              <a:rPr sz="1600" b="1" i="0">
+                <a:solidFill>
+                  <a:srgbClr val="FFFFFF"/>
+                </a:solidFill>
+                <a:latin typeface="Calibri"/>
+              </a:rPr>
+              <a:t>3</a:t>
+            </a:r>
+          </a:p>
+        </p:txBody>
+      </p:sp>
+      <p:sp>
+        <p:nvSpPr>
+          <p:cNvPr id="16" name="TextBox 15"/>
+          <p:cNvSpPr txBox="1"/>
+          <p:nvPr/>
+        </p:nvSpPr>
+        <p:spPr>
+          <a:xfrm>
+            <a:off x="1188720" y="3410712"/>
+            <a:ext cx="10271455" cy="786384"/>
+          </a:xfrm>
+          <a:prstGeom prst="rect">
+            <a:avLst/>
+          </a:prstGeom>
+          <a:noFill/>
+        </p:spPr>
+        <p:txBody>
+          <a:bodyPr wrap="square" anchor="ctr"/>
+          <a:lstStyle/>
+          <a:p>
+            <a:r>
+              <a:rPr sz="1500" b="1" i="0">
+                <a:solidFill>
+                  <a:srgbClr val="095292"/>
+                </a:solidFill>
+                <a:latin typeface="Calibri"/>
+              </a:rPr>
+              <a:t>Correr la bateria de pruebas con bloques DO: 1 caso OK + 3 casos error, escritos en resultado_prueba, mas el COUNT(*) de cita antes y despues.</a:t>
+            </a:r>
+          </a:p>
+        </p:txBody>
+      </p:sp>
+      <p:sp>
+        <p:nvSpPr>
+          <p:cNvPr id="17" name="Rounded Rectangle 16"/>
           <p:cNvSpPr/>
           <p:nvPr/>
         </p:nvSpPr>
         <p:spPr>
           <a:xfrm>
-            <a:off x="457200" y="3694176"/>
-            <a:ext cx="11277295" cy="1051560"/>
+            <a:off x="457200" y="4361688"/>
+            <a:ext cx="11277295" cy="950976"/>
           </a:xfrm>
           <a:prstGeom prst="roundRect">
             <a:avLst>
@@ -6310,7 +6606,7 @@
             </a:avLst>
           </a:prstGeom>
           <a:solidFill>
-            <a:srgbClr val="FBE4E4"/>
+            <a:srgbClr val="E8F4FA"/>
           </a:solidFill>
           <a:ln>
             <a:noFill/>
@@ -6340,20 +6636,22 @@
       </p:sp>
       <p:sp>
         <p:nvSpPr>
-          <p:cNvPr id="12" name="Rectangle 11"/>
+          <p:cNvPr id="18" name="Rounded Rectangle 17"/>
           <p:cNvSpPr/>
           <p:nvPr/>
         </p:nvSpPr>
         <p:spPr>
           <a:xfrm>
-            <a:off x="457200" y="3694176"/>
-            <a:ext cx="128016" cy="1051560"/>
-          </a:xfrm>
-          <a:prstGeom prst="rect">
-            <a:avLst/>
+            <a:off x="594360" y="4617720"/>
+            <a:ext cx="438912" cy="438912"/>
+          </a:xfrm>
+          <a:prstGeom prst="roundRect">
+            <a:avLst>
+              <a:gd name="adj" fmla="val 12000"/>
+            </a:avLst>
           </a:prstGeom>
           <a:solidFill>
-            <a:srgbClr val="A02030"/>
+            <a:srgbClr val="095292"/>
           </a:solidFill>
           <a:ln>
             <a:noFill/>
@@ -6383,14 +6681,14 @@
       </p:sp>
       <p:sp>
         <p:nvSpPr>
-          <p:cNvPr id="13" name="TextBox 12"/>
+          <p:cNvPr id="19" name="TextBox 18"/>
           <p:cNvSpPr txBox="1"/>
           <p:nvPr/>
         </p:nvSpPr>
         <p:spPr>
           <a:xfrm>
-            <a:off x="777240" y="3831336"/>
-            <a:ext cx="10774375" cy="822959"/>
+            <a:off x="594360" y="4617720"/>
+            <a:ext cx="438912" cy="438912"/>
           </a:xfrm>
           <a:prstGeom prst="rect">
             <a:avLst/>
@@ -6398,42 +6696,212 @@
           <a:noFill/>
         </p:spPr>
         <p:txBody>
-          <a:bodyPr wrap="square">
-            <a:spAutoFit/>
-          </a:bodyPr>
-          <a:lstStyle/>
-          <a:p>
-            <a:r>
-              <a:rPr sz="1200" b="1" i="0">
-                <a:solidFill>
-                  <a:srgbClr val="A02030"/>
-                </a:solidFill>
-                <a:latin typeface="Calibri"/>
-              </a:rPr>
-              <a:t>Atención</a:t>
-            </a:r>
-          </a:p>
-          <a:p>
-            <a:pPr>
-              <a:spcBef>
-                <a:spcPts val="400"/>
-              </a:spcBef>
-            </a:pPr>
-            <a:r>
-              <a:rPr sz="1400" b="0" i="0">
-                <a:solidFill>
-                  <a:srgbClr val="333333"/>
-                </a:solidFill>
-                <a:latin typeface="Calibri"/>
-              </a:rPr>
-              <a:t>Taller de la semana en ExamLab (https://uniaj.examlab.workers.dev/): domingo 23:59 (regla del Acuerdo) cuando aplique.</a:t>
-            </a:r>
-          </a:p>
-        </p:txBody>
-      </p:sp>
-      <p:sp>
-        <p:nvSpPr>
-          <p:cNvPr id="14" name="TextBox 13"/>
+          <a:bodyPr wrap="square" anchor="ctr"/>
+          <a:lstStyle/>
+          <a:p>
+            <a:pPr algn="ctr"/>
+            <a:r>
+              <a:rPr sz="1600" b="1" i="0">
+                <a:solidFill>
+                  <a:srgbClr val="FFFFFF"/>
+                </a:solidFill>
+                <a:latin typeface="Calibri"/>
+              </a:rPr>
+              <a:t>4</a:t>
+            </a:r>
+          </a:p>
+        </p:txBody>
+      </p:sp>
+      <p:sp>
+        <p:nvSpPr>
+          <p:cNvPr id="20" name="TextBox 19"/>
+          <p:cNvSpPr txBox="1"/>
+          <p:nvPr/>
+        </p:nvSpPr>
+        <p:spPr>
+          <a:xfrm>
+            <a:off x="1188720" y="4453128"/>
+            <a:ext cx="10271455" cy="786384"/>
+          </a:xfrm>
+          <a:prstGeom prst="rect">
+            <a:avLst/>
+          </a:prstGeom>
+          <a:noFill/>
+        </p:spPr>
+        <p:txBody>
+          <a:bodyPr wrap="square" anchor="ctr"/>
+          <a:lstStyle/>
+          <a:p>
+            <a:r>
+              <a:rPr sz="1500" b="1" i="0">
+                <a:solidFill>
+                  <a:srgbClr val="095292"/>
+                </a:solidFill>
+                <a:latin typeface="Calibri"/>
+              </a:rPr>
+              <a:t>Escribir sp_registrar_consulta, comprobando con EXISTS antes de chocar contra la restriccion UNIQUE.</a:t>
+            </a:r>
+          </a:p>
+        </p:txBody>
+      </p:sp>
+      <p:sp>
+        <p:nvSpPr>
+          <p:cNvPr id="21" name="Rounded Rectangle 20"/>
+          <p:cNvSpPr/>
+          <p:nvPr/>
+        </p:nvSpPr>
+        <p:spPr>
+          <a:xfrm>
+            <a:off x="457200" y="5404104"/>
+            <a:ext cx="11277295" cy="950976"/>
+          </a:xfrm>
+          <a:prstGeom prst="roundRect">
+            <a:avLst>
+              <a:gd name="adj" fmla="val 12000"/>
+            </a:avLst>
+          </a:prstGeom>
+          <a:solidFill>
+            <a:srgbClr val="F2F2F2"/>
+          </a:solidFill>
+          <a:ln>
+            <a:noFill/>
+          </a:ln>
+        </p:spPr>
+        <p:style>
+          <a:lnRef idx="1">
+            <a:schemeClr val="accent1"/>
+          </a:lnRef>
+          <a:fillRef idx="3">
+            <a:schemeClr val="accent1"/>
+          </a:fillRef>
+          <a:effectRef idx="2">
+            <a:schemeClr val="accent1"/>
+          </a:effectRef>
+          <a:fontRef idx="minor">
+            <a:schemeClr val="lt1"/>
+          </a:fontRef>
+        </p:style>
+        <p:txBody>
+          <a:bodyPr rtlCol="0" anchor="ctr"/>
+          <a:lstStyle/>
+          <a:p>
+            <a:pPr algn="ctr"/>
+          </a:p>
+        </p:txBody>
+      </p:sp>
+      <p:sp>
+        <p:nvSpPr>
+          <p:cNvPr id="22" name="Rounded Rectangle 21"/>
+          <p:cNvSpPr/>
+          <p:nvPr/>
+        </p:nvSpPr>
+        <p:spPr>
+          <a:xfrm>
+            <a:off x="594360" y="5660136"/>
+            <a:ext cx="438912" cy="438912"/>
+          </a:xfrm>
+          <a:prstGeom prst="roundRect">
+            <a:avLst>
+              <a:gd name="adj" fmla="val 12000"/>
+            </a:avLst>
+          </a:prstGeom>
+          <a:solidFill>
+            <a:srgbClr val="095292"/>
+          </a:solidFill>
+          <a:ln>
+            <a:noFill/>
+          </a:ln>
+        </p:spPr>
+        <p:style>
+          <a:lnRef idx="1">
+            <a:schemeClr val="accent1"/>
+          </a:lnRef>
+          <a:fillRef idx="3">
+            <a:schemeClr val="accent1"/>
+          </a:fillRef>
+          <a:effectRef idx="2">
+            <a:schemeClr val="accent1"/>
+          </a:effectRef>
+          <a:fontRef idx="minor">
+            <a:schemeClr val="lt1"/>
+          </a:fontRef>
+        </p:style>
+        <p:txBody>
+          <a:bodyPr rtlCol="0" anchor="ctr"/>
+          <a:lstStyle/>
+          <a:p>
+            <a:pPr algn="ctr"/>
+          </a:p>
+        </p:txBody>
+      </p:sp>
+      <p:sp>
+        <p:nvSpPr>
+          <p:cNvPr id="23" name="TextBox 22"/>
+          <p:cNvSpPr txBox="1"/>
+          <p:nvPr/>
+        </p:nvSpPr>
+        <p:spPr>
+          <a:xfrm>
+            <a:off x="594360" y="5660136"/>
+            <a:ext cx="438912" cy="438912"/>
+          </a:xfrm>
+          <a:prstGeom prst="rect">
+            <a:avLst/>
+          </a:prstGeom>
+          <a:noFill/>
+        </p:spPr>
+        <p:txBody>
+          <a:bodyPr wrap="square" anchor="ctr"/>
+          <a:lstStyle/>
+          <a:p>
+            <a:pPr algn="ctr"/>
+            <a:r>
+              <a:rPr sz="1600" b="1" i="0">
+                <a:solidFill>
+                  <a:srgbClr val="FFFFFF"/>
+                </a:solidFill>
+                <a:latin typeface="Calibri"/>
+              </a:rPr>
+              <a:t>5</a:t>
+            </a:r>
+          </a:p>
+        </p:txBody>
+      </p:sp>
+      <p:sp>
+        <p:nvSpPr>
+          <p:cNvPr id="24" name="TextBox 23"/>
+          <p:cNvSpPr txBox="1"/>
+          <p:nvPr/>
+        </p:nvSpPr>
+        <p:spPr>
+          <a:xfrm>
+            <a:off x="1188720" y="5495544"/>
+            <a:ext cx="10271455" cy="786384"/>
+          </a:xfrm>
+          <a:prstGeom prst="rect">
+            <a:avLst/>
+          </a:prstGeom>
+          <a:noFill/>
+        </p:spPr>
+        <p:txBody>
+          <a:bodyPr wrap="square" anchor="ctr"/>
+          <a:lstStyle/>
+          <a:p>
+            <a:r>
+              <a:rPr sz="1500" b="1" i="0">
+                <a:solidFill>
+                  <a:srgbClr val="095292"/>
+                </a:solidFill>
+                <a:latin typeface="Calibri"/>
+              </a:rPr>
+              <a:t>Redactar el contrato del proc en sus 6 bloques (plantilla en este documento) y pegarlo en la pregunta 5.</a:t>
+            </a:r>
+          </a:p>
+        </p:txBody>
+      </p:sp>
+      <p:sp>
+        <p:nvSpPr>
+          <p:cNvPr id="25" name="TextBox 24"/>
           <p:cNvSpPr txBox="1"/>
           <p:nvPr/>
         </p:nvSpPr>
@@ -6501,6 +6969,2347 @@
         <p:spPr>
           <a:xfrm>
             <a:off x="0" y="0"/>
+            <a:ext cx="12191695" cy="960120"/>
+          </a:xfrm>
+          <a:prstGeom prst="rect">
+            <a:avLst/>
+          </a:prstGeom>
+          <a:solidFill>
+            <a:srgbClr val="095292"/>
+          </a:solidFill>
+          <a:ln>
+            <a:noFill/>
+          </a:ln>
+        </p:spPr>
+        <p:style>
+          <a:lnRef idx="1">
+            <a:schemeClr val="accent1"/>
+          </a:lnRef>
+          <a:fillRef idx="3">
+            <a:schemeClr val="accent1"/>
+          </a:fillRef>
+          <a:effectRef idx="2">
+            <a:schemeClr val="accent1"/>
+          </a:effectRef>
+          <a:fontRef idx="minor">
+            <a:schemeClr val="lt1"/>
+          </a:fontRef>
+        </p:style>
+        <p:txBody>
+          <a:bodyPr rtlCol="0" anchor="ctr"/>
+          <a:lstStyle/>
+          <a:p>
+            <a:pPr algn="ctr"/>
+          </a:p>
+        </p:txBody>
+      </p:sp>
+      <p:sp>
+        <p:nvSpPr>
+          <p:cNvPr id="3" name="Rectangle 2"/>
+          <p:cNvSpPr/>
+          <p:nvPr/>
+        </p:nvSpPr>
+        <p:spPr>
+          <a:xfrm>
+            <a:off x="0" y="960120"/>
+            <a:ext cx="12191695" cy="41148"/>
+          </a:xfrm>
+          <a:prstGeom prst="rect">
+            <a:avLst/>
+          </a:prstGeom>
+          <a:solidFill>
+            <a:srgbClr val="FFD000"/>
+          </a:solidFill>
+          <a:ln>
+            <a:noFill/>
+          </a:ln>
+        </p:spPr>
+        <p:style>
+          <a:lnRef idx="1">
+            <a:schemeClr val="accent1"/>
+          </a:lnRef>
+          <a:fillRef idx="3">
+            <a:schemeClr val="accent1"/>
+          </a:fillRef>
+          <a:effectRef idx="2">
+            <a:schemeClr val="accent1"/>
+          </a:effectRef>
+          <a:fontRef idx="minor">
+            <a:schemeClr val="lt1"/>
+          </a:fontRef>
+        </p:style>
+        <p:txBody>
+          <a:bodyPr rtlCol="0" anchor="ctr"/>
+          <a:lstStyle/>
+          <a:p>
+            <a:pPr algn="ctr"/>
+          </a:p>
+        </p:txBody>
+      </p:sp>
+      <p:sp>
+        <p:nvSpPr>
+          <p:cNvPr id="4" name="TextBox 3"/>
+          <p:cNvSpPr txBox="1"/>
+          <p:nvPr/>
+        </p:nvSpPr>
+        <p:spPr>
+          <a:xfrm>
+            <a:off x="457200" y="164592"/>
+            <a:ext cx="11277295" cy="502920"/>
+          </a:xfrm>
+          <a:prstGeom prst="rect">
+            <a:avLst/>
+          </a:prstGeom>
+          <a:noFill/>
+        </p:spPr>
+        <p:txBody>
+          <a:bodyPr wrap="square">
+            <a:spAutoFit/>
+          </a:bodyPr>
+          <a:lstStyle/>
+          <a:p>
+            <a:r>
+              <a:rPr sz="2600" b="1" i="0">
+                <a:solidFill>
+                  <a:srgbClr val="FFFFFF"/>
+                </a:solidFill>
+                <a:latin typeface="Calibri"/>
+              </a:rPr>
+              <a:t>Taller PI VetCare — pistas (checklist vacio)</a:t>
+            </a:r>
+          </a:p>
+        </p:txBody>
+      </p:sp>
+      <p:sp>
+        <p:nvSpPr>
+          <p:cNvPr id="5" name="Rounded Rectangle 4"/>
+          <p:cNvSpPr/>
+          <p:nvPr/>
+        </p:nvSpPr>
+        <p:spPr>
+          <a:xfrm>
+            <a:off x="457200" y="1261872"/>
+            <a:ext cx="11277295" cy="566928"/>
+          </a:xfrm>
+          <a:prstGeom prst="roundRect">
+            <a:avLst>
+              <a:gd name="adj" fmla="val 12000"/>
+            </a:avLst>
+          </a:prstGeom>
+          <a:solidFill>
+            <a:srgbClr val="F2F2F2"/>
+          </a:solidFill>
+          <a:ln>
+            <a:noFill/>
+          </a:ln>
+        </p:spPr>
+        <p:style>
+          <a:lnRef idx="1">
+            <a:schemeClr val="accent1"/>
+          </a:lnRef>
+          <a:fillRef idx="3">
+            <a:schemeClr val="accent1"/>
+          </a:fillRef>
+          <a:effectRef idx="2">
+            <a:schemeClr val="accent1"/>
+          </a:effectRef>
+          <a:fontRef idx="minor">
+            <a:schemeClr val="lt1"/>
+          </a:fontRef>
+        </p:style>
+        <p:txBody>
+          <a:bodyPr rtlCol="0" anchor="ctr"/>
+          <a:lstStyle/>
+          <a:p>
+            <a:pPr algn="ctr"/>
+          </a:p>
+        </p:txBody>
+      </p:sp>
+      <p:sp>
+        <p:nvSpPr>
+          <p:cNvPr id="6" name="Rectangle 5"/>
+          <p:cNvSpPr/>
+          <p:nvPr/>
+        </p:nvSpPr>
+        <p:spPr>
+          <a:xfrm>
+            <a:off x="640080" y="1408175"/>
+            <a:ext cx="274320" cy="274320"/>
+          </a:xfrm>
+          <a:prstGeom prst="rect">
+            <a:avLst/>
+          </a:prstGeom>
+          <a:solidFill>
+            <a:srgbClr val="FFFFFF"/>
+          </a:solidFill>
+          <a:ln>
+            <a:solidFill>
+              <a:srgbClr val="333333"/>
+            </a:solidFill>
+          </a:ln>
+        </p:spPr>
+        <p:style>
+          <a:lnRef idx="1">
+            <a:schemeClr val="accent1"/>
+          </a:lnRef>
+          <a:fillRef idx="3">
+            <a:schemeClr val="accent1"/>
+          </a:fillRef>
+          <a:effectRef idx="2">
+            <a:schemeClr val="accent1"/>
+          </a:effectRef>
+          <a:fontRef idx="minor">
+            <a:schemeClr val="lt1"/>
+          </a:fontRef>
+        </p:style>
+        <p:txBody>
+          <a:bodyPr rtlCol="0" anchor="ctr"/>
+          <a:lstStyle/>
+          <a:p>
+            <a:pPr algn="ctr"/>
+          </a:p>
+        </p:txBody>
+      </p:sp>
+      <p:sp>
+        <p:nvSpPr>
+          <p:cNvPr id="7" name="Rectangle 6"/>
+          <p:cNvSpPr/>
+          <p:nvPr/>
+        </p:nvSpPr>
+        <p:spPr>
+          <a:xfrm>
+            <a:off x="640080" y="1408175"/>
+            <a:ext cx="73152" cy="274320"/>
+          </a:xfrm>
+          <a:prstGeom prst="rect">
+            <a:avLst/>
+          </a:prstGeom>
+          <a:solidFill>
+            <a:srgbClr val="269CCB"/>
+          </a:solidFill>
+          <a:ln>
+            <a:noFill/>
+          </a:ln>
+        </p:spPr>
+        <p:style>
+          <a:lnRef idx="1">
+            <a:schemeClr val="accent1"/>
+          </a:lnRef>
+          <a:fillRef idx="3">
+            <a:schemeClr val="accent1"/>
+          </a:fillRef>
+          <a:effectRef idx="2">
+            <a:schemeClr val="accent1"/>
+          </a:effectRef>
+          <a:fontRef idx="minor">
+            <a:schemeClr val="lt1"/>
+          </a:fontRef>
+        </p:style>
+        <p:txBody>
+          <a:bodyPr rtlCol="0" anchor="ctr"/>
+          <a:lstStyle/>
+          <a:p>
+            <a:pPr algn="ctr"/>
+          </a:p>
+        </p:txBody>
+      </p:sp>
+      <p:sp>
+        <p:nvSpPr>
+          <p:cNvPr id="8" name="TextBox 7"/>
+          <p:cNvSpPr txBox="1"/>
+          <p:nvPr/>
+        </p:nvSpPr>
+        <p:spPr>
+          <a:xfrm>
+            <a:off x="1097280" y="1353312"/>
+            <a:ext cx="10362895" cy="402336"/>
+          </a:xfrm>
+          <a:prstGeom prst="rect">
+            <a:avLst/>
+          </a:prstGeom>
+          <a:noFill/>
+        </p:spPr>
+        <p:txBody>
+          <a:bodyPr wrap="square" anchor="ctr"/>
+          <a:lstStyle/>
+          <a:p>
+            <a:r>
+              <a:rPr sz="1500" b="0" i="0">
+                <a:solidFill>
+                  <a:srgbClr val="333333"/>
+                </a:solidFill>
+                <a:latin typeface="Calibri"/>
+              </a:rPr>
+              <a:t>□ ¿El procedimiento se creó </a:t>
+            </a:r>
+            <a:r>
+              <a:rPr sz="1500" b="1" i="0">
+                <a:solidFill>
+                  <a:srgbClr val="333333"/>
+                </a:solidFill>
+                <a:latin typeface="Calibri"/>
+              </a:rPr>
+              <a:t>y</a:t>
+            </a:r>
+            <a:r>
+              <a:rPr sz="1500" b="0" i="0">
+                <a:solidFill>
+                  <a:srgbClr val="333333"/>
+                </a:solidFill>
+                <a:latin typeface="Calibri"/>
+              </a:rPr>
+              <a:t> el «CALL» corrió? Crear no es evidencia.</a:t>
+            </a:r>
+          </a:p>
+        </p:txBody>
+      </p:sp>
+      <p:sp>
+        <p:nvSpPr>
+          <p:cNvPr id="9" name="Rounded Rectangle 8"/>
+          <p:cNvSpPr/>
+          <p:nvPr/>
+        </p:nvSpPr>
+        <p:spPr>
+          <a:xfrm>
+            <a:off x="457200" y="1938528"/>
+            <a:ext cx="11277295" cy="566928"/>
+          </a:xfrm>
+          <a:prstGeom prst="roundRect">
+            <a:avLst>
+              <a:gd name="adj" fmla="val 12000"/>
+            </a:avLst>
+          </a:prstGeom>
+          <a:solidFill>
+            <a:srgbClr val="F2F2F2"/>
+          </a:solidFill>
+          <a:ln>
+            <a:noFill/>
+          </a:ln>
+        </p:spPr>
+        <p:style>
+          <a:lnRef idx="1">
+            <a:schemeClr val="accent1"/>
+          </a:lnRef>
+          <a:fillRef idx="3">
+            <a:schemeClr val="accent1"/>
+          </a:fillRef>
+          <a:effectRef idx="2">
+            <a:schemeClr val="accent1"/>
+          </a:effectRef>
+          <a:fontRef idx="minor">
+            <a:schemeClr val="lt1"/>
+          </a:fontRef>
+        </p:style>
+        <p:txBody>
+          <a:bodyPr rtlCol="0" anchor="ctr"/>
+          <a:lstStyle/>
+          <a:p>
+            <a:pPr algn="ctr"/>
+          </a:p>
+        </p:txBody>
+      </p:sp>
+      <p:sp>
+        <p:nvSpPr>
+          <p:cNvPr id="10" name="Rectangle 9"/>
+          <p:cNvSpPr/>
+          <p:nvPr/>
+        </p:nvSpPr>
+        <p:spPr>
+          <a:xfrm>
+            <a:off x="640080" y="2084832"/>
+            <a:ext cx="274320" cy="274320"/>
+          </a:xfrm>
+          <a:prstGeom prst="rect">
+            <a:avLst/>
+          </a:prstGeom>
+          <a:solidFill>
+            <a:srgbClr val="FFFFFF"/>
+          </a:solidFill>
+          <a:ln>
+            <a:solidFill>
+              <a:srgbClr val="333333"/>
+            </a:solidFill>
+          </a:ln>
+        </p:spPr>
+        <p:style>
+          <a:lnRef idx="1">
+            <a:schemeClr val="accent1"/>
+          </a:lnRef>
+          <a:fillRef idx="3">
+            <a:schemeClr val="accent1"/>
+          </a:fillRef>
+          <a:effectRef idx="2">
+            <a:schemeClr val="accent1"/>
+          </a:effectRef>
+          <a:fontRef idx="minor">
+            <a:schemeClr val="lt1"/>
+          </a:fontRef>
+        </p:style>
+        <p:txBody>
+          <a:bodyPr rtlCol="0" anchor="ctr"/>
+          <a:lstStyle/>
+          <a:p>
+            <a:pPr algn="ctr"/>
+          </a:p>
+        </p:txBody>
+      </p:sp>
+      <p:sp>
+        <p:nvSpPr>
+          <p:cNvPr id="11" name="Rectangle 10"/>
+          <p:cNvSpPr/>
+          <p:nvPr/>
+        </p:nvSpPr>
+        <p:spPr>
+          <a:xfrm>
+            <a:off x="640080" y="2084832"/>
+            <a:ext cx="73152" cy="274320"/>
+          </a:xfrm>
+          <a:prstGeom prst="rect">
+            <a:avLst/>
+          </a:prstGeom>
+          <a:solidFill>
+            <a:srgbClr val="269CCB"/>
+          </a:solidFill>
+          <a:ln>
+            <a:noFill/>
+          </a:ln>
+        </p:spPr>
+        <p:style>
+          <a:lnRef idx="1">
+            <a:schemeClr val="accent1"/>
+          </a:lnRef>
+          <a:fillRef idx="3">
+            <a:schemeClr val="accent1"/>
+          </a:fillRef>
+          <a:effectRef idx="2">
+            <a:schemeClr val="accent1"/>
+          </a:effectRef>
+          <a:fontRef idx="minor">
+            <a:schemeClr val="lt1"/>
+          </a:fontRef>
+        </p:style>
+        <p:txBody>
+          <a:bodyPr rtlCol="0" anchor="ctr"/>
+          <a:lstStyle/>
+          <a:p>
+            <a:pPr algn="ctr"/>
+          </a:p>
+        </p:txBody>
+      </p:sp>
+      <p:sp>
+        <p:nvSpPr>
+          <p:cNvPr id="12" name="TextBox 11"/>
+          <p:cNvSpPr txBox="1"/>
+          <p:nvPr/>
+        </p:nvSpPr>
+        <p:spPr>
+          <a:xfrm>
+            <a:off x="1097280" y="2029968"/>
+            <a:ext cx="10362895" cy="402336"/>
+          </a:xfrm>
+          <a:prstGeom prst="rect">
+            <a:avLst/>
+          </a:prstGeom>
+          <a:noFill/>
+        </p:spPr>
+        <p:txBody>
+          <a:bodyPr wrap="square" anchor="ctr"/>
+          <a:lstStyle/>
+          <a:p>
+            <a:r>
+              <a:rPr sz="1500" b="0" i="0">
+                <a:solidFill>
+                  <a:srgbClr val="333333"/>
+                </a:solidFill>
+                <a:latin typeface="Calibri"/>
+              </a:rPr>
+              <a:t>□ ¿La validación de «no existe» usa «IF NOT FOUND» tras el «SELECT ... INTO»?</a:t>
+            </a:r>
+          </a:p>
+        </p:txBody>
+      </p:sp>
+      <p:sp>
+        <p:nvSpPr>
+          <p:cNvPr id="13" name="Rounded Rectangle 12"/>
+          <p:cNvSpPr/>
+          <p:nvPr/>
+        </p:nvSpPr>
+        <p:spPr>
+          <a:xfrm>
+            <a:off x="457200" y="2615184"/>
+            <a:ext cx="11277295" cy="566928"/>
+          </a:xfrm>
+          <a:prstGeom prst="roundRect">
+            <a:avLst>
+              <a:gd name="adj" fmla="val 12000"/>
+            </a:avLst>
+          </a:prstGeom>
+          <a:solidFill>
+            <a:srgbClr val="F2F2F2"/>
+          </a:solidFill>
+          <a:ln>
+            <a:noFill/>
+          </a:ln>
+        </p:spPr>
+        <p:style>
+          <a:lnRef idx="1">
+            <a:schemeClr val="accent1"/>
+          </a:lnRef>
+          <a:fillRef idx="3">
+            <a:schemeClr val="accent1"/>
+          </a:fillRef>
+          <a:effectRef idx="2">
+            <a:schemeClr val="accent1"/>
+          </a:effectRef>
+          <a:fontRef idx="minor">
+            <a:schemeClr val="lt1"/>
+          </a:fontRef>
+        </p:style>
+        <p:txBody>
+          <a:bodyPr rtlCol="0" anchor="ctr"/>
+          <a:lstStyle/>
+          <a:p>
+            <a:pPr algn="ctr"/>
+          </a:p>
+        </p:txBody>
+      </p:sp>
+      <p:sp>
+        <p:nvSpPr>
+          <p:cNvPr id="14" name="Rectangle 13"/>
+          <p:cNvSpPr/>
+          <p:nvPr/>
+        </p:nvSpPr>
+        <p:spPr>
+          <a:xfrm>
+            <a:off x="640080" y="2761488"/>
+            <a:ext cx="274320" cy="274320"/>
+          </a:xfrm>
+          <a:prstGeom prst="rect">
+            <a:avLst/>
+          </a:prstGeom>
+          <a:solidFill>
+            <a:srgbClr val="FFFFFF"/>
+          </a:solidFill>
+          <a:ln>
+            <a:solidFill>
+              <a:srgbClr val="333333"/>
+            </a:solidFill>
+          </a:ln>
+        </p:spPr>
+        <p:style>
+          <a:lnRef idx="1">
+            <a:schemeClr val="accent1"/>
+          </a:lnRef>
+          <a:fillRef idx="3">
+            <a:schemeClr val="accent1"/>
+          </a:fillRef>
+          <a:effectRef idx="2">
+            <a:schemeClr val="accent1"/>
+          </a:effectRef>
+          <a:fontRef idx="minor">
+            <a:schemeClr val="lt1"/>
+          </a:fontRef>
+        </p:style>
+        <p:txBody>
+          <a:bodyPr rtlCol="0" anchor="ctr"/>
+          <a:lstStyle/>
+          <a:p>
+            <a:pPr algn="ctr"/>
+          </a:p>
+        </p:txBody>
+      </p:sp>
+      <p:sp>
+        <p:nvSpPr>
+          <p:cNvPr id="15" name="Rectangle 14"/>
+          <p:cNvSpPr/>
+          <p:nvPr/>
+        </p:nvSpPr>
+        <p:spPr>
+          <a:xfrm>
+            <a:off x="640080" y="2761488"/>
+            <a:ext cx="73152" cy="274320"/>
+          </a:xfrm>
+          <a:prstGeom prst="rect">
+            <a:avLst/>
+          </a:prstGeom>
+          <a:solidFill>
+            <a:srgbClr val="269CCB"/>
+          </a:solidFill>
+          <a:ln>
+            <a:noFill/>
+          </a:ln>
+        </p:spPr>
+        <p:style>
+          <a:lnRef idx="1">
+            <a:schemeClr val="accent1"/>
+          </a:lnRef>
+          <a:fillRef idx="3">
+            <a:schemeClr val="accent1"/>
+          </a:fillRef>
+          <a:effectRef idx="2">
+            <a:schemeClr val="accent1"/>
+          </a:effectRef>
+          <a:fontRef idx="minor">
+            <a:schemeClr val="lt1"/>
+          </a:fontRef>
+        </p:style>
+        <p:txBody>
+          <a:bodyPr rtlCol="0" anchor="ctr"/>
+          <a:lstStyle/>
+          <a:p>
+            <a:pPr algn="ctr"/>
+          </a:p>
+        </p:txBody>
+      </p:sp>
+      <p:sp>
+        <p:nvSpPr>
+          <p:cNvPr id="16" name="TextBox 15"/>
+          <p:cNvSpPr txBox="1"/>
+          <p:nvPr/>
+        </p:nvSpPr>
+        <p:spPr>
+          <a:xfrm>
+            <a:off x="1097280" y="2706624"/>
+            <a:ext cx="10362895" cy="402336"/>
+          </a:xfrm>
+          <a:prstGeom prst="rect">
+            <a:avLst/>
+          </a:prstGeom>
+          <a:noFill/>
+        </p:spPr>
+        <p:txBody>
+          <a:bodyPr wrap="square" anchor="ctr"/>
+          <a:lstStyle/>
+          <a:p>
+            <a:r>
+              <a:rPr sz="1500" b="0" i="0">
+                <a:solidFill>
+                  <a:srgbClr val="333333"/>
+                </a:solidFill>
+                <a:latin typeface="Calibri"/>
+              </a:rPr>
+              <a:t>□ ¿Los 4 bloques «DO» capturan la excepción y el script llega hasta el final?</a:t>
+            </a:r>
+          </a:p>
+        </p:txBody>
+      </p:sp>
+      <p:sp>
+        <p:nvSpPr>
+          <p:cNvPr id="17" name="Rounded Rectangle 16"/>
+          <p:cNvSpPr/>
+          <p:nvPr/>
+        </p:nvSpPr>
+        <p:spPr>
+          <a:xfrm>
+            <a:off x="457200" y="3291840"/>
+            <a:ext cx="11277295" cy="566928"/>
+          </a:xfrm>
+          <a:prstGeom prst="roundRect">
+            <a:avLst>
+              <a:gd name="adj" fmla="val 12000"/>
+            </a:avLst>
+          </a:prstGeom>
+          <a:solidFill>
+            <a:srgbClr val="F2F2F2"/>
+          </a:solidFill>
+          <a:ln>
+            <a:noFill/>
+          </a:ln>
+        </p:spPr>
+        <p:style>
+          <a:lnRef idx="1">
+            <a:schemeClr val="accent1"/>
+          </a:lnRef>
+          <a:fillRef idx="3">
+            <a:schemeClr val="accent1"/>
+          </a:fillRef>
+          <a:effectRef idx="2">
+            <a:schemeClr val="accent1"/>
+          </a:effectRef>
+          <a:fontRef idx="minor">
+            <a:schemeClr val="lt1"/>
+          </a:fontRef>
+        </p:style>
+        <p:txBody>
+          <a:bodyPr rtlCol="0" anchor="ctr"/>
+          <a:lstStyle/>
+          <a:p>
+            <a:pPr algn="ctr"/>
+          </a:p>
+        </p:txBody>
+      </p:sp>
+      <p:sp>
+        <p:nvSpPr>
+          <p:cNvPr id="18" name="Rectangle 17"/>
+          <p:cNvSpPr/>
+          <p:nvPr/>
+        </p:nvSpPr>
+        <p:spPr>
+          <a:xfrm>
+            <a:off x="640080" y="3438144"/>
+            <a:ext cx="274320" cy="274320"/>
+          </a:xfrm>
+          <a:prstGeom prst="rect">
+            <a:avLst/>
+          </a:prstGeom>
+          <a:solidFill>
+            <a:srgbClr val="FFFFFF"/>
+          </a:solidFill>
+          <a:ln>
+            <a:solidFill>
+              <a:srgbClr val="333333"/>
+            </a:solidFill>
+          </a:ln>
+        </p:spPr>
+        <p:style>
+          <a:lnRef idx="1">
+            <a:schemeClr val="accent1"/>
+          </a:lnRef>
+          <a:fillRef idx="3">
+            <a:schemeClr val="accent1"/>
+          </a:fillRef>
+          <a:effectRef idx="2">
+            <a:schemeClr val="accent1"/>
+          </a:effectRef>
+          <a:fontRef idx="minor">
+            <a:schemeClr val="lt1"/>
+          </a:fontRef>
+        </p:style>
+        <p:txBody>
+          <a:bodyPr rtlCol="0" anchor="ctr"/>
+          <a:lstStyle/>
+          <a:p>
+            <a:pPr algn="ctr"/>
+          </a:p>
+        </p:txBody>
+      </p:sp>
+      <p:sp>
+        <p:nvSpPr>
+          <p:cNvPr id="19" name="Rectangle 18"/>
+          <p:cNvSpPr/>
+          <p:nvPr/>
+        </p:nvSpPr>
+        <p:spPr>
+          <a:xfrm>
+            <a:off x="640080" y="3438144"/>
+            <a:ext cx="73152" cy="274320"/>
+          </a:xfrm>
+          <a:prstGeom prst="rect">
+            <a:avLst/>
+          </a:prstGeom>
+          <a:solidFill>
+            <a:srgbClr val="269CCB"/>
+          </a:solidFill>
+          <a:ln>
+            <a:noFill/>
+          </a:ln>
+        </p:spPr>
+        <p:style>
+          <a:lnRef idx="1">
+            <a:schemeClr val="accent1"/>
+          </a:lnRef>
+          <a:fillRef idx="3">
+            <a:schemeClr val="accent1"/>
+          </a:fillRef>
+          <a:effectRef idx="2">
+            <a:schemeClr val="accent1"/>
+          </a:effectRef>
+          <a:fontRef idx="minor">
+            <a:schemeClr val="lt1"/>
+          </a:fontRef>
+        </p:style>
+        <p:txBody>
+          <a:bodyPr rtlCol="0" anchor="ctr"/>
+          <a:lstStyle/>
+          <a:p>
+            <a:pPr algn="ctr"/>
+          </a:p>
+        </p:txBody>
+      </p:sp>
+      <p:sp>
+        <p:nvSpPr>
+          <p:cNvPr id="20" name="TextBox 19"/>
+          <p:cNvSpPr txBox="1"/>
+          <p:nvPr/>
+        </p:nvSpPr>
+        <p:spPr>
+          <a:xfrm>
+            <a:off x="1097280" y="3383280"/>
+            <a:ext cx="10362895" cy="402336"/>
+          </a:xfrm>
+          <a:prstGeom prst="rect">
+            <a:avLst/>
+          </a:prstGeom>
+          <a:noFill/>
+        </p:spPr>
+        <p:txBody>
+          <a:bodyPr wrap="square" anchor="ctr"/>
+          <a:lstStyle/>
+          <a:p>
+            <a:r>
+              <a:rPr sz="1500" b="0" i="0">
+                <a:solidFill>
+                  <a:srgbClr val="333333"/>
+                </a:solidFill>
+                <a:latin typeface="Calibri"/>
+              </a:rPr>
+              <a:t>□ ¿El conteo final de «cita» es </a:t>
+            </a:r>
+            <a:r>
+              <a:rPr sz="1500" b="1" i="0">
+                <a:solidFill>
+                  <a:srgbClr val="333333"/>
+                </a:solidFill>
+                <a:latin typeface="Calibri"/>
+              </a:rPr>
+              <a:t>11</a:t>
+            </a:r>
+            <a:r>
+              <a:rPr sz="1500" b="0" i="0">
+                <a:solidFill>
+                  <a:srgbClr val="333333"/>
+                </a:solidFill>
+                <a:latin typeface="Calibri"/>
+              </a:rPr>
+              <a:t>, y está en la evidencia?</a:t>
+            </a:r>
+          </a:p>
+        </p:txBody>
+      </p:sp>
+      <p:sp>
+        <p:nvSpPr>
+          <p:cNvPr id="21" name="Rounded Rectangle 20"/>
+          <p:cNvSpPr/>
+          <p:nvPr/>
+        </p:nvSpPr>
+        <p:spPr>
+          <a:xfrm>
+            <a:off x="457200" y="3968496"/>
+            <a:ext cx="11277295" cy="566928"/>
+          </a:xfrm>
+          <a:prstGeom prst="roundRect">
+            <a:avLst>
+              <a:gd name="adj" fmla="val 12000"/>
+            </a:avLst>
+          </a:prstGeom>
+          <a:solidFill>
+            <a:srgbClr val="F2F2F2"/>
+          </a:solidFill>
+          <a:ln>
+            <a:noFill/>
+          </a:ln>
+        </p:spPr>
+        <p:style>
+          <a:lnRef idx="1">
+            <a:schemeClr val="accent1"/>
+          </a:lnRef>
+          <a:fillRef idx="3">
+            <a:schemeClr val="accent1"/>
+          </a:fillRef>
+          <a:effectRef idx="2">
+            <a:schemeClr val="accent1"/>
+          </a:effectRef>
+          <a:fontRef idx="minor">
+            <a:schemeClr val="lt1"/>
+          </a:fontRef>
+        </p:style>
+        <p:txBody>
+          <a:bodyPr rtlCol="0" anchor="ctr"/>
+          <a:lstStyle/>
+          <a:p>
+            <a:pPr algn="ctr"/>
+          </a:p>
+        </p:txBody>
+      </p:sp>
+      <p:sp>
+        <p:nvSpPr>
+          <p:cNvPr id="22" name="Rectangle 21"/>
+          <p:cNvSpPr/>
+          <p:nvPr/>
+        </p:nvSpPr>
+        <p:spPr>
+          <a:xfrm>
+            <a:off x="640080" y="4114800"/>
+            <a:ext cx="274320" cy="274320"/>
+          </a:xfrm>
+          <a:prstGeom prst="rect">
+            <a:avLst/>
+          </a:prstGeom>
+          <a:solidFill>
+            <a:srgbClr val="FFFFFF"/>
+          </a:solidFill>
+          <a:ln>
+            <a:solidFill>
+              <a:srgbClr val="333333"/>
+            </a:solidFill>
+          </a:ln>
+        </p:spPr>
+        <p:style>
+          <a:lnRef idx="1">
+            <a:schemeClr val="accent1"/>
+          </a:lnRef>
+          <a:fillRef idx="3">
+            <a:schemeClr val="accent1"/>
+          </a:fillRef>
+          <a:effectRef idx="2">
+            <a:schemeClr val="accent1"/>
+          </a:effectRef>
+          <a:fontRef idx="minor">
+            <a:schemeClr val="lt1"/>
+          </a:fontRef>
+        </p:style>
+        <p:txBody>
+          <a:bodyPr rtlCol="0" anchor="ctr"/>
+          <a:lstStyle/>
+          <a:p>
+            <a:pPr algn="ctr"/>
+          </a:p>
+        </p:txBody>
+      </p:sp>
+      <p:sp>
+        <p:nvSpPr>
+          <p:cNvPr id="23" name="Rectangle 22"/>
+          <p:cNvSpPr/>
+          <p:nvPr/>
+        </p:nvSpPr>
+        <p:spPr>
+          <a:xfrm>
+            <a:off x="640080" y="4114800"/>
+            <a:ext cx="73152" cy="274320"/>
+          </a:xfrm>
+          <a:prstGeom prst="rect">
+            <a:avLst/>
+          </a:prstGeom>
+          <a:solidFill>
+            <a:srgbClr val="269CCB"/>
+          </a:solidFill>
+          <a:ln>
+            <a:noFill/>
+          </a:ln>
+        </p:spPr>
+        <p:style>
+          <a:lnRef idx="1">
+            <a:schemeClr val="accent1"/>
+          </a:lnRef>
+          <a:fillRef idx="3">
+            <a:schemeClr val="accent1"/>
+          </a:fillRef>
+          <a:effectRef idx="2">
+            <a:schemeClr val="accent1"/>
+          </a:effectRef>
+          <a:fontRef idx="minor">
+            <a:schemeClr val="lt1"/>
+          </a:fontRef>
+        </p:style>
+        <p:txBody>
+          <a:bodyPr rtlCol="0" anchor="ctr"/>
+          <a:lstStyle/>
+          <a:p>
+            <a:pPr algn="ctr"/>
+          </a:p>
+        </p:txBody>
+      </p:sp>
+      <p:sp>
+        <p:nvSpPr>
+          <p:cNvPr id="24" name="TextBox 23"/>
+          <p:cNvSpPr txBox="1"/>
+          <p:nvPr/>
+        </p:nvSpPr>
+        <p:spPr>
+          <a:xfrm>
+            <a:off x="1097280" y="4059936"/>
+            <a:ext cx="10362895" cy="402336"/>
+          </a:xfrm>
+          <a:prstGeom prst="rect">
+            <a:avLst/>
+          </a:prstGeom>
+          <a:noFill/>
+        </p:spPr>
+        <p:txBody>
+          <a:bodyPr wrap="square" anchor="ctr"/>
+          <a:lstStyle/>
+          <a:p>
+            <a:r>
+              <a:rPr sz="1500" b="0" i="0">
+                <a:solidFill>
+                  <a:srgbClr val="333333"/>
+                </a:solidFill>
+                <a:latin typeface="Calibri"/>
+              </a:rPr>
+              <a:t>□ ¿«sp_registrar_consulta» inserta la consulta </a:t>
+            </a:r>
+            <a:r>
+              <a:rPr sz="1500" b="1" i="0">
+                <a:solidFill>
+                  <a:srgbClr val="333333"/>
+                </a:solidFill>
+                <a:latin typeface="Calibri"/>
+              </a:rPr>
+              <a:t>y</a:t>
+            </a:r>
+            <a:r>
+              <a:rPr sz="1500" b="0" i="0">
+                <a:solidFill>
+                  <a:srgbClr val="333333"/>
+                </a:solidFill>
+                <a:latin typeface="Calibri"/>
+              </a:rPr>
+              <a:t> deja la cita en «ATENDIDA»?</a:t>
+            </a:r>
+          </a:p>
+        </p:txBody>
+      </p:sp>
+      <p:sp>
+        <p:nvSpPr>
+          <p:cNvPr id="25" name="Rounded Rectangle 24"/>
+          <p:cNvSpPr/>
+          <p:nvPr/>
+        </p:nvSpPr>
+        <p:spPr>
+          <a:xfrm>
+            <a:off x="457200" y="4645152"/>
+            <a:ext cx="11277295" cy="566928"/>
+          </a:xfrm>
+          <a:prstGeom prst="roundRect">
+            <a:avLst>
+              <a:gd name="adj" fmla="val 12000"/>
+            </a:avLst>
+          </a:prstGeom>
+          <a:solidFill>
+            <a:srgbClr val="F2F2F2"/>
+          </a:solidFill>
+          <a:ln>
+            <a:noFill/>
+          </a:ln>
+        </p:spPr>
+        <p:style>
+          <a:lnRef idx="1">
+            <a:schemeClr val="accent1"/>
+          </a:lnRef>
+          <a:fillRef idx="3">
+            <a:schemeClr val="accent1"/>
+          </a:fillRef>
+          <a:effectRef idx="2">
+            <a:schemeClr val="accent1"/>
+          </a:effectRef>
+          <a:fontRef idx="minor">
+            <a:schemeClr val="lt1"/>
+          </a:fontRef>
+        </p:style>
+        <p:txBody>
+          <a:bodyPr rtlCol="0" anchor="ctr"/>
+          <a:lstStyle/>
+          <a:p>
+            <a:pPr algn="ctr"/>
+          </a:p>
+        </p:txBody>
+      </p:sp>
+      <p:sp>
+        <p:nvSpPr>
+          <p:cNvPr id="26" name="Rectangle 25"/>
+          <p:cNvSpPr/>
+          <p:nvPr/>
+        </p:nvSpPr>
+        <p:spPr>
+          <a:xfrm>
+            <a:off x="640080" y="4791456"/>
+            <a:ext cx="274320" cy="274320"/>
+          </a:xfrm>
+          <a:prstGeom prst="rect">
+            <a:avLst/>
+          </a:prstGeom>
+          <a:solidFill>
+            <a:srgbClr val="FFFFFF"/>
+          </a:solidFill>
+          <a:ln>
+            <a:solidFill>
+              <a:srgbClr val="333333"/>
+            </a:solidFill>
+          </a:ln>
+        </p:spPr>
+        <p:style>
+          <a:lnRef idx="1">
+            <a:schemeClr val="accent1"/>
+          </a:lnRef>
+          <a:fillRef idx="3">
+            <a:schemeClr val="accent1"/>
+          </a:fillRef>
+          <a:effectRef idx="2">
+            <a:schemeClr val="accent1"/>
+          </a:effectRef>
+          <a:fontRef idx="minor">
+            <a:schemeClr val="lt1"/>
+          </a:fontRef>
+        </p:style>
+        <p:txBody>
+          <a:bodyPr rtlCol="0" anchor="ctr"/>
+          <a:lstStyle/>
+          <a:p>
+            <a:pPr algn="ctr"/>
+          </a:p>
+        </p:txBody>
+      </p:sp>
+      <p:sp>
+        <p:nvSpPr>
+          <p:cNvPr id="27" name="Rectangle 26"/>
+          <p:cNvSpPr/>
+          <p:nvPr/>
+        </p:nvSpPr>
+        <p:spPr>
+          <a:xfrm>
+            <a:off x="640080" y="4791456"/>
+            <a:ext cx="73152" cy="274320"/>
+          </a:xfrm>
+          <a:prstGeom prst="rect">
+            <a:avLst/>
+          </a:prstGeom>
+          <a:solidFill>
+            <a:srgbClr val="269CCB"/>
+          </a:solidFill>
+          <a:ln>
+            <a:noFill/>
+          </a:ln>
+        </p:spPr>
+        <p:style>
+          <a:lnRef idx="1">
+            <a:schemeClr val="accent1"/>
+          </a:lnRef>
+          <a:fillRef idx="3">
+            <a:schemeClr val="accent1"/>
+          </a:fillRef>
+          <a:effectRef idx="2">
+            <a:schemeClr val="accent1"/>
+          </a:effectRef>
+          <a:fontRef idx="minor">
+            <a:schemeClr val="lt1"/>
+          </a:fontRef>
+        </p:style>
+        <p:txBody>
+          <a:bodyPr rtlCol="0" anchor="ctr"/>
+          <a:lstStyle/>
+          <a:p>
+            <a:pPr algn="ctr"/>
+          </a:p>
+        </p:txBody>
+      </p:sp>
+      <p:sp>
+        <p:nvSpPr>
+          <p:cNvPr id="28" name="TextBox 27"/>
+          <p:cNvSpPr txBox="1"/>
+          <p:nvPr/>
+        </p:nvSpPr>
+        <p:spPr>
+          <a:xfrm>
+            <a:off x="1097280" y="4736592"/>
+            <a:ext cx="10362895" cy="402336"/>
+          </a:xfrm>
+          <a:prstGeom prst="rect">
+            <a:avLst/>
+          </a:prstGeom>
+          <a:noFill/>
+        </p:spPr>
+        <p:txBody>
+          <a:bodyPr wrap="square" anchor="ctr"/>
+          <a:lstStyle/>
+          <a:p>
+            <a:r>
+              <a:rPr sz="1500" b="0" i="0">
+                <a:solidFill>
+                  <a:srgbClr val="333333"/>
+                </a:solidFill>
+                <a:latin typeface="Calibri"/>
+              </a:rPr>
+              <a:t>□ ¿La cerrada la decidiste por </a:t>
+            </a:r>
+            <a:r>
+              <a:rPr sz="1500" b="1" i="0">
+                <a:solidFill>
+                  <a:srgbClr val="333333"/>
+                </a:solidFill>
+                <a:latin typeface="Calibri"/>
+              </a:rPr>
+              <a:t>dónde se invoca</a:t>
+            </a:r>
+            <a:r>
+              <a:rPr sz="1500" b="0" i="0">
+                <a:solidFill>
+                  <a:srgbClr val="333333"/>
+                </a:solidFill>
+                <a:latin typeface="Calibri"/>
+              </a:rPr>
+              <a:t> cada rutina —dentro de un «SELECT» o como sentencia suelta— y no por el «LANGUAGE» que declara?</a:t>
+            </a:r>
+          </a:p>
+        </p:txBody>
+      </p:sp>
+      <p:sp>
+        <p:nvSpPr>
+          <p:cNvPr id="29" name="Rounded Rectangle 28"/>
+          <p:cNvSpPr/>
+          <p:nvPr/>
+        </p:nvSpPr>
+        <p:spPr>
+          <a:xfrm>
+            <a:off x="457200" y="5321808"/>
+            <a:ext cx="11277295" cy="566928"/>
+          </a:xfrm>
+          <a:prstGeom prst="roundRect">
+            <a:avLst>
+              <a:gd name="adj" fmla="val 12000"/>
+            </a:avLst>
+          </a:prstGeom>
+          <a:solidFill>
+            <a:srgbClr val="F2F2F2"/>
+          </a:solidFill>
+          <a:ln>
+            <a:noFill/>
+          </a:ln>
+        </p:spPr>
+        <p:style>
+          <a:lnRef idx="1">
+            <a:schemeClr val="accent1"/>
+          </a:lnRef>
+          <a:fillRef idx="3">
+            <a:schemeClr val="accent1"/>
+          </a:fillRef>
+          <a:effectRef idx="2">
+            <a:schemeClr val="accent1"/>
+          </a:effectRef>
+          <a:fontRef idx="minor">
+            <a:schemeClr val="lt1"/>
+          </a:fontRef>
+        </p:style>
+        <p:txBody>
+          <a:bodyPr rtlCol="0" anchor="ctr"/>
+          <a:lstStyle/>
+          <a:p>
+            <a:pPr algn="ctr"/>
+          </a:p>
+        </p:txBody>
+      </p:sp>
+      <p:sp>
+        <p:nvSpPr>
+          <p:cNvPr id="30" name="Rectangle 29"/>
+          <p:cNvSpPr/>
+          <p:nvPr/>
+        </p:nvSpPr>
+        <p:spPr>
+          <a:xfrm>
+            <a:off x="640080" y="5468112"/>
+            <a:ext cx="274320" cy="274320"/>
+          </a:xfrm>
+          <a:prstGeom prst="rect">
+            <a:avLst/>
+          </a:prstGeom>
+          <a:solidFill>
+            <a:srgbClr val="FFFFFF"/>
+          </a:solidFill>
+          <a:ln>
+            <a:solidFill>
+              <a:srgbClr val="333333"/>
+            </a:solidFill>
+          </a:ln>
+        </p:spPr>
+        <p:style>
+          <a:lnRef idx="1">
+            <a:schemeClr val="accent1"/>
+          </a:lnRef>
+          <a:fillRef idx="3">
+            <a:schemeClr val="accent1"/>
+          </a:fillRef>
+          <a:effectRef idx="2">
+            <a:schemeClr val="accent1"/>
+          </a:effectRef>
+          <a:fontRef idx="minor">
+            <a:schemeClr val="lt1"/>
+          </a:fontRef>
+        </p:style>
+        <p:txBody>
+          <a:bodyPr rtlCol="0" anchor="ctr"/>
+          <a:lstStyle/>
+          <a:p>
+            <a:pPr algn="ctr"/>
+          </a:p>
+        </p:txBody>
+      </p:sp>
+      <p:sp>
+        <p:nvSpPr>
+          <p:cNvPr id="31" name="Rectangle 30"/>
+          <p:cNvSpPr/>
+          <p:nvPr/>
+        </p:nvSpPr>
+        <p:spPr>
+          <a:xfrm>
+            <a:off x="640080" y="5468112"/>
+            <a:ext cx="73152" cy="274320"/>
+          </a:xfrm>
+          <a:prstGeom prst="rect">
+            <a:avLst/>
+          </a:prstGeom>
+          <a:solidFill>
+            <a:srgbClr val="269CCB"/>
+          </a:solidFill>
+          <a:ln>
+            <a:noFill/>
+          </a:ln>
+        </p:spPr>
+        <p:style>
+          <a:lnRef idx="1">
+            <a:schemeClr val="accent1"/>
+          </a:lnRef>
+          <a:fillRef idx="3">
+            <a:schemeClr val="accent1"/>
+          </a:fillRef>
+          <a:effectRef idx="2">
+            <a:schemeClr val="accent1"/>
+          </a:effectRef>
+          <a:fontRef idx="minor">
+            <a:schemeClr val="lt1"/>
+          </a:fontRef>
+        </p:style>
+        <p:txBody>
+          <a:bodyPr rtlCol="0" anchor="ctr"/>
+          <a:lstStyle/>
+          <a:p>
+            <a:pPr algn="ctr"/>
+          </a:p>
+        </p:txBody>
+      </p:sp>
+      <p:sp>
+        <p:nvSpPr>
+          <p:cNvPr id="32" name="TextBox 31"/>
+          <p:cNvSpPr txBox="1"/>
+          <p:nvPr/>
+        </p:nvSpPr>
+        <p:spPr>
+          <a:xfrm>
+            <a:off x="1097280" y="5413248"/>
+            <a:ext cx="10362895" cy="402336"/>
+          </a:xfrm>
+          <a:prstGeom prst="rect">
+            <a:avLst/>
+          </a:prstGeom>
+          <a:noFill/>
+        </p:spPr>
+        <p:txBody>
+          <a:bodyPr wrap="square" anchor="ctr"/>
+          <a:lstStyle/>
+          <a:p>
+            <a:r>
+              <a:rPr sz="1500" b="0" i="0">
+                <a:solidFill>
+                  <a:srgbClr val="333333"/>
+                </a:solidFill>
+                <a:latin typeface="Calibri"/>
+              </a:rPr>
+              <a:t>□ ¿El contrato trae los 6 bloques de </a:t>
+            </a:r>
+            <a:r>
+              <a:rPr sz="1500" b="1" i="0">
+                <a:solidFill>
+                  <a:srgbClr val="333333"/>
+                </a:solidFill>
+                <a:latin typeface="Calibri"/>
+              </a:rPr>
+              <a:t>cada</a:t>
+            </a:r>
+            <a:r>
+              <a:rPr sz="1500" b="0" i="0">
+                <a:solidFill>
+                  <a:srgbClr val="333333"/>
+                </a:solidFill>
+                <a:latin typeface="Calibri"/>
+              </a:rPr>
+              <a:t> procedimiento y las 7 filas de errores?</a:t>
+            </a:r>
+          </a:p>
+        </p:txBody>
+      </p:sp>
+      <p:sp>
+        <p:nvSpPr>
+          <p:cNvPr id="33" name="TextBox 32"/>
+          <p:cNvSpPr txBox="1"/>
+          <p:nvPr/>
+        </p:nvSpPr>
+        <p:spPr>
+          <a:xfrm>
+            <a:off x="11185855" y="6473952"/>
+            <a:ext cx="640080" cy="274320"/>
+          </a:xfrm>
+          <a:prstGeom prst="rect">
+            <a:avLst/>
+          </a:prstGeom>
+          <a:noFill/>
+        </p:spPr>
+        <p:txBody>
+          <a:bodyPr wrap="square">
+            <a:spAutoFit/>
+          </a:bodyPr>
+          <a:lstStyle/>
+          <a:p>
+            <a:pPr algn="r"/>
+            <a:r>
+              <a:rPr sz="1100" b="0" i="0">
+                <a:solidFill>
+                  <a:srgbClr val="666666"/>
+                </a:solidFill>
+                <a:latin typeface="Calibri"/>
+              </a:rPr>
+              <a:t>16</a:t>
+            </a:r>
+          </a:p>
+        </p:txBody>
+      </p:sp>
+    </p:spTree>
+  </p:cSld>
+  <p:clrMapOvr>
+    <a:masterClrMapping/>
+  </p:clrMapOvr>
+</p:sld>
+</file>
+
+<file path=ppt/slides/slide17.xml><?xml version="1.0" encoding="utf-8"?>
+<p:sld xmlns:a="http://schemas.openxmlformats.org/drawingml/2006/main" xmlns:p="http://schemas.openxmlformats.org/presentationml/2006/main" xmlns:r="http://schemas.openxmlformats.org/officeDocument/2006/relationships">
+  <p:cSld>
+    <p:bg>
+      <p:bgPr>
+        <a:solidFill>
+          <a:srgbClr val="FFFFFF"/>
+        </a:solidFill>
+        <a:effectLst/>
+      </p:bgPr>
+    </p:bg>
+    <p:spTree>
+      <p:nvGrpSpPr>
+        <p:cNvPr id="1" name=""/>
+        <p:cNvGrpSpPr/>
+        <p:nvPr/>
+      </p:nvGrpSpPr>
+      <p:grpSpPr/>
+      <p:sp>
+        <p:nvSpPr>
+          <p:cNvPr id="2" name="Rectangle 1"/>
+          <p:cNvSpPr/>
+          <p:nvPr/>
+        </p:nvSpPr>
+        <p:spPr>
+          <a:xfrm>
+            <a:off x="0" y="0"/>
+            <a:ext cx="12191695" cy="960120"/>
+          </a:xfrm>
+          <a:prstGeom prst="rect">
+            <a:avLst/>
+          </a:prstGeom>
+          <a:solidFill>
+            <a:srgbClr val="095292"/>
+          </a:solidFill>
+          <a:ln>
+            <a:noFill/>
+          </a:ln>
+        </p:spPr>
+        <p:style>
+          <a:lnRef idx="1">
+            <a:schemeClr val="accent1"/>
+          </a:lnRef>
+          <a:fillRef idx="3">
+            <a:schemeClr val="accent1"/>
+          </a:fillRef>
+          <a:effectRef idx="2">
+            <a:schemeClr val="accent1"/>
+          </a:effectRef>
+          <a:fontRef idx="minor">
+            <a:schemeClr val="lt1"/>
+          </a:fontRef>
+        </p:style>
+        <p:txBody>
+          <a:bodyPr rtlCol="0" anchor="ctr"/>
+          <a:lstStyle/>
+          <a:p>
+            <a:pPr algn="ctr"/>
+          </a:p>
+        </p:txBody>
+      </p:sp>
+      <p:sp>
+        <p:nvSpPr>
+          <p:cNvPr id="3" name="Rectangle 2"/>
+          <p:cNvSpPr/>
+          <p:nvPr/>
+        </p:nvSpPr>
+        <p:spPr>
+          <a:xfrm>
+            <a:off x="0" y="960120"/>
+            <a:ext cx="12191695" cy="41148"/>
+          </a:xfrm>
+          <a:prstGeom prst="rect">
+            <a:avLst/>
+          </a:prstGeom>
+          <a:solidFill>
+            <a:srgbClr val="FFD000"/>
+          </a:solidFill>
+          <a:ln>
+            <a:noFill/>
+          </a:ln>
+        </p:spPr>
+        <p:style>
+          <a:lnRef idx="1">
+            <a:schemeClr val="accent1"/>
+          </a:lnRef>
+          <a:fillRef idx="3">
+            <a:schemeClr val="accent1"/>
+          </a:fillRef>
+          <a:effectRef idx="2">
+            <a:schemeClr val="accent1"/>
+          </a:effectRef>
+          <a:fontRef idx="minor">
+            <a:schemeClr val="lt1"/>
+          </a:fontRef>
+        </p:style>
+        <p:txBody>
+          <a:bodyPr rtlCol="0" anchor="ctr"/>
+          <a:lstStyle/>
+          <a:p>
+            <a:pPr algn="ctr"/>
+          </a:p>
+        </p:txBody>
+      </p:sp>
+      <p:sp>
+        <p:nvSpPr>
+          <p:cNvPr id="4" name="TextBox 3"/>
+          <p:cNvSpPr txBox="1"/>
+          <p:nvPr/>
+        </p:nvSpPr>
+        <p:spPr>
+          <a:xfrm>
+            <a:off x="457200" y="164592"/>
+            <a:ext cx="11277295" cy="502920"/>
+          </a:xfrm>
+          <a:prstGeom prst="rect">
+            <a:avLst/>
+          </a:prstGeom>
+          <a:noFill/>
+        </p:spPr>
+        <p:txBody>
+          <a:bodyPr wrap="square">
+            <a:spAutoFit/>
+          </a:bodyPr>
+          <a:lstStyle/>
+          <a:p>
+            <a:r>
+              <a:rPr sz="2600" b="1" i="0">
+                <a:solidFill>
+                  <a:srgbClr val="FFFFFF"/>
+                </a:solidFill>
+                <a:latin typeface="Calibri"/>
+              </a:rPr>
+              <a:t>Criterios de exito / entregable</a:t>
+            </a:r>
+          </a:p>
+        </p:txBody>
+      </p:sp>
+      <p:sp>
+        <p:nvSpPr>
+          <p:cNvPr id="5" name="TextBox 4"/>
+          <p:cNvSpPr txBox="1"/>
+          <p:nvPr/>
+        </p:nvSpPr>
+        <p:spPr>
+          <a:xfrm>
+            <a:off x="457200" y="1170432"/>
+            <a:ext cx="11277295" cy="5230368"/>
+          </a:xfrm>
+          <a:prstGeom prst="rect">
+            <a:avLst/>
+          </a:prstGeom>
+          <a:noFill/>
+        </p:spPr>
+        <p:txBody>
+          <a:bodyPr wrap="square">
+            <a:spAutoFit/>
+          </a:bodyPr>
+          <a:lstStyle/>
+          <a:p>
+            <a:pPr>
+              <a:spcAft>
+                <a:spcPts val="800"/>
+              </a:spcAft>
+            </a:pPr>
+            <a:r>
+              <a:rPr sz="1600" b="0" i="0">
+                <a:solidFill>
+                  <a:srgbClr val="333333"/>
+                </a:solidFill>
+                <a:latin typeface="Calibri"/>
+              </a:rPr>
+              <a:t>–   </a:t>
+            </a:r>
+            <a:r>
+              <a:rPr sz="1600" b="1" i="0">
+                <a:solidFill>
+                  <a:srgbClr val="333333"/>
+                </a:solidFill>
+                <a:latin typeface="Calibri"/>
+              </a:rPr>
+              <a:t>Entregable:</a:t>
+            </a:r>
+            <a:r>
+              <a:rPr sz="1600" b="0" i="0">
+                <a:solidFill>
+                  <a:srgbClr val="333333"/>
+                </a:solidFill>
+                <a:latin typeface="Calibri"/>
+              </a:rPr>
+              <a:t> 2 procedimientos en PL/pgSQL corriendo en ExamLab + bateria de pruebas con su tabla resultado_prueba + contrato del proc (6 bloques)</a:t>
+            </a:r>
+          </a:p>
+          <a:p>
+            <a:pPr>
+              <a:spcAft>
+                <a:spcPts val="800"/>
+              </a:spcAft>
+            </a:pPr>
+            <a:r>
+              <a:rPr sz="1600" b="0" i="0">
+                <a:solidFill>
+                  <a:srgbClr val="333333"/>
+                </a:solidFill>
+                <a:latin typeface="Calibri"/>
+              </a:rPr>
+              <a:t>–   Evidencia: el SQL y su salida quedan guardados en cada pregunta de ExamLab.</a:t>
+            </a:r>
+          </a:p>
+          <a:p>
+            <a:pPr>
+              <a:spcAft>
+                <a:spcPts val="800"/>
+              </a:spcAft>
+            </a:pPr>
+            <a:r>
+              <a:rPr sz="1600" b="0" i="0">
+                <a:solidFill>
+                  <a:srgbClr val="333333"/>
+                </a:solidFill>
+                <a:latin typeface="Calibri"/>
+              </a:rPr>
+              <a:t>–   Conserva copia en tu carpeta del PI (los .sql que pide el entregable).</a:t>
+            </a:r>
+          </a:p>
+          <a:p>
+            <a:pPr>
+              <a:spcAft>
+                <a:spcPts val="800"/>
+              </a:spcAft>
+            </a:pPr>
+            <a:r>
+              <a:rPr sz="1600" b="0" i="0">
+                <a:solidFill>
+                  <a:srgbClr val="333333"/>
+                </a:solidFill>
+                <a:latin typeface="Calibri"/>
+              </a:rPr>
+              <a:t>–   Actualizar checklist PI (que criterio de rubrica avanzo).</a:t>
+            </a:r>
+          </a:p>
+          <a:p>
+            <a:pPr>
+              <a:spcAft>
+                <a:spcPts val="800"/>
+              </a:spcAft>
+            </a:pPr>
+            <a:r>
+              <a:rPr sz="1600" b="0" i="0">
+                <a:solidFill>
+                  <a:srgbClr val="333333"/>
+                </a:solidFill>
+                <a:latin typeface="Calibri"/>
+              </a:rPr>
+              <a:t>–   </a:t>
+            </a:r>
+            <a:r>
+              <a:rPr sz="1600" b="1" i="0">
+                <a:solidFill>
+                  <a:srgbClr val="333333"/>
+                </a:solidFill>
+                <a:latin typeface="Calibri"/>
+              </a:rPr>
+              <a:t>Entrega en ExamLab</a:t>
+            </a:r>
+            <a:r>
+              <a:rPr sz="1600" b="0" i="0">
+                <a:solidFill>
+                  <a:srgbClr val="333333"/>
+                </a:solidFill>
+                <a:latin typeface="Calibri"/>
+              </a:rPr>
+              <a:t> (https://uniaj.examlab.workers.dev/) — domingo 23:59 cuando aplique taller.</a:t>
+            </a:r>
+          </a:p>
+        </p:txBody>
+      </p:sp>
+      <p:sp>
+        <p:nvSpPr>
+          <p:cNvPr id="6" name="TextBox 5"/>
+          <p:cNvSpPr txBox="1"/>
+          <p:nvPr/>
+        </p:nvSpPr>
+        <p:spPr>
+          <a:xfrm>
+            <a:off x="11185855" y="6473952"/>
+            <a:ext cx="640080" cy="274320"/>
+          </a:xfrm>
+          <a:prstGeom prst="rect">
+            <a:avLst/>
+          </a:prstGeom>
+          <a:noFill/>
+        </p:spPr>
+        <p:txBody>
+          <a:bodyPr wrap="square">
+            <a:spAutoFit/>
+          </a:bodyPr>
+          <a:lstStyle/>
+          <a:p>
+            <a:pPr algn="r"/>
+            <a:r>
+              <a:rPr sz="1100" b="0" i="0">
+                <a:solidFill>
+                  <a:srgbClr val="666666"/>
+                </a:solidFill>
+                <a:latin typeface="Calibri"/>
+              </a:rPr>
+              <a:t>17</a:t>
+            </a:r>
+          </a:p>
+        </p:txBody>
+      </p:sp>
+    </p:spTree>
+  </p:cSld>
+  <p:clrMapOvr>
+    <a:masterClrMapping/>
+  </p:clrMapOvr>
+</p:sld>
+</file>
+
+<file path=ppt/slides/slide18.xml><?xml version="1.0" encoding="utf-8"?>
+<p:sld xmlns:a="http://schemas.openxmlformats.org/drawingml/2006/main" xmlns:p="http://schemas.openxmlformats.org/presentationml/2006/main" xmlns:r="http://schemas.openxmlformats.org/officeDocument/2006/relationships">
+  <p:cSld>
+    <p:bg>
+      <p:bgPr>
+        <a:solidFill>
+          <a:srgbClr val="FFFFFF"/>
+        </a:solidFill>
+        <a:effectLst/>
+      </p:bgPr>
+    </p:bg>
+    <p:spTree>
+      <p:nvGrpSpPr>
+        <p:cNvPr id="1" name=""/>
+        <p:cNvGrpSpPr/>
+        <p:nvPr/>
+      </p:nvGrpSpPr>
+      <p:grpSpPr/>
+      <p:sp>
+        <p:nvSpPr>
+          <p:cNvPr id="2" name="Rectangle 1"/>
+          <p:cNvSpPr/>
+          <p:nvPr/>
+        </p:nvSpPr>
+        <p:spPr>
+          <a:xfrm>
+            <a:off x="0" y="0"/>
+            <a:ext cx="12191695" cy="960120"/>
+          </a:xfrm>
+          <a:prstGeom prst="rect">
+            <a:avLst/>
+          </a:prstGeom>
+          <a:solidFill>
+            <a:srgbClr val="095292"/>
+          </a:solidFill>
+          <a:ln>
+            <a:noFill/>
+          </a:ln>
+        </p:spPr>
+        <p:style>
+          <a:lnRef idx="1">
+            <a:schemeClr val="accent1"/>
+          </a:lnRef>
+          <a:fillRef idx="3">
+            <a:schemeClr val="accent1"/>
+          </a:fillRef>
+          <a:effectRef idx="2">
+            <a:schemeClr val="accent1"/>
+          </a:effectRef>
+          <a:fontRef idx="minor">
+            <a:schemeClr val="lt1"/>
+          </a:fontRef>
+        </p:style>
+        <p:txBody>
+          <a:bodyPr rtlCol="0" anchor="ctr"/>
+          <a:lstStyle/>
+          <a:p>
+            <a:pPr algn="ctr"/>
+          </a:p>
+        </p:txBody>
+      </p:sp>
+      <p:sp>
+        <p:nvSpPr>
+          <p:cNvPr id="3" name="Rectangle 2"/>
+          <p:cNvSpPr/>
+          <p:nvPr/>
+        </p:nvSpPr>
+        <p:spPr>
+          <a:xfrm>
+            <a:off x="0" y="960120"/>
+            <a:ext cx="12191695" cy="41148"/>
+          </a:xfrm>
+          <a:prstGeom prst="rect">
+            <a:avLst/>
+          </a:prstGeom>
+          <a:solidFill>
+            <a:srgbClr val="FFD000"/>
+          </a:solidFill>
+          <a:ln>
+            <a:noFill/>
+          </a:ln>
+        </p:spPr>
+        <p:style>
+          <a:lnRef idx="1">
+            <a:schemeClr val="accent1"/>
+          </a:lnRef>
+          <a:fillRef idx="3">
+            <a:schemeClr val="accent1"/>
+          </a:fillRef>
+          <a:effectRef idx="2">
+            <a:schemeClr val="accent1"/>
+          </a:effectRef>
+          <a:fontRef idx="minor">
+            <a:schemeClr val="lt1"/>
+          </a:fontRef>
+        </p:style>
+        <p:txBody>
+          <a:bodyPr rtlCol="0" anchor="ctr"/>
+          <a:lstStyle/>
+          <a:p>
+            <a:pPr algn="ctr"/>
+          </a:p>
+        </p:txBody>
+      </p:sp>
+      <p:sp>
+        <p:nvSpPr>
+          <p:cNvPr id="4" name="TextBox 3"/>
+          <p:cNvSpPr txBox="1"/>
+          <p:nvPr/>
+        </p:nvSpPr>
+        <p:spPr>
+          <a:xfrm>
+            <a:off x="457200" y="164592"/>
+            <a:ext cx="11277295" cy="502920"/>
+          </a:xfrm>
+          <a:prstGeom prst="rect">
+            <a:avLst/>
+          </a:prstGeom>
+          <a:noFill/>
+        </p:spPr>
+        <p:txBody>
+          <a:bodyPr wrap="square">
+            <a:spAutoFit/>
+          </a:bodyPr>
+          <a:lstStyle/>
+          <a:p>
+            <a:r>
+              <a:rPr sz="2600" b="1" i="0">
+                <a:solidFill>
+                  <a:srgbClr val="FFFFFF"/>
+                </a:solidFill>
+                <a:latin typeface="Calibri"/>
+              </a:rPr>
+              <a:t>Para el PI esta semana</a:t>
+            </a:r>
+          </a:p>
+        </p:txBody>
+      </p:sp>
+      <p:sp>
+        <p:nvSpPr>
+          <p:cNvPr id="5" name="Rounded Rectangle 4"/>
+          <p:cNvSpPr/>
+          <p:nvPr/>
+        </p:nvSpPr>
+        <p:spPr>
+          <a:xfrm>
+            <a:off x="457200" y="1261872"/>
+            <a:ext cx="11277295" cy="1051560"/>
+          </a:xfrm>
+          <a:prstGeom prst="roundRect">
+            <a:avLst>
+              <a:gd name="adj" fmla="val 12000"/>
+            </a:avLst>
+          </a:prstGeom>
+          <a:solidFill>
+            <a:srgbClr val="E8F4FA"/>
+          </a:solidFill>
+          <a:ln>
+            <a:noFill/>
+          </a:ln>
+        </p:spPr>
+        <p:style>
+          <a:lnRef idx="1">
+            <a:schemeClr val="accent1"/>
+          </a:lnRef>
+          <a:fillRef idx="3">
+            <a:schemeClr val="accent1"/>
+          </a:fillRef>
+          <a:effectRef idx="2">
+            <a:schemeClr val="accent1"/>
+          </a:effectRef>
+          <a:fontRef idx="minor">
+            <a:schemeClr val="lt1"/>
+          </a:fontRef>
+        </p:style>
+        <p:txBody>
+          <a:bodyPr rtlCol="0" anchor="ctr"/>
+          <a:lstStyle/>
+          <a:p>
+            <a:pPr algn="ctr"/>
+          </a:p>
+        </p:txBody>
+      </p:sp>
+      <p:sp>
+        <p:nvSpPr>
+          <p:cNvPr id="6" name="Rectangle 5"/>
+          <p:cNvSpPr/>
+          <p:nvPr/>
+        </p:nvSpPr>
+        <p:spPr>
+          <a:xfrm>
+            <a:off x="457200" y="1261872"/>
+            <a:ext cx="128016" cy="1051560"/>
+          </a:xfrm>
+          <a:prstGeom prst="rect">
+            <a:avLst/>
+          </a:prstGeom>
+          <a:solidFill>
+            <a:srgbClr val="269CCB"/>
+          </a:solidFill>
+          <a:ln>
+            <a:noFill/>
+          </a:ln>
+        </p:spPr>
+        <p:style>
+          <a:lnRef idx="1">
+            <a:schemeClr val="accent1"/>
+          </a:lnRef>
+          <a:fillRef idx="3">
+            <a:schemeClr val="accent1"/>
+          </a:fillRef>
+          <a:effectRef idx="2">
+            <a:schemeClr val="accent1"/>
+          </a:effectRef>
+          <a:fontRef idx="minor">
+            <a:schemeClr val="lt1"/>
+          </a:fontRef>
+        </p:style>
+        <p:txBody>
+          <a:bodyPr rtlCol="0" anchor="ctr"/>
+          <a:lstStyle/>
+          <a:p>
+            <a:pPr algn="ctr"/>
+          </a:p>
+        </p:txBody>
+      </p:sp>
+      <p:sp>
+        <p:nvSpPr>
+          <p:cNvPr id="7" name="TextBox 6"/>
+          <p:cNvSpPr txBox="1"/>
+          <p:nvPr/>
+        </p:nvSpPr>
+        <p:spPr>
+          <a:xfrm>
+            <a:off x="777240" y="1399031"/>
+            <a:ext cx="10774375" cy="822959"/>
+          </a:xfrm>
+          <a:prstGeom prst="rect">
+            <a:avLst/>
+          </a:prstGeom>
+          <a:noFill/>
+        </p:spPr>
+        <p:txBody>
+          <a:bodyPr wrap="square">
+            <a:spAutoFit/>
+          </a:bodyPr>
+          <a:lstStyle/>
+          <a:p>
+            <a:r>
+              <a:rPr sz="1200" b="1" i="0">
+                <a:solidFill>
+                  <a:srgbClr val="269CCB"/>
+                </a:solidFill>
+                <a:latin typeface="Calibri"/>
+              </a:rPr>
+              <a:t>Info</a:t>
+            </a:r>
+          </a:p>
+          <a:p>
+            <a:pPr>
+              <a:spcBef>
+                <a:spcPts val="400"/>
+              </a:spcBef>
+            </a:pPr>
+            <a:r>
+              <a:rPr sz="1400" b="0" i="0">
+                <a:solidFill>
+                  <a:srgbClr val="333333"/>
+                </a:solidFill>
+                <a:latin typeface="Calibri"/>
+              </a:rPr>
+              <a:t>Hito: &gt;=1 procedimiento de negocio (agendar cita / registrar consulta)</a:t>
+            </a:r>
+          </a:p>
+        </p:txBody>
+      </p:sp>
+      <p:sp>
+        <p:nvSpPr>
+          <p:cNvPr id="8" name="Rounded Rectangle 7"/>
+          <p:cNvSpPr/>
+          <p:nvPr/>
+        </p:nvSpPr>
+        <p:spPr>
+          <a:xfrm>
+            <a:off x="457200" y="2478024"/>
+            <a:ext cx="11277295" cy="1051560"/>
+          </a:xfrm>
+          <a:prstGeom prst="roundRect">
+            <a:avLst>
+              <a:gd name="adj" fmla="val 12000"/>
+            </a:avLst>
+          </a:prstGeom>
+          <a:solidFill>
+            <a:srgbClr val="FFF8E1"/>
+          </a:solidFill>
+          <a:ln>
+            <a:noFill/>
+          </a:ln>
+        </p:spPr>
+        <p:style>
+          <a:lnRef idx="1">
+            <a:schemeClr val="accent1"/>
+          </a:lnRef>
+          <a:fillRef idx="3">
+            <a:schemeClr val="accent1"/>
+          </a:fillRef>
+          <a:effectRef idx="2">
+            <a:schemeClr val="accent1"/>
+          </a:effectRef>
+          <a:fontRef idx="minor">
+            <a:schemeClr val="lt1"/>
+          </a:fontRef>
+        </p:style>
+        <p:txBody>
+          <a:bodyPr rtlCol="0" anchor="ctr"/>
+          <a:lstStyle/>
+          <a:p>
+            <a:pPr algn="ctr"/>
+          </a:p>
+        </p:txBody>
+      </p:sp>
+      <p:sp>
+        <p:nvSpPr>
+          <p:cNvPr id="9" name="Rectangle 8"/>
+          <p:cNvSpPr/>
+          <p:nvPr/>
+        </p:nvSpPr>
+        <p:spPr>
+          <a:xfrm>
+            <a:off x="457200" y="2478024"/>
+            <a:ext cx="128016" cy="1051560"/>
+          </a:xfrm>
+          <a:prstGeom prst="rect">
+            <a:avLst/>
+          </a:prstGeom>
+          <a:solidFill>
+            <a:srgbClr val="FFD000"/>
+          </a:solidFill>
+          <a:ln>
+            <a:noFill/>
+          </a:ln>
+        </p:spPr>
+        <p:style>
+          <a:lnRef idx="1">
+            <a:schemeClr val="accent1"/>
+          </a:lnRef>
+          <a:fillRef idx="3">
+            <a:schemeClr val="accent1"/>
+          </a:fillRef>
+          <a:effectRef idx="2">
+            <a:schemeClr val="accent1"/>
+          </a:effectRef>
+          <a:fontRef idx="minor">
+            <a:schemeClr val="lt1"/>
+          </a:fontRef>
+        </p:style>
+        <p:txBody>
+          <a:bodyPr rtlCol="0" anchor="ctr"/>
+          <a:lstStyle/>
+          <a:p>
+            <a:pPr algn="ctr"/>
+          </a:p>
+        </p:txBody>
+      </p:sp>
+      <p:sp>
+        <p:nvSpPr>
+          <p:cNvPr id="10" name="TextBox 9"/>
+          <p:cNvSpPr txBox="1"/>
+          <p:nvPr/>
+        </p:nvSpPr>
+        <p:spPr>
+          <a:xfrm>
+            <a:off x="777240" y="2615184"/>
+            <a:ext cx="10774375" cy="822959"/>
+          </a:xfrm>
+          <a:prstGeom prst="rect">
+            <a:avLst/>
+          </a:prstGeom>
+          <a:noFill/>
+        </p:spPr>
+        <p:txBody>
+          <a:bodyPr wrap="square">
+            <a:spAutoFit/>
+          </a:bodyPr>
+          <a:lstStyle/>
+          <a:p>
+            <a:r>
+              <a:rPr sz="1200" b="1" i="0">
+                <a:solidFill>
+                  <a:srgbClr val="FFD000"/>
+                </a:solidFill>
+                <a:latin typeface="Calibri"/>
+              </a:rPr>
+              <a:t>Aclaración</a:t>
+            </a:r>
+          </a:p>
+          <a:p>
+            <a:pPr>
+              <a:spcBef>
+                <a:spcPts val="400"/>
+              </a:spcBef>
+            </a:pPr>
+            <a:r>
+              <a:rPr sz="1400" b="0" i="0">
+                <a:solidFill>
+                  <a:srgbClr val="333333"/>
+                </a:solidFill>
+                <a:latin typeface="Calibri"/>
+              </a:rPr>
+              <a:t>Enunciado completo: Clases/Proyecto Integrador/ (VetCare DB).</a:t>
+            </a:r>
+          </a:p>
+        </p:txBody>
+      </p:sp>
+      <p:sp>
+        <p:nvSpPr>
+          <p:cNvPr id="11" name="Rounded Rectangle 10"/>
+          <p:cNvSpPr/>
+          <p:nvPr/>
+        </p:nvSpPr>
+        <p:spPr>
+          <a:xfrm>
+            <a:off x="457200" y="3694176"/>
+            <a:ext cx="11277295" cy="1051560"/>
+          </a:xfrm>
+          <a:prstGeom prst="roundRect">
+            <a:avLst>
+              <a:gd name="adj" fmla="val 12000"/>
+            </a:avLst>
+          </a:prstGeom>
+          <a:solidFill>
+            <a:srgbClr val="FBE4E4"/>
+          </a:solidFill>
+          <a:ln>
+            <a:noFill/>
+          </a:ln>
+        </p:spPr>
+        <p:style>
+          <a:lnRef idx="1">
+            <a:schemeClr val="accent1"/>
+          </a:lnRef>
+          <a:fillRef idx="3">
+            <a:schemeClr val="accent1"/>
+          </a:fillRef>
+          <a:effectRef idx="2">
+            <a:schemeClr val="accent1"/>
+          </a:effectRef>
+          <a:fontRef idx="minor">
+            <a:schemeClr val="lt1"/>
+          </a:fontRef>
+        </p:style>
+        <p:txBody>
+          <a:bodyPr rtlCol="0" anchor="ctr"/>
+          <a:lstStyle/>
+          <a:p>
+            <a:pPr algn="ctr"/>
+          </a:p>
+        </p:txBody>
+      </p:sp>
+      <p:sp>
+        <p:nvSpPr>
+          <p:cNvPr id="12" name="Rectangle 11"/>
+          <p:cNvSpPr/>
+          <p:nvPr/>
+        </p:nvSpPr>
+        <p:spPr>
+          <a:xfrm>
+            <a:off x="457200" y="3694176"/>
+            <a:ext cx="128016" cy="1051560"/>
+          </a:xfrm>
+          <a:prstGeom prst="rect">
+            <a:avLst/>
+          </a:prstGeom>
+          <a:solidFill>
+            <a:srgbClr val="A02030"/>
+          </a:solidFill>
+          <a:ln>
+            <a:noFill/>
+          </a:ln>
+        </p:spPr>
+        <p:style>
+          <a:lnRef idx="1">
+            <a:schemeClr val="accent1"/>
+          </a:lnRef>
+          <a:fillRef idx="3">
+            <a:schemeClr val="accent1"/>
+          </a:fillRef>
+          <a:effectRef idx="2">
+            <a:schemeClr val="accent1"/>
+          </a:effectRef>
+          <a:fontRef idx="minor">
+            <a:schemeClr val="lt1"/>
+          </a:fontRef>
+        </p:style>
+        <p:txBody>
+          <a:bodyPr rtlCol="0" anchor="ctr"/>
+          <a:lstStyle/>
+          <a:p>
+            <a:pPr algn="ctr"/>
+          </a:p>
+        </p:txBody>
+      </p:sp>
+      <p:sp>
+        <p:nvSpPr>
+          <p:cNvPr id="13" name="TextBox 12"/>
+          <p:cNvSpPr txBox="1"/>
+          <p:nvPr/>
+        </p:nvSpPr>
+        <p:spPr>
+          <a:xfrm>
+            <a:off x="777240" y="3831336"/>
+            <a:ext cx="10774375" cy="822959"/>
+          </a:xfrm>
+          <a:prstGeom prst="rect">
+            <a:avLst/>
+          </a:prstGeom>
+          <a:noFill/>
+        </p:spPr>
+        <p:txBody>
+          <a:bodyPr wrap="square">
+            <a:spAutoFit/>
+          </a:bodyPr>
+          <a:lstStyle/>
+          <a:p>
+            <a:r>
+              <a:rPr sz="1200" b="1" i="0">
+                <a:solidFill>
+                  <a:srgbClr val="A02030"/>
+                </a:solidFill>
+                <a:latin typeface="Calibri"/>
+              </a:rPr>
+              <a:t>Atención</a:t>
+            </a:r>
+          </a:p>
+          <a:p>
+            <a:pPr>
+              <a:spcBef>
+                <a:spcPts val="400"/>
+              </a:spcBef>
+            </a:pPr>
+            <a:r>
+              <a:rPr sz="1400" b="0" i="0">
+                <a:solidFill>
+                  <a:srgbClr val="333333"/>
+                </a:solidFill>
+                <a:latin typeface="Calibri"/>
+              </a:rPr>
+              <a:t>Taller de la semana en ExamLab (https://uniaj.examlab.workers.dev/): domingo 23:59 (regla del Acuerdo) cuando aplique.</a:t>
+            </a:r>
+          </a:p>
+        </p:txBody>
+      </p:sp>
+      <p:sp>
+        <p:nvSpPr>
+          <p:cNvPr id="14" name="TextBox 13"/>
+          <p:cNvSpPr txBox="1"/>
+          <p:nvPr/>
+        </p:nvSpPr>
+        <p:spPr>
+          <a:xfrm>
+            <a:off x="11185855" y="6473952"/>
+            <a:ext cx="640080" cy="274320"/>
+          </a:xfrm>
+          <a:prstGeom prst="rect">
+            <a:avLst/>
+          </a:prstGeom>
+          <a:noFill/>
+        </p:spPr>
+        <p:txBody>
+          <a:bodyPr wrap="square">
+            <a:spAutoFit/>
+          </a:bodyPr>
+          <a:lstStyle/>
+          <a:p>
+            <a:pPr algn="r"/>
+            <a:r>
+              <a:rPr sz="1100" b="0" i="0">
+                <a:solidFill>
+                  <a:srgbClr val="666666"/>
+                </a:solidFill>
+                <a:latin typeface="Calibri"/>
+              </a:rPr>
+              <a:t>18</a:t>
+            </a:r>
+          </a:p>
+        </p:txBody>
+      </p:sp>
+    </p:spTree>
+  </p:cSld>
+  <p:clrMapOvr>
+    <a:masterClrMapping/>
+  </p:clrMapOvr>
+</p:sld>
+</file>
+
+<file path=ppt/slides/slide19.xml><?xml version="1.0" encoding="utf-8"?>
+<p:sld xmlns:a="http://schemas.openxmlformats.org/drawingml/2006/main" xmlns:p="http://schemas.openxmlformats.org/presentationml/2006/main" xmlns:r="http://schemas.openxmlformats.org/officeDocument/2006/relationships">
+  <p:cSld>
+    <p:bg>
+      <p:bgPr>
+        <a:solidFill>
+          <a:srgbClr val="FFFFFF"/>
+        </a:solidFill>
+        <a:effectLst/>
+      </p:bgPr>
+    </p:bg>
+    <p:spTree>
+      <p:nvGrpSpPr>
+        <p:cNvPr id="1" name=""/>
+        <p:cNvGrpSpPr/>
+        <p:nvPr/>
+      </p:nvGrpSpPr>
+      <p:grpSpPr/>
+      <p:sp>
+        <p:nvSpPr>
+          <p:cNvPr id="2" name="Rectangle 1"/>
+          <p:cNvSpPr/>
+          <p:nvPr/>
+        </p:nvSpPr>
+        <p:spPr>
+          <a:xfrm>
+            <a:off x="0" y="0"/>
             <a:ext cx="12191695" cy="164592"/>
           </a:xfrm>
           <a:prstGeom prst="rect">
@@ -6642,7 +9451,7 @@
                 </a:solidFill>
                 <a:latin typeface="Calibri"/>
               </a:rPr>
-              <a:t>Entregable: Script proc + casos de prueba (captura o enlace Live SQL)</a:t>
+              <a:t>Entregable: 2 procedimientos en PL/pgSQL corriendo en ExamLab + bateria de pruebas con su tabla resultado_prueba + contrato del proc (6 bloques)</a:t>
             </a:r>
           </a:p>
           <a:p>
@@ -6921,7 +9730,7 @@
                 </a:solidFill>
                 <a:latin typeface="Calibri"/>
               </a:rPr>
-              <a:t>Oracle Live SQL</a:t>
+              <a:t>ExamLab (PostgreSQL) + Google Docs</a:t>
             </a:r>
             <a:r>
               <a:rPr sz="1600" b="0" i="0">
@@ -6982,7 +9791,7 @@
                 </a:solidFill>
                 <a:latin typeface="Calibri"/>
               </a:rPr>
-              <a:t> Script proc + casos de prueba (captura o enlace Live SQL)</a:t>
+              <a:t> 2 procedimientos en PL/pgSQL corriendo en ExamLab + bateria de pruebas con su tabla resultado_prueba + contrato del proc (6 bloques)</a:t>
             </a:r>
           </a:p>
           <a:p>
@@ -8102,7 +10911,7 @@
                 </a:solidFill>
                 <a:latin typeface="Calibri"/>
               </a:rPr>
-              <a:t>–   Un procedimiento almacenado (stored procedure) es un bloque de codigo SQL/PLSQL con nombre propio, guardado y…</a:t>
+              <a:t>–   Un procedimiento almacenado es logica de negocio guardada DENTRO de la base, y se llama con CALL. No es una…</a:t>
             </a:r>
           </a:p>
           <a:p>
@@ -8118,7 +10927,7 @@
                 </a:solidFill>
                 <a:latin typeface="Calibri"/>
               </a:rPr>
-              <a:t>–   Parametros: IN (entra un valor, ej</a:t>
+              <a:t>–   El molde de PL/pgSQL es fijo: CREATE PROCEDURE nombre(params) LANGUAGE plpgsql AS $proc$ ... $proc$;. Dentro…</a:t>
             </a:r>
           </a:p>
           <a:p>
@@ -8134,7 +10943,7 @@
                 </a:solidFill>
                 <a:latin typeface="Calibri"/>
               </a:rPr>
-              <a:t>–   Ventaja central para el PI: sin proc, cada pantalla de la futura app (o cada persona que toque el codigo)…</a:t>
+              <a:t>–   Parametros: IN es el defecto y no se escribe; OUT e INOUT existen pero hoy no se usan para reportar errores</a:t>
             </a:r>
           </a:p>
           <a:p>
@@ -8150,7 +10959,7 @@
                 </a:solidFill>
                 <a:latin typeface="Calibri"/>
               </a:rPr>
-              <a:t>–   Manejo de errores controlado: en vez de dejar que la insercion falle con un error crudo de motor, el proc…</a:t>
+              <a:t>–   La validacion no devuelve un mensaje: aborta con RAISE EXCEPTION 'ERROR: ... %', variable;. El % se sustituye…</a:t>
             </a:r>
           </a:p>
           <a:p>
@@ -8166,7 +10975,7 @@
                 </a:solidFill>
                 <a:latin typeface="Calibri"/>
               </a:rPr>
-              <a:t>–   Diferencia con una funcion (se vera en Clase 4): el procedimiento se ejecuta como una accion (CALL sp_algo)…</a:t>
+              <a:t>–   Un procedimiento sin prueba no esta terminado: la bateria son bloques DO que capturan el error</a:t>
             </a:r>
           </a:p>
         </p:txBody>
@@ -8944,7 +11753,7 @@
                 </a:solidFill>
                 <a:latin typeface="Calibri"/>
               </a:rPr>
-              <a:t>La validacion que justifica usar un procedimiento</a:t>
+              <a:t>El molde de PL/pgSQL y la validacion que aborta</a:t>
             </a:r>
           </a:p>
         </p:txBody>
@@ -9103,7 +11912,7 @@
                 </a:solidFill>
                 <a:latin typeface="Calibri"/>
               </a:rPr>
-              <a:t>SELECT activa INTO v_activa FROM mascota</a:t>
+              <a:t>CREATE OR REPLACE PROCEDURE sp_agendar_cita(</a:t>
             </a:r>
           </a:p>
           <a:p>
@@ -9119,7 +11928,7 @@
                 </a:solidFill>
                 <a:latin typeface="Calibri"/>
               </a:rPr>
-              <a:t> WHERE id_mascota = p_id_mascota;</a:t>
+              <a:t>  p_id_mascota INT, p_id_veterinario INT,</a:t>
             </a:r>
           </a:p>
           <a:p>
@@ -9135,7 +11944,7 @@
                 </a:solidFill>
                 <a:latin typeface="Calibri"/>
               </a:rPr>
-              <a:t/>
+              <a:t>  p_fecha_hora TIMESTAMP)          -- id_cita es SERIAL: no se pasa</a:t>
             </a:r>
           </a:p>
           <a:p>
@@ -9151,7 +11960,7 @@
                 </a:solidFill>
                 <a:latin typeface="Calibri"/>
               </a:rPr>
-              <a:t>IF v_activa &lt;&gt; 'S' THEN</a:t>
+              <a:t>LANGUAGE plpgsql AS $proc$         -- ni IS, ni VARCHAR2, ni / final</a:t>
             </a:r>
           </a:p>
           <a:p>
@@ -9167,7 +11976,7 @@
                 </a:solidFill>
                 <a:latin typeface="Calibri"/>
               </a:rPr>
-              <a:t>  p_msg := 'ERROR: mascota inactiva; no se agenda';</a:t>
+              <a:t>DECLARE v_activa CHAR(1);</a:t>
             </a:r>
           </a:p>
           <a:p>
@@ -9183,7 +11992,7 @@
                 </a:solidFill>
                 <a:latin typeface="Calibri"/>
               </a:rPr>
-              <a:t>  RETURN;                       -- sale SIN insertar</a:t>
+              <a:t>BEGIN</a:t>
             </a:r>
           </a:p>
           <a:p>
@@ -9199,7 +12008,7 @@
                 </a:solidFill>
                 <a:latin typeface="Calibri"/>
               </a:rPr>
-              <a:t>END IF;</a:t>
+              <a:t>  SELECT activa INTO v_activa FROM mascota</a:t>
             </a:r>
           </a:p>
           <a:p>
@@ -9215,7 +12024,7 @@
                 </a:solidFill>
                 <a:latin typeface="Calibri"/>
               </a:rPr>
-              <a:t/>
+              <a:t>   WHERE id_mascota = p_id_mascota;</a:t>
             </a:r>
           </a:p>
           <a:p>
@@ -9231,7 +12040,135 @@
                 </a:solidFill>
                 <a:latin typeface="Calibri"/>
               </a:rPr>
-              <a:t>INSERT INTO cita(...) VALUES (...);</a:t>
+              <a:t>  IF NOT FOUND THEN</a:t>
+            </a:r>
+          </a:p>
+          <a:p>
+            <a:pPr>
+              <a:spcAft>
+                <a:spcPts val="400"/>
+              </a:spcAft>
+            </a:pPr>
+            <a:r>
+              <a:rPr sz="1400" b="0" i="0">
+                <a:solidFill>
+                  <a:srgbClr val="FFFFFF"/>
+                </a:solidFill>
+                <a:latin typeface="Calibri"/>
+              </a:rPr>
+              <a:t>    RAISE EXCEPTION 'ERROR: la mascota % no existe', p_id_mascota;</a:t>
+            </a:r>
+          </a:p>
+          <a:p>
+            <a:pPr>
+              <a:spcAft>
+                <a:spcPts val="400"/>
+              </a:spcAft>
+            </a:pPr>
+            <a:r>
+              <a:rPr sz="1400" b="0" i="0">
+                <a:solidFill>
+                  <a:srgbClr val="FFFFFF"/>
+                </a:solidFill>
+                <a:latin typeface="Calibri"/>
+              </a:rPr>
+              <a:t>  END IF;</a:t>
+            </a:r>
+          </a:p>
+          <a:p>
+            <a:pPr>
+              <a:spcAft>
+                <a:spcPts val="400"/>
+              </a:spcAft>
+            </a:pPr>
+            <a:r>
+              <a:rPr sz="1400" b="0" i="0">
+                <a:solidFill>
+                  <a:srgbClr val="FFFFFF"/>
+                </a:solidFill>
+                <a:latin typeface="Calibri"/>
+              </a:rPr>
+              <a:t>  IF v_activa &lt;&gt; 'S' THEN</a:t>
+            </a:r>
+          </a:p>
+          <a:p>
+            <a:pPr>
+              <a:spcAft>
+                <a:spcPts val="400"/>
+              </a:spcAft>
+            </a:pPr>
+            <a:r>
+              <a:rPr sz="1400" b="0" i="0">
+                <a:solidFill>
+                  <a:srgbClr val="FFFFFF"/>
+                </a:solidFill>
+                <a:latin typeface="Calibri"/>
+              </a:rPr>
+              <a:t>    RAISE EXCEPTION 'ERROR: la mascota % esta inactiva', p_id_mascota;</a:t>
+            </a:r>
+          </a:p>
+          <a:p>
+            <a:pPr>
+              <a:spcAft>
+                <a:spcPts val="400"/>
+              </a:spcAft>
+            </a:pPr>
+            <a:r>
+              <a:rPr sz="1400" b="0" i="0">
+                <a:solidFill>
+                  <a:srgbClr val="FFFFFF"/>
+                </a:solidFill>
+                <a:latin typeface="Calibri"/>
+              </a:rPr>
+              <a:t>  END IF;                          -- aborta: no inserta NADA</a:t>
+            </a:r>
+          </a:p>
+          <a:p>
+            <a:pPr>
+              <a:spcAft>
+                <a:spcPts val="400"/>
+              </a:spcAft>
+            </a:pPr>
+            <a:r>
+              <a:rPr sz="1400" b="0" i="0">
+                <a:solidFill>
+                  <a:srgbClr val="FFFFFF"/>
+                </a:solidFill>
+                <a:latin typeface="Calibri"/>
+              </a:rPr>
+              <a:t>  INSERT INTO cita(id_mascota, id_veterinario, fecha_hora, estado)</a:t>
+            </a:r>
+          </a:p>
+          <a:p>
+            <a:pPr>
+              <a:spcAft>
+                <a:spcPts val="400"/>
+              </a:spcAft>
+            </a:pPr>
+            <a:r>
+              <a:rPr sz="1400" b="0" i="0">
+                <a:solidFill>
+                  <a:srgbClr val="FFFFFF"/>
+                </a:solidFill>
+                <a:latin typeface="Calibri"/>
+              </a:rPr>
+              <a:t>  VALUES (p_id_mascota, p_id_veterinario, p_fecha_hora, 'PROGRAMADA');</a:t>
+            </a:r>
+          </a:p>
+          <a:p>
+            <a:pPr>
+              <a:spcAft>
+                <a:spcPts val="400"/>
+              </a:spcAft>
+            </a:pPr>
+            <a:r>
+              <a:rPr sz="1400" b="0" i="0">
+                <a:solidFill>
+                  <a:srgbClr val="FFFFFF"/>
+                </a:solidFill>
+                <a:latin typeface="Calibri"/>
+              </a:rPr>
+              <a:t>END; $proc$;</a:t>
             </a:r>
           </a:p>
         </p:txBody>
@@ -9266,7 +12203,7 @@
                 </a:solidFill>
                 <a:latin typeface="Calibri"/>
               </a:rPr>
-              <a:t>Sin este IF, el proc es solo un INSERT con nombre: no resuelve nada.</a:t>
+              <a:t>«RAISE EXCEPTION» aborta el CALL completo y deshace lo hecho. Con el mensaje en un parametro OUT, el INSERT seguiria corriendo.</a:t>
             </a:r>
           </a:p>
         </p:txBody>
@@ -9341,7 +12278,7 @@
         <p:spPr>
           <a:xfrm>
             <a:off x="0" y="0"/>
-            <a:ext cx="12191695" cy="960120"/>
+            <a:ext cx="12191695" cy="1170432"/>
           </a:xfrm>
           <a:prstGeom prst="rect">
             <a:avLst/>
@@ -9383,7 +12320,7 @@
         </p:nvSpPr>
         <p:spPr>
           <a:xfrm>
-            <a:off x="0" y="960120"/>
+            <a:off x="0" y="1170432"/>
             <a:ext cx="12191695" cy="41148"/>
           </a:xfrm>
           <a:prstGeom prst="rect">
@@ -9427,7 +12364,7 @@
         <p:spPr>
           <a:xfrm>
             <a:off x="457200" y="164592"/>
-            <a:ext cx="11277295" cy="502920"/>
+            <a:ext cx="11277295" cy="384048"/>
           </a:xfrm>
           <a:prstGeom prst="rect">
             <a:avLst/>
@@ -9447,7 +12384,7 @@
                 </a:solidFill>
                 <a:latin typeface="Calibri"/>
               </a:rPr>
-              <a:t>Demo del dia</a:t>
+              <a:t>La bateria de pruebas: un bloque DO por caso</a:t>
             </a:r>
           </a:p>
         </p:txBody>
@@ -9460,8 +12397,42 @@
         </p:nvSpPr>
         <p:spPr>
           <a:xfrm>
-            <a:off x="457200" y="1170432"/>
-            <a:ext cx="11277295" cy="5230368"/>
+            <a:off x="457200" y="566928"/>
+            <a:ext cx="11277295" cy="411480"/>
+          </a:xfrm>
+          <a:prstGeom prst="rect">
+            <a:avLst/>
+          </a:prstGeom>
+          <a:noFill/>
+        </p:spPr>
+        <p:txBody>
+          <a:bodyPr wrap="square">
+            <a:spAutoFit/>
+          </a:bodyPr>
+          <a:lstStyle/>
+          <a:p>
+            <a:r>
+              <a:rPr sz="1400" b="0" i="0">
+                <a:solidFill>
+                  <a:srgbClr val="B8D8EE"/>
+                </a:solidFill>
+                <a:latin typeface="Calibri"/>
+              </a:rPr>
+              <a:t>Un procedimiento sin bateria no esta terminado. Son 25 de los 100 puntos y se califican por la tabla de resultados, no por el CALL suelto</a:t>
+            </a:r>
+          </a:p>
+        </p:txBody>
+      </p:sp>
+      <p:sp>
+        <p:nvSpPr>
+          <p:cNvPr id="6" name="TextBox 5"/>
+          <p:cNvSpPr txBox="1"/>
+          <p:nvPr/>
+        </p:nvSpPr>
+        <p:spPr>
+          <a:xfrm>
+            <a:off x="457200" y="1380744"/>
+            <a:ext cx="11277295" cy="5020056"/>
           </a:xfrm>
           <a:prstGeom prst="rect">
             <a:avLst/>
@@ -9480,7 +12451,7 @@
               </a:spcAft>
             </a:pPr>
             <a:r>
-              <a:rPr sz="1600" b="0" i="0">
+              <a:rPr sz="1300" b="0" i="0">
                 <a:solidFill>
                   <a:srgbClr val="333333"/>
                 </a:solidFill>
@@ -9489,22 +12460,40 @@
               <a:t>–   </a:t>
             </a:r>
             <a:r>
-              <a:rPr sz="1600" b="1" i="0">
-                <a:solidFill>
-                  <a:srgbClr val="333333"/>
-                </a:solidFill>
-                <a:latin typeface="Calibri"/>
-              </a:rPr>
-              <a:t>Herramienta:</a:t>
-            </a:r>
-            <a:r>
-              <a:rPr sz="1600" b="0" i="0">
-                <a:solidFill>
-                  <a:srgbClr val="333333"/>
-                </a:solidFill>
-                <a:latin typeface="Calibri"/>
-              </a:rPr>
-              <a:t> Oracle Live SQL</a:t>
+              <a:rPr sz="1300" b="1" i="0">
+                <a:solidFill>
+                  <a:srgbClr val="333333"/>
+                </a:solidFill>
+                <a:latin typeface="Calibri"/>
+              </a:rPr>
+              <a:t>Por que un bloque por caso.</a:t>
+            </a:r>
+            <a:r>
+              <a:rPr sz="1300" b="0" i="0">
+                <a:solidFill>
+                  <a:srgbClr val="333333"/>
+                </a:solidFill>
+                <a:latin typeface="Calibri"/>
+              </a:rPr>
+              <a:t> Si los cuatro «CALL» van seguidos, el primero que falla </a:t>
+            </a:r>
+            <a:r>
+              <a:rPr sz="1300" b="1" i="0">
+                <a:solidFill>
+                  <a:srgbClr val="333333"/>
+                </a:solidFill>
+                <a:latin typeface="Calibri"/>
+              </a:rPr>
+              <a:t>aborta el resto</a:t>
+            </a:r>
+            <a:r>
+              <a:rPr sz="1300" b="0" i="0">
+                <a:solidFill>
+                  <a:srgbClr val="333333"/>
+                </a:solidFill>
+                <a:latin typeface="Calibri"/>
+              </a:rPr>
+              <a:t> y la evidencia queda a medias. «DO $$ ... $$;» es un bloque anonimo —se ejecuta una vez y no se guarda— y su «EXCEPTION» atrapa el error y deja seguir al siguiente caso.</a:t>
             </a:r>
           </a:p>
           <a:p>
@@ -9514,7 +12503,7 @@
               </a:spcAft>
             </a:pPr>
             <a:r>
-              <a:rPr sz="1600" b="0" i="0">
+              <a:rPr sz="1300" b="0" i="0">
                 <a:solidFill>
                   <a:srgbClr val="333333"/>
                 </a:solidFill>
@@ -9523,22 +12512,22 @@
               <a:t>–   </a:t>
             </a:r>
             <a:r>
-              <a:rPr sz="1600" b="1" i="0">
-                <a:solidFill>
-                  <a:srgbClr val="333333"/>
-                </a:solidFill>
-                <a:latin typeface="Calibri"/>
-              </a:rPr>
-              <a:t>Demo:</a:t>
-            </a:r>
-            <a:r>
-              <a:rPr sz="1600" b="0" i="0">
-                <a:solidFill>
-                  <a:srgbClr val="333333"/>
-                </a:solidFill>
-                <a:latin typeface="Calibri"/>
-              </a:rPr>
-              <a:t> CREATE PROCEDURE sp_agendar_cita(...) con validacion de mascota activa.</a:t>
+              <a:rPr sz="1300" b="1" i="0">
+                <a:solidFill>
+                  <a:srgbClr val="333333"/>
+                </a:solidFill>
+                <a:latin typeface="Calibri"/>
+              </a:rPr>
+              <a:t>El molde de un caso error.</a:t>
+            </a:r>
+            <a:r>
+              <a:rPr sz="1300" b="0" i="0">
+                <a:solidFill>
+                  <a:srgbClr val="333333"/>
+                </a:solidFill>
+                <a:latin typeface="Calibri"/>
+              </a:rPr>
+              <a:t> «DO $$ BEGIN CALL sp_agendar_cita(...); INSERT INTO resultado_prueba VALUES (..., 'FALLO: no lanzo error', FALSE); EXCEPTION WHEN OTHERS THEN INSERT INTO resultado_prueba VALUES (..., SQLERRM, TRUE); END $$;» — «SQLERRM» es el texto del error que se acaba de capturar.</a:t>
             </a:r>
           </a:p>
           <a:p>
@@ -9548,13 +12537,67 @@
               </a:spcAft>
             </a:pPr>
             <a:r>
-              <a:rPr sz="1600" b="0" i="0">
-                <a:solidFill>
-                  <a:srgbClr val="333333"/>
-                </a:solidFill>
-                <a:latin typeface="Calibri"/>
-              </a:rPr>
-              <a:t>–   Sigan el mismo dominio VetCare (no inventen otro caso).</a:t>
+              <a:rPr sz="1300" b="0" i="0">
+                <a:solidFill>
+                  <a:srgbClr val="333333"/>
+                </a:solidFill>
+                <a:latin typeface="Calibri"/>
+              </a:rPr>
+              <a:t>–   </a:t>
+            </a:r>
+            <a:r>
+              <a:rPr sz="1300" b="1" i="0">
+                <a:solidFill>
+                  <a:srgbClr val="333333"/>
+                </a:solidFill>
+                <a:latin typeface="Calibri"/>
+              </a:rPr>
+              <a:t>Ojo con la logica invertida, y con «WHEN OTHERS» a secas.</a:t>
+            </a:r>
+            <a:r>
+              <a:rPr sz="1300" b="0" i="0">
+                <a:solidFill>
+                  <a:srgbClr val="333333"/>
+                </a:solidFill>
+                <a:latin typeface="Calibri"/>
+              </a:rPr>
+              <a:t> En un caso error, </a:t>
+            </a:r>
+            <a:r>
+              <a:rPr sz="1300" b="1" i="0">
+                <a:solidFill>
+                  <a:srgbClr val="333333"/>
+                </a:solidFill>
+                <a:latin typeface="Calibri"/>
+              </a:rPr>
+              <a:t>llegar al final sin excepcion es el fallo</a:t>
+            </a:r>
+            <a:r>
+              <a:rPr sz="1300" b="0" i="0">
+                <a:solidFill>
+                  <a:srgbClr val="333333"/>
+                </a:solidFill>
+                <a:latin typeface="Calibri"/>
+              </a:rPr>
+              <a:t>. Y no basta con que falle: hay que verificar </a:t>
+            </a:r>
+            <a:r>
+              <a:rPr sz="1300" b="1" i="0">
+                <a:solidFill>
+                  <a:srgbClr val="333333"/>
+                </a:solidFill>
+                <a:latin typeface="Calibri"/>
+              </a:rPr>
+              <a:t>que falle por lo esperado</a:t>
+            </a:r>
+            <a:r>
+              <a:rPr sz="1300" b="0" i="0">
+                <a:solidFill>
+                  <a:srgbClr val="333333"/>
+                </a:solidFill>
+                <a:latin typeface="Calibri"/>
+              </a:rPr>
+              <a:t> («SQLERRM ILIKE '%inactiva%'»), porque un typo en un nombre de columna tambien lanza excepcion y se reportaria como prueba superada.</a:t>
             </a:r>
           </a:p>
           <a:p>
@@ -9564,20 +12607,126 @@
               </a:spcAft>
             </a:pPr>
             <a:r>
-              <a:rPr sz="1600" b="0" i="0">
-                <a:solidFill>
-                  <a:srgbClr val="333333"/>
-                </a:solidFill>
-                <a:latin typeface="Calibri"/>
-              </a:rPr>
-              <a:t>–   Al final de la demo: dejar enlace/script compartible al grupo.</a:t>
-            </a:r>
-          </a:p>
-        </p:txBody>
-      </p:sp>
-      <p:sp>
-        <p:nvSpPr>
-          <p:cNvPr id="6" name="TextBox 5"/>
+              <a:rPr sz="1300" b="0" i="0">
+                <a:solidFill>
+                  <a:srgbClr val="333333"/>
+                </a:solidFill>
+                <a:latin typeface="Calibri"/>
+              </a:rPr>
+              <a:t>–   </a:t>
+            </a:r>
+            <a:r>
+              <a:rPr sz="1300" b="1" i="0">
+                <a:solidFill>
+                  <a:srgbClr val="333333"/>
+                </a:solidFill>
+                <a:latin typeface="Calibri"/>
+              </a:rPr>
+              <a:t>La tabla de resultados.</a:t>
+            </a:r>
+            <a:r>
+              <a:rPr sz="1300" b="0" i="0">
+                <a:solidFill>
+                  <a:srgbClr val="333333"/>
+                </a:solidFill>
+                <a:latin typeface="Calibri"/>
+              </a:rPr>
+              <a:t> «resultado_prueba(id_prueba SERIAL, caso TEXT, esperado TEXT, obtenido TEXT, paso BOOLEAN)», y un «SELECT * ... ORDER BY id_prueba;» con las 4 filas. «paso» admite dos lecturas —«coincidio con lo esperado» o «la operacion se completo»— y las dos valen; lo que se exige es </a:t>
+            </a:r>
+            <a:r>
+              <a:rPr sz="1300" b="1" i="0">
+                <a:solidFill>
+                  <a:srgbClr val="333333"/>
+                </a:solidFill>
+                <a:latin typeface="Calibri"/>
+              </a:rPr>
+              <a:t>usar la misma para las 4 y decir cual</a:t>
+            </a:r>
+            <a:r>
+              <a:rPr sz="1300" b="0" i="0">
+                <a:solidFill>
+                  <a:srgbClr val="333333"/>
+                </a:solidFill>
+                <a:latin typeface="Calibri"/>
+              </a:rPr>
+              <a:t>.</a:t>
+            </a:r>
+          </a:p>
+          <a:p>
+            <a:pPr>
+              <a:spcAft>
+                <a:spcPts val="800"/>
+              </a:spcAft>
+            </a:pPr>
+            <a:r>
+              <a:rPr sz="1300" b="0" i="0">
+                <a:solidFill>
+                  <a:srgbClr val="333333"/>
+                </a:solidFill>
+                <a:latin typeface="Calibri"/>
+              </a:rPr>
+              <a:t>–   </a:t>
+            </a:r>
+            <a:r>
+              <a:rPr sz="1300" b="1" i="0">
+                <a:solidFill>
+                  <a:srgbClr val="333333"/>
+                </a:solidFill>
+                <a:latin typeface="Calibri"/>
+              </a:rPr>
+              <a:t>Los 4 casos, y la prueba de que si inserto.</a:t>
+            </a:r>
+            <a:r>
+              <a:rPr sz="1300" b="0" i="0">
+                <a:solidFill>
+                  <a:srgbClr val="333333"/>
+                </a:solidFill>
+                <a:latin typeface="Calibri"/>
+              </a:rPr>
+              <a:t> 1 caso OK + mascota inexistente + mascota inactiva + franja ocupada. Y un «COUNT(*)» sobre «cita» </a:t>
+            </a:r>
+            <a:r>
+              <a:rPr sz="1300" b="1" i="0">
+                <a:solidFill>
+                  <a:srgbClr val="333333"/>
+                </a:solidFill>
+                <a:latin typeface="Calibri"/>
+              </a:rPr>
+              <a:t>antes y despues</a:t>
+            </a:r>
+            <a:r>
+              <a:rPr sz="1300" b="0" i="0">
+                <a:solidFill>
+                  <a:srgbClr val="333333"/>
+                </a:solidFill>
+                <a:latin typeface="Calibri"/>
+              </a:rPr>
+              <a:t>: tiene que pasar de </a:t>
+            </a:r>
+            <a:r>
+              <a:rPr sz="1300" b="1" i="0">
+                <a:solidFill>
+                  <a:srgbClr val="333333"/>
+                </a:solidFill>
+                <a:latin typeface="Calibri"/>
+              </a:rPr>
+              <a:t>10 a 11</a:t>
+            </a:r>
+            <a:r>
+              <a:rPr sz="1300" b="0" i="0">
+                <a:solidFill>
+                  <a:srgbClr val="333333"/>
+                </a:solidFill>
+                <a:latin typeface="Calibri"/>
+              </a:rPr>
+              <a:t> filas. Sin ese conteo nada demuestra que el caso OK hizo algo.</a:t>
+            </a:r>
+          </a:p>
+        </p:txBody>
+      </p:sp>
+      <p:sp>
+        <p:nvSpPr>
+          <p:cNvPr id="7" name="TextBox 6"/>
           <p:cNvSpPr txBox="1"/>
           <p:nvPr/>
         </p:nvSpPr>
@@ -9751,7 +12900,7 @@
                 </a:solidFill>
                 <a:latin typeface="Calibri"/>
               </a:rPr>
-              <a:t>Herramientas de hoy</a:t>
+              <a:t>El contrato del procedimiento: los 6 bloques que consume la app</a:t>
             </a:r>
           </a:p>
         </p:txBody>
@@ -9785,176 +12934,21 @@
                 </a:solidFill>
                 <a:latin typeface="Calibri"/>
               </a:rPr>
-              <a:t>Gratis · navegador o free tier</a:t>
-            </a:r>
-          </a:p>
-        </p:txBody>
-      </p:sp>
-      <p:sp>
-        <p:nvSpPr>
-          <p:cNvPr id="6" name="Rounded Rectangle 5"/>
-          <p:cNvSpPr/>
-          <p:nvPr/>
-        </p:nvSpPr>
-        <p:spPr>
-          <a:xfrm>
-            <a:off x="457200" y="1591056"/>
-            <a:ext cx="3624986" cy="2331720"/>
-          </a:xfrm>
-          <a:prstGeom prst="roundRect">
-            <a:avLst>
-              <a:gd name="adj" fmla="val 12000"/>
-            </a:avLst>
-          </a:prstGeom>
-          <a:solidFill>
-            <a:srgbClr val="F2F2F2"/>
-          </a:solidFill>
-          <a:ln>
-            <a:noFill/>
-          </a:ln>
-        </p:spPr>
-        <p:style>
-          <a:lnRef idx="1">
-            <a:schemeClr val="accent1"/>
-          </a:lnRef>
-          <a:fillRef idx="3">
-            <a:schemeClr val="accent1"/>
-          </a:fillRef>
-          <a:effectRef idx="2">
-            <a:schemeClr val="accent1"/>
-          </a:effectRef>
-          <a:fontRef idx="minor">
-            <a:schemeClr val="lt1"/>
-          </a:fontRef>
-        </p:style>
-        <p:txBody>
-          <a:bodyPr rtlCol="0" anchor="ctr"/>
-          <a:lstStyle/>
-          <a:p>
-            <a:pPr algn="ctr"/>
-          </a:p>
-        </p:txBody>
-      </p:sp>
-      <p:sp>
-        <p:nvSpPr>
-          <p:cNvPr id="7" name="Rectangle 6"/>
-          <p:cNvSpPr/>
-          <p:nvPr/>
-        </p:nvSpPr>
-        <p:spPr>
-          <a:xfrm>
-            <a:off x="457200" y="1591056"/>
-            <a:ext cx="3624986" cy="64008"/>
-          </a:xfrm>
-          <a:prstGeom prst="rect">
-            <a:avLst/>
-          </a:prstGeom>
-          <a:solidFill>
-            <a:srgbClr val="095292"/>
-          </a:solidFill>
-          <a:ln>
-            <a:noFill/>
-          </a:ln>
-        </p:spPr>
-        <p:style>
-          <a:lnRef idx="1">
-            <a:schemeClr val="accent1"/>
-          </a:lnRef>
-          <a:fillRef idx="3">
-            <a:schemeClr val="accent1"/>
-          </a:fillRef>
-          <a:effectRef idx="2">
-            <a:schemeClr val="accent1"/>
-          </a:effectRef>
-          <a:fontRef idx="minor">
-            <a:schemeClr val="lt1"/>
-          </a:fontRef>
-        </p:style>
-        <p:txBody>
-          <a:bodyPr rtlCol="0" anchor="ctr"/>
-          <a:lstStyle/>
-          <a:p>
-            <a:pPr algn="ctr"/>
-          </a:p>
-        </p:txBody>
-      </p:sp>
-      <p:sp>
-        <p:nvSpPr>
-          <p:cNvPr id="8" name="Rectangle 7"/>
-          <p:cNvSpPr/>
-          <p:nvPr/>
-        </p:nvSpPr>
-        <p:spPr>
-          <a:xfrm>
-            <a:off x="457200" y="1655064"/>
-            <a:ext cx="3624986" cy="27432"/>
-          </a:xfrm>
-          <a:prstGeom prst="rect">
-            <a:avLst/>
-          </a:prstGeom>
-          <a:solidFill>
-            <a:srgbClr val="FFD000"/>
-          </a:solidFill>
-          <a:ln>
-            <a:noFill/>
-          </a:ln>
-        </p:spPr>
-        <p:style>
-          <a:lnRef idx="1">
-            <a:schemeClr val="accent1"/>
-          </a:lnRef>
-          <a:fillRef idx="3">
-            <a:schemeClr val="accent1"/>
-          </a:fillRef>
-          <a:effectRef idx="2">
-            <a:schemeClr val="accent1"/>
-          </a:effectRef>
-          <a:fontRef idx="minor">
-            <a:schemeClr val="lt1"/>
-          </a:fontRef>
-        </p:style>
-        <p:txBody>
-          <a:bodyPr rtlCol="0" anchor="ctr"/>
-          <a:lstStyle/>
-          <a:p>
-            <a:pPr algn="ctr"/>
-          </a:p>
-        </p:txBody>
-      </p:sp>
-      <p:pic>
-        <p:nvPicPr>
-          <p:cNvPr id="9" name="Picture 8" descr="oracle_livesql.png"/>
-          <p:cNvPicPr>
-            <a:picLocks noChangeAspect="1"/>
-          </p:cNvPicPr>
-          <p:nvPr/>
-        </p:nvPicPr>
-        <p:blipFill>
-          <a:blip r:embed="rId2"/>
-          <a:stretch>
-            <a:fillRect/>
-          </a:stretch>
-        </p:blipFill>
-        <p:spPr>
-          <a:xfrm>
-            <a:off x="1643329" y="1847087"/>
-            <a:ext cx="1252728" cy="1252728"/>
-          </a:xfrm>
-          <a:prstGeom prst="rect">
-            <a:avLst/>
-          </a:prstGeom>
-        </p:spPr>
-      </p:pic>
-      <p:sp>
-        <p:nvSpPr>
-          <p:cNvPr id="10" name="TextBox 9"/>
+              <a:t>Es el entregable de la pregunta 5, vale 15 puntos, y la plantilla en blanco de los 6 bloques esta en el Taller del PI</a:t>
+            </a:r>
+          </a:p>
+        </p:txBody>
+      </p:sp>
+      <p:sp>
+        <p:nvSpPr>
+          <p:cNvPr id="6" name="TextBox 5"/>
           <p:cNvSpPr txBox="1"/>
           <p:nvPr/>
         </p:nvSpPr>
         <p:spPr>
           <a:xfrm>
-            <a:off x="530352" y="3191256"/>
-            <a:ext cx="3478682" cy="621792"/>
+            <a:off x="457200" y="1380744"/>
+            <a:ext cx="11277295" cy="5020056"/>
           </a:xfrm>
           <a:prstGeom prst="rect">
             <a:avLst/>
@@ -9962,449 +12956,275 @@
           <a:noFill/>
         </p:spPr>
         <p:txBody>
-          <a:bodyPr wrap="square" anchor="t"/>
-          <a:lstStyle/>
-          <a:p>
-            <a:pPr algn="ctr"/>
+          <a:bodyPr wrap="square">
+            <a:spAutoFit/>
+          </a:bodyPr>
+          <a:lstStyle/>
+          <a:p>
+            <a:pPr>
+              <a:spcAft>
+                <a:spcPts val="800"/>
+              </a:spcAft>
+            </a:pPr>
+            <a:r>
+              <a:rPr sz="1300" b="0" i="0">
+                <a:solidFill>
+                  <a:srgbClr val="333333"/>
+                </a:solidFill>
+                <a:latin typeface="Calibri"/>
+              </a:rPr>
+              <a:t>–   </a:t>
+            </a:r>
             <a:r>
               <a:rPr sz="1300" b="1" i="0">
                 <a:solidFill>
-                  <a:srgbClr val="095292"/>
-                </a:solidFill>
-                <a:latin typeface="Calibri"/>
-              </a:rPr>
-              <a:t>Oracle Live SQL</a:t>
-            </a:r>
-          </a:p>
-          <a:p>
-            <a:pPr algn="ctr">
-              <a:spcBef>
-                <a:spcPts val="200"/>
-              </a:spcBef>
+                  <a:srgbClr val="333333"/>
+                </a:solidFill>
+                <a:latin typeface="Calibri"/>
+              </a:rPr>
+              <a:t>1. Firma exacta.</a:t>
+            </a:r>
+            <a:r>
+              <a:rPr sz="1300" b="0" i="0">
+                <a:solidFill>
+                  <a:srgbClr val="333333"/>
+                </a:solidFill>
+                <a:latin typeface="Calibri"/>
+              </a:rPr>
+              <a:t> «sp_agendar_cita(p_id_mascota INT, p_id_veterinario INT, p_fecha_hora TIMESTAMP)»: nombre, orden y </a:t>
+            </a:r>
+            <a:r>
+              <a:rPr sz="1300" b="1" i="0">
+                <a:solidFill>
+                  <a:srgbClr val="333333"/>
+                </a:solidFill>
+                <a:latin typeface="Calibri"/>
+              </a:rPr>
+              <a:t>tipo</a:t>
+            </a:r>
+            <a:r>
+              <a:rPr sz="1300" b="0" i="0">
+                <a:solidFill>
+                  <a:srgbClr val="333333"/>
+                </a:solidFill>
+                <a:latin typeface="Calibri"/>
+              </a:rPr>
+              <a:t> de cada parametro. Sin los tipos no es un contrato, es una descripcion. </a:t>
+            </a:r>
+            <a:r>
+              <a:rPr sz="1300" b="1" i="0">
+                <a:solidFill>
+                  <a:srgbClr val="333333"/>
+                </a:solidFill>
+                <a:latin typeface="Calibri"/>
+              </a:rPr>
+              <a:t>2. Como se llama:</a:t>
+            </a:r>
+            <a:r>
+              <a:rPr sz="1300" b="0" i="0">
+                <a:solidFill>
+                  <a:srgbClr val="333333"/>
+                </a:solidFill>
+                <a:latin typeface="Calibri"/>
+              </a:rPr>
+              <a:t> un «CALL» de ejemplo con valores reales, copiable tal cual.</a:t>
+            </a:r>
+          </a:p>
+          <a:p>
+            <a:pPr>
+              <a:spcAft>
+                <a:spcPts val="800"/>
+              </a:spcAft>
             </a:pPr>
             <a:r>
-              <a:rPr sz="1000" b="0" i="0">
-                <a:solidFill>
-                  <a:srgbClr val="666666"/>
-                </a:solidFill>
-                <a:latin typeface="Calibri"/>
-              </a:rPr>
-              <a:t>Procedimientos</a:t>
-            </a:r>
-          </a:p>
-        </p:txBody>
-      </p:sp>
-      <p:sp>
-        <p:nvSpPr>
-          <p:cNvPr id="11" name="Rounded Rectangle 10"/>
-          <p:cNvSpPr/>
-          <p:nvPr/>
-        </p:nvSpPr>
-        <p:spPr>
-          <a:xfrm>
-            <a:off x="4283354" y="1591056"/>
-            <a:ext cx="3624986" cy="2331720"/>
-          </a:xfrm>
-          <a:prstGeom prst="roundRect">
-            <a:avLst>
-              <a:gd name="adj" fmla="val 12000"/>
-            </a:avLst>
-          </a:prstGeom>
-          <a:solidFill>
-            <a:srgbClr val="F2F2F2"/>
-          </a:solidFill>
-          <a:ln>
-            <a:noFill/>
-          </a:ln>
-        </p:spPr>
-        <p:style>
-          <a:lnRef idx="1">
-            <a:schemeClr val="accent1"/>
-          </a:lnRef>
-          <a:fillRef idx="3">
-            <a:schemeClr val="accent1"/>
-          </a:fillRef>
-          <a:effectRef idx="2">
-            <a:schemeClr val="accent1"/>
-          </a:effectRef>
-          <a:fontRef idx="minor">
-            <a:schemeClr val="lt1"/>
-          </a:fontRef>
-        </p:style>
-        <p:txBody>
-          <a:bodyPr rtlCol="0" anchor="ctr"/>
-          <a:lstStyle/>
-          <a:p>
-            <a:pPr algn="ctr"/>
-          </a:p>
-        </p:txBody>
-      </p:sp>
-      <p:sp>
-        <p:nvSpPr>
-          <p:cNvPr id="12" name="Rectangle 11"/>
-          <p:cNvSpPr/>
-          <p:nvPr/>
-        </p:nvSpPr>
-        <p:spPr>
-          <a:xfrm>
-            <a:off x="4283354" y="1591056"/>
-            <a:ext cx="3624986" cy="64008"/>
-          </a:xfrm>
-          <a:prstGeom prst="rect">
-            <a:avLst/>
-          </a:prstGeom>
-          <a:solidFill>
-            <a:srgbClr val="095292"/>
-          </a:solidFill>
-          <a:ln>
-            <a:noFill/>
-          </a:ln>
-        </p:spPr>
-        <p:style>
-          <a:lnRef idx="1">
-            <a:schemeClr val="accent1"/>
-          </a:lnRef>
-          <a:fillRef idx="3">
-            <a:schemeClr val="accent1"/>
-          </a:fillRef>
-          <a:effectRef idx="2">
-            <a:schemeClr val="accent1"/>
-          </a:effectRef>
-          <a:fontRef idx="minor">
-            <a:schemeClr val="lt1"/>
-          </a:fontRef>
-        </p:style>
-        <p:txBody>
-          <a:bodyPr rtlCol="0" anchor="ctr"/>
-          <a:lstStyle/>
-          <a:p>
-            <a:pPr algn="ctr"/>
-          </a:p>
-        </p:txBody>
-      </p:sp>
-      <p:sp>
-        <p:nvSpPr>
-          <p:cNvPr id="13" name="Rectangle 12"/>
-          <p:cNvSpPr/>
-          <p:nvPr/>
-        </p:nvSpPr>
-        <p:spPr>
-          <a:xfrm>
-            <a:off x="4283354" y="1655064"/>
-            <a:ext cx="3624986" cy="27432"/>
-          </a:xfrm>
-          <a:prstGeom prst="rect">
-            <a:avLst/>
-          </a:prstGeom>
-          <a:solidFill>
-            <a:srgbClr val="FFD000"/>
-          </a:solidFill>
-          <a:ln>
-            <a:noFill/>
-          </a:ln>
-        </p:spPr>
-        <p:style>
-          <a:lnRef idx="1">
-            <a:schemeClr val="accent1"/>
-          </a:lnRef>
-          <a:fillRef idx="3">
-            <a:schemeClr val="accent1"/>
-          </a:fillRef>
-          <a:effectRef idx="2">
-            <a:schemeClr val="accent1"/>
-          </a:effectRef>
-          <a:fontRef idx="minor">
-            <a:schemeClr val="lt1"/>
-          </a:fontRef>
-        </p:style>
-        <p:txBody>
-          <a:bodyPr rtlCol="0" anchor="ctr"/>
-          <a:lstStyle/>
-          <a:p>
-            <a:pPr algn="ctr"/>
-          </a:p>
-        </p:txBody>
-      </p:sp>
-      <p:pic>
-        <p:nvPicPr>
-          <p:cNvPr id="14" name="Picture 13" descr="dbfiddle.png"/>
-          <p:cNvPicPr>
-            <a:picLocks noChangeAspect="1"/>
-          </p:cNvPicPr>
-          <p:nvPr/>
-        </p:nvPicPr>
-        <p:blipFill>
-          <a:blip r:embed="rId3"/>
-          <a:stretch>
-            <a:fillRect/>
-          </a:stretch>
-        </p:blipFill>
-        <p:spPr>
-          <a:xfrm>
-            <a:off x="5469483" y="1847087"/>
-            <a:ext cx="1252728" cy="1252728"/>
-          </a:xfrm>
-          <a:prstGeom prst="rect">
-            <a:avLst/>
-          </a:prstGeom>
-        </p:spPr>
-      </p:pic>
-      <p:sp>
-        <p:nvSpPr>
-          <p:cNvPr id="15" name="TextBox 14"/>
-          <p:cNvSpPr txBox="1"/>
-          <p:nvPr/>
-        </p:nvSpPr>
-        <p:spPr>
-          <a:xfrm>
-            <a:off x="4356506" y="3191256"/>
-            <a:ext cx="3478682" cy="621792"/>
-          </a:xfrm>
-          <a:prstGeom prst="rect">
-            <a:avLst/>
-          </a:prstGeom>
-          <a:noFill/>
-        </p:spPr>
-        <p:txBody>
-          <a:bodyPr wrap="square" anchor="t"/>
-          <a:lstStyle/>
-          <a:p>
-            <a:pPr algn="ctr"/>
+              <a:rPr sz="1300" b="0" i="0">
+                <a:solidFill>
+                  <a:srgbClr val="333333"/>
+                </a:solidFill>
+                <a:latin typeface="Calibri"/>
+              </a:rPr>
+              <a:t>–   </a:t>
+            </a:r>
             <a:r>
               <a:rPr sz="1300" b="1" i="0">
                 <a:solidFill>
-                  <a:srgbClr val="095292"/>
-                </a:solidFill>
-                <a:latin typeface="Calibri"/>
-              </a:rPr>
-              <a:t>DB Fiddle</a:t>
-            </a:r>
-          </a:p>
-          <a:p>
-            <a:pPr algn="ctr">
-              <a:spcBef>
-                <a:spcPts val="200"/>
-              </a:spcBef>
+                  <a:srgbClr val="333333"/>
+                </a:solidFill>
+                <a:latin typeface="Calibri"/>
+              </a:rPr>
+              <a:t>3. Precondiciones</a:t>
+            </a:r>
+            <a:r>
+              <a:rPr sz="1300" b="0" i="0">
+                <a:solidFill>
+                  <a:srgbClr val="333333"/>
+                </a:solidFill>
+                <a:latin typeface="Calibri"/>
+              </a:rPr>
+              <a:t> — lo que garantiza quien llama: la mascota existe y esta activa, la franja del veterinario esta libre.</a:t>
+            </a:r>
+          </a:p>
+          <a:p>
+            <a:pPr>
+              <a:spcAft>
+                <a:spcPts val="800"/>
+              </a:spcAft>
             </a:pPr>
             <a:r>
-              <a:rPr sz="1000" b="0" i="0">
-                <a:solidFill>
-                  <a:srgbClr val="666666"/>
-                </a:solidFill>
-                <a:latin typeface="Calibri"/>
-              </a:rPr>
-              <a:t>Pruebas</a:t>
-            </a:r>
-          </a:p>
-        </p:txBody>
-      </p:sp>
-      <p:sp>
-        <p:nvSpPr>
-          <p:cNvPr id="16" name="Rounded Rectangle 15"/>
-          <p:cNvSpPr/>
-          <p:nvPr/>
-        </p:nvSpPr>
-        <p:spPr>
-          <a:xfrm>
-            <a:off x="8109508" y="1591056"/>
-            <a:ext cx="3624986" cy="2331720"/>
-          </a:xfrm>
-          <a:prstGeom prst="roundRect">
-            <a:avLst>
-              <a:gd name="adj" fmla="val 12000"/>
-            </a:avLst>
-          </a:prstGeom>
-          <a:solidFill>
-            <a:srgbClr val="F2F2F2"/>
-          </a:solidFill>
-          <a:ln>
-            <a:noFill/>
-          </a:ln>
-        </p:spPr>
-        <p:style>
-          <a:lnRef idx="1">
-            <a:schemeClr val="accent1"/>
-          </a:lnRef>
-          <a:fillRef idx="3">
-            <a:schemeClr val="accent1"/>
-          </a:fillRef>
-          <a:effectRef idx="2">
-            <a:schemeClr val="accent1"/>
-          </a:effectRef>
-          <a:fontRef idx="minor">
-            <a:schemeClr val="lt1"/>
-          </a:fontRef>
-        </p:style>
-        <p:txBody>
-          <a:bodyPr rtlCol="0" anchor="ctr"/>
-          <a:lstStyle/>
-          <a:p>
-            <a:pPr algn="ctr"/>
-          </a:p>
-        </p:txBody>
-      </p:sp>
-      <p:sp>
-        <p:nvSpPr>
-          <p:cNvPr id="17" name="Rectangle 16"/>
-          <p:cNvSpPr/>
-          <p:nvPr/>
-        </p:nvSpPr>
-        <p:spPr>
-          <a:xfrm>
-            <a:off x="8109508" y="1591056"/>
-            <a:ext cx="3624986" cy="64008"/>
-          </a:xfrm>
-          <a:prstGeom prst="rect">
-            <a:avLst/>
-          </a:prstGeom>
-          <a:solidFill>
-            <a:srgbClr val="095292"/>
-          </a:solidFill>
-          <a:ln>
-            <a:noFill/>
-          </a:ln>
-        </p:spPr>
-        <p:style>
-          <a:lnRef idx="1">
-            <a:schemeClr val="accent1"/>
-          </a:lnRef>
-          <a:fillRef idx="3">
-            <a:schemeClr val="accent1"/>
-          </a:fillRef>
-          <a:effectRef idx="2">
-            <a:schemeClr val="accent1"/>
-          </a:effectRef>
-          <a:fontRef idx="minor">
-            <a:schemeClr val="lt1"/>
-          </a:fontRef>
-        </p:style>
-        <p:txBody>
-          <a:bodyPr rtlCol="0" anchor="ctr"/>
-          <a:lstStyle/>
-          <a:p>
-            <a:pPr algn="ctr"/>
-          </a:p>
-        </p:txBody>
-      </p:sp>
-      <p:sp>
-        <p:nvSpPr>
-          <p:cNvPr id="18" name="Rectangle 17"/>
-          <p:cNvSpPr/>
-          <p:nvPr/>
-        </p:nvSpPr>
-        <p:spPr>
-          <a:xfrm>
-            <a:off x="8109508" y="1655064"/>
-            <a:ext cx="3624986" cy="27432"/>
-          </a:xfrm>
-          <a:prstGeom prst="rect">
-            <a:avLst/>
-          </a:prstGeom>
-          <a:solidFill>
-            <a:srgbClr val="FFD000"/>
-          </a:solidFill>
-          <a:ln>
-            <a:noFill/>
-          </a:ln>
-        </p:spPr>
-        <p:style>
-          <a:lnRef idx="1">
-            <a:schemeClr val="accent1"/>
-          </a:lnRef>
-          <a:fillRef idx="3">
-            <a:schemeClr val="accent1"/>
-          </a:fillRef>
-          <a:effectRef idx="2">
-            <a:schemeClr val="accent1"/>
-          </a:effectRef>
-          <a:fontRef idx="minor">
-            <a:schemeClr val="lt1"/>
-          </a:fontRef>
-        </p:style>
-        <p:txBody>
-          <a:bodyPr rtlCol="0" anchor="ctr"/>
-          <a:lstStyle/>
-          <a:p>
-            <a:pPr algn="ctr"/>
-          </a:p>
-        </p:txBody>
-      </p:sp>
-      <p:pic>
-        <p:nvPicPr>
-          <p:cNvPr id="19" name="Picture 18" descr="google_docs.png"/>
-          <p:cNvPicPr>
-            <a:picLocks noChangeAspect="1"/>
-          </p:cNvPicPr>
-          <p:nvPr/>
-        </p:nvPicPr>
-        <p:blipFill>
-          <a:blip r:embed="rId4"/>
-          <a:stretch>
-            <a:fillRect/>
-          </a:stretch>
-        </p:blipFill>
-        <p:spPr>
-          <a:xfrm>
-            <a:off x="9295638" y="1847087"/>
-            <a:ext cx="1252728" cy="1252728"/>
-          </a:xfrm>
-          <a:prstGeom prst="rect">
-            <a:avLst/>
-          </a:prstGeom>
-        </p:spPr>
-      </p:pic>
-      <p:sp>
-        <p:nvSpPr>
-          <p:cNvPr id="20" name="TextBox 19"/>
-          <p:cNvSpPr txBox="1"/>
-          <p:nvPr/>
-        </p:nvSpPr>
-        <p:spPr>
-          <a:xfrm>
-            <a:off x="8182660" y="3191256"/>
-            <a:ext cx="3478682" cy="621792"/>
-          </a:xfrm>
-          <a:prstGeom prst="rect">
-            <a:avLst/>
-          </a:prstGeom>
-          <a:noFill/>
-        </p:spPr>
-        <p:txBody>
-          <a:bodyPr wrap="square" anchor="t"/>
-          <a:lstStyle/>
-          <a:p>
-            <a:pPr algn="ctr"/>
+              <a:rPr sz="1300" b="0" i="0">
+                <a:solidFill>
+                  <a:srgbClr val="333333"/>
+                </a:solidFill>
+                <a:latin typeface="Calibri"/>
+              </a:rPr>
+              <a:t>–   </a:t>
+            </a:r>
             <a:r>
               <a:rPr sz="1300" b="1" i="0">
                 <a:solidFill>
-                  <a:srgbClr val="095292"/>
-                </a:solidFill>
-                <a:latin typeface="Calibri"/>
-              </a:rPr>
-              <a:t>Google Docs</a:t>
-            </a:r>
-          </a:p>
-          <a:p>
-            <a:pPr algn="ctr">
-              <a:spcBef>
-                <a:spcPts val="200"/>
-              </a:spcBef>
+                  <a:srgbClr val="333333"/>
+                </a:solidFill>
+                <a:latin typeface="Calibri"/>
+              </a:rPr>
+              <a:t>4. Postcondiciones</a:t>
+            </a:r>
+            <a:r>
+              <a:rPr sz="1300" b="0" i="0">
+                <a:solidFill>
+                  <a:srgbClr val="333333"/>
+                </a:solidFill>
+                <a:latin typeface="Calibri"/>
+              </a:rPr>
+              <a:t> — lo que queda cierto si termina bien: una fila nueva en «cita» con estado «PROGRAMADA», y </a:t>
+            </a:r>
+            <a:r>
+              <a:rPr sz="1300" b="1" i="0">
+                <a:solidFill>
+                  <a:srgbClr val="333333"/>
+                </a:solidFill>
+                <a:latin typeface="Calibri"/>
+              </a:rPr>
+              <a:t>ninguna</a:t>
+            </a:r>
+            <a:r>
+              <a:rPr sz="1300" b="0" i="0">
+                <a:solidFill>
+                  <a:srgbClr val="333333"/>
+                </a:solidFill>
+                <a:latin typeface="Calibri"/>
+              </a:rPr>
+              <a:t> si termina mal.</a:t>
+            </a:r>
+          </a:p>
+          <a:p>
+            <a:pPr>
+              <a:spcAft>
+                <a:spcPts val="800"/>
+              </a:spcAft>
             </a:pPr>
             <a:r>
-              <a:rPr sz="1000" b="0" i="0">
-                <a:solidFill>
-                  <a:srgbClr val="666666"/>
-                </a:solidFill>
-                <a:latin typeface="Calibri"/>
-              </a:rPr>
-              <a:t>Contrato proc</a:t>
-            </a:r>
-          </a:p>
-        </p:txBody>
-      </p:sp>
-      <p:sp>
-        <p:nvSpPr>
-          <p:cNvPr id="21" name="TextBox 20"/>
+              <a:rPr sz="1300" b="0" i="0">
+                <a:solidFill>
+                  <a:srgbClr val="333333"/>
+                </a:solidFill>
+                <a:latin typeface="Calibri"/>
+              </a:rPr>
+              <a:t>–   </a:t>
+            </a:r>
+            <a:r>
+              <a:rPr sz="1300" b="1" i="0">
+                <a:solidFill>
+                  <a:srgbClr val="333333"/>
+                </a:solidFill>
+                <a:latin typeface="Calibri"/>
+              </a:rPr>
+              <a:t>5. Tabla de errores.</a:t>
+            </a:r>
+            <a:r>
+              <a:rPr sz="1300" b="0" i="0">
+                <a:solidFill>
+                  <a:srgbClr val="333333"/>
+                </a:solidFill>
+                <a:latin typeface="Calibri"/>
+              </a:rPr>
+              <a:t> Una fila por cada «RAISE EXCEPTION», con el </a:t>
+            </a:r>
+            <a:r>
+              <a:rPr sz="1300" b="1" i="0">
+                <a:solidFill>
+                  <a:srgbClr val="333333"/>
+                </a:solidFill>
+                <a:latin typeface="Calibri"/>
+              </a:rPr>
+              <a:t>mensaje literal</a:t>
+            </a:r>
+            <a:r>
+              <a:rPr sz="1300" b="0" i="0">
+                <a:solidFill>
+                  <a:srgbClr val="333333"/>
+                </a:solidFill>
+                <a:latin typeface="Calibri"/>
+              </a:rPr>
+              <a:t> y que debe hacer la app al recibirlo. Es lo que vuelve programable el contrato: sin el texto exacto, la app no puede distinguir un error de otro.</a:t>
+            </a:r>
+          </a:p>
+          <a:p>
+            <a:pPr>
+              <a:spcAft>
+                <a:spcPts val="800"/>
+              </a:spcAft>
+            </a:pPr>
+            <a:r>
+              <a:rPr sz="1300" b="0" i="0">
+                <a:solidFill>
+                  <a:srgbClr val="333333"/>
+                </a:solidFill>
+                <a:latin typeface="Calibri"/>
+              </a:rPr>
+              <a:t>–   </a:t>
+            </a:r>
+            <a:r>
+              <a:rPr sz="1300" b="1" i="0">
+                <a:solidFill>
+                  <a:srgbClr val="333333"/>
+                </a:solidFill>
+                <a:latin typeface="Calibri"/>
+              </a:rPr>
+              <a:t>6. Decision de diseno.</a:t>
+            </a:r>
+            <a:r>
+              <a:rPr sz="1300" b="0" i="0">
+                <a:solidFill>
+                  <a:srgbClr val="333333"/>
+                </a:solidFill>
+                <a:latin typeface="Calibri"/>
+              </a:rPr>
+              <a:t> Por que se aborta en vez de devolver un codigo en un «OUT»: porque abortar </a:t>
+            </a:r>
+            <a:r>
+              <a:rPr sz="1300" b="1" i="0">
+                <a:solidFill>
+                  <a:srgbClr val="333333"/>
+                </a:solidFill>
+                <a:latin typeface="Calibri"/>
+              </a:rPr>
+              <a:t>deshace</a:t>
+            </a:r>
+            <a:r>
+              <a:rPr sz="1300" b="0" i="0">
+                <a:solidFill>
+                  <a:srgbClr val="333333"/>
+                </a:solidFill>
+                <a:latin typeface="Calibri"/>
+              </a:rPr>
+              <a:t> lo hecho, y un codigo que nadie revise deja la cita creada igual.</a:t>
+            </a:r>
+          </a:p>
+        </p:txBody>
+      </p:sp>
+      <p:sp>
+        <p:nvSpPr>
+          <p:cNvPr id="7" name="TextBox 6"/>
           <p:cNvSpPr txBox="1"/>
           <p:nvPr/>
         </p:nvSpPr>
@@ -10472,7 +13292,7 @@
         <p:spPr>
           <a:xfrm>
             <a:off x="0" y="0"/>
-            <a:ext cx="12191695" cy="960120"/>
+            <a:ext cx="12191695" cy="1170432"/>
           </a:xfrm>
           <a:prstGeom prst="rect">
             <a:avLst/>
@@ -10514,7 +13334,7 @@
         </p:nvSpPr>
         <p:spPr>
           <a:xfrm>
-            <a:off x="0" y="960120"/>
+            <a:off x="0" y="1170432"/>
             <a:ext cx="12191695" cy="41148"/>
           </a:xfrm>
           <a:prstGeom prst="rect">
@@ -10558,7 +13378,7 @@
         <p:spPr>
           <a:xfrm>
             <a:off x="457200" y="164592"/>
-            <a:ext cx="11277295" cy="502920"/>
+            <a:ext cx="11277295" cy="384048"/>
           </a:xfrm>
           <a:prstGeom prst="rect">
             <a:avLst/>
@@ -10578,7 +13398,7 @@
                 </a:solidFill>
                 <a:latin typeface="Calibri"/>
               </a:rPr>
-              <a:t>Taller PI VetCare — contexto / por que importa</a:t>
+              <a:t>PROCEDURE o FUNCTION: cual se puede usar dentro de un SELECT</a:t>
             </a:r>
           </a:p>
         </p:txBody>
@@ -10591,8 +13411,42 @@
         </p:nvSpPr>
         <p:spPr>
           <a:xfrm>
-            <a:off x="457200" y="1170432"/>
-            <a:ext cx="11277295" cy="5230368"/>
+            <a:off x="457200" y="566928"/>
+            <a:ext cx="11277295" cy="411480"/>
+          </a:xfrm>
+          <a:prstGeom prst="rect">
+            <a:avLst/>
+          </a:prstGeom>
+          <a:noFill/>
+        </p:spPr>
+        <p:txBody>
+          <a:bodyPr wrap="square">
+            <a:spAutoFit/>
+          </a:bodyPr>
+          <a:lstStyle/>
+          <a:p>
+            <a:r>
+              <a:rPr sz="1400" b="0" i="0">
+                <a:solidFill>
+                  <a:srgbClr val="B8D8EE"/>
+                </a:solidFill>
+                <a:latin typeface="Calibri"/>
+              </a:rPr>
+              <a:t>PROCEDURE y FUNCTION no son sinonimos: si el resultado tiene que entrar en un SELECT, es FUNCTION. Son 10 de los 100 puntos y es la bisagra con la Clase 4</a:t>
+            </a:r>
+          </a:p>
+        </p:txBody>
+      </p:sp>
+      <p:sp>
+        <p:nvSpPr>
+          <p:cNvPr id="6" name="TextBox 5"/>
+          <p:cNvSpPr txBox="1"/>
+          <p:nvPr/>
+        </p:nvSpPr>
+        <p:spPr>
+          <a:xfrm>
+            <a:off x="457200" y="1380744"/>
+            <a:ext cx="11277295" cy="5020056"/>
           </a:xfrm>
           <a:prstGeom prst="rect">
             <a:avLst/>
@@ -10611,7 +13465,7 @@
               </a:spcAft>
             </a:pPr>
             <a:r>
-              <a:rPr sz="1600" b="0" i="0">
+              <a:rPr sz="1300" b="0" i="0">
                 <a:solidFill>
                   <a:srgbClr val="333333"/>
                 </a:solidFill>
@@ -10620,22 +13474,40 @@
               <a:t>–   </a:t>
             </a:r>
             <a:r>
-              <a:rPr sz="1600" b="1" i="0">
-                <a:solidFill>
-                  <a:srgbClr val="333333"/>
-                </a:solidFill>
-                <a:latin typeface="Calibri"/>
-              </a:rPr>
-              <a:t>Por qué importa al PI:</a:t>
-            </a:r>
-            <a:r>
-              <a:rPr sz="1600" b="0" i="0">
-                <a:solidFill>
-                  <a:srgbClr val="333333"/>
-                </a:solidFill>
-                <a:latin typeface="Calibri"/>
-              </a:rPr>
-              <a:t> la regla vive en un proc reutilizable.</a:t>
+              <a:rPr sz="1300" b="1" i="0">
+                <a:solidFill>
+                  <a:srgbClr val="333333"/>
+                </a:solidFill>
+                <a:latin typeface="Calibri"/>
+              </a:rPr>
+              <a:t>«FUNCTION»: devuelve un valor y se invoca DENTRO de una consulta.</a:t>
+            </a:r>
+            <a:r>
+              <a:rPr sz="1300" b="0" i="0">
+                <a:solidFill>
+                  <a:srgbClr val="333333"/>
+                </a:solidFill>
+                <a:latin typeface="Calibri"/>
+              </a:rPr>
+              <a:t> «CREATE FUNCTION fn_precio(p_especie TEXT) RETURNS NUMERIC LANGUAGE plpgsql AS $fn$ ... RETURN v_precio; ... $fn$;» y se usa «SELECT nombre, fn_precio(especie) FROM mascota;». Es la </a:t>
+            </a:r>
+            <a:r>
+              <a:rPr sz="1300" b="1" i="0">
+                <a:solidFill>
+                  <a:srgbClr val="333333"/>
+                </a:solidFill>
+                <a:latin typeface="Calibri"/>
+              </a:rPr>
+              <a:t>unica de las dos</a:t>
+            </a:r>
+            <a:r>
+              <a:rPr sz="1300" b="0" i="0">
+                <a:solidFill>
+                  <a:srgbClr val="333333"/>
+                </a:solidFill>
+                <a:latin typeface="Calibri"/>
+              </a:rPr>
+              <a:t> que cabe en la lista de columnas de un «SELECT», en un «WHERE» o en un «ORDER BY».</a:t>
             </a:r>
           </a:p>
           <a:p>
@@ -10645,20 +13517,194 @@
               </a:spcAft>
             </a:pPr>
             <a:r>
-              <a:rPr sz="1600" b="0" i="0">
-                <a:solidFill>
-                  <a:srgbClr val="333333"/>
-                </a:solidFill>
-                <a:latin typeface="Calibri"/>
-              </a:rPr>
-              <a:t>–   La app futura llama al proc.</a:t>
-            </a:r>
-          </a:p>
-        </p:txBody>
-      </p:sp>
-      <p:sp>
-        <p:nvSpPr>
-          <p:cNvPr id="6" name="TextBox 5"/>
+              <a:rPr sz="1300" b="0" i="0">
+                <a:solidFill>
+                  <a:srgbClr val="333333"/>
+                </a:solidFill>
+                <a:latin typeface="Calibri"/>
+              </a:rPr>
+              <a:t>–   </a:t>
+            </a:r>
+            <a:r>
+              <a:rPr sz="1300" b="1" i="0">
+                <a:solidFill>
+                  <a:srgbClr val="333333"/>
+                </a:solidFill>
+                <a:latin typeface="Calibri"/>
+              </a:rPr>
+              <a:t>«PROCEDURE»: ejecuta pasos y se invoca como sentencia suelta.</a:t>
+            </a:r>
+            <a:r>
+              <a:rPr sz="1300" b="0" i="0">
+                <a:solidFill>
+                  <a:srgbClr val="333333"/>
+                </a:solidFill>
+                <a:latin typeface="Calibri"/>
+              </a:rPr>
+              <a:t> «CALL sp_agendar_cita(3, 7, '2026-09-01 10:00');». </a:t>
+            </a:r>
+            <a:r>
+              <a:rPr sz="1300" b="1" i="0">
+                <a:solidFill>
+                  <a:srgbClr val="333333"/>
+                </a:solidFill>
+                <a:latin typeface="Calibri"/>
+              </a:rPr>
+              <a:t>No</a:t>
+            </a:r>
+            <a:r>
+              <a:rPr sz="1300" b="0" i="0">
+                <a:solidFill>
+                  <a:srgbClr val="333333"/>
+                </a:solidFill>
+                <a:latin typeface="Calibri"/>
+              </a:rPr>
+              <a:t> se puede poner en un «SELECT». Si lo intentas, el motor responde «sp_agendar_cita(...) is not a function».</a:t>
+            </a:r>
+          </a:p>
+          <a:p>
+            <a:pPr>
+              <a:spcAft>
+                <a:spcPts val="800"/>
+              </a:spcAft>
+            </a:pPr>
+            <a:r>
+              <a:rPr sz="1300" b="0" i="0">
+                <a:solidFill>
+                  <a:srgbClr val="333333"/>
+                </a:solidFill>
+                <a:latin typeface="Calibri"/>
+              </a:rPr>
+              <a:t>–   </a:t>
+            </a:r>
+            <a:r>
+              <a:rPr sz="1300" b="1" i="0">
+                <a:solidFill>
+                  <a:srgbClr val="333333"/>
+                </a:solidFill>
+                <a:latin typeface="Calibri"/>
+              </a:rPr>
+              <a:t>Las dos pueden ser «LANGUAGE plpgsql».</a:t>
+            </a:r>
+            <a:r>
+              <a:rPr sz="1300" b="0" i="0">
+                <a:solidFill>
+                  <a:srgbClr val="333333"/>
+                </a:solidFill>
+                <a:latin typeface="Calibri"/>
+              </a:rPr>
+              <a:t> El lenguaje no decide nada: es falso que una funcion necesite «LANGUAGE sql» para poder retornar un valor. «sp_agendar_cita» y «fn_precio» son las dos «plpgsql».</a:t>
+            </a:r>
+          </a:p>
+          <a:p>
+            <a:pPr>
+              <a:spcAft>
+                <a:spcPts val="800"/>
+              </a:spcAft>
+            </a:pPr>
+            <a:r>
+              <a:rPr sz="1300" b="0" i="0">
+                <a:solidFill>
+                  <a:srgbClr val="333333"/>
+                </a:solidFill>
+                <a:latin typeface="Calibri"/>
+              </a:rPr>
+              <a:t>–   </a:t>
+            </a:r>
+            <a:r>
+              <a:rPr sz="1300" b="1" i="0">
+                <a:solidFill>
+                  <a:srgbClr val="333333"/>
+                </a:solidFill>
+                <a:latin typeface="Calibri"/>
+              </a:rPr>
+              <a:t>Un «PROCEDURE» si admite parametros «OUT»</a:t>
+            </a:r>
+            <a:r>
+              <a:rPr sz="1300" b="0" i="0">
+                <a:solidFill>
+                  <a:srgbClr val="333333"/>
+                </a:solidFill>
+                <a:latin typeface="Calibri"/>
+              </a:rPr>
+              <a:t> —y aun asi </a:t>
+            </a:r>
+            <a:r>
+              <a:rPr sz="1300" b="1" i="0">
+                <a:solidFill>
+                  <a:srgbClr val="333333"/>
+                </a:solidFill>
+                <a:latin typeface="Calibri"/>
+              </a:rPr>
+              <a:t>sigue sin poder usarse dentro de un «SELECT»</a:t>
+            </a:r>
+            <a:r>
+              <a:rPr sz="1300" b="0" i="0">
+                <a:solidFill>
+                  <a:srgbClr val="333333"/>
+                </a:solidFill>
+                <a:latin typeface="Calibri"/>
+              </a:rPr>
+              <a:t>. Devolver por «OUT» no es lo mismo que ser invocable en una consulta, y no es «la unica forma de retornar un valor».</a:t>
+            </a:r>
+          </a:p>
+          <a:p>
+            <a:pPr>
+              <a:spcAft>
+                <a:spcPts val="800"/>
+              </a:spcAft>
+            </a:pPr>
+            <a:r>
+              <a:rPr sz="1300" b="0" i="0">
+                <a:solidFill>
+                  <a:srgbClr val="333333"/>
+                </a:solidFill>
+                <a:latin typeface="Calibri"/>
+              </a:rPr>
+              <a:t>–   </a:t>
+            </a:r>
+            <a:r>
+              <a:rPr sz="1300" b="1" i="0">
+                <a:solidFill>
+                  <a:srgbClr val="333333"/>
+                </a:solidFill>
+                <a:latin typeface="Calibri"/>
+              </a:rPr>
+              <a:t>Lo que solo puede el procedimiento: manejar la transaccion.</a:t>
+            </a:r>
+            <a:r>
+              <a:rPr sz="1300" b="0" i="0">
+                <a:solidFill>
+                  <a:srgbClr val="333333"/>
+                </a:solidFill>
+                <a:latin typeface="Calibri"/>
+              </a:rPr>
+              <a:t> Un «PROCEDURE» puede hacer «COMMIT» o «ROLLBACK» adentro; una «FUNCTION» corre dentro de la transaccion de quien la llamo. Por eso agendar es procedimiento y </a:t>
+            </a:r>
+            <a:r>
+              <a:rPr sz="1300" b="1" i="0">
+                <a:solidFill>
+                  <a:srgbClr val="333333"/>
+                </a:solidFill>
+                <a:latin typeface="Calibri"/>
+              </a:rPr>
+              <a:t>la tarifa de la Clase 4 sera funcion</a:t>
+            </a:r>
+            <a:r>
+              <a:rPr sz="1300" b="0" i="0">
+                <a:solidFill>
+                  <a:srgbClr val="333333"/>
+                </a:solidFill>
+                <a:latin typeface="Calibri"/>
+              </a:rPr>
+              <a:t>.</a:t>
+            </a:r>
+          </a:p>
+        </p:txBody>
+      </p:sp>
+      <p:sp>
+        <p:nvSpPr>
+          <p:cNvPr id="7" name="TextBox 6"/>
           <p:cNvSpPr txBox="1"/>
           <p:nvPr/>
         </p:nvSpPr>

--- a/Bases de Datos II/Clases/Clase 3 - Procedimientos almacenados/Presentacion.pptx
+++ b/Bases de Datos II/Clases/Clase 3 - Procedimientos almacenados/Presentacion.pptx
@@ -24,6 +24,7 @@
     <p:sldId id="272" r:id="rId23"/>
     <p:sldId id="273" r:id="rId24"/>
     <p:sldId id="274" r:id="rId25"/>
+    <p:sldId id="275" r:id="rId26"/>
   </p:sldIdLst>
   <p:sldSz cx="12191695" cy="6858000" type="screen4x3"/>
   <p:notesSz cx="6858000" cy="9144000"/>
@@ -3518,7 +3519,7 @@
         <p:spPr>
           <a:xfrm>
             <a:off x="0" y="0"/>
-            <a:ext cx="12191695" cy="960120"/>
+            <a:ext cx="12191695" cy="1170432"/>
           </a:xfrm>
           <a:prstGeom prst="rect">
             <a:avLst/>
@@ -3560,7 +3561,7 @@
         </p:nvSpPr>
         <p:spPr>
           <a:xfrm>
-            <a:off x="0" y="960120"/>
+            <a:off x="0" y="1170432"/>
             <a:ext cx="12191695" cy="41148"/>
           </a:xfrm>
           <a:prstGeom prst="rect">
@@ -3604,7 +3605,7 @@
         <p:spPr>
           <a:xfrm>
             <a:off x="457200" y="164592"/>
-            <a:ext cx="11277295" cy="502920"/>
+            <a:ext cx="11277295" cy="384048"/>
           </a:xfrm>
           <a:prstGeom prst="rect">
             <a:avLst/>
@@ -3624,7 +3625,7 @@
                 </a:solidFill>
                 <a:latin typeface="Calibri"/>
               </a:rPr>
-              <a:t>Demo del dia</a:t>
+              <a:t>PROCEDURE o FUNCTION: cual se puede usar dentro de un SELECT</a:t>
             </a:r>
           </a:p>
         </p:txBody>
@@ -3637,8 +3638,42 @@
         </p:nvSpPr>
         <p:spPr>
           <a:xfrm>
-            <a:off x="457200" y="1170432"/>
-            <a:ext cx="11277295" cy="5230368"/>
+            <a:off x="457200" y="566928"/>
+            <a:ext cx="11277295" cy="411480"/>
+          </a:xfrm>
+          <a:prstGeom prst="rect">
+            <a:avLst/>
+          </a:prstGeom>
+          <a:noFill/>
+        </p:spPr>
+        <p:txBody>
+          <a:bodyPr wrap="square">
+            <a:spAutoFit/>
+          </a:bodyPr>
+          <a:lstStyle/>
+          <a:p>
+            <a:r>
+              <a:rPr sz="1400" b="0" i="0">
+                <a:solidFill>
+                  <a:srgbClr val="B8D8EE"/>
+                </a:solidFill>
+                <a:latin typeface="Calibri"/>
+              </a:rPr>
+              <a:t>PROCEDURE y FUNCTION no son sinonimos: si el resultado tiene que entrar en un SELECT, es FUNCTION. Son 10 de los 100 puntos y es la bisagra con la Clase 4</a:t>
+            </a:r>
+          </a:p>
+        </p:txBody>
+      </p:sp>
+      <p:sp>
+        <p:nvSpPr>
+          <p:cNvPr id="6" name="TextBox 5"/>
+          <p:cNvSpPr txBox="1"/>
+          <p:nvPr/>
+        </p:nvSpPr>
+        <p:spPr>
+          <a:xfrm>
+            <a:off x="457200" y="1380744"/>
+            <a:ext cx="11277295" cy="5020056"/>
           </a:xfrm>
           <a:prstGeom prst="rect">
             <a:avLst/>
@@ -3657,7 +3692,7 @@
               </a:spcAft>
             </a:pPr>
             <a:r>
-              <a:rPr sz="1600" b="0" i="0">
+              <a:rPr sz="2000" b="0" i="0">
                 <a:solidFill>
                   <a:srgbClr val="333333"/>
                 </a:solidFill>
@@ -3666,22 +3701,40 @@
               <a:t>–   </a:t>
             </a:r>
             <a:r>
-              <a:rPr sz="1600" b="1" i="0">
-                <a:solidFill>
-                  <a:srgbClr val="333333"/>
-                </a:solidFill>
-                <a:latin typeface="Calibri"/>
-              </a:rPr>
-              <a:t>Herramienta:</a:t>
-            </a:r>
-            <a:r>
-              <a:rPr sz="1600" b="0" i="0">
-                <a:solidFill>
-                  <a:srgbClr val="333333"/>
-                </a:solidFill>
-                <a:latin typeface="Calibri"/>
-              </a:rPr>
-              <a:t> ExamLab (PostgreSQL) + Google Docs</a:t>
+              <a:rPr sz="2000" b="1" i="0">
+                <a:solidFill>
+                  <a:srgbClr val="333333"/>
+                </a:solidFill>
+                <a:latin typeface="Calibri"/>
+              </a:rPr>
+              <a:t>«FUNCTION»: devuelve un valor y se invoca DENTRO de una consulta.</a:t>
+            </a:r>
+            <a:r>
+              <a:rPr sz="2000" b="0" i="0">
+                <a:solidFill>
+                  <a:srgbClr val="333333"/>
+                </a:solidFill>
+                <a:latin typeface="Calibri"/>
+              </a:rPr>
+              <a:t> «CREATE FUNCTION fn_precio(p_especie TEXT) RETURNS NUMERIC LANGUAGE plpgsql AS $fn$ ... RETURN v_precio; ... $fn$;» y se usa «SELECT nombre, fn_precio(especie) FROM mascota;». Es la </a:t>
+            </a:r>
+            <a:r>
+              <a:rPr sz="2000" b="1" i="0">
+                <a:solidFill>
+                  <a:srgbClr val="333333"/>
+                </a:solidFill>
+                <a:latin typeface="Calibri"/>
+              </a:rPr>
+              <a:t>unica de las dos</a:t>
+            </a:r>
+            <a:r>
+              <a:rPr sz="2000" b="0" i="0">
+                <a:solidFill>
+                  <a:srgbClr val="333333"/>
+                </a:solidFill>
+                <a:latin typeface="Calibri"/>
+              </a:rPr>
+              <a:t> que cabe en la lista de columnas de un «SELECT», en un «WHERE» o en un «ORDER BY».</a:t>
             </a:r>
           </a:p>
           <a:p>
@@ -3691,7 +3744,7 @@
               </a:spcAft>
             </a:pPr>
             <a:r>
-              <a:rPr sz="1600" b="0" i="0">
+              <a:rPr sz="2000" b="0" i="0">
                 <a:solidFill>
                   <a:srgbClr val="333333"/>
                 </a:solidFill>
@@ -3700,22 +3753,40 @@
               <a:t>–   </a:t>
             </a:r>
             <a:r>
-              <a:rPr sz="1600" b="1" i="0">
-                <a:solidFill>
-                  <a:srgbClr val="333333"/>
-                </a:solidFill>
-                <a:latin typeface="Calibri"/>
-              </a:rPr>
-              <a:t>Demo:</a:t>
-            </a:r>
-            <a:r>
-              <a:rPr sz="1600" b="0" i="0">
-                <a:solidFill>
-                  <a:srgbClr val="333333"/>
-                </a:solidFill>
-                <a:latin typeface="Calibri"/>
-              </a:rPr>
-              <a:t> sp_agendar_cita en PL/pgSQL dentro de ExamLab: las 3 validaciones con RAISE EXCEPTION y la bateria de bloques DO que las prueba.</a:t>
+              <a:rPr sz="2000" b="1" i="0">
+                <a:solidFill>
+                  <a:srgbClr val="333333"/>
+                </a:solidFill>
+                <a:latin typeface="Calibri"/>
+              </a:rPr>
+              <a:t>«PROCEDURE»: ejecuta pasos y se invoca como sentencia suelta.</a:t>
+            </a:r>
+            <a:r>
+              <a:rPr sz="2000" b="0" i="0">
+                <a:solidFill>
+                  <a:srgbClr val="333333"/>
+                </a:solidFill>
+                <a:latin typeface="Calibri"/>
+              </a:rPr>
+              <a:t> «CALL sp_agendar_cita(3, 7, '2026-09-01 10:00');». </a:t>
+            </a:r>
+            <a:r>
+              <a:rPr sz="2000" b="1" i="0">
+                <a:solidFill>
+                  <a:srgbClr val="333333"/>
+                </a:solidFill>
+                <a:latin typeface="Calibri"/>
+              </a:rPr>
+              <a:t>No</a:t>
+            </a:r>
+            <a:r>
+              <a:rPr sz="2000" b="0" i="0">
+                <a:solidFill>
+                  <a:srgbClr val="333333"/>
+                </a:solidFill>
+                <a:latin typeface="Calibri"/>
+              </a:rPr>
+              <a:t> se puede poner en un «SELECT». Si lo intentas, el motor responde «sp_agendar_cita(...) is not a function».</a:t>
             </a:r>
           </a:p>
           <a:p>
@@ -3725,13 +3796,31 @@
               </a:spcAft>
             </a:pPr>
             <a:r>
-              <a:rPr sz="1600" b="0" i="0">
-                <a:solidFill>
-                  <a:srgbClr val="333333"/>
-                </a:solidFill>
-                <a:latin typeface="Calibri"/>
-              </a:rPr>
-              <a:t>–   Sigan el mismo dominio VetCare (no inventen otro caso).</a:t>
+              <a:rPr sz="2000" b="0" i="0">
+                <a:solidFill>
+                  <a:srgbClr val="333333"/>
+                </a:solidFill>
+                <a:latin typeface="Calibri"/>
+              </a:rPr>
+              <a:t>–   </a:t>
+            </a:r>
+            <a:r>
+              <a:rPr sz="2000" b="1" i="0">
+                <a:solidFill>
+                  <a:srgbClr val="333333"/>
+                </a:solidFill>
+                <a:latin typeface="Calibri"/>
+              </a:rPr>
+              <a:t>Las dos pueden ser «LANGUAGE plpgsql».</a:t>
+            </a:r>
+            <a:r>
+              <a:rPr sz="2000" b="0" i="0">
+                <a:solidFill>
+                  <a:srgbClr val="333333"/>
+                </a:solidFill>
+                <a:latin typeface="Calibri"/>
+              </a:rPr>
+              <a:t> El lenguaje no decide nada: es falso que una funcion necesite «LANGUAGE sql» para poder retornar un valor. «sp_agendar_cita» y «fn_precio» son las dos «plpgsql».</a:t>
             </a:r>
           </a:p>
           <a:p>
@@ -3741,20 +3830,108 @@
               </a:spcAft>
             </a:pPr>
             <a:r>
-              <a:rPr sz="1600" b="0" i="0">
-                <a:solidFill>
-                  <a:srgbClr val="333333"/>
-                </a:solidFill>
-                <a:latin typeface="Calibri"/>
-              </a:rPr>
-              <a:t>–   Al final de la demo: dejar enlace/script compartible al grupo.</a:t>
-            </a:r>
-          </a:p>
-        </p:txBody>
-      </p:sp>
-      <p:sp>
-        <p:nvSpPr>
-          <p:cNvPr id="6" name="TextBox 5"/>
+              <a:rPr sz="2000" b="0" i="0">
+                <a:solidFill>
+                  <a:srgbClr val="333333"/>
+                </a:solidFill>
+                <a:latin typeface="Calibri"/>
+              </a:rPr>
+              <a:t>–   </a:t>
+            </a:r>
+            <a:r>
+              <a:rPr sz="2000" b="1" i="0">
+                <a:solidFill>
+                  <a:srgbClr val="333333"/>
+                </a:solidFill>
+                <a:latin typeface="Calibri"/>
+              </a:rPr>
+              <a:t>Un «PROCEDURE» si admite parametros «OUT»</a:t>
+            </a:r>
+            <a:r>
+              <a:rPr sz="2000" b="0" i="0">
+                <a:solidFill>
+                  <a:srgbClr val="333333"/>
+                </a:solidFill>
+                <a:latin typeface="Calibri"/>
+              </a:rPr>
+              <a:t> —y aun asi </a:t>
+            </a:r>
+            <a:r>
+              <a:rPr sz="2000" b="1" i="0">
+                <a:solidFill>
+                  <a:srgbClr val="333333"/>
+                </a:solidFill>
+                <a:latin typeface="Calibri"/>
+              </a:rPr>
+              <a:t>sigue sin poder usarse dentro de un «SELECT»</a:t>
+            </a:r>
+            <a:r>
+              <a:rPr sz="2000" b="0" i="0">
+                <a:solidFill>
+                  <a:srgbClr val="333333"/>
+                </a:solidFill>
+                <a:latin typeface="Calibri"/>
+              </a:rPr>
+              <a:t>. Devolver por «OUT» no es lo mismo que ser invocable en una consulta, y no es «la unica forma de retornar un valor».</a:t>
+            </a:r>
+          </a:p>
+          <a:p>
+            <a:pPr>
+              <a:spcAft>
+                <a:spcPts val="800"/>
+              </a:spcAft>
+            </a:pPr>
+            <a:r>
+              <a:rPr sz="2000" b="0" i="0">
+                <a:solidFill>
+                  <a:srgbClr val="333333"/>
+                </a:solidFill>
+                <a:latin typeface="Calibri"/>
+              </a:rPr>
+              <a:t>–   </a:t>
+            </a:r>
+            <a:r>
+              <a:rPr sz="2000" b="1" i="0">
+                <a:solidFill>
+                  <a:srgbClr val="333333"/>
+                </a:solidFill>
+                <a:latin typeface="Calibri"/>
+              </a:rPr>
+              <a:t>Lo que solo puede el procedimiento: manejar la transaccion.</a:t>
+            </a:r>
+            <a:r>
+              <a:rPr sz="2000" b="0" i="0">
+                <a:solidFill>
+                  <a:srgbClr val="333333"/>
+                </a:solidFill>
+                <a:latin typeface="Calibri"/>
+              </a:rPr>
+              <a:t> Un «PROCEDURE» puede hacer «COMMIT» o «ROLLBACK» adentro; una «FUNCTION» corre dentro de la transaccion de quien la llamo. Por eso agendar es procedimiento y </a:t>
+            </a:r>
+            <a:r>
+              <a:rPr sz="2000" b="1" i="0">
+                <a:solidFill>
+                  <a:srgbClr val="333333"/>
+                </a:solidFill>
+                <a:latin typeface="Calibri"/>
+              </a:rPr>
+              <a:t>la tarifa de la Clase 4 sera funcion</a:t>
+            </a:r>
+            <a:r>
+              <a:rPr sz="2000" b="0" i="0">
+                <a:solidFill>
+                  <a:srgbClr val="333333"/>
+                </a:solidFill>
+                <a:latin typeface="Calibri"/>
+              </a:rPr>
+              <a:t>.</a:t>
+            </a:r>
+          </a:p>
+        </p:txBody>
+      </p:sp>
+      <p:sp>
+        <p:nvSpPr>
+          <p:cNvPr id="7" name="TextBox 6"/>
           <p:cNvSpPr txBox="1"/>
           <p:nvPr/>
         </p:nvSpPr>
@@ -3822,7 +3999,7 @@
         <p:spPr>
           <a:xfrm>
             <a:off x="0" y="0"/>
-            <a:ext cx="12191695" cy="1170432"/>
+            <a:ext cx="12191695" cy="960120"/>
           </a:xfrm>
           <a:prstGeom prst="rect">
             <a:avLst/>
@@ -3864,7 +4041,7 @@
         </p:nvSpPr>
         <p:spPr>
           <a:xfrm>
-            <a:off x="0" y="1170432"/>
+            <a:off x="0" y="960120"/>
             <a:ext cx="12191695" cy="41148"/>
           </a:xfrm>
           <a:prstGeom prst="rect">
@@ -3908,7 +4085,7 @@
         <p:spPr>
           <a:xfrm>
             <a:off x="457200" y="164592"/>
-            <a:ext cx="11277295" cy="384048"/>
+            <a:ext cx="11277295" cy="502920"/>
           </a:xfrm>
           <a:prstGeom prst="rect">
             <a:avLst/>
@@ -3928,7 +4105,7 @@
                 </a:solidFill>
                 <a:latin typeface="Calibri"/>
               </a:rPr>
-              <a:t>Herramientas de hoy</a:t>
+              <a:t>Demo del dia</a:t>
             </a:r>
           </a:p>
         </p:txBody>
@@ -3941,8 +4118,8 @@
         </p:nvSpPr>
         <p:spPr>
           <a:xfrm>
-            <a:off x="457200" y="566928"/>
-            <a:ext cx="11277295" cy="411480"/>
+            <a:off x="457200" y="1170432"/>
+            <a:ext cx="11277295" cy="5230368"/>
           </a:xfrm>
           <a:prstGeom prst="rect">
             <a:avLst/>
@@ -3955,837 +4132,110 @@
           </a:bodyPr>
           <a:lstStyle/>
           <a:p>
-            <a:r>
-              <a:rPr sz="1400" b="0" i="0">
-                <a:solidFill>
-                  <a:srgbClr val="B8D8EE"/>
-                </a:solidFill>
-                <a:latin typeface="Calibri"/>
-              </a:rPr>
-              <a:t>Gratis · navegador o free tier</a:t>
-            </a:r>
-          </a:p>
-        </p:txBody>
-      </p:sp>
-      <p:sp>
-        <p:nvSpPr>
-          <p:cNvPr id="6" name="Rounded Rectangle 5"/>
-          <p:cNvSpPr/>
-          <p:nvPr/>
-        </p:nvSpPr>
-        <p:spPr>
-          <a:xfrm>
-            <a:off x="457200" y="1591056"/>
-            <a:ext cx="3624986" cy="2299716"/>
-          </a:xfrm>
-          <a:prstGeom prst="roundRect">
-            <a:avLst>
-              <a:gd name="adj" fmla="val 12000"/>
-            </a:avLst>
-          </a:prstGeom>
-          <a:solidFill>
-            <a:srgbClr val="F2F2F2"/>
-          </a:solidFill>
-          <a:ln>
-            <a:noFill/>
-          </a:ln>
-        </p:spPr>
-        <p:style>
-          <a:lnRef idx="1">
-            <a:schemeClr val="accent1"/>
-          </a:lnRef>
-          <a:fillRef idx="3">
-            <a:schemeClr val="accent1"/>
-          </a:fillRef>
-          <a:effectRef idx="2">
-            <a:schemeClr val="accent1"/>
-          </a:effectRef>
-          <a:fontRef idx="minor">
-            <a:schemeClr val="lt1"/>
-          </a:fontRef>
-        </p:style>
-        <p:txBody>
-          <a:bodyPr rtlCol="0" anchor="ctr"/>
-          <a:lstStyle/>
-          <a:p>
-            <a:pPr algn="ctr"/>
-          </a:p>
-        </p:txBody>
-      </p:sp>
-      <p:sp>
-        <p:nvSpPr>
-          <p:cNvPr id="7" name="Rectangle 6"/>
-          <p:cNvSpPr/>
-          <p:nvPr/>
-        </p:nvSpPr>
-        <p:spPr>
-          <a:xfrm>
-            <a:off x="457200" y="1591056"/>
-            <a:ext cx="3624986" cy="64008"/>
-          </a:xfrm>
-          <a:prstGeom prst="rect">
-            <a:avLst/>
-          </a:prstGeom>
-          <a:solidFill>
-            <a:srgbClr val="095292"/>
-          </a:solidFill>
-          <a:ln>
-            <a:noFill/>
-          </a:ln>
-        </p:spPr>
-        <p:style>
-          <a:lnRef idx="1">
-            <a:schemeClr val="accent1"/>
-          </a:lnRef>
-          <a:fillRef idx="3">
-            <a:schemeClr val="accent1"/>
-          </a:fillRef>
-          <a:effectRef idx="2">
-            <a:schemeClr val="accent1"/>
-          </a:effectRef>
-          <a:fontRef idx="minor">
-            <a:schemeClr val="lt1"/>
-          </a:fontRef>
-        </p:style>
-        <p:txBody>
-          <a:bodyPr rtlCol="0" anchor="ctr"/>
-          <a:lstStyle/>
-          <a:p>
-            <a:pPr algn="ctr"/>
-          </a:p>
-        </p:txBody>
-      </p:sp>
-      <p:sp>
-        <p:nvSpPr>
-          <p:cNvPr id="8" name="Rectangle 7"/>
-          <p:cNvSpPr/>
-          <p:nvPr/>
-        </p:nvSpPr>
-        <p:spPr>
-          <a:xfrm>
-            <a:off x="457200" y="1655064"/>
-            <a:ext cx="3624986" cy="27432"/>
-          </a:xfrm>
-          <a:prstGeom prst="rect">
-            <a:avLst/>
-          </a:prstGeom>
-          <a:solidFill>
-            <a:srgbClr val="FFD000"/>
-          </a:solidFill>
-          <a:ln>
-            <a:noFill/>
-          </a:ln>
-        </p:spPr>
-        <p:style>
-          <a:lnRef idx="1">
-            <a:schemeClr val="accent1"/>
-          </a:lnRef>
-          <a:fillRef idx="3">
-            <a:schemeClr val="accent1"/>
-          </a:fillRef>
-          <a:effectRef idx="2">
-            <a:schemeClr val="accent1"/>
-          </a:effectRef>
-          <a:fontRef idx="minor">
-            <a:schemeClr val="lt1"/>
-          </a:fontRef>
-        </p:style>
-        <p:txBody>
-          <a:bodyPr rtlCol="0" anchor="ctr"/>
-          <a:lstStyle/>
-          <a:p>
-            <a:pPr algn="ctr"/>
-          </a:p>
-        </p:txBody>
-      </p:sp>
-      <p:pic>
-        <p:nvPicPr>
-          <p:cNvPr id="9" name="Picture 8" descr="examlab.png"/>
-          <p:cNvPicPr>
-            <a:picLocks noChangeAspect="1"/>
-          </p:cNvPicPr>
-          <p:nvPr/>
-        </p:nvPicPr>
-        <p:blipFill>
-          <a:blip r:embed="rId2"/>
-          <a:stretch>
-            <a:fillRect/>
-          </a:stretch>
-        </p:blipFill>
-        <p:spPr>
-          <a:xfrm>
-            <a:off x="1659331" y="1847087"/>
-            <a:ext cx="1220724" cy="1220724"/>
-          </a:xfrm>
-          <a:prstGeom prst="rect">
-            <a:avLst/>
-          </a:prstGeom>
-        </p:spPr>
-      </p:pic>
-      <p:sp>
-        <p:nvSpPr>
-          <p:cNvPr id="10" name="TextBox 9"/>
-          <p:cNvSpPr txBox="1"/>
-          <p:nvPr/>
-        </p:nvSpPr>
-        <p:spPr>
-          <a:xfrm>
-            <a:off x="530352" y="3159251"/>
-            <a:ext cx="3478682" cy="621792"/>
-          </a:xfrm>
-          <a:prstGeom prst="rect">
-            <a:avLst/>
-          </a:prstGeom>
-          <a:noFill/>
-        </p:spPr>
-        <p:txBody>
-          <a:bodyPr wrap="square" anchor="t"/>
-          <a:lstStyle/>
-          <a:p>
-            <a:pPr algn="ctr"/>
-            <a:r>
-              <a:rPr sz="1300" b="1" i="0">
-                <a:solidFill>
-                  <a:srgbClr val="095292"/>
-                </a:solidFill>
-                <a:latin typeface="Calibri"/>
-              </a:rPr>
-              <a:t>ExamLab</a:t>
-            </a:r>
-          </a:p>
-          <a:p>
-            <a:pPr algn="ctr">
-              <a:spcBef>
-                <a:spcPts val="200"/>
-              </a:spcBef>
+            <a:pPr>
+              <a:spcAft>
+                <a:spcPts val="800"/>
+              </a:spcAft>
             </a:pPr>
             <a:r>
-              <a:rPr sz="1000" b="0" i="0">
-                <a:solidFill>
-                  <a:srgbClr val="666666"/>
-                </a:solidFill>
-                <a:latin typeface="Calibri"/>
-              </a:rPr>
-              <a:t>PL/pgSQL: aqui corre</a:t>
-            </a:r>
-          </a:p>
-        </p:txBody>
-      </p:sp>
-      <p:sp>
-        <p:nvSpPr>
-          <p:cNvPr id="11" name="Rounded Rectangle 10"/>
-          <p:cNvSpPr/>
-          <p:nvPr/>
-        </p:nvSpPr>
-        <p:spPr>
-          <a:xfrm>
-            <a:off x="4283354" y="1591056"/>
-            <a:ext cx="3624986" cy="2299716"/>
-          </a:xfrm>
-          <a:prstGeom prst="roundRect">
-            <a:avLst>
-              <a:gd name="adj" fmla="val 12000"/>
-            </a:avLst>
-          </a:prstGeom>
-          <a:solidFill>
-            <a:srgbClr val="F2F2F2"/>
-          </a:solidFill>
-          <a:ln>
-            <a:noFill/>
-          </a:ln>
-        </p:spPr>
-        <p:style>
-          <a:lnRef idx="1">
-            <a:schemeClr val="accent1"/>
-          </a:lnRef>
-          <a:fillRef idx="3">
-            <a:schemeClr val="accent1"/>
-          </a:fillRef>
-          <a:effectRef idx="2">
-            <a:schemeClr val="accent1"/>
-          </a:effectRef>
-          <a:fontRef idx="minor">
-            <a:schemeClr val="lt1"/>
-          </a:fontRef>
-        </p:style>
-        <p:txBody>
-          <a:bodyPr rtlCol="0" anchor="ctr"/>
-          <a:lstStyle/>
-          <a:p>
-            <a:pPr algn="ctr"/>
-          </a:p>
-        </p:txBody>
-      </p:sp>
-      <p:sp>
-        <p:nvSpPr>
-          <p:cNvPr id="12" name="Rectangle 11"/>
-          <p:cNvSpPr/>
-          <p:nvPr/>
-        </p:nvSpPr>
-        <p:spPr>
-          <a:xfrm>
-            <a:off x="4283354" y="1591056"/>
-            <a:ext cx="3624986" cy="64008"/>
-          </a:xfrm>
-          <a:prstGeom prst="rect">
-            <a:avLst/>
-          </a:prstGeom>
-          <a:solidFill>
-            <a:srgbClr val="095292"/>
-          </a:solidFill>
-          <a:ln>
-            <a:noFill/>
-          </a:ln>
-        </p:spPr>
-        <p:style>
-          <a:lnRef idx="1">
-            <a:schemeClr val="accent1"/>
-          </a:lnRef>
-          <a:fillRef idx="3">
-            <a:schemeClr val="accent1"/>
-          </a:fillRef>
-          <a:effectRef idx="2">
-            <a:schemeClr val="accent1"/>
-          </a:effectRef>
-          <a:fontRef idx="minor">
-            <a:schemeClr val="lt1"/>
-          </a:fontRef>
-        </p:style>
-        <p:txBody>
-          <a:bodyPr rtlCol="0" anchor="ctr"/>
-          <a:lstStyle/>
-          <a:p>
-            <a:pPr algn="ctr"/>
-          </a:p>
-        </p:txBody>
-      </p:sp>
-      <p:sp>
-        <p:nvSpPr>
-          <p:cNvPr id="13" name="Rectangle 12"/>
-          <p:cNvSpPr/>
-          <p:nvPr/>
-        </p:nvSpPr>
-        <p:spPr>
-          <a:xfrm>
-            <a:off x="4283354" y="1655064"/>
-            <a:ext cx="3624986" cy="27432"/>
-          </a:xfrm>
-          <a:prstGeom prst="rect">
-            <a:avLst/>
-          </a:prstGeom>
-          <a:solidFill>
-            <a:srgbClr val="FFD000"/>
-          </a:solidFill>
-          <a:ln>
-            <a:noFill/>
-          </a:ln>
-        </p:spPr>
-        <p:style>
-          <a:lnRef idx="1">
-            <a:schemeClr val="accent1"/>
-          </a:lnRef>
-          <a:fillRef idx="3">
-            <a:schemeClr val="accent1"/>
-          </a:fillRef>
-          <a:effectRef idx="2">
-            <a:schemeClr val="accent1"/>
-          </a:effectRef>
-          <a:fontRef idx="minor">
-            <a:schemeClr val="lt1"/>
-          </a:fontRef>
-        </p:style>
-        <p:txBody>
-          <a:bodyPr rtlCol="0" anchor="ctr"/>
-          <a:lstStyle/>
-          <a:p>
-            <a:pPr algn="ctr"/>
-          </a:p>
-        </p:txBody>
-      </p:sp>
-      <p:pic>
-        <p:nvPicPr>
-          <p:cNvPr id="14" name="Picture 13" descr="google_docs.png"/>
-          <p:cNvPicPr>
-            <a:picLocks noChangeAspect="1"/>
-          </p:cNvPicPr>
-          <p:nvPr/>
-        </p:nvPicPr>
-        <p:blipFill>
-          <a:blip r:embed="rId3"/>
-          <a:stretch>
-            <a:fillRect/>
-          </a:stretch>
-        </p:blipFill>
-        <p:spPr>
-          <a:xfrm>
-            <a:off x="5485485" y="1847087"/>
-            <a:ext cx="1220724" cy="1220724"/>
-          </a:xfrm>
-          <a:prstGeom prst="rect">
-            <a:avLst/>
-          </a:prstGeom>
-        </p:spPr>
-      </p:pic>
-      <p:sp>
-        <p:nvSpPr>
-          <p:cNvPr id="15" name="TextBox 14"/>
-          <p:cNvSpPr txBox="1"/>
-          <p:nvPr/>
-        </p:nvSpPr>
-        <p:spPr>
-          <a:xfrm>
-            <a:off x="4356506" y="3159251"/>
-            <a:ext cx="3478682" cy="621792"/>
-          </a:xfrm>
-          <a:prstGeom prst="rect">
-            <a:avLst/>
-          </a:prstGeom>
-          <a:noFill/>
-        </p:spPr>
-        <p:txBody>
-          <a:bodyPr wrap="square" anchor="t"/>
-          <a:lstStyle/>
-          <a:p>
-            <a:pPr algn="ctr"/>
-            <a:r>
-              <a:rPr sz="1300" b="1" i="0">
-                <a:solidFill>
-                  <a:srgbClr val="095292"/>
-                </a:solidFill>
-                <a:latin typeface="Calibri"/>
-              </a:rPr>
-              <a:t>Google Docs</a:t>
-            </a:r>
-          </a:p>
-          <a:p>
-            <a:pPr algn="ctr">
-              <a:spcBef>
-                <a:spcPts val="200"/>
-              </a:spcBef>
+              <a:rPr sz="2000" b="0" i="0">
+                <a:solidFill>
+                  <a:srgbClr val="333333"/>
+                </a:solidFill>
+                <a:latin typeface="Calibri"/>
+              </a:rPr>
+              <a:t>–   </a:t>
+            </a:r>
+            <a:r>
+              <a:rPr sz="2000" b="1" i="0">
+                <a:solidFill>
+                  <a:srgbClr val="333333"/>
+                </a:solidFill>
+                <a:latin typeface="Calibri"/>
+              </a:rPr>
+              <a:t>Herramienta:</a:t>
+            </a:r>
+            <a:r>
+              <a:rPr sz="2000" b="0" i="0">
+                <a:solidFill>
+                  <a:srgbClr val="333333"/>
+                </a:solidFill>
+                <a:latin typeface="Calibri"/>
+              </a:rPr>
+              <a:t> ExamLab (PostgreSQL) + Google Docs</a:t>
+            </a:r>
+          </a:p>
+          <a:p>
+            <a:pPr>
+              <a:spcAft>
+                <a:spcPts val="800"/>
+              </a:spcAft>
             </a:pPr>
             <a:r>
-              <a:rPr sz="1000" b="0" i="0">
-                <a:solidFill>
-                  <a:srgbClr val="666666"/>
-                </a:solidFill>
-                <a:latin typeface="Calibri"/>
-              </a:rPr>
-              <a:t>Contrato del proc</a:t>
-            </a:r>
-          </a:p>
-        </p:txBody>
-      </p:sp>
-      <p:sp>
-        <p:nvSpPr>
-          <p:cNvPr id="16" name="Rounded Rectangle 15"/>
-          <p:cNvSpPr/>
-          <p:nvPr/>
-        </p:nvSpPr>
-        <p:spPr>
-          <a:xfrm>
-            <a:off x="8109508" y="1591056"/>
-            <a:ext cx="3624986" cy="2299716"/>
-          </a:xfrm>
-          <a:prstGeom prst="roundRect">
-            <a:avLst>
-              <a:gd name="adj" fmla="val 12000"/>
-            </a:avLst>
-          </a:prstGeom>
-          <a:solidFill>
-            <a:srgbClr val="F2F2F2"/>
-          </a:solidFill>
-          <a:ln>
-            <a:noFill/>
-          </a:ln>
-        </p:spPr>
-        <p:style>
-          <a:lnRef idx="1">
-            <a:schemeClr val="accent1"/>
-          </a:lnRef>
-          <a:fillRef idx="3">
-            <a:schemeClr val="accent1"/>
-          </a:fillRef>
-          <a:effectRef idx="2">
-            <a:schemeClr val="accent1"/>
-          </a:effectRef>
-          <a:fontRef idx="minor">
-            <a:schemeClr val="lt1"/>
-          </a:fontRef>
-        </p:style>
-        <p:txBody>
-          <a:bodyPr rtlCol="0" anchor="ctr"/>
-          <a:lstStyle/>
-          <a:p>
-            <a:pPr algn="ctr"/>
-          </a:p>
-        </p:txBody>
-      </p:sp>
-      <p:sp>
-        <p:nvSpPr>
-          <p:cNvPr id="17" name="Rectangle 16"/>
-          <p:cNvSpPr/>
-          <p:nvPr/>
-        </p:nvSpPr>
-        <p:spPr>
-          <a:xfrm>
-            <a:off x="8109508" y="1591056"/>
-            <a:ext cx="3624986" cy="64008"/>
-          </a:xfrm>
-          <a:prstGeom prst="rect">
-            <a:avLst/>
-          </a:prstGeom>
-          <a:solidFill>
-            <a:srgbClr val="095292"/>
-          </a:solidFill>
-          <a:ln>
-            <a:noFill/>
-          </a:ln>
-        </p:spPr>
-        <p:style>
-          <a:lnRef idx="1">
-            <a:schemeClr val="accent1"/>
-          </a:lnRef>
-          <a:fillRef idx="3">
-            <a:schemeClr val="accent1"/>
-          </a:fillRef>
-          <a:effectRef idx="2">
-            <a:schemeClr val="accent1"/>
-          </a:effectRef>
-          <a:fontRef idx="minor">
-            <a:schemeClr val="lt1"/>
-          </a:fontRef>
-        </p:style>
-        <p:txBody>
-          <a:bodyPr rtlCol="0" anchor="ctr"/>
-          <a:lstStyle/>
-          <a:p>
-            <a:pPr algn="ctr"/>
-          </a:p>
-        </p:txBody>
-      </p:sp>
-      <p:sp>
-        <p:nvSpPr>
-          <p:cNvPr id="18" name="Rectangle 17"/>
-          <p:cNvSpPr/>
-          <p:nvPr/>
-        </p:nvSpPr>
-        <p:spPr>
-          <a:xfrm>
-            <a:off x="8109508" y="1655064"/>
-            <a:ext cx="3624986" cy="27432"/>
-          </a:xfrm>
-          <a:prstGeom prst="rect">
-            <a:avLst/>
-          </a:prstGeom>
-          <a:solidFill>
-            <a:srgbClr val="FFD000"/>
-          </a:solidFill>
-          <a:ln>
-            <a:noFill/>
-          </a:ln>
-        </p:spPr>
-        <p:style>
-          <a:lnRef idx="1">
-            <a:schemeClr val="accent1"/>
-          </a:lnRef>
-          <a:fillRef idx="3">
-            <a:schemeClr val="accent1"/>
-          </a:fillRef>
-          <a:effectRef idx="2">
-            <a:schemeClr val="accent1"/>
-          </a:effectRef>
-          <a:fontRef idx="minor">
-            <a:schemeClr val="lt1"/>
-          </a:fontRef>
-        </p:style>
-        <p:txBody>
-          <a:bodyPr rtlCol="0" anchor="ctr"/>
-          <a:lstStyle/>
-          <a:p>
-            <a:pPr algn="ctr"/>
-          </a:p>
-        </p:txBody>
-      </p:sp>
-      <p:pic>
-        <p:nvPicPr>
-          <p:cNvPr id="19" name="Picture 18" descr="dbfiddle.png"/>
-          <p:cNvPicPr>
-            <a:picLocks noChangeAspect="1"/>
-          </p:cNvPicPr>
-          <p:nvPr/>
-        </p:nvPicPr>
-        <p:blipFill>
-          <a:blip r:embed="rId4"/>
-          <a:stretch>
-            <a:fillRect/>
-          </a:stretch>
-        </p:blipFill>
-        <p:spPr>
-          <a:xfrm>
-            <a:off x="9311640" y="1847087"/>
-            <a:ext cx="1220724" cy="1220724"/>
-          </a:xfrm>
-          <a:prstGeom prst="rect">
-            <a:avLst/>
-          </a:prstGeom>
-        </p:spPr>
-      </p:pic>
-      <p:sp>
-        <p:nvSpPr>
-          <p:cNvPr id="20" name="TextBox 19"/>
-          <p:cNvSpPr txBox="1"/>
-          <p:nvPr/>
-        </p:nvSpPr>
-        <p:spPr>
-          <a:xfrm>
-            <a:off x="8182660" y="3159251"/>
-            <a:ext cx="3478682" cy="621792"/>
-          </a:xfrm>
-          <a:prstGeom prst="rect">
-            <a:avLst/>
-          </a:prstGeom>
-          <a:noFill/>
-        </p:spPr>
-        <p:txBody>
-          <a:bodyPr wrap="square" anchor="t"/>
-          <a:lstStyle/>
-          <a:p>
-            <a:pPr algn="ctr"/>
-            <a:r>
-              <a:rPr sz="1300" b="1" i="0">
-                <a:solidFill>
-                  <a:srgbClr val="095292"/>
-                </a:solidFill>
-                <a:latin typeface="Calibri"/>
-              </a:rPr>
-              <a:t>DB Fiddle</a:t>
-            </a:r>
-          </a:p>
-          <a:p>
-            <a:pPr algn="ctr">
-              <a:spcBef>
-                <a:spcPts val="200"/>
-              </a:spcBef>
+              <a:rPr sz="2000" b="0" i="0">
+                <a:solidFill>
+                  <a:srgbClr val="333333"/>
+                </a:solidFill>
+                <a:latin typeface="Calibri"/>
+              </a:rPr>
+              <a:t>–   </a:t>
+            </a:r>
+            <a:r>
+              <a:rPr sz="2000" b="1" i="0">
+                <a:solidFill>
+                  <a:srgbClr val="333333"/>
+                </a:solidFill>
+                <a:latin typeface="Calibri"/>
+              </a:rPr>
+              <a:t>Demo:</a:t>
+            </a:r>
+            <a:r>
+              <a:rPr sz="2000" b="0" i="0">
+                <a:solidFill>
+                  <a:srgbClr val="333333"/>
+                </a:solidFill>
+                <a:latin typeface="Calibri"/>
+              </a:rPr>
+              <a:t> sp_agendar_cita en PL/pgSQL dentro de ExamLab: las 3 validaciones con RAISE EXCEPTION y la bateria de bloques DO que las prueba.</a:t>
+            </a:r>
+          </a:p>
+          <a:p>
+            <a:pPr>
+              <a:spcAft>
+                <a:spcPts val="800"/>
+              </a:spcAft>
             </a:pPr>
             <a:r>
-              <a:rPr sz="1000" b="0" i="0">
-                <a:solidFill>
-                  <a:srgbClr val="666666"/>
-                </a:solidFill>
-                <a:latin typeface="Calibri"/>
-              </a:rPr>
-              <a:t>Alterno: PostgreSQL</a:t>
-            </a:r>
-          </a:p>
-        </p:txBody>
-      </p:sp>
-      <p:sp>
-        <p:nvSpPr>
-          <p:cNvPr id="21" name="Rounded Rectangle 20"/>
-          <p:cNvSpPr/>
-          <p:nvPr/>
-        </p:nvSpPr>
-        <p:spPr>
-          <a:xfrm>
-            <a:off x="4283354" y="4055364"/>
-            <a:ext cx="3624986" cy="2299716"/>
-          </a:xfrm>
-          <a:prstGeom prst="roundRect">
-            <a:avLst>
-              <a:gd name="adj" fmla="val 12000"/>
-            </a:avLst>
-          </a:prstGeom>
-          <a:solidFill>
-            <a:srgbClr val="F2F2F2"/>
-          </a:solidFill>
-          <a:ln>
-            <a:noFill/>
-          </a:ln>
-        </p:spPr>
-        <p:style>
-          <a:lnRef idx="1">
-            <a:schemeClr val="accent1"/>
-          </a:lnRef>
-          <a:fillRef idx="3">
-            <a:schemeClr val="accent1"/>
-          </a:fillRef>
-          <a:effectRef idx="2">
-            <a:schemeClr val="accent1"/>
-          </a:effectRef>
-          <a:fontRef idx="minor">
-            <a:schemeClr val="lt1"/>
-          </a:fontRef>
-        </p:style>
-        <p:txBody>
-          <a:bodyPr rtlCol="0" anchor="ctr"/>
-          <a:lstStyle/>
-          <a:p>
-            <a:pPr algn="ctr"/>
-          </a:p>
-        </p:txBody>
-      </p:sp>
-      <p:sp>
-        <p:nvSpPr>
-          <p:cNvPr id="22" name="Rectangle 21"/>
-          <p:cNvSpPr/>
-          <p:nvPr/>
-        </p:nvSpPr>
-        <p:spPr>
-          <a:xfrm>
-            <a:off x="4283354" y="4055364"/>
-            <a:ext cx="3624986" cy="64008"/>
-          </a:xfrm>
-          <a:prstGeom prst="rect">
-            <a:avLst/>
-          </a:prstGeom>
-          <a:solidFill>
-            <a:srgbClr val="095292"/>
-          </a:solidFill>
-          <a:ln>
-            <a:noFill/>
-          </a:ln>
-        </p:spPr>
-        <p:style>
-          <a:lnRef idx="1">
-            <a:schemeClr val="accent1"/>
-          </a:lnRef>
-          <a:fillRef idx="3">
-            <a:schemeClr val="accent1"/>
-          </a:fillRef>
-          <a:effectRef idx="2">
-            <a:schemeClr val="accent1"/>
-          </a:effectRef>
-          <a:fontRef idx="minor">
-            <a:schemeClr val="lt1"/>
-          </a:fontRef>
-        </p:style>
-        <p:txBody>
-          <a:bodyPr rtlCol="0" anchor="ctr"/>
-          <a:lstStyle/>
-          <a:p>
-            <a:pPr algn="ctr"/>
-          </a:p>
-        </p:txBody>
-      </p:sp>
-      <p:sp>
-        <p:nvSpPr>
-          <p:cNvPr id="23" name="Rectangle 22"/>
-          <p:cNvSpPr/>
-          <p:nvPr/>
-        </p:nvSpPr>
-        <p:spPr>
-          <a:xfrm>
-            <a:off x="4283354" y="4119372"/>
-            <a:ext cx="3624986" cy="27432"/>
-          </a:xfrm>
-          <a:prstGeom prst="rect">
-            <a:avLst/>
-          </a:prstGeom>
-          <a:solidFill>
-            <a:srgbClr val="FFD000"/>
-          </a:solidFill>
-          <a:ln>
-            <a:noFill/>
-          </a:ln>
-        </p:spPr>
-        <p:style>
-          <a:lnRef idx="1">
-            <a:schemeClr val="accent1"/>
-          </a:lnRef>
-          <a:fillRef idx="3">
-            <a:schemeClr val="accent1"/>
-          </a:fillRef>
-          <a:effectRef idx="2">
-            <a:schemeClr val="accent1"/>
-          </a:effectRef>
-          <a:fontRef idx="minor">
-            <a:schemeClr val="lt1"/>
-          </a:fontRef>
-        </p:style>
-        <p:txBody>
-          <a:bodyPr rtlCol="0" anchor="ctr"/>
-          <a:lstStyle/>
-          <a:p>
-            <a:pPr algn="ctr"/>
-          </a:p>
-        </p:txBody>
-      </p:sp>
-      <p:pic>
-        <p:nvPicPr>
-          <p:cNvPr id="24" name="Picture 23" descr="oracle_livesql.png"/>
-          <p:cNvPicPr>
-            <a:picLocks noChangeAspect="1"/>
-          </p:cNvPicPr>
-          <p:nvPr/>
-        </p:nvPicPr>
-        <p:blipFill>
-          <a:blip r:embed="rId5"/>
-          <a:stretch>
-            <a:fillRect/>
-          </a:stretch>
-        </p:blipFill>
-        <p:spPr>
-          <a:xfrm>
-            <a:off x="5485485" y="4311396"/>
-            <a:ext cx="1220724" cy="1220724"/>
-          </a:xfrm>
-          <a:prstGeom prst="rect">
-            <a:avLst/>
-          </a:prstGeom>
-        </p:spPr>
-      </p:pic>
-      <p:sp>
-        <p:nvSpPr>
-          <p:cNvPr id="25" name="TextBox 24"/>
-          <p:cNvSpPr txBox="1"/>
-          <p:nvPr/>
-        </p:nvSpPr>
-        <p:spPr>
-          <a:xfrm>
-            <a:off x="4356506" y="5623560"/>
-            <a:ext cx="3478682" cy="621792"/>
-          </a:xfrm>
-          <a:prstGeom prst="rect">
-            <a:avLst/>
-          </a:prstGeom>
-          <a:noFill/>
-        </p:spPr>
-        <p:txBody>
-          <a:bodyPr wrap="square" anchor="t"/>
-          <a:lstStyle/>
-          <a:p>
-            <a:pPr algn="ctr"/>
-            <a:r>
-              <a:rPr sz="1300" b="1" i="0">
-                <a:solidFill>
-                  <a:srgbClr val="095292"/>
-                </a:solidFill>
-                <a:latin typeface="Calibri"/>
-              </a:rPr>
-              <a:t>Oracle Live SQL</a:t>
-            </a:r>
-          </a:p>
-          <a:p>
-            <a:pPr algn="ctr">
-              <a:spcBef>
-                <a:spcPts val="200"/>
-              </a:spcBef>
+              <a:rPr sz="2000" b="0" i="0">
+                <a:solidFill>
+                  <a:srgbClr val="333333"/>
+                </a:solidFill>
+                <a:latin typeface="Calibri"/>
+              </a:rPr>
+              <a:t>–   Sigan el mismo dominio VetCare (no inventen otro caso).</a:t>
+            </a:r>
+          </a:p>
+          <a:p>
+            <a:pPr>
+              <a:spcAft>
+                <a:spcPts val="800"/>
+              </a:spcAft>
             </a:pPr>
             <a:r>
-              <a:rPr sz="1000" b="0" i="0">
-                <a:solidFill>
-                  <a:srgbClr val="666666"/>
-                </a:solidFill>
-                <a:latin typeface="Calibri"/>
-              </a:rPr>
-              <a:t>Solo contraste</a:t>
-            </a:r>
-          </a:p>
-        </p:txBody>
-      </p:sp>
-      <p:sp>
-        <p:nvSpPr>
-          <p:cNvPr id="26" name="TextBox 25"/>
+              <a:rPr sz="2000" b="0" i="0">
+                <a:solidFill>
+                  <a:srgbClr val="333333"/>
+                </a:solidFill>
+                <a:latin typeface="Calibri"/>
+              </a:rPr>
+              <a:t>–   Al final de la demo: dejar enlace/script compartible al grupo.</a:t>
+            </a:r>
+          </a:p>
+        </p:txBody>
+      </p:sp>
+      <p:sp>
+        <p:nvSpPr>
+          <p:cNvPr id="6" name="TextBox 5"/>
           <p:cNvSpPr txBox="1"/>
           <p:nvPr/>
         </p:nvSpPr>
@@ -4853,7 +4303,7 @@
         <p:spPr>
           <a:xfrm>
             <a:off x="0" y="0"/>
-            <a:ext cx="12191695" cy="960120"/>
+            <a:ext cx="12191695" cy="1170432"/>
           </a:xfrm>
           <a:prstGeom prst="rect">
             <a:avLst/>
@@ -4895,7 +4345,7 @@
         </p:nvSpPr>
         <p:spPr>
           <a:xfrm>
-            <a:off x="0" y="960120"/>
+            <a:off x="0" y="1170432"/>
             <a:ext cx="12191695" cy="41148"/>
           </a:xfrm>
           <a:prstGeom prst="rect">
@@ -4939,7 +4389,7 @@
         <p:spPr>
           <a:xfrm>
             <a:off x="457200" y="164592"/>
-            <a:ext cx="11277295" cy="502920"/>
+            <a:ext cx="11277295" cy="384048"/>
           </a:xfrm>
           <a:prstGeom prst="rect">
             <a:avLst/>
@@ -4959,7 +4409,7 @@
                 </a:solidFill>
                 <a:latin typeface="Calibri"/>
               </a:rPr>
-              <a:t>Taller PI VetCare — contexto / por que importa</a:t>
+              <a:t>Herramientas de hoy</a:t>
             </a:r>
           </a:p>
         </p:txBody>
@@ -4972,8 +4422,8 @@
         </p:nvSpPr>
         <p:spPr>
           <a:xfrm>
-            <a:off x="457200" y="1170432"/>
-            <a:ext cx="11277295" cy="5230368"/>
+            <a:off x="457200" y="566928"/>
+            <a:ext cx="11277295" cy="411480"/>
           </a:xfrm>
           <a:prstGeom prst="rect">
             <a:avLst/>
@@ -4986,94 +4436,837 @@
           </a:bodyPr>
           <a:lstStyle/>
           <a:p>
-            <a:pPr>
-              <a:spcAft>
-                <a:spcPts val="800"/>
-              </a:spcAft>
+            <a:r>
+              <a:rPr sz="1400" b="0" i="0">
+                <a:solidFill>
+                  <a:srgbClr val="B8D8EE"/>
+                </a:solidFill>
+                <a:latin typeface="Calibri"/>
+              </a:rPr>
+              <a:t>Gratis · navegador o free tier</a:t>
+            </a:r>
+          </a:p>
+        </p:txBody>
+      </p:sp>
+      <p:sp>
+        <p:nvSpPr>
+          <p:cNvPr id="6" name="Rounded Rectangle 5"/>
+          <p:cNvSpPr/>
+          <p:nvPr/>
+        </p:nvSpPr>
+        <p:spPr>
+          <a:xfrm>
+            <a:off x="457200" y="1591056"/>
+            <a:ext cx="3624986" cy="2299716"/>
+          </a:xfrm>
+          <a:prstGeom prst="roundRect">
+            <a:avLst>
+              <a:gd name="adj" fmla="val 12000"/>
+            </a:avLst>
+          </a:prstGeom>
+          <a:solidFill>
+            <a:srgbClr val="F2F2F2"/>
+          </a:solidFill>
+          <a:ln>
+            <a:noFill/>
+          </a:ln>
+        </p:spPr>
+        <p:style>
+          <a:lnRef idx="1">
+            <a:schemeClr val="accent1"/>
+          </a:lnRef>
+          <a:fillRef idx="3">
+            <a:schemeClr val="accent1"/>
+          </a:fillRef>
+          <a:effectRef idx="2">
+            <a:schemeClr val="accent1"/>
+          </a:effectRef>
+          <a:fontRef idx="minor">
+            <a:schemeClr val="lt1"/>
+          </a:fontRef>
+        </p:style>
+        <p:txBody>
+          <a:bodyPr rtlCol="0" anchor="ctr"/>
+          <a:lstStyle/>
+          <a:p>
+            <a:pPr algn="ctr"/>
+          </a:p>
+        </p:txBody>
+      </p:sp>
+      <p:sp>
+        <p:nvSpPr>
+          <p:cNvPr id="7" name="Rectangle 6"/>
+          <p:cNvSpPr/>
+          <p:nvPr/>
+        </p:nvSpPr>
+        <p:spPr>
+          <a:xfrm>
+            <a:off x="457200" y="1591056"/>
+            <a:ext cx="3624986" cy="64008"/>
+          </a:xfrm>
+          <a:prstGeom prst="rect">
+            <a:avLst/>
+          </a:prstGeom>
+          <a:solidFill>
+            <a:srgbClr val="095292"/>
+          </a:solidFill>
+          <a:ln>
+            <a:noFill/>
+          </a:ln>
+        </p:spPr>
+        <p:style>
+          <a:lnRef idx="1">
+            <a:schemeClr val="accent1"/>
+          </a:lnRef>
+          <a:fillRef idx="3">
+            <a:schemeClr val="accent1"/>
+          </a:fillRef>
+          <a:effectRef idx="2">
+            <a:schemeClr val="accent1"/>
+          </a:effectRef>
+          <a:fontRef idx="minor">
+            <a:schemeClr val="lt1"/>
+          </a:fontRef>
+        </p:style>
+        <p:txBody>
+          <a:bodyPr rtlCol="0" anchor="ctr"/>
+          <a:lstStyle/>
+          <a:p>
+            <a:pPr algn="ctr"/>
+          </a:p>
+        </p:txBody>
+      </p:sp>
+      <p:sp>
+        <p:nvSpPr>
+          <p:cNvPr id="8" name="Rectangle 7"/>
+          <p:cNvSpPr/>
+          <p:nvPr/>
+        </p:nvSpPr>
+        <p:spPr>
+          <a:xfrm>
+            <a:off x="457200" y="1655064"/>
+            <a:ext cx="3624986" cy="27432"/>
+          </a:xfrm>
+          <a:prstGeom prst="rect">
+            <a:avLst/>
+          </a:prstGeom>
+          <a:solidFill>
+            <a:srgbClr val="FFD000"/>
+          </a:solidFill>
+          <a:ln>
+            <a:noFill/>
+          </a:ln>
+        </p:spPr>
+        <p:style>
+          <a:lnRef idx="1">
+            <a:schemeClr val="accent1"/>
+          </a:lnRef>
+          <a:fillRef idx="3">
+            <a:schemeClr val="accent1"/>
+          </a:fillRef>
+          <a:effectRef idx="2">
+            <a:schemeClr val="accent1"/>
+          </a:effectRef>
+          <a:fontRef idx="minor">
+            <a:schemeClr val="lt1"/>
+          </a:fontRef>
+        </p:style>
+        <p:txBody>
+          <a:bodyPr rtlCol="0" anchor="ctr"/>
+          <a:lstStyle/>
+          <a:p>
+            <a:pPr algn="ctr"/>
+          </a:p>
+        </p:txBody>
+      </p:sp>
+      <p:pic>
+        <p:nvPicPr>
+          <p:cNvPr id="9" name="Picture 8" descr="examlab.png"/>
+          <p:cNvPicPr>
+            <a:picLocks noChangeAspect="1"/>
+          </p:cNvPicPr>
+          <p:nvPr/>
+        </p:nvPicPr>
+        <p:blipFill>
+          <a:blip r:embed="rId2"/>
+          <a:stretch>
+            <a:fillRect/>
+          </a:stretch>
+        </p:blipFill>
+        <p:spPr>
+          <a:xfrm>
+            <a:off x="1659331" y="1847087"/>
+            <a:ext cx="1220724" cy="1220724"/>
+          </a:xfrm>
+          <a:prstGeom prst="rect">
+            <a:avLst/>
+          </a:prstGeom>
+        </p:spPr>
+      </p:pic>
+      <p:sp>
+        <p:nvSpPr>
+          <p:cNvPr id="10" name="TextBox 9"/>
+          <p:cNvSpPr txBox="1"/>
+          <p:nvPr/>
+        </p:nvSpPr>
+        <p:spPr>
+          <a:xfrm>
+            <a:off x="530352" y="3159251"/>
+            <a:ext cx="3478682" cy="621792"/>
+          </a:xfrm>
+          <a:prstGeom prst="rect">
+            <a:avLst/>
+          </a:prstGeom>
+          <a:noFill/>
+        </p:spPr>
+        <p:txBody>
+          <a:bodyPr wrap="square" anchor="t"/>
+          <a:lstStyle/>
+          <a:p>
+            <a:pPr algn="ctr"/>
+            <a:r>
+              <a:rPr sz="1300" b="1" i="0">
+                <a:solidFill>
+                  <a:srgbClr val="095292"/>
+                </a:solidFill>
+                <a:latin typeface="Calibri"/>
+              </a:rPr>
+              <a:t>ExamLab</a:t>
+            </a:r>
+          </a:p>
+          <a:p>
+            <a:pPr algn="ctr">
+              <a:spcBef>
+                <a:spcPts val="200"/>
+              </a:spcBef>
             </a:pPr>
             <a:r>
-              <a:rPr sz="1600" b="0" i="0">
-                <a:solidFill>
-                  <a:srgbClr val="333333"/>
-                </a:solidFill>
-                <a:latin typeface="Calibri"/>
-              </a:rPr>
-              <a:t>–   </a:t>
-            </a:r>
-            <a:r>
-              <a:rPr sz="1600" b="1" i="0">
-                <a:solidFill>
-                  <a:srgbClr val="333333"/>
-                </a:solidFill>
-                <a:latin typeface="Calibri"/>
-              </a:rPr>
-              <a:t>Por qué importa al PI:</a:t>
-            </a:r>
-            <a:r>
-              <a:rPr sz="1600" b="0" i="0">
-                <a:solidFill>
-                  <a:srgbClr val="333333"/>
-                </a:solidFill>
-                <a:latin typeface="Calibri"/>
-              </a:rPr>
-              <a:t> la regla de negocio deja de vivir en la pantalla y queda dentro de la base, donde vale para </a:t>
-            </a:r>
-            <a:r>
-              <a:rPr sz="1600" b="1" i="0">
-                <a:solidFill>
-                  <a:srgbClr val="333333"/>
-                </a:solidFill>
-                <a:latin typeface="Calibri"/>
-              </a:rPr>
-              <a:t>cualquier</a:t>
-            </a:r>
-            <a:r>
-              <a:rPr sz="1600" b="0" i="0">
-                <a:solidFill>
-                  <a:srgbClr val="333333"/>
-                </a:solidFill>
-                <a:latin typeface="Calibri"/>
-              </a:rPr>
-              <a:t> cliente que se conecte.</a:t>
-            </a:r>
-          </a:p>
-          <a:p>
-            <a:pPr>
-              <a:spcAft>
-                <a:spcPts val="800"/>
-              </a:spcAft>
+              <a:rPr sz="1000" b="0" i="0">
+                <a:solidFill>
+                  <a:srgbClr val="666666"/>
+                </a:solidFill>
+                <a:latin typeface="Calibri"/>
+              </a:rPr>
+              <a:t>PL/pgSQL: aqui corre</a:t>
+            </a:r>
+          </a:p>
+        </p:txBody>
+      </p:sp>
+      <p:sp>
+        <p:nvSpPr>
+          <p:cNvPr id="11" name="Rounded Rectangle 10"/>
+          <p:cNvSpPr/>
+          <p:nvPr/>
+        </p:nvSpPr>
+        <p:spPr>
+          <a:xfrm>
+            <a:off x="4283354" y="1591056"/>
+            <a:ext cx="3624986" cy="2299716"/>
+          </a:xfrm>
+          <a:prstGeom prst="roundRect">
+            <a:avLst>
+              <a:gd name="adj" fmla="val 12000"/>
+            </a:avLst>
+          </a:prstGeom>
+          <a:solidFill>
+            <a:srgbClr val="F2F2F2"/>
+          </a:solidFill>
+          <a:ln>
+            <a:noFill/>
+          </a:ln>
+        </p:spPr>
+        <p:style>
+          <a:lnRef idx="1">
+            <a:schemeClr val="accent1"/>
+          </a:lnRef>
+          <a:fillRef idx="3">
+            <a:schemeClr val="accent1"/>
+          </a:fillRef>
+          <a:effectRef idx="2">
+            <a:schemeClr val="accent1"/>
+          </a:effectRef>
+          <a:fontRef idx="minor">
+            <a:schemeClr val="lt1"/>
+          </a:fontRef>
+        </p:style>
+        <p:txBody>
+          <a:bodyPr rtlCol="0" anchor="ctr"/>
+          <a:lstStyle/>
+          <a:p>
+            <a:pPr algn="ctr"/>
+          </a:p>
+        </p:txBody>
+      </p:sp>
+      <p:sp>
+        <p:nvSpPr>
+          <p:cNvPr id="12" name="Rectangle 11"/>
+          <p:cNvSpPr/>
+          <p:nvPr/>
+        </p:nvSpPr>
+        <p:spPr>
+          <a:xfrm>
+            <a:off x="4283354" y="1591056"/>
+            <a:ext cx="3624986" cy="64008"/>
+          </a:xfrm>
+          <a:prstGeom prst="rect">
+            <a:avLst/>
+          </a:prstGeom>
+          <a:solidFill>
+            <a:srgbClr val="095292"/>
+          </a:solidFill>
+          <a:ln>
+            <a:noFill/>
+          </a:ln>
+        </p:spPr>
+        <p:style>
+          <a:lnRef idx="1">
+            <a:schemeClr val="accent1"/>
+          </a:lnRef>
+          <a:fillRef idx="3">
+            <a:schemeClr val="accent1"/>
+          </a:fillRef>
+          <a:effectRef idx="2">
+            <a:schemeClr val="accent1"/>
+          </a:effectRef>
+          <a:fontRef idx="minor">
+            <a:schemeClr val="lt1"/>
+          </a:fontRef>
+        </p:style>
+        <p:txBody>
+          <a:bodyPr rtlCol="0" anchor="ctr"/>
+          <a:lstStyle/>
+          <a:p>
+            <a:pPr algn="ctr"/>
+          </a:p>
+        </p:txBody>
+      </p:sp>
+      <p:sp>
+        <p:nvSpPr>
+          <p:cNvPr id="13" name="Rectangle 12"/>
+          <p:cNvSpPr/>
+          <p:nvPr/>
+        </p:nvSpPr>
+        <p:spPr>
+          <a:xfrm>
+            <a:off x="4283354" y="1655064"/>
+            <a:ext cx="3624986" cy="27432"/>
+          </a:xfrm>
+          <a:prstGeom prst="rect">
+            <a:avLst/>
+          </a:prstGeom>
+          <a:solidFill>
+            <a:srgbClr val="FFD000"/>
+          </a:solidFill>
+          <a:ln>
+            <a:noFill/>
+          </a:ln>
+        </p:spPr>
+        <p:style>
+          <a:lnRef idx="1">
+            <a:schemeClr val="accent1"/>
+          </a:lnRef>
+          <a:fillRef idx="3">
+            <a:schemeClr val="accent1"/>
+          </a:fillRef>
+          <a:effectRef idx="2">
+            <a:schemeClr val="accent1"/>
+          </a:effectRef>
+          <a:fontRef idx="minor">
+            <a:schemeClr val="lt1"/>
+          </a:fontRef>
+        </p:style>
+        <p:txBody>
+          <a:bodyPr rtlCol="0" anchor="ctr"/>
+          <a:lstStyle/>
+          <a:p>
+            <a:pPr algn="ctr"/>
+          </a:p>
+        </p:txBody>
+      </p:sp>
+      <p:pic>
+        <p:nvPicPr>
+          <p:cNvPr id="14" name="Picture 13" descr="google_docs.png"/>
+          <p:cNvPicPr>
+            <a:picLocks noChangeAspect="1"/>
+          </p:cNvPicPr>
+          <p:nvPr/>
+        </p:nvPicPr>
+        <p:blipFill>
+          <a:blip r:embed="rId3"/>
+          <a:stretch>
+            <a:fillRect/>
+          </a:stretch>
+        </p:blipFill>
+        <p:spPr>
+          <a:xfrm>
+            <a:off x="5485485" y="1847087"/>
+            <a:ext cx="1220724" cy="1220724"/>
+          </a:xfrm>
+          <a:prstGeom prst="rect">
+            <a:avLst/>
+          </a:prstGeom>
+        </p:spPr>
+      </p:pic>
+      <p:sp>
+        <p:nvSpPr>
+          <p:cNvPr id="15" name="TextBox 14"/>
+          <p:cNvSpPr txBox="1"/>
+          <p:nvPr/>
+        </p:nvSpPr>
+        <p:spPr>
+          <a:xfrm>
+            <a:off x="4356506" y="3159251"/>
+            <a:ext cx="3478682" cy="621792"/>
+          </a:xfrm>
+          <a:prstGeom prst="rect">
+            <a:avLst/>
+          </a:prstGeom>
+          <a:noFill/>
+        </p:spPr>
+        <p:txBody>
+          <a:bodyPr wrap="square" anchor="t"/>
+          <a:lstStyle/>
+          <a:p>
+            <a:pPr algn="ctr"/>
+            <a:r>
+              <a:rPr sz="1300" b="1" i="0">
+                <a:solidFill>
+                  <a:srgbClr val="095292"/>
+                </a:solidFill>
+                <a:latin typeface="Calibri"/>
+              </a:rPr>
+              <a:t>Google Docs</a:t>
+            </a:r>
+          </a:p>
+          <a:p>
+            <a:pPr algn="ctr">
+              <a:spcBef>
+                <a:spcPts val="200"/>
+              </a:spcBef>
             </a:pPr>
             <a:r>
-              <a:rPr sz="1600" b="0" i="0">
-                <a:solidFill>
-                  <a:srgbClr val="333333"/>
-                </a:solidFill>
-                <a:latin typeface="Calibri"/>
-              </a:rPr>
-              <a:t>–   Un procedimiento probado es la única forma de que «una mascota inactiva no agenda» siga siendo cierto cuando aparezcan la app, un script de carga y soporte.</a:t>
-            </a:r>
-          </a:p>
-          <a:p>
-            <a:pPr>
-              <a:spcAft>
-                <a:spcPts val="800"/>
-              </a:spcAft>
+              <a:rPr sz="1000" b="0" i="0">
+                <a:solidFill>
+                  <a:srgbClr val="666666"/>
+                </a:solidFill>
+                <a:latin typeface="Calibri"/>
+              </a:rPr>
+              <a:t>Contrato del proc</a:t>
+            </a:r>
+          </a:p>
+        </p:txBody>
+      </p:sp>
+      <p:sp>
+        <p:nvSpPr>
+          <p:cNvPr id="16" name="Rounded Rectangle 15"/>
+          <p:cNvSpPr/>
+          <p:nvPr/>
+        </p:nvSpPr>
+        <p:spPr>
+          <a:xfrm>
+            <a:off x="8109508" y="1591056"/>
+            <a:ext cx="3624986" cy="2299716"/>
+          </a:xfrm>
+          <a:prstGeom prst="roundRect">
+            <a:avLst>
+              <a:gd name="adj" fmla="val 12000"/>
+            </a:avLst>
+          </a:prstGeom>
+          <a:solidFill>
+            <a:srgbClr val="F2F2F2"/>
+          </a:solidFill>
+          <a:ln>
+            <a:noFill/>
+          </a:ln>
+        </p:spPr>
+        <p:style>
+          <a:lnRef idx="1">
+            <a:schemeClr val="accent1"/>
+          </a:lnRef>
+          <a:fillRef idx="3">
+            <a:schemeClr val="accent1"/>
+          </a:fillRef>
+          <a:effectRef idx="2">
+            <a:schemeClr val="accent1"/>
+          </a:effectRef>
+          <a:fontRef idx="minor">
+            <a:schemeClr val="lt1"/>
+          </a:fontRef>
+        </p:style>
+        <p:txBody>
+          <a:bodyPr rtlCol="0" anchor="ctr"/>
+          <a:lstStyle/>
+          <a:p>
+            <a:pPr algn="ctr"/>
+          </a:p>
+        </p:txBody>
+      </p:sp>
+      <p:sp>
+        <p:nvSpPr>
+          <p:cNvPr id="17" name="Rectangle 16"/>
+          <p:cNvSpPr/>
+          <p:nvPr/>
+        </p:nvSpPr>
+        <p:spPr>
+          <a:xfrm>
+            <a:off x="8109508" y="1591056"/>
+            <a:ext cx="3624986" cy="64008"/>
+          </a:xfrm>
+          <a:prstGeom prst="rect">
+            <a:avLst/>
+          </a:prstGeom>
+          <a:solidFill>
+            <a:srgbClr val="095292"/>
+          </a:solidFill>
+          <a:ln>
+            <a:noFill/>
+          </a:ln>
+        </p:spPr>
+        <p:style>
+          <a:lnRef idx="1">
+            <a:schemeClr val="accent1"/>
+          </a:lnRef>
+          <a:fillRef idx="3">
+            <a:schemeClr val="accent1"/>
+          </a:fillRef>
+          <a:effectRef idx="2">
+            <a:schemeClr val="accent1"/>
+          </a:effectRef>
+          <a:fontRef idx="minor">
+            <a:schemeClr val="lt1"/>
+          </a:fontRef>
+        </p:style>
+        <p:txBody>
+          <a:bodyPr rtlCol="0" anchor="ctr"/>
+          <a:lstStyle/>
+          <a:p>
+            <a:pPr algn="ctr"/>
+          </a:p>
+        </p:txBody>
+      </p:sp>
+      <p:sp>
+        <p:nvSpPr>
+          <p:cNvPr id="18" name="Rectangle 17"/>
+          <p:cNvSpPr/>
+          <p:nvPr/>
+        </p:nvSpPr>
+        <p:spPr>
+          <a:xfrm>
+            <a:off x="8109508" y="1655064"/>
+            <a:ext cx="3624986" cy="27432"/>
+          </a:xfrm>
+          <a:prstGeom prst="rect">
+            <a:avLst/>
+          </a:prstGeom>
+          <a:solidFill>
+            <a:srgbClr val="FFD000"/>
+          </a:solidFill>
+          <a:ln>
+            <a:noFill/>
+          </a:ln>
+        </p:spPr>
+        <p:style>
+          <a:lnRef idx="1">
+            <a:schemeClr val="accent1"/>
+          </a:lnRef>
+          <a:fillRef idx="3">
+            <a:schemeClr val="accent1"/>
+          </a:fillRef>
+          <a:effectRef idx="2">
+            <a:schemeClr val="accent1"/>
+          </a:effectRef>
+          <a:fontRef idx="minor">
+            <a:schemeClr val="lt1"/>
+          </a:fontRef>
+        </p:style>
+        <p:txBody>
+          <a:bodyPr rtlCol="0" anchor="ctr"/>
+          <a:lstStyle/>
+          <a:p>
+            <a:pPr algn="ctr"/>
+          </a:p>
+        </p:txBody>
+      </p:sp>
+      <p:pic>
+        <p:nvPicPr>
+          <p:cNvPr id="19" name="Picture 18" descr="dbfiddle.png"/>
+          <p:cNvPicPr>
+            <a:picLocks noChangeAspect="1"/>
+          </p:cNvPicPr>
+          <p:nvPr/>
+        </p:nvPicPr>
+        <p:blipFill>
+          <a:blip r:embed="rId4"/>
+          <a:stretch>
+            <a:fillRect/>
+          </a:stretch>
+        </p:blipFill>
+        <p:spPr>
+          <a:xfrm>
+            <a:off x="9311640" y="1847087"/>
+            <a:ext cx="1220724" cy="1220724"/>
+          </a:xfrm>
+          <a:prstGeom prst="rect">
+            <a:avLst/>
+          </a:prstGeom>
+        </p:spPr>
+      </p:pic>
+      <p:sp>
+        <p:nvSpPr>
+          <p:cNvPr id="20" name="TextBox 19"/>
+          <p:cNvSpPr txBox="1"/>
+          <p:nvPr/>
+        </p:nvSpPr>
+        <p:spPr>
+          <a:xfrm>
+            <a:off x="8182660" y="3159251"/>
+            <a:ext cx="3478682" cy="621792"/>
+          </a:xfrm>
+          <a:prstGeom prst="rect">
+            <a:avLst/>
+          </a:prstGeom>
+          <a:noFill/>
+        </p:spPr>
+        <p:txBody>
+          <a:bodyPr wrap="square" anchor="t"/>
+          <a:lstStyle/>
+          <a:p>
+            <a:pPr algn="ctr"/>
+            <a:r>
+              <a:rPr sz="1300" b="1" i="0">
+                <a:solidFill>
+                  <a:srgbClr val="095292"/>
+                </a:solidFill>
+                <a:latin typeface="Calibri"/>
+              </a:rPr>
+              <a:t>DB Fiddle</a:t>
+            </a:r>
+          </a:p>
+          <a:p>
+            <a:pPr algn="ctr">
+              <a:spcBef>
+                <a:spcPts val="200"/>
+              </a:spcBef>
             </a:pPr>
             <a:r>
-              <a:rPr sz="1600" b="0" i="0">
-                <a:solidFill>
-                  <a:srgbClr val="333333"/>
-                </a:solidFill>
-                <a:latin typeface="Calibri"/>
-              </a:rPr>
-              <a:t>–   El contrato que escribes hoy es lo que la Clase 12 le entrega a quien programe la aplicación: firma, errores y qué hacer con cada uno.</a:t>
-            </a:r>
-          </a:p>
-        </p:txBody>
-      </p:sp>
-      <p:sp>
-        <p:nvSpPr>
-          <p:cNvPr id="6" name="TextBox 5"/>
+              <a:rPr sz="1000" b="0" i="0">
+                <a:solidFill>
+                  <a:srgbClr val="666666"/>
+                </a:solidFill>
+                <a:latin typeface="Calibri"/>
+              </a:rPr>
+              <a:t>Alterno: PostgreSQL</a:t>
+            </a:r>
+          </a:p>
+        </p:txBody>
+      </p:sp>
+      <p:sp>
+        <p:nvSpPr>
+          <p:cNvPr id="21" name="Rounded Rectangle 20"/>
+          <p:cNvSpPr/>
+          <p:nvPr/>
+        </p:nvSpPr>
+        <p:spPr>
+          <a:xfrm>
+            <a:off x="4283354" y="4055364"/>
+            <a:ext cx="3624986" cy="2299716"/>
+          </a:xfrm>
+          <a:prstGeom prst="roundRect">
+            <a:avLst>
+              <a:gd name="adj" fmla="val 12000"/>
+            </a:avLst>
+          </a:prstGeom>
+          <a:solidFill>
+            <a:srgbClr val="F2F2F2"/>
+          </a:solidFill>
+          <a:ln>
+            <a:noFill/>
+          </a:ln>
+        </p:spPr>
+        <p:style>
+          <a:lnRef idx="1">
+            <a:schemeClr val="accent1"/>
+          </a:lnRef>
+          <a:fillRef idx="3">
+            <a:schemeClr val="accent1"/>
+          </a:fillRef>
+          <a:effectRef idx="2">
+            <a:schemeClr val="accent1"/>
+          </a:effectRef>
+          <a:fontRef idx="minor">
+            <a:schemeClr val="lt1"/>
+          </a:fontRef>
+        </p:style>
+        <p:txBody>
+          <a:bodyPr rtlCol="0" anchor="ctr"/>
+          <a:lstStyle/>
+          <a:p>
+            <a:pPr algn="ctr"/>
+          </a:p>
+        </p:txBody>
+      </p:sp>
+      <p:sp>
+        <p:nvSpPr>
+          <p:cNvPr id="22" name="Rectangle 21"/>
+          <p:cNvSpPr/>
+          <p:nvPr/>
+        </p:nvSpPr>
+        <p:spPr>
+          <a:xfrm>
+            <a:off x="4283354" y="4055364"/>
+            <a:ext cx="3624986" cy="64008"/>
+          </a:xfrm>
+          <a:prstGeom prst="rect">
+            <a:avLst/>
+          </a:prstGeom>
+          <a:solidFill>
+            <a:srgbClr val="095292"/>
+          </a:solidFill>
+          <a:ln>
+            <a:noFill/>
+          </a:ln>
+        </p:spPr>
+        <p:style>
+          <a:lnRef idx="1">
+            <a:schemeClr val="accent1"/>
+          </a:lnRef>
+          <a:fillRef idx="3">
+            <a:schemeClr val="accent1"/>
+          </a:fillRef>
+          <a:effectRef idx="2">
+            <a:schemeClr val="accent1"/>
+          </a:effectRef>
+          <a:fontRef idx="minor">
+            <a:schemeClr val="lt1"/>
+          </a:fontRef>
+        </p:style>
+        <p:txBody>
+          <a:bodyPr rtlCol="0" anchor="ctr"/>
+          <a:lstStyle/>
+          <a:p>
+            <a:pPr algn="ctr"/>
+          </a:p>
+        </p:txBody>
+      </p:sp>
+      <p:sp>
+        <p:nvSpPr>
+          <p:cNvPr id="23" name="Rectangle 22"/>
+          <p:cNvSpPr/>
+          <p:nvPr/>
+        </p:nvSpPr>
+        <p:spPr>
+          <a:xfrm>
+            <a:off x="4283354" y="4119372"/>
+            <a:ext cx="3624986" cy="27432"/>
+          </a:xfrm>
+          <a:prstGeom prst="rect">
+            <a:avLst/>
+          </a:prstGeom>
+          <a:solidFill>
+            <a:srgbClr val="FFD000"/>
+          </a:solidFill>
+          <a:ln>
+            <a:noFill/>
+          </a:ln>
+        </p:spPr>
+        <p:style>
+          <a:lnRef idx="1">
+            <a:schemeClr val="accent1"/>
+          </a:lnRef>
+          <a:fillRef idx="3">
+            <a:schemeClr val="accent1"/>
+          </a:fillRef>
+          <a:effectRef idx="2">
+            <a:schemeClr val="accent1"/>
+          </a:effectRef>
+          <a:fontRef idx="minor">
+            <a:schemeClr val="lt1"/>
+          </a:fontRef>
+        </p:style>
+        <p:txBody>
+          <a:bodyPr rtlCol="0" anchor="ctr"/>
+          <a:lstStyle/>
+          <a:p>
+            <a:pPr algn="ctr"/>
+          </a:p>
+        </p:txBody>
+      </p:sp>
+      <p:pic>
+        <p:nvPicPr>
+          <p:cNvPr id="24" name="Picture 23" descr="oracle_livesql.png"/>
+          <p:cNvPicPr>
+            <a:picLocks noChangeAspect="1"/>
+          </p:cNvPicPr>
+          <p:nvPr/>
+        </p:nvPicPr>
+        <p:blipFill>
+          <a:blip r:embed="rId5"/>
+          <a:stretch>
+            <a:fillRect/>
+          </a:stretch>
+        </p:blipFill>
+        <p:spPr>
+          <a:xfrm>
+            <a:off x="5485485" y="4311396"/>
+            <a:ext cx="1220724" cy="1220724"/>
+          </a:xfrm>
+          <a:prstGeom prst="rect">
+            <a:avLst/>
+          </a:prstGeom>
+        </p:spPr>
+      </p:pic>
+      <p:sp>
+        <p:nvSpPr>
+          <p:cNvPr id="25" name="TextBox 24"/>
+          <p:cNvSpPr txBox="1"/>
+          <p:nvPr/>
+        </p:nvSpPr>
+        <p:spPr>
+          <a:xfrm>
+            <a:off x="4356506" y="5623560"/>
+            <a:ext cx="3478682" cy="621792"/>
+          </a:xfrm>
+          <a:prstGeom prst="rect">
+            <a:avLst/>
+          </a:prstGeom>
+          <a:noFill/>
+        </p:spPr>
+        <p:txBody>
+          <a:bodyPr wrap="square" anchor="t"/>
+          <a:lstStyle/>
+          <a:p>
+            <a:pPr algn="ctr"/>
+            <a:r>
+              <a:rPr sz="1300" b="1" i="0">
+                <a:solidFill>
+                  <a:srgbClr val="095292"/>
+                </a:solidFill>
+                <a:latin typeface="Calibri"/>
+              </a:rPr>
+              <a:t>Oracle Live SQL</a:t>
+            </a:r>
+          </a:p>
+          <a:p>
+            <a:pPr algn="ctr">
+              <a:spcBef>
+                <a:spcPts val="200"/>
+              </a:spcBef>
+            </a:pPr>
+            <a:r>
+              <a:rPr sz="1000" b="0" i="0">
+                <a:solidFill>
+                  <a:srgbClr val="666666"/>
+                </a:solidFill>
+                <a:latin typeface="Calibri"/>
+              </a:rPr>
+              <a:t>Solo contraste</a:t>
+            </a:r>
+          </a:p>
+        </p:txBody>
+      </p:sp>
+      <p:sp>
+        <p:nvSpPr>
+          <p:cNvPr id="26" name="TextBox 25"/>
           <p:cNvSpPr txBox="1"/>
           <p:nvPr/>
         </p:nvSpPr>
@@ -5247,7 +5440,7 @@
                 </a:solidFill>
                 <a:latin typeface="Calibri"/>
               </a:rPr>
-              <a:t>Taller PI VetCare — objetivo y criterios</a:t>
+              <a:t>Taller PI VetCare — contexto / por que importa</a:t>
             </a:r>
           </a:p>
         </p:txBody>
@@ -5280,7 +5473,7 @@
               </a:spcAft>
             </a:pPr>
             <a:r>
-              <a:rPr sz="1500" b="0" i="0">
+              <a:rPr sz="2000" b="0" i="0">
                 <a:solidFill>
                   <a:srgbClr val="333333"/>
                 </a:solidFill>
@@ -5289,22 +5482,40 @@
               <a:t>–   </a:t>
             </a:r>
             <a:r>
-              <a:rPr sz="1500" b="1" i="0">
-                <a:solidFill>
-                  <a:srgbClr val="333333"/>
-                </a:solidFill>
-                <a:latin typeface="Calibri"/>
-              </a:rPr>
-              <a:t>Objetivo:</a:t>
-            </a:r>
-            <a:r>
-              <a:rPr sz="1500" b="0" i="0">
-                <a:solidFill>
-                  <a:srgbClr val="333333"/>
-                </a:solidFill>
-                <a:latin typeface="Calibri"/>
-              </a:rPr>
-              <a:t> Dos procedimientos de negocio en PL/pgSQL corriendo en ExamLab, su batería de pruebas con evidencia, y el contrato de los dos documentado.</a:t>
+              <a:rPr sz="2000" b="1" i="0">
+                <a:solidFill>
+                  <a:srgbClr val="333333"/>
+                </a:solidFill>
+                <a:latin typeface="Calibri"/>
+              </a:rPr>
+              <a:t>Por qué importa al PI:</a:t>
+            </a:r>
+            <a:r>
+              <a:rPr sz="2000" b="0" i="0">
+                <a:solidFill>
+                  <a:srgbClr val="333333"/>
+                </a:solidFill>
+                <a:latin typeface="Calibri"/>
+              </a:rPr>
+              <a:t> la regla de negocio deja de vivir en la pantalla y queda dentro de la base, donde vale para </a:t>
+            </a:r>
+            <a:r>
+              <a:rPr sz="2000" b="1" i="0">
+                <a:solidFill>
+                  <a:srgbClr val="333333"/>
+                </a:solidFill>
+                <a:latin typeface="Calibri"/>
+              </a:rPr>
+              <a:t>cualquier</a:t>
+            </a:r>
+            <a:r>
+              <a:rPr sz="2000" b="0" i="0">
+                <a:solidFill>
+                  <a:srgbClr val="333333"/>
+                </a:solidFill>
+                <a:latin typeface="Calibri"/>
+              </a:rPr>
+              <a:t> cliente que se conecte.</a:t>
             </a:r>
           </a:p>
           <a:p>
@@ -5314,31 +5525,13 @@
               </a:spcAft>
             </a:pPr>
             <a:r>
-              <a:rPr sz="1500" b="0" i="0">
-                <a:solidFill>
-                  <a:srgbClr val="333333"/>
-                </a:solidFill>
-                <a:latin typeface="Calibri"/>
-              </a:rPr>
-              <a:t>–   </a:t>
-            </a:r>
-            <a:r>
-              <a:rPr sz="1500" b="1" i="0">
-                <a:solidFill>
-                  <a:srgbClr val="333333"/>
-                </a:solidFill>
-                <a:latin typeface="Calibri"/>
-              </a:rPr>
-              <a:t>Exito:</a:t>
-            </a:r>
-            <a:r>
-              <a:rPr sz="1500" b="0" i="0">
-                <a:solidFill>
-                  <a:srgbClr val="333333"/>
-                </a:solidFill>
-                <a:latin typeface="Calibri"/>
-              </a:rPr>
-              <a:t> «sp_agendar_cita» con sus 3 parámetros y sus 3 validaciones, cada una con su «RAISE EXCEPTION» y su mensaje literal.</a:t>
+              <a:rPr sz="2000" b="0" i="0">
+                <a:solidFill>
+                  <a:srgbClr val="333333"/>
+                </a:solidFill>
+                <a:latin typeface="Calibri"/>
+              </a:rPr>
+              <a:t>–   Un procedimiento probado es la única forma de que «una mascota inactiva no agenda» siga siendo cierto cuando aparezcan la app, un script de carga y soporte.</a:t>
             </a:r>
           </a:p>
           <a:p>
@@ -5348,221 +5541,13 @@
               </a:spcAft>
             </a:pPr>
             <a:r>
-              <a:rPr sz="1500" b="0" i="0">
-                <a:solidFill>
-                  <a:srgbClr val="333333"/>
-                </a:solidFill>
-                <a:latin typeface="Calibri"/>
-              </a:rPr>
-              <a:t>–   </a:t>
-            </a:r>
-            <a:r>
-              <a:rPr sz="1500" b="1" i="0">
-                <a:solidFill>
-                  <a:srgbClr val="333333"/>
-                </a:solidFill>
-                <a:latin typeface="Calibri"/>
-              </a:rPr>
-              <a:t>Exito:</a:t>
-            </a:r>
-            <a:r>
-              <a:rPr sz="1500" b="0" i="0">
-                <a:solidFill>
-                  <a:srgbClr val="333333"/>
-                </a:solidFill>
-                <a:latin typeface="Calibri"/>
-              </a:rPr>
-              <a:t> Batería de 4 bloques «DO» que </a:t>
-            </a:r>
-            <a:r>
-              <a:rPr sz="1500" b="1" i="0">
-                <a:solidFill>
-                  <a:srgbClr val="333333"/>
-                </a:solidFill>
-                <a:latin typeface="Calibri"/>
-              </a:rPr>
-              <a:t>no aborta el script</a:t>
-            </a:r>
-            <a:r>
-              <a:rPr sz="1500" b="0" i="0">
-                <a:solidFill>
-                  <a:srgbClr val="333333"/>
-                </a:solidFill>
-                <a:latin typeface="Calibri"/>
-              </a:rPr>
-              <a:t> y escribe 4 filas en «resultado_prueba» con el «SQLERRM» real.</a:t>
-            </a:r>
-          </a:p>
-          <a:p>
-            <a:pPr>
-              <a:spcAft>
-                <a:spcPts val="800"/>
-              </a:spcAft>
-            </a:pPr>
-            <a:r>
-              <a:rPr sz="1500" b="0" i="0">
-                <a:solidFill>
-                  <a:srgbClr val="333333"/>
-                </a:solidFill>
-                <a:latin typeface="Calibri"/>
-              </a:rPr>
-              <a:t>–   </a:t>
-            </a:r>
-            <a:r>
-              <a:rPr sz="1500" b="1" i="0">
-                <a:solidFill>
-                  <a:srgbClr val="333333"/>
-                </a:solidFill>
-                <a:latin typeface="Calibri"/>
-              </a:rPr>
-              <a:t>Exito:</a:t>
-            </a:r>
-            <a:r>
-              <a:rPr sz="1500" b="0" i="0">
-                <a:solidFill>
-                  <a:srgbClr val="333333"/>
-                </a:solidFill>
-                <a:latin typeface="Calibri"/>
-              </a:rPr>
-              <a:t> El «COUNT(*)» de «cita» demuestra que pasó de </a:t>
-            </a:r>
-            <a:r>
-              <a:rPr sz="1500" b="1" i="0">
-                <a:solidFill>
-                  <a:srgbClr val="333333"/>
-                </a:solidFill>
-                <a:latin typeface="Calibri"/>
-              </a:rPr>
-              <a:t>10 a 11</a:t>
-            </a:r>
-            <a:r>
-              <a:rPr sz="1500" b="0" i="0">
-                <a:solidFill>
-                  <a:srgbClr val="333333"/>
-                </a:solidFill>
-                <a:latin typeface="Calibri"/>
-              </a:rPr>
-              <a:t> filas: las tres validaciones no insertaron nada.</a:t>
-            </a:r>
-          </a:p>
-          <a:p>
-            <a:pPr>
-              <a:spcAft>
-                <a:spcPts val="800"/>
-              </a:spcAft>
-            </a:pPr>
-            <a:r>
-              <a:rPr sz="1500" b="0" i="0">
-                <a:solidFill>
-                  <a:srgbClr val="333333"/>
-                </a:solidFill>
-                <a:latin typeface="Calibri"/>
-              </a:rPr>
-              <a:t>–   </a:t>
-            </a:r>
-            <a:r>
-              <a:rPr sz="1500" b="1" i="0">
-                <a:solidFill>
-                  <a:srgbClr val="333333"/>
-                </a:solidFill>
-                <a:latin typeface="Calibri"/>
-              </a:rPr>
-              <a:t>Exito:</a:t>
-            </a:r>
-            <a:r>
-              <a:rPr sz="1500" b="0" i="0">
-                <a:solidFill>
-                  <a:srgbClr val="333333"/>
-                </a:solidFill>
-                <a:latin typeface="Calibri"/>
-              </a:rPr>
-              <a:t> «sp_registrar_consulta» detectando la consulta duplicada con «EXISTS» </a:t>
-            </a:r>
-            <a:r>
-              <a:rPr sz="1500" b="1" i="0">
-                <a:solidFill>
-                  <a:srgbClr val="333333"/>
-                </a:solidFill>
-                <a:latin typeface="Calibri"/>
-              </a:rPr>
-              <a:t>antes</a:t>
-            </a:r>
-            <a:r>
-              <a:rPr sz="1500" b="0" i="0">
-                <a:solidFill>
-                  <a:srgbClr val="333333"/>
-                </a:solidFill>
-                <a:latin typeface="Calibri"/>
-              </a:rPr>
-              <a:t> de chocar contra el «UNIQUE».</a:t>
-            </a:r>
-          </a:p>
-          <a:p>
-            <a:pPr>
-              <a:spcAft>
-                <a:spcPts val="800"/>
-              </a:spcAft>
-            </a:pPr>
-            <a:r>
-              <a:rPr sz="1500" b="0" i="0">
-                <a:solidFill>
-                  <a:srgbClr val="333333"/>
-                </a:solidFill>
-                <a:latin typeface="Calibri"/>
-              </a:rPr>
-              <a:t>–   </a:t>
-            </a:r>
-            <a:r>
-              <a:rPr sz="1500" b="1" i="0">
-                <a:solidFill>
-                  <a:srgbClr val="333333"/>
-                </a:solidFill>
-                <a:latin typeface="Calibri"/>
-              </a:rPr>
-              <a:t>Exito:</a:t>
-            </a:r>
-            <a:r>
-              <a:rPr sz="1500" b="0" i="0">
-                <a:solidFill>
-                  <a:srgbClr val="333333"/>
-                </a:solidFill>
-                <a:latin typeface="Calibri"/>
-              </a:rPr>
-              <a:t> Contrato de los dos procedimientos con sus 6 bloques y la tabla de errores completa (7 filas); las firmas coinciden con el código entregado.</a:t>
-            </a:r>
-          </a:p>
-          <a:p>
-            <a:pPr>
-              <a:spcAft>
-                <a:spcPts val="800"/>
-              </a:spcAft>
-            </a:pPr>
-            <a:r>
-              <a:rPr sz="1500" b="0" i="0">
-                <a:solidFill>
-                  <a:srgbClr val="333333"/>
-                </a:solidFill>
-                <a:latin typeface="Calibri"/>
-              </a:rPr>
-              <a:t>–   </a:t>
-            </a:r>
-            <a:r>
-              <a:rPr sz="1500" b="1" i="0">
-                <a:solidFill>
-                  <a:srgbClr val="333333"/>
-                </a:solidFill>
-                <a:latin typeface="Calibri"/>
-              </a:rPr>
-              <a:t>Exito:</a:t>
-            </a:r>
-            <a:r>
-              <a:rPr sz="1500" b="0" i="0">
-                <a:solidFill>
-                  <a:srgbClr val="333333"/>
-                </a:solidFill>
-                <a:latin typeface="Calibri"/>
-              </a:rPr>
-              <a:t> Entrega domingo 23:59.</a:t>
+              <a:rPr sz="2000" b="0" i="0">
+                <a:solidFill>
+                  <a:srgbClr val="333333"/>
+                </a:solidFill>
+                <a:latin typeface="Calibri"/>
+              </a:rPr>
+              <a:t>–   El contrato que escribes hoy es lo que la Clase 12 le entrega a quien programe la aplicación: firma, errores y qué hacer con cada uno.</a:t>
             </a:r>
           </a:p>
         </p:txBody>
@@ -5743,7 +5728,7 @@
                 </a:solidFill>
                 <a:latin typeface="Calibri"/>
               </a:rPr>
-              <a:t>Taller PI VetCare — escenario / datos de partida</a:t>
+              <a:t>Taller PI VetCare — objetivo y criterios</a:t>
             </a:r>
           </a:p>
         </p:txBody>
@@ -5776,85 +5761,31 @@
               </a:spcAft>
             </a:pPr>
             <a:r>
-              <a:rPr sz="1600" b="0" i="0">
-                <a:solidFill>
-                  <a:srgbClr val="333333"/>
-                </a:solidFill>
-                <a:latin typeface="Calibri"/>
-              </a:rPr>
-              <a:t>–   Esquema de VetCare ya creado y poblado: </a:t>
-            </a:r>
-            <a:r>
-              <a:rPr sz="1600" b="1" i="0">
-                <a:solidFill>
-                  <a:srgbClr val="333333"/>
-                </a:solidFill>
-                <a:latin typeface="Calibri"/>
-              </a:rPr>
-              <a:t>8 mascotas</a:t>
-            </a:r>
-            <a:r>
-              <a:rPr sz="1600" b="0" i="0">
-                <a:solidFill>
-                  <a:srgbClr val="333333"/>
-                </a:solidFill>
-                <a:latin typeface="Calibri"/>
-              </a:rPr>
-              <a:t> —la </a:t>
-            </a:r>
-            <a:r>
-              <a:rPr sz="1600" b="1" i="0">
-                <a:solidFill>
-                  <a:srgbClr val="333333"/>
-                </a:solidFill>
-                <a:latin typeface="Calibri"/>
-              </a:rPr>
-              <a:t>3 (Rocky)</a:t>
-            </a:r>
-            <a:r>
-              <a:rPr sz="1600" b="0" i="0">
-                <a:solidFill>
-                  <a:srgbClr val="333333"/>
-                </a:solidFill>
-                <a:latin typeface="Calibri"/>
-              </a:rPr>
-              <a:t> y la </a:t>
-            </a:r>
-            <a:r>
-              <a:rPr sz="1600" b="1" i="0">
-                <a:solidFill>
-                  <a:srgbClr val="333333"/>
-                </a:solidFill>
-                <a:latin typeface="Calibri"/>
-              </a:rPr>
-              <a:t>8 (Kiara)</a:t>
-            </a:r>
-            <a:r>
-              <a:rPr sz="1600" b="0" i="0">
-                <a:solidFill>
-                  <a:srgbClr val="333333"/>
-                </a:solidFill>
-                <a:latin typeface="Calibri"/>
-              </a:rPr>
-              <a:t> están </a:t>
-            </a:r>
-            <a:r>
-              <a:rPr sz="1600" b="1" i="0">
-                <a:solidFill>
-                  <a:srgbClr val="333333"/>
-                </a:solidFill>
-                <a:latin typeface="Calibri"/>
-              </a:rPr>
-              <a:t>INACTIVAS</a:t>
-            </a:r>
-            <a:r>
-              <a:rPr sz="1600" b="0" i="0">
-                <a:solidFill>
-                  <a:srgbClr val="333333"/>
-                </a:solidFill>
-                <a:latin typeface="Calibri"/>
-              </a:rPr>
-              <a:t>—, 4 veterinarios y 10 citas.</a:t>
+              <a:rPr sz="2000" b="0" i="0">
+                <a:solidFill>
+                  <a:srgbClr val="333333"/>
+                </a:solidFill>
+                <a:latin typeface="Calibri"/>
+              </a:rPr>
+              <a:t>–   </a:t>
+            </a:r>
+            <a:r>
+              <a:rPr sz="2000" b="1" i="0">
+                <a:solidFill>
+                  <a:srgbClr val="333333"/>
+                </a:solidFill>
+                <a:latin typeface="Calibri"/>
+              </a:rPr>
+              <a:t>Objetivo:</a:t>
+            </a:r>
+            <a:r>
+              <a:rPr sz="2000" b="0" i="0">
+                <a:solidFill>
+                  <a:srgbClr val="333333"/>
+                </a:solidFill>
+                <a:latin typeface="Calibri"/>
+              </a:rPr>
+              <a:t> Dos procedimientos de negocio en PL/pgSQL corriendo en ExamLab, su batería de pruebas con evidencia, y el contrato de los dos documentado.</a:t>
             </a:r>
           </a:p>
           <a:p>
@@ -5864,31 +5795,31 @@
               </a:spcAft>
             </a:pPr>
             <a:r>
-              <a:rPr sz="1600" b="0" i="0">
-                <a:solidFill>
-                  <a:srgbClr val="333333"/>
-                </a:solidFill>
-                <a:latin typeface="Calibri"/>
-              </a:rPr>
-              <a:t>–   Ya existe una cita del </a:t>
-            </a:r>
-            <a:r>
-              <a:rPr sz="1600" b="1" i="0">
-                <a:solidFill>
-                  <a:srgbClr val="333333"/>
-                </a:solidFill>
-                <a:latin typeface="Calibri"/>
-              </a:rPr>
-              <a:t>veterinario 1</a:t>
-            </a:r>
-            <a:r>
-              <a:rPr sz="1600" b="0" i="0">
-                <a:solidFill>
-                  <a:srgbClr val="333333"/>
-                </a:solidFill>
-                <a:latin typeface="Calibri"/>
-              </a:rPr>
-              <a:t> el «2026-09-01 08:00:00»: es la que dispara la validación de veterinario ocupado.</a:t>
+              <a:rPr sz="2000" b="0" i="0">
+                <a:solidFill>
+                  <a:srgbClr val="333333"/>
+                </a:solidFill>
+                <a:latin typeface="Calibri"/>
+              </a:rPr>
+              <a:t>–   </a:t>
+            </a:r>
+            <a:r>
+              <a:rPr sz="2000" b="1" i="0">
+                <a:solidFill>
+                  <a:srgbClr val="333333"/>
+                </a:solidFill>
+                <a:latin typeface="Calibri"/>
+              </a:rPr>
+              <a:t>Exito:</a:t>
+            </a:r>
+            <a:r>
+              <a:rPr sz="2000" b="0" i="0">
+                <a:solidFill>
+                  <a:srgbClr val="333333"/>
+                </a:solidFill>
+                <a:latin typeface="Calibri"/>
+              </a:rPr>
+              <a:t> «sp_agendar_cita» con sus 3 parámetros y sus 3 validaciones, cada una con su «RAISE EXCEPTION» y su mensaje literal.</a:t>
             </a:r>
           </a:p>
           <a:p>
@@ -5898,7 +5829,7 @@
               </a:spcAft>
             </a:pPr>
             <a:r>
-              <a:rPr sz="1600" b="0" i="0">
+              <a:rPr sz="2000" b="0" i="0">
                 <a:solidFill>
                   <a:srgbClr val="333333"/>
                 </a:solidFill>
@@ -5907,22 +5838,40 @@
               <a:t>–   </a:t>
             </a:r>
             <a:r>
-              <a:rPr sz="1600" b="1" i="0">
-                <a:solidFill>
-                  <a:srgbClr val="333333"/>
-                </a:solidFill>
-                <a:latin typeface="Calibri"/>
-              </a:rPr>
-              <a:t>Motor:</a:t>
-            </a:r>
-            <a:r>
-              <a:rPr sz="1600" b="0" i="0">
-                <a:solidFill>
-                  <a:srgbClr val="333333"/>
-                </a:solidFill>
-                <a:latin typeface="Calibri"/>
-              </a:rPr>
-              <a:t> PostgreSQL dentro de ExamLab. El molde es «CREATE PROCEDURE ... LANGUAGE plpgsql AS $proc$ ... $proc$;» — no hay «IS», ni «VARCHAR2», ni «/» final.</a:t>
+              <a:rPr sz="2000" b="1" i="0">
+                <a:solidFill>
+                  <a:srgbClr val="333333"/>
+                </a:solidFill>
+                <a:latin typeface="Calibri"/>
+              </a:rPr>
+              <a:t>Exito:</a:t>
+            </a:r>
+            <a:r>
+              <a:rPr sz="2000" b="0" i="0">
+                <a:solidFill>
+                  <a:srgbClr val="333333"/>
+                </a:solidFill>
+                <a:latin typeface="Calibri"/>
+              </a:rPr>
+              <a:t> Batería de 4 bloques «DO» que </a:t>
+            </a:r>
+            <a:r>
+              <a:rPr sz="2000" b="1" i="0">
+                <a:solidFill>
+                  <a:srgbClr val="333333"/>
+                </a:solidFill>
+                <a:latin typeface="Calibri"/>
+              </a:rPr>
+              <a:t>no aborta el script</a:t>
+            </a:r>
+            <a:r>
+              <a:rPr sz="2000" b="0" i="0">
+                <a:solidFill>
+                  <a:srgbClr val="333333"/>
+                </a:solidFill>
+                <a:latin typeface="Calibri"/>
+              </a:rPr>
+              <a:t> y escribe 4 filas en «resultado_prueba» con el «SQLERRM» real.</a:t>
             </a:r>
           </a:p>
           <a:p>
@@ -5932,13 +5881,169 @@
               </a:spcAft>
             </a:pPr>
             <a:r>
-              <a:rPr sz="1600" b="0" i="0">
-                <a:solidFill>
-                  <a:srgbClr val="333333"/>
-                </a:solidFill>
-                <a:latin typeface="Calibri"/>
-              </a:rPr>
-              <a:t>–   El contrato se escribe en Google Docs y se pega en la pregunta 5; la plantilla en blanco de sus 6 bloques y de la tabla de errores está en este documento.</a:t>
+              <a:rPr sz="2000" b="0" i="0">
+                <a:solidFill>
+                  <a:srgbClr val="333333"/>
+                </a:solidFill>
+                <a:latin typeface="Calibri"/>
+              </a:rPr>
+              <a:t>–   </a:t>
+            </a:r>
+            <a:r>
+              <a:rPr sz="2000" b="1" i="0">
+                <a:solidFill>
+                  <a:srgbClr val="333333"/>
+                </a:solidFill>
+                <a:latin typeface="Calibri"/>
+              </a:rPr>
+              <a:t>Exito:</a:t>
+            </a:r>
+            <a:r>
+              <a:rPr sz="2000" b="0" i="0">
+                <a:solidFill>
+                  <a:srgbClr val="333333"/>
+                </a:solidFill>
+                <a:latin typeface="Calibri"/>
+              </a:rPr>
+              <a:t> El «COUNT(*)» de «cita» demuestra que pasó de </a:t>
+            </a:r>
+            <a:r>
+              <a:rPr sz="2000" b="1" i="0">
+                <a:solidFill>
+                  <a:srgbClr val="333333"/>
+                </a:solidFill>
+                <a:latin typeface="Calibri"/>
+              </a:rPr>
+              <a:t>10 a 11</a:t>
+            </a:r>
+            <a:r>
+              <a:rPr sz="2000" b="0" i="0">
+                <a:solidFill>
+                  <a:srgbClr val="333333"/>
+                </a:solidFill>
+                <a:latin typeface="Calibri"/>
+              </a:rPr>
+              <a:t> filas: las tres validaciones no insertaron nada.</a:t>
+            </a:r>
+          </a:p>
+          <a:p>
+            <a:pPr>
+              <a:spcAft>
+                <a:spcPts val="800"/>
+              </a:spcAft>
+            </a:pPr>
+            <a:r>
+              <a:rPr sz="2000" b="0" i="0">
+                <a:solidFill>
+                  <a:srgbClr val="333333"/>
+                </a:solidFill>
+                <a:latin typeface="Calibri"/>
+              </a:rPr>
+              <a:t>–   </a:t>
+            </a:r>
+            <a:r>
+              <a:rPr sz="2000" b="1" i="0">
+                <a:solidFill>
+                  <a:srgbClr val="333333"/>
+                </a:solidFill>
+                <a:latin typeface="Calibri"/>
+              </a:rPr>
+              <a:t>Exito:</a:t>
+            </a:r>
+            <a:r>
+              <a:rPr sz="2000" b="0" i="0">
+                <a:solidFill>
+                  <a:srgbClr val="333333"/>
+                </a:solidFill>
+                <a:latin typeface="Calibri"/>
+              </a:rPr>
+              <a:t> «sp_registrar_consulta» detectando la consulta duplicada con «EXISTS» </a:t>
+            </a:r>
+            <a:r>
+              <a:rPr sz="2000" b="1" i="0">
+                <a:solidFill>
+                  <a:srgbClr val="333333"/>
+                </a:solidFill>
+                <a:latin typeface="Calibri"/>
+              </a:rPr>
+              <a:t>antes</a:t>
+            </a:r>
+            <a:r>
+              <a:rPr sz="2000" b="0" i="0">
+                <a:solidFill>
+                  <a:srgbClr val="333333"/>
+                </a:solidFill>
+                <a:latin typeface="Calibri"/>
+              </a:rPr>
+              <a:t> de chocar contra el «UNIQUE».</a:t>
+            </a:r>
+          </a:p>
+          <a:p>
+            <a:pPr>
+              <a:spcAft>
+                <a:spcPts val="800"/>
+              </a:spcAft>
+            </a:pPr>
+            <a:r>
+              <a:rPr sz="2000" b="0" i="0">
+                <a:solidFill>
+                  <a:srgbClr val="333333"/>
+                </a:solidFill>
+                <a:latin typeface="Calibri"/>
+              </a:rPr>
+              <a:t>–   </a:t>
+            </a:r>
+            <a:r>
+              <a:rPr sz="2000" b="1" i="0">
+                <a:solidFill>
+                  <a:srgbClr val="333333"/>
+                </a:solidFill>
+                <a:latin typeface="Calibri"/>
+              </a:rPr>
+              <a:t>Exito:</a:t>
+            </a:r>
+            <a:r>
+              <a:rPr sz="2000" b="0" i="0">
+                <a:solidFill>
+                  <a:srgbClr val="333333"/>
+                </a:solidFill>
+                <a:latin typeface="Calibri"/>
+              </a:rPr>
+              <a:t> Contrato de los dos procedimientos con sus 6 bloques y la tabla de errores completa (7 filas); las firmas coinciden con el código entregado.</a:t>
+            </a:r>
+          </a:p>
+          <a:p>
+            <a:pPr>
+              <a:spcAft>
+                <a:spcPts val="800"/>
+              </a:spcAft>
+            </a:pPr>
+            <a:r>
+              <a:rPr sz="2000" b="0" i="0">
+                <a:solidFill>
+                  <a:srgbClr val="333333"/>
+                </a:solidFill>
+                <a:latin typeface="Calibri"/>
+              </a:rPr>
+              <a:t>–   </a:t>
+            </a:r>
+            <a:r>
+              <a:rPr sz="2000" b="1" i="0">
+                <a:solidFill>
+                  <a:srgbClr val="333333"/>
+                </a:solidFill>
+                <a:latin typeface="Calibri"/>
+              </a:rPr>
+              <a:t>Exito:</a:t>
+            </a:r>
+            <a:r>
+              <a:rPr sz="2000" b="0" i="0">
+                <a:solidFill>
+                  <a:srgbClr val="333333"/>
+                </a:solidFill>
+                <a:latin typeface="Calibri"/>
+              </a:rPr>
+              <a:t> Entrega domingo 23:59.</a:t>
             </a:r>
           </a:p>
         </p:txBody>
@@ -6119,111 +6224,21 @@
                 </a:solidFill>
                 <a:latin typeface="Calibri"/>
               </a:rPr>
-              <a:t>Taller PI VetCare — pasos guiados</a:t>
-            </a:r>
-          </a:p>
-        </p:txBody>
-      </p:sp>
-      <p:sp>
-        <p:nvSpPr>
-          <p:cNvPr id="5" name="Rounded Rectangle 4"/>
-          <p:cNvSpPr/>
-          <p:nvPr/>
-        </p:nvSpPr>
-        <p:spPr>
-          <a:xfrm>
-            <a:off x="457200" y="1234440"/>
-            <a:ext cx="11277295" cy="950976"/>
-          </a:xfrm>
-          <a:prstGeom prst="roundRect">
-            <a:avLst>
-              <a:gd name="adj" fmla="val 12000"/>
-            </a:avLst>
-          </a:prstGeom>
-          <a:solidFill>
-            <a:srgbClr val="F2F2F2"/>
-          </a:solidFill>
-          <a:ln>
-            <a:noFill/>
-          </a:ln>
-        </p:spPr>
-        <p:style>
-          <a:lnRef idx="1">
-            <a:schemeClr val="accent1"/>
-          </a:lnRef>
-          <a:fillRef idx="3">
-            <a:schemeClr val="accent1"/>
-          </a:fillRef>
-          <a:effectRef idx="2">
-            <a:schemeClr val="accent1"/>
-          </a:effectRef>
-          <a:fontRef idx="minor">
-            <a:schemeClr val="lt1"/>
-          </a:fontRef>
-        </p:style>
-        <p:txBody>
-          <a:bodyPr rtlCol="0" anchor="ctr"/>
-          <a:lstStyle/>
-          <a:p>
-            <a:pPr algn="ctr"/>
-          </a:p>
-        </p:txBody>
-      </p:sp>
-      <p:sp>
-        <p:nvSpPr>
-          <p:cNvPr id="6" name="Rounded Rectangle 5"/>
-          <p:cNvSpPr/>
-          <p:nvPr/>
-        </p:nvSpPr>
-        <p:spPr>
-          <a:xfrm>
-            <a:off x="594360" y="1490472"/>
-            <a:ext cx="438912" cy="438912"/>
-          </a:xfrm>
-          <a:prstGeom prst="roundRect">
-            <a:avLst>
-              <a:gd name="adj" fmla="val 12000"/>
-            </a:avLst>
-          </a:prstGeom>
-          <a:solidFill>
-            <a:srgbClr val="095292"/>
-          </a:solidFill>
-          <a:ln>
-            <a:noFill/>
-          </a:ln>
-        </p:spPr>
-        <p:style>
-          <a:lnRef idx="1">
-            <a:schemeClr val="accent1"/>
-          </a:lnRef>
-          <a:fillRef idx="3">
-            <a:schemeClr val="accent1"/>
-          </a:fillRef>
-          <a:effectRef idx="2">
-            <a:schemeClr val="accent1"/>
-          </a:effectRef>
-          <a:fontRef idx="minor">
-            <a:schemeClr val="lt1"/>
-          </a:fontRef>
-        </p:style>
-        <p:txBody>
-          <a:bodyPr rtlCol="0" anchor="ctr"/>
-          <a:lstStyle/>
-          <a:p>
-            <a:pPr algn="ctr"/>
-          </a:p>
-        </p:txBody>
-      </p:sp>
-      <p:sp>
-        <p:nvSpPr>
-          <p:cNvPr id="7" name="TextBox 6"/>
+              <a:t>Taller PI VetCare — escenario / datos de partida</a:t>
+            </a:r>
+          </a:p>
+        </p:txBody>
+      </p:sp>
+      <p:sp>
+        <p:nvSpPr>
+          <p:cNvPr id="5" name="TextBox 4"/>
           <p:cNvSpPr txBox="1"/>
           <p:nvPr/>
         </p:nvSpPr>
         <p:spPr>
           <a:xfrm>
-            <a:off x="594360" y="1490472"/>
-            <a:ext cx="438912" cy="438912"/>
+            <a:off x="457200" y="1170432"/>
+            <a:ext cx="11277295" cy="5230368"/>
           </a:xfrm>
           <a:prstGeom prst="rect">
             <a:avLst/>
@@ -6231,677 +6246,187 @@
           <a:noFill/>
         </p:spPr>
         <p:txBody>
-          <a:bodyPr wrap="square" anchor="ctr"/>
-          <a:lstStyle/>
-          <a:p>
-            <a:pPr algn="ctr"/>
-            <a:r>
-              <a:rPr sz="1600" b="1" i="0">
-                <a:solidFill>
-                  <a:srgbClr val="FFFFFF"/>
-                </a:solidFill>
-                <a:latin typeface="Calibri"/>
-              </a:rPr>
-              <a:t>1</a:t>
-            </a:r>
-          </a:p>
-        </p:txBody>
-      </p:sp>
-      <p:sp>
-        <p:nvSpPr>
-          <p:cNvPr id="8" name="TextBox 7"/>
-          <p:cNvSpPr txBox="1"/>
-          <p:nvPr/>
-        </p:nvSpPr>
-        <p:spPr>
-          <a:xfrm>
-            <a:off x="1188720" y="1325880"/>
-            <a:ext cx="10271455" cy="786384"/>
-          </a:xfrm>
-          <a:prstGeom prst="rect">
-            <a:avLst/>
-          </a:prstGeom>
-          <a:noFill/>
-        </p:spPr>
-        <p:txBody>
-          <a:bodyPr wrap="square" anchor="ctr"/>
-          <a:lstStyle/>
-          <a:p>
-            <a:r>
-              <a:rPr sz="1500" b="1" i="0">
-                <a:solidFill>
-                  <a:srgbClr val="095292"/>
-                </a:solidFill>
-                <a:latin typeface="Calibri"/>
-              </a:rPr>
-              <a:t>Escribir sp_agendar_cita en PL/pgSQL y ejecutarlo en ExamLab (LANGUAGE plpgsql, dollar-quoting, sin sintaxis de Oracle).</a:t>
-            </a:r>
-          </a:p>
-        </p:txBody>
-      </p:sp>
-      <p:sp>
-        <p:nvSpPr>
-          <p:cNvPr id="9" name="Rounded Rectangle 8"/>
-          <p:cNvSpPr/>
-          <p:nvPr/>
-        </p:nvSpPr>
-        <p:spPr>
-          <a:xfrm>
-            <a:off x="457200" y="2276856"/>
-            <a:ext cx="11277295" cy="950976"/>
-          </a:xfrm>
-          <a:prstGeom prst="roundRect">
-            <a:avLst>
-              <a:gd name="adj" fmla="val 12000"/>
-            </a:avLst>
-          </a:prstGeom>
-          <a:solidFill>
-            <a:srgbClr val="E8F4FA"/>
-          </a:solidFill>
-          <a:ln>
-            <a:noFill/>
-          </a:ln>
-        </p:spPr>
-        <p:style>
-          <a:lnRef idx="1">
-            <a:schemeClr val="accent1"/>
-          </a:lnRef>
-          <a:fillRef idx="3">
-            <a:schemeClr val="accent1"/>
-          </a:fillRef>
-          <a:effectRef idx="2">
-            <a:schemeClr val="accent1"/>
-          </a:effectRef>
-          <a:fontRef idx="minor">
-            <a:schemeClr val="lt1"/>
-          </a:fontRef>
-        </p:style>
-        <p:txBody>
-          <a:bodyPr rtlCol="0" anchor="ctr"/>
-          <a:lstStyle/>
-          <a:p>
-            <a:pPr algn="ctr"/>
-          </a:p>
-        </p:txBody>
-      </p:sp>
-      <p:sp>
-        <p:nvSpPr>
-          <p:cNvPr id="10" name="Rounded Rectangle 9"/>
-          <p:cNvSpPr/>
-          <p:nvPr/>
-        </p:nvSpPr>
-        <p:spPr>
-          <a:xfrm>
-            <a:off x="594360" y="2532888"/>
-            <a:ext cx="438912" cy="438912"/>
-          </a:xfrm>
-          <a:prstGeom prst="roundRect">
-            <a:avLst>
-              <a:gd name="adj" fmla="val 12000"/>
-            </a:avLst>
-          </a:prstGeom>
-          <a:solidFill>
-            <a:srgbClr val="095292"/>
-          </a:solidFill>
-          <a:ln>
-            <a:noFill/>
-          </a:ln>
-        </p:spPr>
-        <p:style>
-          <a:lnRef idx="1">
-            <a:schemeClr val="accent1"/>
-          </a:lnRef>
-          <a:fillRef idx="3">
-            <a:schemeClr val="accent1"/>
-          </a:fillRef>
-          <a:effectRef idx="2">
-            <a:schemeClr val="accent1"/>
-          </a:effectRef>
-          <a:fontRef idx="minor">
-            <a:schemeClr val="lt1"/>
-          </a:fontRef>
-        </p:style>
-        <p:txBody>
-          <a:bodyPr rtlCol="0" anchor="ctr"/>
-          <a:lstStyle/>
-          <a:p>
-            <a:pPr algn="ctr"/>
-          </a:p>
-        </p:txBody>
-      </p:sp>
-      <p:sp>
-        <p:nvSpPr>
-          <p:cNvPr id="11" name="TextBox 10"/>
-          <p:cNvSpPr txBox="1"/>
-          <p:nvPr/>
-        </p:nvSpPr>
-        <p:spPr>
-          <a:xfrm>
-            <a:off x="594360" y="2532888"/>
-            <a:ext cx="438912" cy="438912"/>
-          </a:xfrm>
-          <a:prstGeom prst="rect">
-            <a:avLst/>
-          </a:prstGeom>
-          <a:noFill/>
-        </p:spPr>
-        <p:txBody>
-          <a:bodyPr wrap="square" anchor="ctr"/>
-          <a:lstStyle/>
-          <a:p>
-            <a:pPr algn="ctr"/>
-            <a:r>
-              <a:rPr sz="1600" b="1" i="0">
-                <a:solidFill>
-                  <a:srgbClr val="FFFFFF"/>
-                </a:solidFill>
-                <a:latin typeface="Calibri"/>
-              </a:rPr>
-              <a:t>2</a:t>
-            </a:r>
-          </a:p>
-        </p:txBody>
-      </p:sp>
-      <p:sp>
-        <p:nvSpPr>
-          <p:cNvPr id="12" name="TextBox 11"/>
-          <p:cNvSpPr txBox="1"/>
-          <p:nvPr/>
-        </p:nvSpPr>
-        <p:spPr>
-          <a:xfrm>
-            <a:off x="1188720" y="2368296"/>
-            <a:ext cx="10271455" cy="786384"/>
-          </a:xfrm>
-          <a:prstGeom prst="rect">
-            <a:avLst/>
-          </a:prstGeom>
-          <a:noFill/>
-        </p:spPr>
-        <p:txBody>
-          <a:bodyPr wrap="square" anchor="ctr"/>
-          <a:lstStyle/>
-          <a:p>
-            <a:r>
-              <a:rPr sz="1500" b="1" i="0">
-                <a:solidFill>
-                  <a:srgbClr val="095292"/>
-                </a:solidFill>
-                <a:latin typeface="Calibri"/>
-              </a:rPr>
-              <a:t>Incluir las 3 validaciones de negocio del PI, cada una con su RAISE EXCEPTION y su mensaje literal.</a:t>
-            </a:r>
-          </a:p>
-        </p:txBody>
-      </p:sp>
-      <p:sp>
-        <p:nvSpPr>
-          <p:cNvPr id="13" name="Rounded Rectangle 12"/>
-          <p:cNvSpPr/>
-          <p:nvPr/>
-        </p:nvSpPr>
-        <p:spPr>
-          <a:xfrm>
-            <a:off x="457200" y="3319272"/>
-            <a:ext cx="11277295" cy="950976"/>
-          </a:xfrm>
-          <a:prstGeom prst="roundRect">
-            <a:avLst>
-              <a:gd name="adj" fmla="val 12000"/>
-            </a:avLst>
-          </a:prstGeom>
-          <a:solidFill>
-            <a:srgbClr val="F2F2F2"/>
-          </a:solidFill>
-          <a:ln>
-            <a:noFill/>
-          </a:ln>
-        </p:spPr>
-        <p:style>
-          <a:lnRef idx="1">
-            <a:schemeClr val="accent1"/>
-          </a:lnRef>
-          <a:fillRef idx="3">
-            <a:schemeClr val="accent1"/>
-          </a:fillRef>
-          <a:effectRef idx="2">
-            <a:schemeClr val="accent1"/>
-          </a:effectRef>
-          <a:fontRef idx="minor">
-            <a:schemeClr val="lt1"/>
-          </a:fontRef>
-        </p:style>
-        <p:txBody>
-          <a:bodyPr rtlCol="0" anchor="ctr"/>
-          <a:lstStyle/>
-          <a:p>
-            <a:pPr algn="ctr"/>
-          </a:p>
-        </p:txBody>
-      </p:sp>
-      <p:sp>
-        <p:nvSpPr>
-          <p:cNvPr id="14" name="Rounded Rectangle 13"/>
-          <p:cNvSpPr/>
-          <p:nvPr/>
-        </p:nvSpPr>
-        <p:spPr>
-          <a:xfrm>
-            <a:off x="594360" y="3575304"/>
-            <a:ext cx="438912" cy="438912"/>
-          </a:xfrm>
-          <a:prstGeom prst="roundRect">
-            <a:avLst>
-              <a:gd name="adj" fmla="val 12000"/>
-            </a:avLst>
-          </a:prstGeom>
-          <a:solidFill>
-            <a:srgbClr val="095292"/>
-          </a:solidFill>
-          <a:ln>
-            <a:noFill/>
-          </a:ln>
-        </p:spPr>
-        <p:style>
-          <a:lnRef idx="1">
-            <a:schemeClr val="accent1"/>
-          </a:lnRef>
-          <a:fillRef idx="3">
-            <a:schemeClr val="accent1"/>
-          </a:fillRef>
-          <a:effectRef idx="2">
-            <a:schemeClr val="accent1"/>
-          </a:effectRef>
-          <a:fontRef idx="minor">
-            <a:schemeClr val="lt1"/>
-          </a:fontRef>
-        </p:style>
-        <p:txBody>
-          <a:bodyPr rtlCol="0" anchor="ctr"/>
-          <a:lstStyle/>
-          <a:p>
-            <a:pPr algn="ctr"/>
-          </a:p>
-        </p:txBody>
-      </p:sp>
-      <p:sp>
-        <p:nvSpPr>
-          <p:cNvPr id="15" name="TextBox 14"/>
-          <p:cNvSpPr txBox="1"/>
-          <p:nvPr/>
-        </p:nvSpPr>
-        <p:spPr>
-          <a:xfrm>
-            <a:off x="594360" y="3575304"/>
-            <a:ext cx="438912" cy="438912"/>
-          </a:xfrm>
-          <a:prstGeom prst="rect">
-            <a:avLst/>
-          </a:prstGeom>
-          <a:noFill/>
-        </p:spPr>
-        <p:txBody>
-          <a:bodyPr wrap="square" anchor="ctr"/>
-          <a:lstStyle/>
-          <a:p>
-            <a:pPr algn="ctr"/>
-            <a:r>
-              <a:rPr sz="1600" b="1" i="0">
-                <a:solidFill>
-                  <a:srgbClr val="FFFFFF"/>
-                </a:solidFill>
-                <a:latin typeface="Calibri"/>
-              </a:rPr>
-              <a:t>3</a:t>
-            </a:r>
-          </a:p>
-        </p:txBody>
-      </p:sp>
-      <p:sp>
-        <p:nvSpPr>
-          <p:cNvPr id="16" name="TextBox 15"/>
-          <p:cNvSpPr txBox="1"/>
-          <p:nvPr/>
-        </p:nvSpPr>
-        <p:spPr>
-          <a:xfrm>
-            <a:off x="1188720" y="3410712"/>
-            <a:ext cx="10271455" cy="786384"/>
-          </a:xfrm>
-          <a:prstGeom prst="rect">
-            <a:avLst/>
-          </a:prstGeom>
-          <a:noFill/>
-        </p:spPr>
-        <p:txBody>
-          <a:bodyPr wrap="square" anchor="ctr"/>
-          <a:lstStyle/>
-          <a:p>
-            <a:r>
-              <a:rPr sz="1500" b="1" i="0">
-                <a:solidFill>
-                  <a:srgbClr val="095292"/>
-                </a:solidFill>
-                <a:latin typeface="Calibri"/>
-              </a:rPr>
-              <a:t>Correr la bateria de pruebas con bloques DO: 1 caso OK + 3 casos error, escritos en resultado_prueba, mas el COUNT(*) de cita antes y despues.</a:t>
-            </a:r>
-          </a:p>
-        </p:txBody>
-      </p:sp>
-      <p:sp>
-        <p:nvSpPr>
-          <p:cNvPr id="17" name="Rounded Rectangle 16"/>
-          <p:cNvSpPr/>
-          <p:nvPr/>
-        </p:nvSpPr>
-        <p:spPr>
-          <a:xfrm>
-            <a:off x="457200" y="4361688"/>
-            <a:ext cx="11277295" cy="950976"/>
-          </a:xfrm>
-          <a:prstGeom prst="roundRect">
-            <a:avLst>
-              <a:gd name="adj" fmla="val 12000"/>
-            </a:avLst>
-          </a:prstGeom>
-          <a:solidFill>
-            <a:srgbClr val="E8F4FA"/>
-          </a:solidFill>
-          <a:ln>
-            <a:noFill/>
-          </a:ln>
-        </p:spPr>
-        <p:style>
-          <a:lnRef idx="1">
-            <a:schemeClr val="accent1"/>
-          </a:lnRef>
-          <a:fillRef idx="3">
-            <a:schemeClr val="accent1"/>
-          </a:fillRef>
-          <a:effectRef idx="2">
-            <a:schemeClr val="accent1"/>
-          </a:effectRef>
-          <a:fontRef idx="minor">
-            <a:schemeClr val="lt1"/>
-          </a:fontRef>
-        </p:style>
-        <p:txBody>
-          <a:bodyPr rtlCol="0" anchor="ctr"/>
-          <a:lstStyle/>
-          <a:p>
-            <a:pPr algn="ctr"/>
-          </a:p>
-        </p:txBody>
-      </p:sp>
-      <p:sp>
-        <p:nvSpPr>
-          <p:cNvPr id="18" name="Rounded Rectangle 17"/>
-          <p:cNvSpPr/>
-          <p:nvPr/>
-        </p:nvSpPr>
-        <p:spPr>
-          <a:xfrm>
-            <a:off x="594360" y="4617720"/>
-            <a:ext cx="438912" cy="438912"/>
-          </a:xfrm>
-          <a:prstGeom prst="roundRect">
-            <a:avLst>
-              <a:gd name="adj" fmla="val 12000"/>
-            </a:avLst>
-          </a:prstGeom>
-          <a:solidFill>
-            <a:srgbClr val="095292"/>
-          </a:solidFill>
-          <a:ln>
-            <a:noFill/>
-          </a:ln>
-        </p:spPr>
-        <p:style>
-          <a:lnRef idx="1">
-            <a:schemeClr val="accent1"/>
-          </a:lnRef>
-          <a:fillRef idx="3">
-            <a:schemeClr val="accent1"/>
-          </a:fillRef>
-          <a:effectRef idx="2">
-            <a:schemeClr val="accent1"/>
-          </a:effectRef>
-          <a:fontRef idx="minor">
-            <a:schemeClr val="lt1"/>
-          </a:fontRef>
-        </p:style>
-        <p:txBody>
-          <a:bodyPr rtlCol="0" anchor="ctr"/>
-          <a:lstStyle/>
-          <a:p>
-            <a:pPr algn="ctr"/>
-          </a:p>
-        </p:txBody>
-      </p:sp>
-      <p:sp>
-        <p:nvSpPr>
-          <p:cNvPr id="19" name="TextBox 18"/>
-          <p:cNvSpPr txBox="1"/>
-          <p:nvPr/>
-        </p:nvSpPr>
-        <p:spPr>
-          <a:xfrm>
-            <a:off x="594360" y="4617720"/>
-            <a:ext cx="438912" cy="438912"/>
-          </a:xfrm>
-          <a:prstGeom prst="rect">
-            <a:avLst/>
-          </a:prstGeom>
-          <a:noFill/>
-        </p:spPr>
-        <p:txBody>
-          <a:bodyPr wrap="square" anchor="ctr"/>
-          <a:lstStyle/>
-          <a:p>
-            <a:pPr algn="ctr"/>
-            <a:r>
-              <a:rPr sz="1600" b="1" i="0">
-                <a:solidFill>
-                  <a:srgbClr val="FFFFFF"/>
-                </a:solidFill>
-                <a:latin typeface="Calibri"/>
-              </a:rPr>
-              <a:t>4</a:t>
-            </a:r>
-          </a:p>
-        </p:txBody>
-      </p:sp>
-      <p:sp>
-        <p:nvSpPr>
-          <p:cNvPr id="20" name="TextBox 19"/>
-          <p:cNvSpPr txBox="1"/>
-          <p:nvPr/>
-        </p:nvSpPr>
-        <p:spPr>
-          <a:xfrm>
-            <a:off x="1188720" y="4453128"/>
-            <a:ext cx="10271455" cy="786384"/>
-          </a:xfrm>
-          <a:prstGeom prst="rect">
-            <a:avLst/>
-          </a:prstGeom>
-          <a:noFill/>
-        </p:spPr>
-        <p:txBody>
-          <a:bodyPr wrap="square" anchor="ctr"/>
-          <a:lstStyle/>
-          <a:p>
-            <a:r>
-              <a:rPr sz="1500" b="1" i="0">
-                <a:solidFill>
-                  <a:srgbClr val="095292"/>
-                </a:solidFill>
-                <a:latin typeface="Calibri"/>
-              </a:rPr>
-              <a:t>Escribir sp_registrar_consulta, comprobando con EXISTS antes de chocar contra la restriccion UNIQUE.</a:t>
-            </a:r>
-          </a:p>
-        </p:txBody>
-      </p:sp>
-      <p:sp>
-        <p:nvSpPr>
-          <p:cNvPr id="21" name="Rounded Rectangle 20"/>
-          <p:cNvSpPr/>
-          <p:nvPr/>
-        </p:nvSpPr>
-        <p:spPr>
-          <a:xfrm>
-            <a:off x="457200" y="5404104"/>
-            <a:ext cx="11277295" cy="950976"/>
-          </a:xfrm>
-          <a:prstGeom prst="roundRect">
-            <a:avLst>
-              <a:gd name="adj" fmla="val 12000"/>
-            </a:avLst>
-          </a:prstGeom>
-          <a:solidFill>
-            <a:srgbClr val="F2F2F2"/>
-          </a:solidFill>
-          <a:ln>
-            <a:noFill/>
-          </a:ln>
-        </p:spPr>
-        <p:style>
-          <a:lnRef idx="1">
-            <a:schemeClr val="accent1"/>
-          </a:lnRef>
-          <a:fillRef idx="3">
-            <a:schemeClr val="accent1"/>
-          </a:fillRef>
-          <a:effectRef idx="2">
-            <a:schemeClr val="accent1"/>
-          </a:effectRef>
-          <a:fontRef idx="minor">
-            <a:schemeClr val="lt1"/>
-          </a:fontRef>
-        </p:style>
-        <p:txBody>
-          <a:bodyPr rtlCol="0" anchor="ctr"/>
-          <a:lstStyle/>
-          <a:p>
-            <a:pPr algn="ctr"/>
-          </a:p>
-        </p:txBody>
-      </p:sp>
-      <p:sp>
-        <p:nvSpPr>
-          <p:cNvPr id="22" name="Rounded Rectangle 21"/>
-          <p:cNvSpPr/>
-          <p:nvPr/>
-        </p:nvSpPr>
-        <p:spPr>
-          <a:xfrm>
-            <a:off x="594360" y="5660136"/>
-            <a:ext cx="438912" cy="438912"/>
-          </a:xfrm>
-          <a:prstGeom prst="roundRect">
-            <a:avLst>
-              <a:gd name="adj" fmla="val 12000"/>
-            </a:avLst>
-          </a:prstGeom>
-          <a:solidFill>
-            <a:srgbClr val="095292"/>
-          </a:solidFill>
-          <a:ln>
-            <a:noFill/>
-          </a:ln>
-        </p:spPr>
-        <p:style>
-          <a:lnRef idx="1">
-            <a:schemeClr val="accent1"/>
-          </a:lnRef>
-          <a:fillRef idx="3">
-            <a:schemeClr val="accent1"/>
-          </a:fillRef>
-          <a:effectRef idx="2">
-            <a:schemeClr val="accent1"/>
-          </a:effectRef>
-          <a:fontRef idx="minor">
-            <a:schemeClr val="lt1"/>
-          </a:fontRef>
-        </p:style>
-        <p:txBody>
-          <a:bodyPr rtlCol="0" anchor="ctr"/>
-          <a:lstStyle/>
-          <a:p>
-            <a:pPr algn="ctr"/>
-          </a:p>
-        </p:txBody>
-      </p:sp>
-      <p:sp>
-        <p:nvSpPr>
-          <p:cNvPr id="23" name="TextBox 22"/>
-          <p:cNvSpPr txBox="1"/>
-          <p:nvPr/>
-        </p:nvSpPr>
-        <p:spPr>
-          <a:xfrm>
-            <a:off x="594360" y="5660136"/>
-            <a:ext cx="438912" cy="438912"/>
-          </a:xfrm>
-          <a:prstGeom prst="rect">
-            <a:avLst/>
-          </a:prstGeom>
-          <a:noFill/>
-        </p:spPr>
-        <p:txBody>
-          <a:bodyPr wrap="square" anchor="ctr"/>
-          <a:lstStyle/>
-          <a:p>
-            <a:pPr algn="ctr"/>
-            <a:r>
-              <a:rPr sz="1600" b="1" i="0">
-                <a:solidFill>
-                  <a:srgbClr val="FFFFFF"/>
-                </a:solidFill>
-                <a:latin typeface="Calibri"/>
-              </a:rPr>
-              <a:t>5</a:t>
-            </a:r>
-          </a:p>
-        </p:txBody>
-      </p:sp>
-      <p:sp>
-        <p:nvSpPr>
-          <p:cNvPr id="24" name="TextBox 23"/>
-          <p:cNvSpPr txBox="1"/>
-          <p:nvPr/>
-        </p:nvSpPr>
-        <p:spPr>
-          <a:xfrm>
-            <a:off x="1188720" y="5495544"/>
-            <a:ext cx="10271455" cy="786384"/>
-          </a:xfrm>
-          <a:prstGeom prst="rect">
-            <a:avLst/>
-          </a:prstGeom>
-          <a:noFill/>
-        </p:spPr>
-        <p:txBody>
-          <a:bodyPr wrap="square" anchor="ctr"/>
-          <a:lstStyle/>
-          <a:p>
-            <a:r>
-              <a:rPr sz="1500" b="1" i="0">
-                <a:solidFill>
-                  <a:srgbClr val="095292"/>
-                </a:solidFill>
-                <a:latin typeface="Calibri"/>
-              </a:rPr>
-              <a:t>Redactar el contrato del proc en sus 6 bloques (plantilla en este documento) y pegarlo en la pregunta 5.</a:t>
-            </a:r>
-          </a:p>
-        </p:txBody>
-      </p:sp>
-      <p:sp>
-        <p:nvSpPr>
-          <p:cNvPr id="25" name="TextBox 24"/>
+          <a:bodyPr wrap="square">
+            <a:spAutoFit/>
+          </a:bodyPr>
+          <a:lstStyle/>
+          <a:p>
+            <a:pPr>
+              <a:spcAft>
+                <a:spcPts val="800"/>
+              </a:spcAft>
+            </a:pPr>
+            <a:r>
+              <a:rPr sz="2000" b="0" i="0">
+                <a:solidFill>
+                  <a:srgbClr val="333333"/>
+                </a:solidFill>
+                <a:latin typeface="Calibri"/>
+              </a:rPr>
+              <a:t>–   Esquema de VetCare ya creado y poblado: </a:t>
+            </a:r>
+            <a:r>
+              <a:rPr sz="2000" b="1" i="0">
+                <a:solidFill>
+                  <a:srgbClr val="333333"/>
+                </a:solidFill>
+                <a:latin typeface="Calibri"/>
+              </a:rPr>
+              <a:t>8 mascotas</a:t>
+            </a:r>
+            <a:r>
+              <a:rPr sz="2000" b="0" i="0">
+                <a:solidFill>
+                  <a:srgbClr val="333333"/>
+                </a:solidFill>
+                <a:latin typeface="Calibri"/>
+              </a:rPr>
+              <a:t> —la </a:t>
+            </a:r>
+            <a:r>
+              <a:rPr sz="2000" b="1" i="0">
+                <a:solidFill>
+                  <a:srgbClr val="333333"/>
+                </a:solidFill>
+                <a:latin typeface="Calibri"/>
+              </a:rPr>
+              <a:t>3 (Rocky)</a:t>
+            </a:r>
+            <a:r>
+              <a:rPr sz="2000" b="0" i="0">
+                <a:solidFill>
+                  <a:srgbClr val="333333"/>
+                </a:solidFill>
+                <a:latin typeface="Calibri"/>
+              </a:rPr>
+              <a:t> y la </a:t>
+            </a:r>
+            <a:r>
+              <a:rPr sz="2000" b="1" i="0">
+                <a:solidFill>
+                  <a:srgbClr val="333333"/>
+                </a:solidFill>
+                <a:latin typeface="Calibri"/>
+              </a:rPr>
+              <a:t>8 (Kiara)</a:t>
+            </a:r>
+            <a:r>
+              <a:rPr sz="2000" b="0" i="0">
+                <a:solidFill>
+                  <a:srgbClr val="333333"/>
+                </a:solidFill>
+                <a:latin typeface="Calibri"/>
+              </a:rPr>
+              <a:t> están </a:t>
+            </a:r>
+            <a:r>
+              <a:rPr sz="2000" b="1" i="0">
+                <a:solidFill>
+                  <a:srgbClr val="333333"/>
+                </a:solidFill>
+                <a:latin typeface="Calibri"/>
+              </a:rPr>
+              <a:t>INACTIVAS</a:t>
+            </a:r>
+            <a:r>
+              <a:rPr sz="2000" b="0" i="0">
+                <a:solidFill>
+                  <a:srgbClr val="333333"/>
+                </a:solidFill>
+                <a:latin typeface="Calibri"/>
+              </a:rPr>
+              <a:t>—, 4 veterinarios y 10 citas.</a:t>
+            </a:r>
+          </a:p>
+          <a:p>
+            <a:pPr>
+              <a:spcAft>
+                <a:spcPts val="800"/>
+              </a:spcAft>
+            </a:pPr>
+            <a:r>
+              <a:rPr sz="2000" b="0" i="0">
+                <a:solidFill>
+                  <a:srgbClr val="333333"/>
+                </a:solidFill>
+                <a:latin typeface="Calibri"/>
+              </a:rPr>
+              <a:t>–   Ya existe una cita del </a:t>
+            </a:r>
+            <a:r>
+              <a:rPr sz="2000" b="1" i="0">
+                <a:solidFill>
+                  <a:srgbClr val="333333"/>
+                </a:solidFill>
+                <a:latin typeface="Calibri"/>
+              </a:rPr>
+              <a:t>veterinario 1</a:t>
+            </a:r>
+            <a:r>
+              <a:rPr sz="2000" b="0" i="0">
+                <a:solidFill>
+                  <a:srgbClr val="333333"/>
+                </a:solidFill>
+                <a:latin typeface="Calibri"/>
+              </a:rPr>
+              <a:t> el «2026-09-01 08:00:00»: es la que dispara la validación de veterinario ocupado.</a:t>
+            </a:r>
+          </a:p>
+          <a:p>
+            <a:pPr>
+              <a:spcAft>
+                <a:spcPts val="800"/>
+              </a:spcAft>
+            </a:pPr>
+            <a:r>
+              <a:rPr sz="2000" b="0" i="0">
+                <a:solidFill>
+                  <a:srgbClr val="333333"/>
+                </a:solidFill>
+                <a:latin typeface="Calibri"/>
+              </a:rPr>
+              <a:t>–   </a:t>
+            </a:r>
+            <a:r>
+              <a:rPr sz="2000" b="1" i="0">
+                <a:solidFill>
+                  <a:srgbClr val="333333"/>
+                </a:solidFill>
+                <a:latin typeface="Calibri"/>
+              </a:rPr>
+              <a:t>Motor:</a:t>
+            </a:r>
+            <a:r>
+              <a:rPr sz="2000" b="0" i="0">
+                <a:solidFill>
+                  <a:srgbClr val="333333"/>
+                </a:solidFill>
+                <a:latin typeface="Calibri"/>
+              </a:rPr>
+              <a:t> PostgreSQL dentro de ExamLab. El molde es «CREATE PROCEDURE ... LANGUAGE plpgsql AS $proc$ ... $proc$;» — no hay «IS», ni «VARCHAR2», ni «/» final.</a:t>
+            </a:r>
+          </a:p>
+          <a:p>
+            <a:pPr>
+              <a:spcAft>
+                <a:spcPts val="800"/>
+              </a:spcAft>
+            </a:pPr>
+            <a:r>
+              <a:rPr sz="2000" b="0" i="0">
+                <a:solidFill>
+                  <a:srgbClr val="333333"/>
+                </a:solidFill>
+                <a:latin typeface="Calibri"/>
+              </a:rPr>
+              <a:t>–   El contrato se escribe en Google Docs y se pega en la pregunta 5; la plantilla en blanco de sus 6 bloques y de la tabla de errores está en este documento.</a:t>
+            </a:r>
+          </a:p>
+        </p:txBody>
+      </p:sp>
+      <p:sp>
+        <p:nvSpPr>
+          <p:cNvPr id="6" name="TextBox 5"/>
           <p:cNvSpPr txBox="1"/>
           <p:nvPr/>
         </p:nvSpPr>
@@ -7075,7 +6600,7 @@
                 </a:solidFill>
                 <a:latin typeface="Calibri"/>
               </a:rPr>
-              <a:t>Taller PI VetCare — pistas (checklist vacio)</a:t>
+              <a:t>Taller PI VetCare — pasos guiados</a:t>
             </a:r>
           </a:p>
         </p:txBody>
@@ -7088,8 +6613,8 @@
         </p:nvSpPr>
         <p:spPr>
           <a:xfrm>
-            <a:off x="457200" y="1261872"/>
-            <a:ext cx="11277295" cy="566928"/>
+            <a:off x="457200" y="1234440"/>
+            <a:ext cx="11277295" cy="950976"/>
           </a:xfrm>
           <a:prstGeom prst="roundRect">
             <a:avLst>
@@ -7127,25 +6652,25 @@
       </p:sp>
       <p:sp>
         <p:nvSpPr>
-          <p:cNvPr id="6" name="Rectangle 5"/>
+          <p:cNvPr id="6" name="Rounded Rectangle 5"/>
           <p:cNvSpPr/>
           <p:nvPr/>
         </p:nvSpPr>
         <p:spPr>
           <a:xfrm>
-            <a:off x="640080" y="1408175"/>
-            <a:ext cx="274320" cy="274320"/>
-          </a:xfrm>
-          <a:prstGeom prst="rect">
-            <a:avLst/>
+            <a:off x="594360" y="1490472"/>
+            <a:ext cx="438912" cy="438912"/>
+          </a:xfrm>
+          <a:prstGeom prst="roundRect">
+            <a:avLst>
+              <a:gd name="adj" fmla="val 12000"/>
+            </a:avLst>
           </a:prstGeom>
           <a:solidFill>
-            <a:srgbClr val="FFFFFF"/>
+            <a:srgbClr val="095292"/>
           </a:solidFill>
           <a:ln>
-            <a:solidFill>
-              <a:srgbClr val="333333"/>
-            </a:solidFill>
+            <a:noFill/>
           </a:ln>
         </p:spPr>
         <p:style>
@@ -7172,20 +6697,87 @@
       </p:sp>
       <p:sp>
         <p:nvSpPr>
-          <p:cNvPr id="7" name="Rectangle 6"/>
+          <p:cNvPr id="7" name="TextBox 6"/>
+          <p:cNvSpPr txBox="1"/>
+          <p:nvPr/>
+        </p:nvSpPr>
+        <p:spPr>
+          <a:xfrm>
+            <a:off x="594360" y="1490472"/>
+            <a:ext cx="438912" cy="438912"/>
+          </a:xfrm>
+          <a:prstGeom prst="rect">
+            <a:avLst/>
+          </a:prstGeom>
+          <a:noFill/>
+        </p:spPr>
+        <p:txBody>
+          <a:bodyPr wrap="square" anchor="ctr"/>
+          <a:lstStyle/>
+          <a:p>
+            <a:pPr algn="ctr"/>
+            <a:r>
+              <a:rPr sz="1600" b="1" i="0">
+                <a:solidFill>
+                  <a:srgbClr val="FFFFFF"/>
+                </a:solidFill>
+                <a:latin typeface="Calibri"/>
+              </a:rPr>
+              <a:t>1</a:t>
+            </a:r>
+          </a:p>
+        </p:txBody>
+      </p:sp>
+      <p:sp>
+        <p:nvSpPr>
+          <p:cNvPr id="8" name="TextBox 7"/>
+          <p:cNvSpPr txBox="1"/>
+          <p:nvPr/>
+        </p:nvSpPr>
+        <p:spPr>
+          <a:xfrm>
+            <a:off x="1188720" y="1325880"/>
+            <a:ext cx="10271455" cy="786384"/>
+          </a:xfrm>
+          <a:prstGeom prst="rect">
+            <a:avLst/>
+          </a:prstGeom>
+          <a:noFill/>
+        </p:spPr>
+        <p:txBody>
+          <a:bodyPr wrap="square" anchor="ctr"/>
+          <a:lstStyle/>
+          <a:p>
+            <a:r>
+              <a:rPr sz="1500" b="1" i="0">
+                <a:solidFill>
+                  <a:srgbClr val="095292"/>
+                </a:solidFill>
+                <a:latin typeface="Calibri"/>
+              </a:rPr>
+              <a:t>Escribir sp_agendar_cita en PL/pgSQL y ejecutarlo en ExamLab (LANGUAGE plpgsql, dollar-quoting, sin sintaxis de Oracle).</a:t>
+            </a:r>
+          </a:p>
+        </p:txBody>
+      </p:sp>
+      <p:sp>
+        <p:nvSpPr>
+          <p:cNvPr id="9" name="Rounded Rectangle 8"/>
           <p:cNvSpPr/>
           <p:nvPr/>
         </p:nvSpPr>
         <p:spPr>
           <a:xfrm>
-            <a:off x="640080" y="1408175"/>
-            <a:ext cx="73152" cy="274320"/>
-          </a:xfrm>
-          <a:prstGeom prst="rect">
-            <a:avLst/>
+            <a:off x="457200" y="2276856"/>
+            <a:ext cx="11277295" cy="950976"/>
+          </a:xfrm>
+          <a:prstGeom prst="roundRect">
+            <a:avLst>
+              <a:gd name="adj" fmla="val 12000"/>
+            </a:avLst>
           </a:prstGeom>
           <a:solidFill>
-            <a:srgbClr val="269CCB"/>
+            <a:srgbClr val="E8F4FA"/>
           </a:solidFill>
           <a:ln>
             <a:noFill/>
@@ -7215,14 +6807,59 @@
       </p:sp>
       <p:sp>
         <p:nvSpPr>
-          <p:cNvPr id="8" name="TextBox 7"/>
+          <p:cNvPr id="10" name="Rounded Rectangle 9"/>
+          <p:cNvSpPr/>
+          <p:nvPr/>
+        </p:nvSpPr>
+        <p:spPr>
+          <a:xfrm>
+            <a:off x="594360" y="2532888"/>
+            <a:ext cx="438912" cy="438912"/>
+          </a:xfrm>
+          <a:prstGeom prst="roundRect">
+            <a:avLst>
+              <a:gd name="adj" fmla="val 12000"/>
+            </a:avLst>
+          </a:prstGeom>
+          <a:solidFill>
+            <a:srgbClr val="095292"/>
+          </a:solidFill>
+          <a:ln>
+            <a:noFill/>
+          </a:ln>
+        </p:spPr>
+        <p:style>
+          <a:lnRef idx="1">
+            <a:schemeClr val="accent1"/>
+          </a:lnRef>
+          <a:fillRef idx="3">
+            <a:schemeClr val="accent1"/>
+          </a:fillRef>
+          <a:effectRef idx="2">
+            <a:schemeClr val="accent1"/>
+          </a:effectRef>
+          <a:fontRef idx="minor">
+            <a:schemeClr val="lt1"/>
+          </a:fontRef>
+        </p:style>
+        <p:txBody>
+          <a:bodyPr rtlCol="0" anchor="ctr"/>
+          <a:lstStyle/>
+          <a:p>
+            <a:pPr algn="ctr"/>
+          </a:p>
+        </p:txBody>
+      </p:sp>
+      <p:sp>
+        <p:nvSpPr>
+          <p:cNvPr id="11" name="TextBox 10"/>
           <p:cNvSpPr txBox="1"/>
           <p:nvPr/>
         </p:nvSpPr>
         <p:spPr>
           <a:xfrm>
-            <a:off x="1097280" y="1353312"/>
-            <a:ext cx="10362895" cy="402336"/>
+            <a:off x="594360" y="2532888"/>
+            <a:ext cx="438912" cy="438912"/>
           </a:xfrm>
           <a:prstGeom prst="rect">
             <a:avLst/>
@@ -7233,46 +6870,61 @@
           <a:bodyPr wrap="square" anchor="ctr"/>
           <a:lstStyle/>
           <a:p>
-            <a:r>
-              <a:rPr sz="1500" b="0" i="0">
-                <a:solidFill>
-                  <a:srgbClr val="333333"/>
-                </a:solidFill>
-                <a:latin typeface="Calibri"/>
-              </a:rPr>
-              <a:t>□ ¿El procedimiento se creó </a:t>
-            </a:r>
+            <a:pPr algn="ctr"/>
+            <a:r>
+              <a:rPr sz="1600" b="1" i="0">
+                <a:solidFill>
+                  <a:srgbClr val="FFFFFF"/>
+                </a:solidFill>
+                <a:latin typeface="Calibri"/>
+              </a:rPr>
+              <a:t>2</a:t>
+            </a:r>
+          </a:p>
+        </p:txBody>
+      </p:sp>
+      <p:sp>
+        <p:nvSpPr>
+          <p:cNvPr id="12" name="TextBox 11"/>
+          <p:cNvSpPr txBox="1"/>
+          <p:nvPr/>
+        </p:nvSpPr>
+        <p:spPr>
+          <a:xfrm>
+            <a:off x="1188720" y="2368296"/>
+            <a:ext cx="10271455" cy="786384"/>
+          </a:xfrm>
+          <a:prstGeom prst="rect">
+            <a:avLst/>
+          </a:prstGeom>
+          <a:noFill/>
+        </p:spPr>
+        <p:txBody>
+          <a:bodyPr wrap="square" anchor="ctr"/>
+          <a:lstStyle/>
+          <a:p>
             <a:r>
               <a:rPr sz="1500" b="1" i="0">
                 <a:solidFill>
-                  <a:srgbClr val="333333"/>
-                </a:solidFill>
-                <a:latin typeface="Calibri"/>
-              </a:rPr>
-              <a:t>y</a:t>
-            </a:r>
-            <a:r>
-              <a:rPr sz="1500" b="0" i="0">
-                <a:solidFill>
-                  <a:srgbClr val="333333"/>
-                </a:solidFill>
-                <a:latin typeface="Calibri"/>
-              </a:rPr>
-              <a:t> el «CALL» corrió? Crear no es evidencia.</a:t>
-            </a:r>
-          </a:p>
-        </p:txBody>
-      </p:sp>
-      <p:sp>
-        <p:nvSpPr>
-          <p:cNvPr id="9" name="Rounded Rectangle 8"/>
+                  <a:srgbClr val="095292"/>
+                </a:solidFill>
+                <a:latin typeface="Calibri"/>
+              </a:rPr>
+              <a:t>Incluir las 3 validaciones de negocio del PI, cada una con su RAISE EXCEPTION y su mensaje literal.</a:t>
+            </a:r>
+          </a:p>
+        </p:txBody>
+      </p:sp>
+      <p:sp>
+        <p:nvSpPr>
+          <p:cNvPr id="13" name="Rounded Rectangle 12"/>
           <p:cNvSpPr/>
           <p:nvPr/>
         </p:nvSpPr>
         <p:spPr>
           <a:xfrm>
-            <a:off x="457200" y="1938528"/>
-            <a:ext cx="11277295" cy="566928"/>
+            <a:off x="457200" y="3319272"/>
+            <a:ext cx="11277295" cy="950976"/>
           </a:xfrm>
           <a:prstGeom prst="roundRect">
             <a:avLst>
@@ -7310,25 +6962,25 @@
       </p:sp>
       <p:sp>
         <p:nvSpPr>
-          <p:cNvPr id="10" name="Rectangle 9"/>
+          <p:cNvPr id="14" name="Rounded Rectangle 13"/>
           <p:cNvSpPr/>
           <p:nvPr/>
         </p:nvSpPr>
         <p:spPr>
           <a:xfrm>
-            <a:off x="640080" y="2084832"/>
-            <a:ext cx="274320" cy="274320"/>
-          </a:xfrm>
-          <a:prstGeom prst="rect">
-            <a:avLst/>
+            <a:off x="594360" y="3575304"/>
+            <a:ext cx="438912" cy="438912"/>
+          </a:xfrm>
+          <a:prstGeom prst="roundRect">
+            <a:avLst>
+              <a:gd name="adj" fmla="val 12000"/>
+            </a:avLst>
           </a:prstGeom>
           <a:solidFill>
-            <a:srgbClr val="FFFFFF"/>
+            <a:srgbClr val="095292"/>
           </a:solidFill>
           <a:ln>
-            <a:solidFill>
-              <a:srgbClr val="333333"/>
-            </a:solidFill>
+            <a:noFill/>
           </a:ln>
         </p:spPr>
         <p:style>
@@ -7355,20 +7007,87 @@
       </p:sp>
       <p:sp>
         <p:nvSpPr>
-          <p:cNvPr id="11" name="Rectangle 10"/>
+          <p:cNvPr id="15" name="TextBox 14"/>
+          <p:cNvSpPr txBox="1"/>
+          <p:nvPr/>
+        </p:nvSpPr>
+        <p:spPr>
+          <a:xfrm>
+            <a:off x="594360" y="3575304"/>
+            <a:ext cx="438912" cy="438912"/>
+          </a:xfrm>
+          <a:prstGeom prst="rect">
+            <a:avLst/>
+          </a:prstGeom>
+          <a:noFill/>
+        </p:spPr>
+        <p:txBody>
+          <a:bodyPr wrap="square" anchor="ctr"/>
+          <a:lstStyle/>
+          <a:p>
+            <a:pPr algn="ctr"/>
+            <a:r>
+              <a:rPr sz="1600" b="1" i="0">
+                <a:solidFill>
+                  <a:srgbClr val="FFFFFF"/>
+                </a:solidFill>
+                <a:latin typeface="Calibri"/>
+              </a:rPr>
+              <a:t>3</a:t>
+            </a:r>
+          </a:p>
+        </p:txBody>
+      </p:sp>
+      <p:sp>
+        <p:nvSpPr>
+          <p:cNvPr id="16" name="TextBox 15"/>
+          <p:cNvSpPr txBox="1"/>
+          <p:nvPr/>
+        </p:nvSpPr>
+        <p:spPr>
+          <a:xfrm>
+            <a:off x="1188720" y="3410712"/>
+            <a:ext cx="10271455" cy="786384"/>
+          </a:xfrm>
+          <a:prstGeom prst="rect">
+            <a:avLst/>
+          </a:prstGeom>
+          <a:noFill/>
+        </p:spPr>
+        <p:txBody>
+          <a:bodyPr wrap="square" anchor="ctr"/>
+          <a:lstStyle/>
+          <a:p>
+            <a:r>
+              <a:rPr sz="1500" b="1" i="0">
+                <a:solidFill>
+                  <a:srgbClr val="095292"/>
+                </a:solidFill>
+                <a:latin typeface="Calibri"/>
+              </a:rPr>
+              <a:t>Correr la bateria de pruebas con bloques DO: 1 caso OK + 3 casos error, escritos en resultado_prueba, mas el COUNT(*) de cita antes y despues.</a:t>
+            </a:r>
+          </a:p>
+        </p:txBody>
+      </p:sp>
+      <p:sp>
+        <p:nvSpPr>
+          <p:cNvPr id="17" name="Rounded Rectangle 16"/>
           <p:cNvSpPr/>
           <p:nvPr/>
         </p:nvSpPr>
         <p:spPr>
           <a:xfrm>
-            <a:off x="640080" y="2084832"/>
-            <a:ext cx="73152" cy="274320"/>
-          </a:xfrm>
-          <a:prstGeom prst="rect">
-            <a:avLst/>
+            <a:off x="457200" y="4361688"/>
+            <a:ext cx="11277295" cy="950976"/>
+          </a:xfrm>
+          <a:prstGeom prst="roundRect">
+            <a:avLst>
+              <a:gd name="adj" fmla="val 12000"/>
+            </a:avLst>
           </a:prstGeom>
           <a:solidFill>
-            <a:srgbClr val="269CCB"/>
+            <a:srgbClr val="E8F4FA"/>
           </a:solidFill>
           <a:ln>
             <a:noFill/>
@@ -7398,14 +7117,59 @@
       </p:sp>
       <p:sp>
         <p:nvSpPr>
-          <p:cNvPr id="12" name="TextBox 11"/>
+          <p:cNvPr id="18" name="Rounded Rectangle 17"/>
+          <p:cNvSpPr/>
+          <p:nvPr/>
+        </p:nvSpPr>
+        <p:spPr>
+          <a:xfrm>
+            <a:off x="594360" y="4617720"/>
+            <a:ext cx="438912" cy="438912"/>
+          </a:xfrm>
+          <a:prstGeom prst="roundRect">
+            <a:avLst>
+              <a:gd name="adj" fmla="val 12000"/>
+            </a:avLst>
+          </a:prstGeom>
+          <a:solidFill>
+            <a:srgbClr val="095292"/>
+          </a:solidFill>
+          <a:ln>
+            <a:noFill/>
+          </a:ln>
+        </p:spPr>
+        <p:style>
+          <a:lnRef idx="1">
+            <a:schemeClr val="accent1"/>
+          </a:lnRef>
+          <a:fillRef idx="3">
+            <a:schemeClr val="accent1"/>
+          </a:fillRef>
+          <a:effectRef idx="2">
+            <a:schemeClr val="accent1"/>
+          </a:effectRef>
+          <a:fontRef idx="minor">
+            <a:schemeClr val="lt1"/>
+          </a:fontRef>
+        </p:style>
+        <p:txBody>
+          <a:bodyPr rtlCol="0" anchor="ctr"/>
+          <a:lstStyle/>
+          <a:p>
+            <a:pPr algn="ctr"/>
+          </a:p>
+        </p:txBody>
+      </p:sp>
+      <p:sp>
+        <p:nvSpPr>
+          <p:cNvPr id="19" name="TextBox 18"/>
           <p:cNvSpPr txBox="1"/>
           <p:nvPr/>
         </p:nvSpPr>
         <p:spPr>
           <a:xfrm>
-            <a:off x="1097280" y="2029968"/>
-            <a:ext cx="10362895" cy="402336"/>
+            <a:off x="594360" y="4617720"/>
+            <a:ext cx="438912" cy="438912"/>
           </a:xfrm>
           <a:prstGeom prst="rect">
             <a:avLst/>
@@ -7416,28 +7180,61 @@
           <a:bodyPr wrap="square" anchor="ctr"/>
           <a:lstStyle/>
           <a:p>
-            <a:r>
-              <a:rPr sz="1500" b="0" i="0">
-                <a:solidFill>
-                  <a:srgbClr val="333333"/>
-                </a:solidFill>
-                <a:latin typeface="Calibri"/>
-              </a:rPr>
-              <a:t>□ ¿La validación de «no existe» usa «IF NOT FOUND» tras el «SELECT ... INTO»?</a:t>
-            </a:r>
-          </a:p>
-        </p:txBody>
-      </p:sp>
-      <p:sp>
-        <p:nvSpPr>
-          <p:cNvPr id="13" name="Rounded Rectangle 12"/>
+            <a:pPr algn="ctr"/>
+            <a:r>
+              <a:rPr sz="1600" b="1" i="0">
+                <a:solidFill>
+                  <a:srgbClr val="FFFFFF"/>
+                </a:solidFill>
+                <a:latin typeface="Calibri"/>
+              </a:rPr>
+              <a:t>4</a:t>
+            </a:r>
+          </a:p>
+        </p:txBody>
+      </p:sp>
+      <p:sp>
+        <p:nvSpPr>
+          <p:cNvPr id="20" name="TextBox 19"/>
+          <p:cNvSpPr txBox="1"/>
+          <p:nvPr/>
+        </p:nvSpPr>
+        <p:spPr>
+          <a:xfrm>
+            <a:off x="1188720" y="4453128"/>
+            <a:ext cx="10271455" cy="786384"/>
+          </a:xfrm>
+          <a:prstGeom prst="rect">
+            <a:avLst/>
+          </a:prstGeom>
+          <a:noFill/>
+        </p:spPr>
+        <p:txBody>
+          <a:bodyPr wrap="square" anchor="ctr"/>
+          <a:lstStyle/>
+          <a:p>
+            <a:r>
+              <a:rPr sz="1500" b="1" i="0">
+                <a:solidFill>
+                  <a:srgbClr val="095292"/>
+                </a:solidFill>
+                <a:latin typeface="Calibri"/>
+              </a:rPr>
+              <a:t>Escribir sp_registrar_consulta, comprobando con EXISTS antes de chocar contra la restriccion UNIQUE.</a:t>
+            </a:r>
+          </a:p>
+        </p:txBody>
+      </p:sp>
+      <p:sp>
+        <p:nvSpPr>
+          <p:cNvPr id="21" name="Rounded Rectangle 20"/>
           <p:cNvSpPr/>
           <p:nvPr/>
         </p:nvSpPr>
         <p:spPr>
           <a:xfrm>
-            <a:off x="457200" y="2615184"/>
-            <a:ext cx="11277295" cy="566928"/>
+            <a:off x="457200" y="5404104"/>
+            <a:ext cx="11277295" cy="950976"/>
           </a:xfrm>
           <a:prstGeom prst="roundRect">
             <a:avLst>
@@ -7475,25 +7272,25 @@
       </p:sp>
       <p:sp>
         <p:nvSpPr>
-          <p:cNvPr id="14" name="Rectangle 13"/>
+          <p:cNvPr id="22" name="Rounded Rectangle 21"/>
           <p:cNvSpPr/>
           <p:nvPr/>
         </p:nvSpPr>
         <p:spPr>
           <a:xfrm>
-            <a:off x="640080" y="2761488"/>
-            <a:ext cx="274320" cy="274320"/>
-          </a:xfrm>
-          <a:prstGeom prst="rect">
-            <a:avLst/>
+            <a:off x="594360" y="5660136"/>
+            <a:ext cx="438912" cy="438912"/>
+          </a:xfrm>
+          <a:prstGeom prst="roundRect">
+            <a:avLst>
+              <a:gd name="adj" fmla="val 12000"/>
+            </a:avLst>
           </a:prstGeom>
           <a:solidFill>
-            <a:srgbClr val="FFFFFF"/>
+            <a:srgbClr val="095292"/>
           </a:solidFill>
           <a:ln>
-            <a:solidFill>
-              <a:srgbClr val="333333"/>
-            </a:solidFill>
+            <a:noFill/>
           </a:ln>
         </p:spPr>
         <p:style>
@@ -7520,392 +7317,34 @@
       </p:sp>
       <p:sp>
         <p:nvSpPr>
-          <p:cNvPr id="15" name="Rectangle 14"/>
-          <p:cNvSpPr/>
-          <p:nvPr/>
-        </p:nvSpPr>
-        <p:spPr>
-          <a:xfrm>
-            <a:off x="640080" y="2761488"/>
-            <a:ext cx="73152" cy="274320"/>
-          </a:xfrm>
-          <a:prstGeom prst="rect">
-            <a:avLst/>
-          </a:prstGeom>
-          <a:solidFill>
-            <a:srgbClr val="269CCB"/>
-          </a:solidFill>
-          <a:ln>
-            <a:noFill/>
-          </a:ln>
-        </p:spPr>
-        <p:style>
-          <a:lnRef idx="1">
-            <a:schemeClr val="accent1"/>
-          </a:lnRef>
-          <a:fillRef idx="3">
-            <a:schemeClr val="accent1"/>
-          </a:fillRef>
-          <a:effectRef idx="2">
-            <a:schemeClr val="accent1"/>
-          </a:effectRef>
-          <a:fontRef idx="minor">
-            <a:schemeClr val="lt1"/>
-          </a:fontRef>
-        </p:style>
-        <p:txBody>
-          <a:bodyPr rtlCol="0" anchor="ctr"/>
+          <p:cNvPr id="23" name="TextBox 22"/>
+          <p:cNvSpPr txBox="1"/>
+          <p:nvPr/>
+        </p:nvSpPr>
+        <p:spPr>
+          <a:xfrm>
+            <a:off x="594360" y="5660136"/>
+            <a:ext cx="438912" cy="438912"/>
+          </a:xfrm>
+          <a:prstGeom prst="rect">
+            <a:avLst/>
+          </a:prstGeom>
+          <a:noFill/>
+        </p:spPr>
+        <p:txBody>
+          <a:bodyPr wrap="square" anchor="ctr"/>
           <a:lstStyle/>
           <a:p>
             <a:pPr algn="ctr"/>
-          </a:p>
-        </p:txBody>
-      </p:sp>
-      <p:sp>
-        <p:nvSpPr>
-          <p:cNvPr id="16" name="TextBox 15"/>
-          <p:cNvSpPr txBox="1"/>
-          <p:nvPr/>
-        </p:nvSpPr>
-        <p:spPr>
-          <a:xfrm>
-            <a:off x="1097280" y="2706624"/>
-            <a:ext cx="10362895" cy="402336"/>
-          </a:xfrm>
-          <a:prstGeom prst="rect">
-            <a:avLst/>
-          </a:prstGeom>
-          <a:noFill/>
-        </p:spPr>
-        <p:txBody>
-          <a:bodyPr wrap="square" anchor="ctr"/>
-          <a:lstStyle/>
-          <a:p>
-            <a:r>
-              <a:rPr sz="1500" b="0" i="0">
-                <a:solidFill>
-                  <a:srgbClr val="333333"/>
-                </a:solidFill>
-                <a:latin typeface="Calibri"/>
-              </a:rPr>
-              <a:t>□ ¿Los 4 bloques «DO» capturan la excepción y el script llega hasta el final?</a:t>
-            </a:r>
-          </a:p>
-        </p:txBody>
-      </p:sp>
-      <p:sp>
-        <p:nvSpPr>
-          <p:cNvPr id="17" name="Rounded Rectangle 16"/>
-          <p:cNvSpPr/>
-          <p:nvPr/>
-        </p:nvSpPr>
-        <p:spPr>
-          <a:xfrm>
-            <a:off x="457200" y="3291840"/>
-            <a:ext cx="11277295" cy="566928"/>
-          </a:xfrm>
-          <a:prstGeom prst="roundRect">
-            <a:avLst>
-              <a:gd name="adj" fmla="val 12000"/>
-            </a:avLst>
-          </a:prstGeom>
-          <a:solidFill>
-            <a:srgbClr val="F2F2F2"/>
-          </a:solidFill>
-          <a:ln>
-            <a:noFill/>
-          </a:ln>
-        </p:spPr>
-        <p:style>
-          <a:lnRef idx="1">
-            <a:schemeClr val="accent1"/>
-          </a:lnRef>
-          <a:fillRef idx="3">
-            <a:schemeClr val="accent1"/>
-          </a:fillRef>
-          <a:effectRef idx="2">
-            <a:schemeClr val="accent1"/>
-          </a:effectRef>
-          <a:fontRef idx="minor">
-            <a:schemeClr val="lt1"/>
-          </a:fontRef>
-        </p:style>
-        <p:txBody>
-          <a:bodyPr rtlCol="0" anchor="ctr"/>
-          <a:lstStyle/>
-          <a:p>
-            <a:pPr algn="ctr"/>
-          </a:p>
-        </p:txBody>
-      </p:sp>
-      <p:sp>
-        <p:nvSpPr>
-          <p:cNvPr id="18" name="Rectangle 17"/>
-          <p:cNvSpPr/>
-          <p:nvPr/>
-        </p:nvSpPr>
-        <p:spPr>
-          <a:xfrm>
-            <a:off x="640080" y="3438144"/>
-            <a:ext cx="274320" cy="274320"/>
-          </a:xfrm>
-          <a:prstGeom prst="rect">
-            <a:avLst/>
-          </a:prstGeom>
-          <a:solidFill>
-            <a:srgbClr val="FFFFFF"/>
-          </a:solidFill>
-          <a:ln>
-            <a:solidFill>
-              <a:srgbClr val="333333"/>
-            </a:solidFill>
-          </a:ln>
-        </p:spPr>
-        <p:style>
-          <a:lnRef idx="1">
-            <a:schemeClr val="accent1"/>
-          </a:lnRef>
-          <a:fillRef idx="3">
-            <a:schemeClr val="accent1"/>
-          </a:fillRef>
-          <a:effectRef idx="2">
-            <a:schemeClr val="accent1"/>
-          </a:effectRef>
-          <a:fontRef idx="minor">
-            <a:schemeClr val="lt1"/>
-          </a:fontRef>
-        </p:style>
-        <p:txBody>
-          <a:bodyPr rtlCol="0" anchor="ctr"/>
-          <a:lstStyle/>
-          <a:p>
-            <a:pPr algn="ctr"/>
-          </a:p>
-        </p:txBody>
-      </p:sp>
-      <p:sp>
-        <p:nvSpPr>
-          <p:cNvPr id="19" name="Rectangle 18"/>
-          <p:cNvSpPr/>
-          <p:nvPr/>
-        </p:nvSpPr>
-        <p:spPr>
-          <a:xfrm>
-            <a:off x="640080" y="3438144"/>
-            <a:ext cx="73152" cy="274320"/>
-          </a:xfrm>
-          <a:prstGeom prst="rect">
-            <a:avLst/>
-          </a:prstGeom>
-          <a:solidFill>
-            <a:srgbClr val="269CCB"/>
-          </a:solidFill>
-          <a:ln>
-            <a:noFill/>
-          </a:ln>
-        </p:spPr>
-        <p:style>
-          <a:lnRef idx="1">
-            <a:schemeClr val="accent1"/>
-          </a:lnRef>
-          <a:fillRef idx="3">
-            <a:schemeClr val="accent1"/>
-          </a:fillRef>
-          <a:effectRef idx="2">
-            <a:schemeClr val="accent1"/>
-          </a:effectRef>
-          <a:fontRef idx="minor">
-            <a:schemeClr val="lt1"/>
-          </a:fontRef>
-        </p:style>
-        <p:txBody>
-          <a:bodyPr rtlCol="0" anchor="ctr"/>
-          <a:lstStyle/>
-          <a:p>
-            <a:pPr algn="ctr"/>
-          </a:p>
-        </p:txBody>
-      </p:sp>
-      <p:sp>
-        <p:nvSpPr>
-          <p:cNvPr id="20" name="TextBox 19"/>
-          <p:cNvSpPr txBox="1"/>
-          <p:nvPr/>
-        </p:nvSpPr>
-        <p:spPr>
-          <a:xfrm>
-            <a:off x="1097280" y="3383280"/>
-            <a:ext cx="10362895" cy="402336"/>
-          </a:xfrm>
-          <a:prstGeom prst="rect">
-            <a:avLst/>
-          </a:prstGeom>
-          <a:noFill/>
-        </p:spPr>
-        <p:txBody>
-          <a:bodyPr wrap="square" anchor="ctr"/>
-          <a:lstStyle/>
-          <a:p>
-            <a:r>
-              <a:rPr sz="1500" b="0" i="0">
-                <a:solidFill>
-                  <a:srgbClr val="333333"/>
-                </a:solidFill>
-                <a:latin typeface="Calibri"/>
-              </a:rPr>
-              <a:t>□ ¿El conteo final de «cita» es </a:t>
-            </a:r>
-            <a:r>
-              <a:rPr sz="1500" b="1" i="0">
-                <a:solidFill>
-                  <a:srgbClr val="333333"/>
-                </a:solidFill>
-                <a:latin typeface="Calibri"/>
-              </a:rPr>
-              <a:t>11</a:t>
-            </a:r>
-            <a:r>
-              <a:rPr sz="1500" b="0" i="0">
-                <a:solidFill>
-                  <a:srgbClr val="333333"/>
-                </a:solidFill>
-                <a:latin typeface="Calibri"/>
-              </a:rPr>
-              <a:t>, y está en la evidencia?</a:t>
-            </a:r>
-          </a:p>
-        </p:txBody>
-      </p:sp>
-      <p:sp>
-        <p:nvSpPr>
-          <p:cNvPr id="21" name="Rounded Rectangle 20"/>
-          <p:cNvSpPr/>
-          <p:nvPr/>
-        </p:nvSpPr>
-        <p:spPr>
-          <a:xfrm>
-            <a:off x="457200" y="3968496"/>
-            <a:ext cx="11277295" cy="566928"/>
-          </a:xfrm>
-          <a:prstGeom prst="roundRect">
-            <a:avLst>
-              <a:gd name="adj" fmla="val 12000"/>
-            </a:avLst>
-          </a:prstGeom>
-          <a:solidFill>
-            <a:srgbClr val="F2F2F2"/>
-          </a:solidFill>
-          <a:ln>
-            <a:noFill/>
-          </a:ln>
-        </p:spPr>
-        <p:style>
-          <a:lnRef idx="1">
-            <a:schemeClr val="accent1"/>
-          </a:lnRef>
-          <a:fillRef idx="3">
-            <a:schemeClr val="accent1"/>
-          </a:fillRef>
-          <a:effectRef idx="2">
-            <a:schemeClr val="accent1"/>
-          </a:effectRef>
-          <a:fontRef idx="minor">
-            <a:schemeClr val="lt1"/>
-          </a:fontRef>
-        </p:style>
-        <p:txBody>
-          <a:bodyPr rtlCol="0" anchor="ctr"/>
-          <a:lstStyle/>
-          <a:p>
-            <a:pPr algn="ctr"/>
-          </a:p>
-        </p:txBody>
-      </p:sp>
-      <p:sp>
-        <p:nvSpPr>
-          <p:cNvPr id="22" name="Rectangle 21"/>
-          <p:cNvSpPr/>
-          <p:nvPr/>
-        </p:nvSpPr>
-        <p:spPr>
-          <a:xfrm>
-            <a:off x="640080" y="4114800"/>
-            <a:ext cx="274320" cy="274320"/>
-          </a:xfrm>
-          <a:prstGeom prst="rect">
-            <a:avLst/>
-          </a:prstGeom>
-          <a:solidFill>
-            <a:srgbClr val="FFFFFF"/>
-          </a:solidFill>
-          <a:ln>
-            <a:solidFill>
-              <a:srgbClr val="333333"/>
-            </a:solidFill>
-          </a:ln>
-        </p:spPr>
-        <p:style>
-          <a:lnRef idx="1">
-            <a:schemeClr val="accent1"/>
-          </a:lnRef>
-          <a:fillRef idx="3">
-            <a:schemeClr val="accent1"/>
-          </a:fillRef>
-          <a:effectRef idx="2">
-            <a:schemeClr val="accent1"/>
-          </a:effectRef>
-          <a:fontRef idx="minor">
-            <a:schemeClr val="lt1"/>
-          </a:fontRef>
-        </p:style>
-        <p:txBody>
-          <a:bodyPr rtlCol="0" anchor="ctr"/>
-          <a:lstStyle/>
-          <a:p>
-            <a:pPr algn="ctr"/>
-          </a:p>
-        </p:txBody>
-      </p:sp>
-      <p:sp>
-        <p:nvSpPr>
-          <p:cNvPr id="23" name="Rectangle 22"/>
-          <p:cNvSpPr/>
-          <p:nvPr/>
-        </p:nvSpPr>
-        <p:spPr>
-          <a:xfrm>
-            <a:off x="640080" y="4114800"/>
-            <a:ext cx="73152" cy="274320"/>
-          </a:xfrm>
-          <a:prstGeom prst="rect">
-            <a:avLst/>
-          </a:prstGeom>
-          <a:solidFill>
-            <a:srgbClr val="269CCB"/>
-          </a:solidFill>
-          <a:ln>
-            <a:noFill/>
-          </a:ln>
-        </p:spPr>
-        <p:style>
-          <a:lnRef idx="1">
-            <a:schemeClr val="accent1"/>
-          </a:lnRef>
-          <a:fillRef idx="3">
-            <a:schemeClr val="accent1"/>
-          </a:fillRef>
-          <a:effectRef idx="2">
-            <a:schemeClr val="accent1"/>
-          </a:effectRef>
-          <a:fontRef idx="minor">
-            <a:schemeClr val="lt1"/>
-          </a:fontRef>
-        </p:style>
-        <p:txBody>
-          <a:bodyPr rtlCol="0" anchor="ctr"/>
-          <a:lstStyle/>
-          <a:p>
-            <a:pPr algn="ctr"/>
+            <a:r>
+              <a:rPr sz="1600" b="1" i="0">
+                <a:solidFill>
+                  <a:srgbClr val="FFFFFF"/>
+                </a:solidFill>
+                <a:latin typeface="Calibri"/>
+              </a:rPr>
+              <a:t>5</a:t>
+            </a:r>
           </a:p>
         </p:txBody>
       </p:sp>
@@ -7917,8 +7356,8 @@
         </p:nvSpPr>
         <p:spPr>
           <a:xfrm>
-            <a:off x="1097280" y="4059936"/>
-            <a:ext cx="10362895" cy="402336"/>
+            <a:off x="1188720" y="5495544"/>
+            <a:ext cx="10271455" cy="786384"/>
           </a:xfrm>
           <a:prstGeom prst="rect">
             <a:avLst/>
@@ -7930,404 +7369,20 @@
           <a:lstStyle/>
           <a:p>
             <a:r>
-              <a:rPr sz="1500" b="0" i="0">
-                <a:solidFill>
-                  <a:srgbClr val="333333"/>
-                </a:solidFill>
-                <a:latin typeface="Calibri"/>
-              </a:rPr>
-              <a:t>□ ¿«sp_registrar_consulta» inserta la consulta </a:t>
-            </a:r>
-            <a:r>
               <a:rPr sz="1500" b="1" i="0">
                 <a:solidFill>
-                  <a:srgbClr val="333333"/>
-                </a:solidFill>
-                <a:latin typeface="Calibri"/>
-              </a:rPr>
-              <a:t>y</a:t>
-            </a:r>
-            <a:r>
-              <a:rPr sz="1500" b="0" i="0">
-                <a:solidFill>
-                  <a:srgbClr val="333333"/>
-                </a:solidFill>
-                <a:latin typeface="Calibri"/>
-              </a:rPr>
-              <a:t> deja la cita en «ATENDIDA»?</a:t>
-            </a:r>
-          </a:p>
-        </p:txBody>
-      </p:sp>
-      <p:sp>
-        <p:nvSpPr>
-          <p:cNvPr id="25" name="Rounded Rectangle 24"/>
-          <p:cNvSpPr/>
-          <p:nvPr/>
-        </p:nvSpPr>
-        <p:spPr>
-          <a:xfrm>
-            <a:off x="457200" y="4645152"/>
-            <a:ext cx="11277295" cy="566928"/>
-          </a:xfrm>
-          <a:prstGeom prst="roundRect">
-            <a:avLst>
-              <a:gd name="adj" fmla="val 12000"/>
-            </a:avLst>
-          </a:prstGeom>
-          <a:solidFill>
-            <a:srgbClr val="F2F2F2"/>
-          </a:solidFill>
-          <a:ln>
-            <a:noFill/>
-          </a:ln>
-        </p:spPr>
-        <p:style>
-          <a:lnRef idx="1">
-            <a:schemeClr val="accent1"/>
-          </a:lnRef>
-          <a:fillRef idx="3">
-            <a:schemeClr val="accent1"/>
-          </a:fillRef>
-          <a:effectRef idx="2">
-            <a:schemeClr val="accent1"/>
-          </a:effectRef>
-          <a:fontRef idx="minor">
-            <a:schemeClr val="lt1"/>
-          </a:fontRef>
-        </p:style>
-        <p:txBody>
-          <a:bodyPr rtlCol="0" anchor="ctr"/>
-          <a:lstStyle/>
-          <a:p>
-            <a:pPr algn="ctr"/>
-          </a:p>
-        </p:txBody>
-      </p:sp>
-      <p:sp>
-        <p:nvSpPr>
-          <p:cNvPr id="26" name="Rectangle 25"/>
-          <p:cNvSpPr/>
-          <p:nvPr/>
-        </p:nvSpPr>
-        <p:spPr>
-          <a:xfrm>
-            <a:off x="640080" y="4791456"/>
-            <a:ext cx="274320" cy="274320"/>
-          </a:xfrm>
-          <a:prstGeom prst="rect">
-            <a:avLst/>
-          </a:prstGeom>
-          <a:solidFill>
-            <a:srgbClr val="FFFFFF"/>
-          </a:solidFill>
-          <a:ln>
-            <a:solidFill>
-              <a:srgbClr val="333333"/>
-            </a:solidFill>
-          </a:ln>
-        </p:spPr>
-        <p:style>
-          <a:lnRef idx="1">
-            <a:schemeClr val="accent1"/>
-          </a:lnRef>
-          <a:fillRef idx="3">
-            <a:schemeClr val="accent1"/>
-          </a:fillRef>
-          <a:effectRef idx="2">
-            <a:schemeClr val="accent1"/>
-          </a:effectRef>
-          <a:fontRef idx="minor">
-            <a:schemeClr val="lt1"/>
-          </a:fontRef>
-        </p:style>
-        <p:txBody>
-          <a:bodyPr rtlCol="0" anchor="ctr"/>
-          <a:lstStyle/>
-          <a:p>
-            <a:pPr algn="ctr"/>
-          </a:p>
-        </p:txBody>
-      </p:sp>
-      <p:sp>
-        <p:nvSpPr>
-          <p:cNvPr id="27" name="Rectangle 26"/>
-          <p:cNvSpPr/>
-          <p:nvPr/>
-        </p:nvSpPr>
-        <p:spPr>
-          <a:xfrm>
-            <a:off x="640080" y="4791456"/>
-            <a:ext cx="73152" cy="274320"/>
-          </a:xfrm>
-          <a:prstGeom prst="rect">
-            <a:avLst/>
-          </a:prstGeom>
-          <a:solidFill>
-            <a:srgbClr val="269CCB"/>
-          </a:solidFill>
-          <a:ln>
-            <a:noFill/>
-          </a:ln>
-        </p:spPr>
-        <p:style>
-          <a:lnRef idx="1">
-            <a:schemeClr val="accent1"/>
-          </a:lnRef>
-          <a:fillRef idx="3">
-            <a:schemeClr val="accent1"/>
-          </a:fillRef>
-          <a:effectRef idx="2">
-            <a:schemeClr val="accent1"/>
-          </a:effectRef>
-          <a:fontRef idx="minor">
-            <a:schemeClr val="lt1"/>
-          </a:fontRef>
-        </p:style>
-        <p:txBody>
-          <a:bodyPr rtlCol="0" anchor="ctr"/>
-          <a:lstStyle/>
-          <a:p>
-            <a:pPr algn="ctr"/>
-          </a:p>
-        </p:txBody>
-      </p:sp>
-      <p:sp>
-        <p:nvSpPr>
-          <p:cNvPr id="28" name="TextBox 27"/>
-          <p:cNvSpPr txBox="1"/>
-          <p:nvPr/>
-        </p:nvSpPr>
-        <p:spPr>
-          <a:xfrm>
-            <a:off x="1097280" y="4736592"/>
-            <a:ext cx="10362895" cy="402336"/>
-          </a:xfrm>
-          <a:prstGeom prst="rect">
-            <a:avLst/>
-          </a:prstGeom>
-          <a:noFill/>
-        </p:spPr>
-        <p:txBody>
-          <a:bodyPr wrap="square" anchor="ctr"/>
-          <a:lstStyle/>
-          <a:p>
-            <a:r>
-              <a:rPr sz="1500" b="0" i="0">
-                <a:solidFill>
-                  <a:srgbClr val="333333"/>
-                </a:solidFill>
-                <a:latin typeface="Calibri"/>
-              </a:rPr>
-              <a:t>□ ¿La cerrada la decidiste por </a:t>
-            </a:r>
-            <a:r>
-              <a:rPr sz="1500" b="1" i="0">
-                <a:solidFill>
-                  <a:srgbClr val="333333"/>
-                </a:solidFill>
-                <a:latin typeface="Calibri"/>
-              </a:rPr>
-              <a:t>dónde se invoca</a:t>
-            </a:r>
-            <a:r>
-              <a:rPr sz="1500" b="0" i="0">
-                <a:solidFill>
-                  <a:srgbClr val="333333"/>
-                </a:solidFill>
-                <a:latin typeface="Calibri"/>
-              </a:rPr>
-              <a:t> cada rutina —dentro de un «SELECT» o como sentencia suelta— y no por el «LANGUAGE» que declara?</a:t>
-            </a:r>
-          </a:p>
-        </p:txBody>
-      </p:sp>
-      <p:sp>
-        <p:nvSpPr>
-          <p:cNvPr id="29" name="Rounded Rectangle 28"/>
-          <p:cNvSpPr/>
-          <p:nvPr/>
-        </p:nvSpPr>
-        <p:spPr>
-          <a:xfrm>
-            <a:off x="457200" y="5321808"/>
-            <a:ext cx="11277295" cy="566928"/>
-          </a:xfrm>
-          <a:prstGeom prst="roundRect">
-            <a:avLst>
-              <a:gd name="adj" fmla="val 12000"/>
-            </a:avLst>
-          </a:prstGeom>
-          <a:solidFill>
-            <a:srgbClr val="F2F2F2"/>
-          </a:solidFill>
-          <a:ln>
-            <a:noFill/>
-          </a:ln>
-        </p:spPr>
-        <p:style>
-          <a:lnRef idx="1">
-            <a:schemeClr val="accent1"/>
-          </a:lnRef>
-          <a:fillRef idx="3">
-            <a:schemeClr val="accent1"/>
-          </a:fillRef>
-          <a:effectRef idx="2">
-            <a:schemeClr val="accent1"/>
-          </a:effectRef>
-          <a:fontRef idx="minor">
-            <a:schemeClr val="lt1"/>
-          </a:fontRef>
-        </p:style>
-        <p:txBody>
-          <a:bodyPr rtlCol="0" anchor="ctr"/>
-          <a:lstStyle/>
-          <a:p>
-            <a:pPr algn="ctr"/>
-          </a:p>
-        </p:txBody>
-      </p:sp>
-      <p:sp>
-        <p:nvSpPr>
-          <p:cNvPr id="30" name="Rectangle 29"/>
-          <p:cNvSpPr/>
-          <p:nvPr/>
-        </p:nvSpPr>
-        <p:spPr>
-          <a:xfrm>
-            <a:off x="640080" y="5468112"/>
-            <a:ext cx="274320" cy="274320"/>
-          </a:xfrm>
-          <a:prstGeom prst="rect">
-            <a:avLst/>
-          </a:prstGeom>
-          <a:solidFill>
-            <a:srgbClr val="FFFFFF"/>
-          </a:solidFill>
-          <a:ln>
-            <a:solidFill>
-              <a:srgbClr val="333333"/>
-            </a:solidFill>
-          </a:ln>
-        </p:spPr>
-        <p:style>
-          <a:lnRef idx="1">
-            <a:schemeClr val="accent1"/>
-          </a:lnRef>
-          <a:fillRef idx="3">
-            <a:schemeClr val="accent1"/>
-          </a:fillRef>
-          <a:effectRef idx="2">
-            <a:schemeClr val="accent1"/>
-          </a:effectRef>
-          <a:fontRef idx="minor">
-            <a:schemeClr val="lt1"/>
-          </a:fontRef>
-        </p:style>
-        <p:txBody>
-          <a:bodyPr rtlCol="0" anchor="ctr"/>
-          <a:lstStyle/>
-          <a:p>
-            <a:pPr algn="ctr"/>
-          </a:p>
-        </p:txBody>
-      </p:sp>
-      <p:sp>
-        <p:nvSpPr>
-          <p:cNvPr id="31" name="Rectangle 30"/>
-          <p:cNvSpPr/>
-          <p:nvPr/>
-        </p:nvSpPr>
-        <p:spPr>
-          <a:xfrm>
-            <a:off x="640080" y="5468112"/>
-            <a:ext cx="73152" cy="274320"/>
-          </a:xfrm>
-          <a:prstGeom prst="rect">
-            <a:avLst/>
-          </a:prstGeom>
-          <a:solidFill>
-            <a:srgbClr val="269CCB"/>
-          </a:solidFill>
-          <a:ln>
-            <a:noFill/>
-          </a:ln>
-        </p:spPr>
-        <p:style>
-          <a:lnRef idx="1">
-            <a:schemeClr val="accent1"/>
-          </a:lnRef>
-          <a:fillRef idx="3">
-            <a:schemeClr val="accent1"/>
-          </a:fillRef>
-          <a:effectRef idx="2">
-            <a:schemeClr val="accent1"/>
-          </a:effectRef>
-          <a:fontRef idx="minor">
-            <a:schemeClr val="lt1"/>
-          </a:fontRef>
-        </p:style>
-        <p:txBody>
-          <a:bodyPr rtlCol="0" anchor="ctr"/>
-          <a:lstStyle/>
-          <a:p>
-            <a:pPr algn="ctr"/>
-          </a:p>
-        </p:txBody>
-      </p:sp>
-      <p:sp>
-        <p:nvSpPr>
-          <p:cNvPr id="32" name="TextBox 31"/>
-          <p:cNvSpPr txBox="1"/>
-          <p:nvPr/>
-        </p:nvSpPr>
-        <p:spPr>
-          <a:xfrm>
-            <a:off x="1097280" y="5413248"/>
-            <a:ext cx="10362895" cy="402336"/>
-          </a:xfrm>
-          <a:prstGeom prst="rect">
-            <a:avLst/>
-          </a:prstGeom>
-          <a:noFill/>
-        </p:spPr>
-        <p:txBody>
-          <a:bodyPr wrap="square" anchor="ctr"/>
-          <a:lstStyle/>
-          <a:p>
-            <a:r>
-              <a:rPr sz="1500" b="0" i="0">
-                <a:solidFill>
-                  <a:srgbClr val="333333"/>
-                </a:solidFill>
-                <a:latin typeface="Calibri"/>
-              </a:rPr>
-              <a:t>□ ¿El contrato trae los 6 bloques de </a:t>
-            </a:r>
-            <a:r>
-              <a:rPr sz="1500" b="1" i="0">
-                <a:solidFill>
-                  <a:srgbClr val="333333"/>
-                </a:solidFill>
-                <a:latin typeface="Calibri"/>
-              </a:rPr>
-              <a:t>cada</a:t>
-            </a:r>
-            <a:r>
-              <a:rPr sz="1500" b="0" i="0">
-                <a:solidFill>
-                  <a:srgbClr val="333333"/>
-                </a:solidFill>
-                <a:latin typeface="Calibri"/>
-              </a:rPr>
-              <a:t> procedimiento y las 7 filas de errores?</a:t>
-            </a:r>
-          </a:p>
-        </p:txBody>
-      </p:sp>
-      <p:sp>
-        <p:nvSpPr>
-          <p:cNvPr id="33" name="TextBox 32"/>
+                  <a:srgbClr val="095292"/>
+                </a:solidFill>
+                <a:latin typeface="Calibri"/>
+              </a:rPr>
+              <a:t>Redactar el contrato del proc en sus 6 bloques (plantilla en este documento) y pegarlo en la pregunta 5.</a:t>
+            </a:r>
+          </a:p>
+        </p:txBody>
+      </p:sp>
+      <p:sp>
+        <p:nvSpPr>
+          <p:cNvPr id="25" name="TextBox 24"/>
           <p:cNvSpPr txBox="1"/>
           <p:nvPr/>
         </p:nvSpPr>
@@ -8501,21 +7556,154 @@
                 </a:solidFill>
                 <a:latin typeface="Calibri"/>
               </a:rPr>
-              <a:t>Criterios de exito / entregable</a:t>
-            </a:r>
-          </a:p>
-        </p:txBody>
-      </p:sp>
-      <p:sp>
-        <p:nvSpPr>
-          <p:cNvPr id="5" name="TextBox 4"/>
+              <a:t>Taller PI VetCare — pistas (checklist vacio)</a:t>
+            </a:r>
+          </a:p>
+        </p:txBody>
+      </p:sp>
+      <p:sp>
+        <p:nvSpPr>
+          <p:cNvPr id="5" name="Rounded Rectangle 4"/>
+          <p:cNvSpPr/>
+          <p:nvPr/>
+        </p:nvSpPr>
+        <p:spPr>
+          <a:xfrm>
+            <a:off x="457200" y="1261872"/>
+            <a:ext cx="11277295" cy="566928"/>
+          </a:xfrm>
+          <a:prstGeom prst="roundRect">
+            <a:avLst>
+              <a:gd name="adj" fmla="val 12000"/>
+            </a:avLst>
+          </a:prstGeom>
+          <a:solidFill>
+            <a:srgbClr val="F2F2F2"/>
+          </a:solidFill>
+          <a:ln>
+            <a:noFill/>
+          </a:ln>
+        </p:spPr>
+        <p:style>
+          <a:lnRef idx="1">
+            <a:schemeClr val="accent1"/>
+          </a:lnRef>
+          <a:fillRef idx="3">
+            <a:schemeClr val="accent1"/>
+          </a:fillRef>
+          <a:effectRef idx="2">
+            <a:schemeClr val="accent1"/>
+          </a:effectRef>
+          <a:fontRef idx="minor">
+            <a:schemeClr val="lt1"/>
+          </a:fontRef>
+        </p:style>
+        <p:txBody>
+          <a:bodyPr rtlCol="0" anchor="ctr"/>
+          <a:lstStyle/>
+          <a:p>
+            <a:pPr algn="ctr"/>
+          </a:p>
+        </p:txBody>
+      </p:sp>
+      <p:sp>
+        <p:nvSpPr>
+          <p:cNvPr id="6" name="Rectangle 5"/>
+          <p:cNvSpPr/>
+          <p:nvPr/>
+        </p:nvSpPr>
+        <p:spPr>
+          <a:xfrm>
+            <a:off x="640080" y="1408175"/>
+            <a:ext cx="274320" cy="274320"/>
+          </a:xfrm>
+          <a:prstGeom prst="rect">
+            <a:avLst/>
+          </a:prstGeom>
+          <a:solidFill>
+            <a:srgbClr val="FFFFFF"/>
+          </a:solidFill>
+          <a:ln>
+            <a:solidFill>
+              <a:srgbClr val="333333"/>
+            </a:solidFill>
+          </a:ln>
+        </p:spPr>
+        <p:style>
+          <a:lnRef idx="1">
+            <a:schemeClr val="accent1"/>
+          </a:lnRef>
+          <a:fillRef idx="3">
+            <a:schemeClr val="accent1"/>
+          </a:fillRef>
+          <a:effectRef idx="2">
+            <a:schemeClr val="accent1"/>
+          </a:effectRef>
+          <a:fontRef idx="minor">
+            <a:schemeClr val="lt1"/>
+          </a:fontRef>
+        </p:style>
+        <p:txBody>
+          <a:bodyPr rtlCol="0" anchor="ctr"/>
+          <a:lstStyle/>
+          <a:p>
+            <a:pPr algn="ctr"/>
+          </a:p>
+        </p:txBody>
+      </p:sp>
+      <p:sp>
+        <p:nvSpPr>
+          <p:cNvPr id="7" name="Rectangle 6"/>
+          <p:cNvSpPr/>
+          <p:nvPr/>
+        </p:nvSpPr>
+        <p:spPr>
+          <a:xfrm>
+            <a:off x="640080" y="1408175"/>
+            <a:ext cx="73152" cy="274320"/>
+          </a:xfrm>
+          <a:prstGeom prst="rect">
+            <a:avLst/>
+          </a:prstGeom>
+          <a:solidFill>
+            <a:srgbClr val="269CCB"/>
+          </a:solidFill>
+          <a:ln>
+            <a:noFill/>
+          </a:ln>
+        </p:spPr>
+        <p:style>
+          <a:lnRef idx="1">
+            <a:schemeClr val="accent1"/>
+          </a:lnRef>
+          <a:fillRef idx="3">
+            <a:schemeClr val="accent1"/>
+          </a:fillRef>
+          <a:effectRef idx="2">
+            <a:schemeClr val="accent1"/>
+          </a:effectRef>
+          <a:fontRef idx="minor">
+            <a:schemeClr val="lt1"/>
+          </a:fontRef>
+        </p:style>
+        <p:txBody>
+          <a:bodyPr rtlCol="0" anchor="ctr"/>
+          <a:lstStyle/>
+          <a:p>
+            <a:pPr algn="ctr"/>
+          </a:p>
+        </p:txBody>
+      </p:sp>
+      <p:sp>
+        <p:nvSpPr>
+          <p:cNvPr id="8" name="TextBox 7"/>
           <p:cNvSpPr txBox="1"/>
           <p:nvPr/>
         </p:nvSpPr>
         <p:spPr>
           <a:xfrm>
-            <a:off x="457200" y="1170432"/>
-            <a:ext cx="11277295" cy="5230368"/>
+            <a:off x="1097280" y="1353312"/>
+            <a:ext cx="10362895" cy="402336"/>
           </a:xfrm>
           <a:prstGeom prst="rect">
             <a:avLst/>
@@ -8523,131 +7711,1104 @@
           <a:noFill/>
         </p:spPr>
         <p:txBody>
-          <a:bodyPr wrap="square">
-            <a:spAutoFit/>
-          </a:bodyPr>
-          <a:lstStyle/>
-          <a:p>
-            <a:pPr>
-              <a:spcAft>
-                <a:spcPts val="800"/>
-              </a:spcAft>
-            </a:pPr>
-            <a:r>
-              <a:rPr sz="1600" b="0" i="0">
-                <a:solidFill>
-                  <a:srgbClr val="333333"/>
-                </a:solidFill>
-                <a:latin typeface="Calibri"/>
-              </a:rPr>
-              <a:t>–   </a:t>
-            </a:r>
-            <a:r>
-              <a:rPr sz="1600" b="1" i="0">
-                <a:solidFill>
-                  <a:srgbClr val="333333"/>
-                </a:solidFill>
-                <a:latin typeface="Calibri"/>
-              </a:rPr>
-              <a:t>Entregable:</a:t>
-            </a:r>
-            <a:r>
-              <a:rPr sz="1600" b="0" i="0">
-                <a:solidFill>
-                  <a:srgbClr val="333333"/>
-                </a:solidFill>
-                <a:latin typeface="Calibri"/>
-              </a:rPr>
-              <a:t> 2 procedimientos en PL/pgSQL corriendo en ExamLab + bateria de pruebas con su tabla resultado_prueba + contrato del proc (6 bloques)</a:t>
-            </a:r>
-          </a:p>
-          <a:p>
-            <a:pPr>
-              <a:spcAft>
-                <a:spcPts val="800"/>
-              </a:spcAft>
-            </a:pPr>
-            <a:r>
-              <a:rPr sz="1600" b="0" i="0">
-                <a:solidFill>
-                  <a:srgbClr val="333333"/>
-                </a:solidFill>
-                <a:latin typeface="Calibri"/>
-              </a:rPr>
-              <a:t>–   Evidencia: el SQL y su salida quedan guardados en cada pregunta de ExamLab.</a:t>
-            </a:r>
-          </a:p>
-          <a:p>
-            <a:pPr>
-              <a:spcAft>
-                <a:spcPts val="800"/>
-              </a:spcAft>
-            </a:pPr>
-            <a:r>
-              <a:rPr sz="1600" b="0" i="0">
-                <a:solidFill>
-                  <a:srgbClr val="333333"/>
-                </a:solidFill>
-                <a:latin typeface="Calibri"/>
-              </a:rPr>
-              <a:t>–   Conserva copia en tu carpeta del PI (los .sql que pide el entregable).</a:t>
-            </a:r>
-          </a:p>
-          <a:p>
-            <a:pPr>
-              <a:spcAft>
-                <a:spcPts val="800"/>
-              </a:spcAft>
-            </a:pPr>
-            <a:r>
-              <a:rPr sz="1600" b="0" i="0">
-                <a:solidFill>
-                  <a:srgbClr val="333333"/>
-                </a:solidFill>
-                <a:latin typeface="Calibri"/>
-              </a:rPr>
-              <a:t>–   Actualizar checklist PI (que criterio de rubrica avanzo).</a:t>
-            </a:r>
-          </a:p>
-          <a:p>
-            <a:pPr>
-              <a:spcAft>
-                <a:spcPts val="800"/>
-              </a:spcAft>
-            </a:pPr>
-            <a:r>
-              <a:rPr sz="1600" b="0" i="0">
-                <a:solidFill>
-                  <a:srgbClr val="333333"/>
-                </a:solidFill>
-                <a:latin typeface="Calibri"/>
-              </a:rPr>
-              <a:t>–   </a:t>
-            </a:r>
-            <a:r>
-              <a:rPr sz="1600" b="1" i="0">
-                <a:solidFill>
-                  <a:srgbClr val="333333"/>
-                </a:solidFill>
-                <a:latin typeface="Calibri"/>
-              </a:rPr>
-              <a:t>Entrega en ExamLab</a:t>
-            </a:r>
-            <a:r>
-              <a:rPr sz="1600" b="0" i="0">
-                <a:solidFill>
-                  <a:srgbClr val="333333"/>
-                </a:solidFill>
-                <a:latin typeface="Calibri"/>
-              </a:rPr>
-              <a:t> (https://uniaj.examlab.workers.dev/) — domingo 23:59 cuando aplique taller.</a:t>
-            </a:r>
-          </a:p>
-        </p:txBody>
-      </p:sp>
-      <p:sp>
-        <p:nvSpPr>
-          <p:cNvPr id="6" name="TextBox 5"/>
+          <a:bodyPr wrap="square" anchor="ctr"/>
+          <a:lstStyle/>
+          <a:p>
+            <a:r>
+              <a:rPr sz="1500" b="0" i="0">
+                <a:solidFill>
+                  <a:srgbClr val="333333"/>
+                </a:solidFill>
+                <a:latin typeface="Calibri"/>
+              </a:rPr>
+              <a:t>□ ¿El procedimiento se creó </a:t>
+            </a:r>
+            <a:r>
+              <a:rPr sz="1500" b="1" i="0">
+                <a:solidFill>
+                  <a:srgbClr val="333333"/>
+                </a:solidFill>
+                <a:latin typeface="Calibri"/>
+              </a:rPr>
+              <a:t>y</a:t>
+            </a:r>
+            <a:r>
+              <a:rPr sz="1500" b="0" i="0">
+                <a:solidFill>
+                  <a:srgbClr val="333333"/>
+                </a:solidFill>
+                <a:latin typeface="Calibri"/>
+              </a:rPr>
+              <a:t> el «CALL» corrió? Crear no es evidencia.</a:t>
+            </a:r>
+          </a:p>
+        </p:txBody>
+      </p:sp>
+      <p:sp>
+        <p:nvSpPr>
+          <p:cNvPr id="9" name="Rounded Rectangle 8"/>
+          <p:cNvSpPr/>
+          <p:nvPr/>
+        </p:nvSpPr>
+        <p:spPr>
+          <a:xfrm>
+            <a:off x="457200" y="1938528"/>
+            <a:ext cx="11277295" cy="566928"/>
+          </a:xfrm>
+          <a:prstGeom prst="roundRect">
+            <a:avLst>
+              <a:gd name="adj" fmla="val 12000"/>
+            </a:avLst>
+          </a:prstGeom>
+          <a:solidFill>
+            <a:srgbClr val="F2F2F2"/>
+          </a:solidFill>
+          <a:ln>
+            <a:noFill/>
+          </a:ln>
+        </p:spPr>
+        <p:style>
+          <a:lnRef idx="1">
+            <a:schemeClr val="accent1"/>
+          </a:lnRef>
+          <a:fillRef idx="3">
+            <a:schemeClr val="accent1"/>
+          </a:fillRef>
+          <a:effectRef idx="2">
+            <a:schemeClr val="accent1"/>
+          </a:effectRef>
+          <a:fontRef idx="minor">
+            <a:schemeClr val="lt1"/>
+          </a:fontRef>
+        </p:style>
+        <p:txBody>
+          <a:bodyPr rtlCol="0" anchor="ctr"/>
+          <a:lstStyle/>
+          <a:p>
+            <a:pPr algn="ctr"/>
+          </a:p>
+        </p:txBody>
+      </p:sp>
+      <p:sp>
+        <p:nvSpPr>
+          <p:cNvPr id="10" name="Rectangle 9"/>
+          <p:cNvSpPr/>
+          <p:nvPr/>
+        </p:nvSpPr>
+        <p:spPr>
+          <a:xfrm>
+            <a:off x="640080" y="2084832"/>
+            <a:ext cx="274320" cy="274320"/>
+          </a:xfrm>
+          <a:prstGeom prst="rect">
+            <a:avLst/>
+          </a:prstGeom>
+          <a:solidFill>
+            <a:srgbClr val="FFFFFF"/>
+          </a:solidFill>
+          <a:ln>
+            <a:solidFill>
+              <a:srgbClr val="333333"/>
+            </a:solidFill>
+          </a:ln>
+        </p:spPr>
+        <p:style>
+          <a:lnRef idx="1">
+            <a:schemeClr val="accent1"/>
+          </a:lnRef>
+          <a:fillRef idx="3">
+            <a:schemeClr val="accent1"/>
+          </a:fillRef>
+          <a:effectRef idx="2">
+            <a:schemeClr val="accent1"/>
+          </a:effectRef>
+          <a:fontRef idx="minor">
+            <a:schemeClr val="lt1"/>
+          </a:fontRef>
+        </p:style>
+        <p:txBody>
+          <a:bodyPr rtlCol="0" anchor="ctr"/>
+          <a:lstStyle/>
+          <a:p>
+            <a:pPr algn="ctr"/>
+          </a:p>
+        </p:txBody>
+      </p:sp>
+      <p:sp>
+        <p:nvSpPr>
+          <p:cNvPr id="11" name="Rectangle 10"/>
+          <p:cNvSpPr/>
+          <p:nvPr/>
+        </p:nvSpPr>
+        <p:spPr>
+          <a:xfrm>
+            <a:off x="640080" y="2084832"/>
+            <a:ext cx="73152" cy="274320"/>
+          </a:xfrm>
+          <a:prstGeom prst="rect">
+            <a:avLst/>
+          </a:prstGeom>
+          <a:solidFill>
+            <a:srgbClr val="269CCB"/>
+          </a:solidFill>
+          <a:ln>
+            <a:noFill/>
+          </a:ln>
+        </p:spPr>
+        <p:style>
+          <a:lnRef idx="1">
+            <a:schemeClr val="accent1"/>
+          </a:lnRef>
+          <a:fillRef idx="3">
+            <a:schemeClr val="accent1"/>
+          </a:fillRef>
+          <a:effectRef idx="2">
+            <a:schemeClr val="accent1"/>
+          </a:effectRef>
+          <a:fontRef idx="minor">
+            <a:schemeClr val="lt1"/>
+          </a:fontRef>
+        </p:style>
+        <p:txBody>
+          <a:bodyPr rtlCol="0" anchor="ctr"/>
+          <a:lstStyle/>
+          <a:p>
+            <a:pPr algn="ctr"/>
+          </a:p>
+        </p:txBody>
+      </p:sp>
+      <p:sp>
+        <p:nvSpPr>
+          <p:cNvPr id="12" name="TextBox 11"/>
+          <p:cNvSpPr txBox="1"/>
+          <p:nvPr/>
+        </p:nvSpPr>
+        <p:spPr>
+          <a:xfrm>
+            <a:off x="1097280" y="2029968"/>
+            <a:ext cx="10362895" cy="402336"/>
+          </a:xfrm>
+          <a:prstGeom prst="rect">
+            <a:avLst/>
+          </a:prstGeom>
+          <a:noFill/>
+        </p:spPr>
+        <p:txBody>
+          <a:bodyPr wrap="square" anchor="ctr"/>
+          <a:lstStyle/>
+          <a:p>
+            <a:r>
+              <a:rPr sz="1500" b="0" i="0">
+                <a:solidFill>
+                  <a:srgbClr val="333333"/>
+                </a:solidFill>
+                <a:latin typeface="Calibri"/>
+              </a:rPr>
+              <a:t>□ ¿La validación de «no existe» usa «IF NOT FOUND» tras el «SELECT ... INTO»?</a:t>
+            </a:r>
+          </a:p>
+        </p:txBody>
+      </p:sp>
+      <p:sp>
+        <p:nvSpPr>
+          <p:cNvPr id="13" name="Rounded Rectangle 12"/>
+          <p:cNvSpPr/>
+          <p:nvPr/>
+        </p:nvSpPr>
+        <p:spPr>
+          <a:xfrm>
+            <a:off x="457200" y="2615184"/>
+            <a:ext cx="11277295" cy="566928"/>
+          </a:xfrm>
+          <a:prstGeom prst="roundRect">
+            <a:avLst>
+              <a:gd name="adj" fmla="val 12000"/>
+            </a:avLst>
+          </a:prstGeom>
+          <a:solidFill>
+            <a:srgbClr val="F2F2F2"/>
+          </a:solidFill>
+          <a:ln>
+            <a:noFill/>
+          </a:ln>
+        </p:spPr>
+        <p:style>
+          <a:lnRef idx="1">
+            <a:schemeClr val="accent1"/>
+          </a:lnRef>
+          <a:fillRef idx="3">
+            <a:schemeClr val="accent1"/>
+          </a:fillRef>
+          <a:effectRef idx="2">
+            <a:schemeClr val="accent1"/>
+          </a:effectRef>
+          <a:fontRef idx="minor">
+            <a:schemeClr val="lt1"/>
+          </a:fontRef>
+        </p:style>
+        <p:txBody>
+          <a:bodyPr rtlCol="0" anchor="ctr"/>
+          <a:lstStyle/>
+          <a:p>
+            <a:pPr algn="ctr"/>
+          </a:p>
+        </p:txBody>
+      </p:sp>
+      <p:sp>
+        <p:nvSpPr>
+          <p:cNvPr id="14" name="Rectangle 13"/>
+          <p:cNvSpPr/>
+          <p:nvPr/>
+        </p:nvSpPr>
+        <p:spPr>
+          <a:xfrm>
+            <a:off x="640080" y="2761488"/>
+            <a:ext cx="274320" cy="274320"/>
+          </a:xfrm>
+          <a:prstGeom prst="rect">
+            <a:avLst/>
+          </a:prstGeom>
+          <a:solidFill>
+            <a:srgbClr val="FFFFFF"/>
+          </a:solidFill>
+          <a:ln>
+            <a:solidFill>
+              <a:srgbClr val="333333"/>
+            </a:solidFill>
+          </a:ln>
+        </p:spPr>
+        <p:style>
+          <a:lnRef idx="1">
+            <a:schemeClr val="accent1"/>
+          </a:lnRef>
+          <a:fillRef idx="3">
+            <a:schemeClr val="accent1"/>
+          </a:fillRef>
+          <a:effectRef idx="2">
+            <a:schemeClr val="accent1"/>
+          </a:effectRef>
+          <a:fontRef idx="minor">
+            <a:schemeClr val="lt1"/>
+          </a:fontRef>
+        </p:style>
+        <p:txBody>
+          <a:bodyPr rtlCol="0" anchor="ctr"/>
+          <a:lstStyle/>
+          <a:p>
+            <a:pPr algn="ctr"/>
+          </a:p>
+        </p:txBody>
+      </p:sp>
+      <p:sp>
+        <p:nvSpPr>
+          <p:cNvPr id="15" name="Rectangle 14"/>
+          <p:cNvSpPr/>
+          <p:nvPr/>
+        </p:nvSpPr>
+        <p:spPr>
+          <a:xfrm>
+            <a:off x="640080" y="2761488"/>
+            <a:ext cx="73152" cy="274320"/>
+          </a:xfrm>
+          <a:prstGeom prst="rect">
+            <a:avLst/>
+          </a:prstGeom>
+          <a:solidFill>
+            <a:srgbClr val="269CCB"/>
+          </a:solidFill>
+          <a:ln>
+            <a:noFill/>
+          </a:ln>
+        </p:spPr>
+        <p:style>
+          <a:lnRef idx="1">
+            <a:schemeClr val="accent1"/>
+          </a:lnRef>
+          <a:fillRef idx="3">
+            <a:schemeClr val="accent1"/>
+          </a:fillRef>
+          <a:effectRef idx="2">
+            <a:schemeClr val="accent1"/>
+          </a:effectRef>
+          <a:fontRef idx="minor">
+            <a:schemeClr val="lt1"/>
+          </a:fontRef>
+        </p:style>
+        <p:txBody>
+          <a:bodyPr rtlCol="0" anchor="ctr"/>
+          <a:lstStyle/>
+          <a:p>
+            <a:pPr algn="ctr"/>
+          </a:p>
+        </p:txBody>
+      </p:sp>
+      <p:sp>
+        <p:nvSpPr>
+          <p:cNvPr id="16" name="TextBox 15"/>
+          <p:cNvSpPr txBox="1"/>
+          <p:nvPr/>
+        </p:nvSpPr>
+        <p:spPr>
+          <a:xfrm>
+            <a:off x="1097280" y="2706624"/>
+            <a:ext cx="10362895" cy="402336"/>
+          </a:xfrm>
+          <a:prstGeom prst="rect">
+            <a:avLst/>
+          </a:prstGeom>
+          <a:noFill/>
+        </p:spPr>
+        <p:txBody>
+          <a:bodyPr wrap="square" anchor="ctr"/>
+          <a:lstStyle/>
+          <a:p>
+            <a:r>
+              <a:rPr sz="1500" b="0" i="0">
+                <a:solidFill>
+                  <a:srgbClr val="333333"/>
+                </a:solidFill>
+                <a:latin typeface="Calibri"/>
+              </a:rPr>
+              <a:t>□ ¿Los 4 bloques «DO» capturan la excepción y el script llega hasta el final?</a:t>
+            </a:r>
+          </a:p>
+        </p:txBody>
+      </p:sp>
+      <p:sp>
+        <p:nvSpPr>
+          <p:cNvPr id="17" name="Rounded Rectangle 16"/>
+          <p:cNvSpPr/>
+          <p:nvPr/>
+        </p:nvSpPr>
+        <p:spPr>
+          <a:xfrm>
+            <a:off x="457200" y="3291840"/>
+            <a:ext cx="11277295" cy="566928"/>
+          </a:xfrm>
+          <a:prstGeom prst="roundRect">
+            <a:avLst>
+              <a:gd name="adj" fmla="val 12000"/>
+            </a:avLst>
+          </a:prstGeom>
+          <a:solidFill>
+            <a:srgbClr val="F2F2F2"/>
+          </a:solidFill>
+          <a:ln>
+            <a:noFill/>
+          </a:ln>
+        </p:spPr>
+        <p:style>
+          <a:lnRef idx="1">
+            <a:schemeClr val="accent1"/>
+          </a:lnRef>
+          <a:fillRef idx="3">
+            <a:schemeClr val="accent1"/>
+          </a:fillRef>
+          <a:effectRef idx="2">
+            <a:schemeClr val="accent1"/>
+          </a:effectRef>
+          <a:fontRef idx="minor">
+            <a:schemeClr val="lt1"/>
+          </a:fontRef>
+        </p:style>
+        <p:txBody>
+          <a:bodyPr rtlCol="0" anchor="ctr"/>
+          <a:lstStyle/>
+          <a:p>
+            <a:pPr algn="ctr"/>
+          </a:p>
+        </p:txBody>
+      </p:sp>
+      <p:sp>
+        <p:nvSpPr>
+          <p:cNvPr id="18" name="Rectangle 17"/>
+          <p:cNvSpPr/>
+          <p:nvPr/>
+        </p:nvSpPr>
+        <p:spPr>
+          <a:xfrm>
+            <a:off x="640080" y="3438144"/>
+            <a:ext cx="274320" cy="274320"/>
+          </a:xfrm>
+          <a:prstGeom prst="rect">
+            <a:avLst/>
+          </a:prstGeom>
+          <a:solidFill>
+            <a:srgbClr val="FFFFFF"/>
+          </a:solidFill>
+          <a:ln>
+            <a:solidFill>
+              <a:srgbClr val="333333"/>
+            </a:solidFill>
+          </a:ln>
+        </p:spPr>
+        <p:style>
+          <a:lnRef idx="1">
+            <a:schemeClr val="accent1"/>
+          </a:lnRef>
+          <a:fillRef idx="3">
+            <a:schemeClr val="accent1"/>
+          </a:fillRef>
+          <a:effectRef idx="2">
+            <a:schemeClr val="accent1"/>
+          </a:effectRef>
+          <a:fontRef idx="minor">
+            <a:schemeClr val="lt1"/>
+          </a:fontRef>
+        </p:style>
+        <p:txBody>
+          <a:bodyPr rtlCol="0" anchor="ctr"/>
+          <a:lstStyle/>
+          <a:p>
+            <a:pPr algn="ctr"/>
+          </a:p>
+        </p:txBody>
+      </p:sp>
+      <p:sp>
+        <p:nvSpPr>
+          <p:cNvPr id="19" name="Rectangle 18"/>
+          <p:cNvSpPr/>
+          <p:nvPr/>
+        </p:nvSpPr>
+        <p:spPr>
+          <a:xfrm>
+            <a:off x="640080" y="3438144"/>
+            <a:ext cx="73152" cy="274320"/>
+          </a:xfrm>
+          <a:prstGeom prst="rect">
+            <a:avLst/>
+          </a:prstGeom>
+          <a:solidFill>
+            <a:srgbClr val="269CCB"/>
+          </a:solidFill>
+          <a:ln>
+            <a:noFill/>
+          </a:ln>
+        </p:spPr>
+        <p:style>
+          <a:lnRef idx="1">
+            <a:schemeClr val="accent1"/>
+          </a:lnRef>
+          <a:fillRef idx="3">
+            <a:schemeClr val="accent1"/>
+          </a:fillRef>
+          <a:effectRef idx="2">
+            <a:schemeClr val="accent1"/>
+          </a:effectRef>
+          <a:fontRef idx="minor">
+            <a:schemeClr val="lt1"/>
+          </a:fontRef>
+        </p:style>
+        <p:txBody>
+          <a:bodyPr rtlCol="0" anchor="ctr"/>
+          <a:lstStyle/>
+          <a:p>
+            <a:pPr algn="ctr"/>
+          </a:p>
+        </p:txBody>
+      </p:sp>
+      <p:sp>
+        <p:nvSpPr>
+          <p:cNvPr id="20" name="TextBox 19"/>
+          <p:cNvSpPr txBox="1"/>
+          <p:nvPr/>
+        </p:nvSpPr>
+        <p:spPr>
+          <a:xfrm>
+            <a:off x="1097280" y="3383280"/>
+            <a:ext cx="10362895" cy="402336"/>
+          </a:xfrm>
+          <a:prstGeom prst="rect">
+            <a:avLst/>
+          </a:prstGeom>
+          <a:noFill/>
+        </p:spPr>
+        <p:txBody>
+          <a:bodyPr wrap="square" anchor="ctr"/>
+          <a:lstStyle/>
+          <a:p>
+            <a:r>
+              <a:rPr sz="1500" b="0" i="0">
+                <a:solidFill>
+                  <a:srgbClr val="333333"/>
+                </a:solidFill>
+                <a:latin typeface="Calibri"/>
+              </a:rPr>
+              <a:t>□ ¿El conteo final de «cita» es </a:t>
+            </a:r>
+            <a:r>
+              <a:rPr sz="1500" b="1" i="0">
+                <a:solidFill>
+                  <a:srgbClr val="333333"/>
+                </a:solidFill>
+                <a:latin typeface="Calibri"/>
+              </a:rPr>
+              <a:t>11</a:t>
+            </a:r>
+            <a:r>
+              <a:rPr sz="1500" b="0" i="0">
+                <a:solidFill>
+                  <a:srgbClr val="333333"/>
+                </a:solidFill>
+                <a:latin typeface="Calibri"/>
+              </a:rPr>
+              <a:t>, y está en la evidencia?</a:t>
+            </a:r>
+          </a:p>
+        </p:txBody>
+      </p:sp>
+      <p:sp>
+        <p:nvSpPr>
+          <p:cNvPr id="21" name="Rounded Rectangle 20"/>
+          <p:cNvSpPr/>
+          <p:nvPr/>
+        </p:nvSpPr>
+        <p:spPr>
+          <a:xfrm>
+            <a:off x="457200" y="3968496"/>
+            <a:ext cx="11277295" cy="566928"/>
+          </a:xfrm>
+          <a:prstGeom prst="roundRect">
+            <a:avLst>
+              <a:gd name="adj" fmla="val 12000"/>
+            </a:avLst>
+          </a:prstGeom>
+          <a:solidFill>
+            <a:srgbClr val="F2F2F2"/>
+          </a:solidFill>
+          <a:ln>
+            <a:noFill/>
+          </a:ln>
+        </p:spPr>
+        <p:style>
+          <a:lnRef idx="1">
+            <a:schemeClr val="accent1"/>
+          </a:lnRef>
+          <a:fillRef idx="3">
+            <a:schemeClr val="accent1"/>
+          </a:fillRef>
+          <a:effectRef idx="2">
+            <a:schemeClr val="accent1"/>
+          </a:effectRef>
+          <a:fontRef idx="minor">
+            <a:schemeClr val="lt1"/>
+          </a:fontRef>
+        </p:style>
+        <p:txBody>
+          <a:bodyPr rtlCol="0" anchor="ctr"/>
+          <a:lstStyle/>
+          <a:p>
+            <a:pPr algn="ctr"/>
+          </a:p>
+        </p:txBody>
+      </p:sp>
+      <p:sp>
+        <p:nvSpPr>
+          <p:cNvPr id="22" name="Rectangle 21"/>
+          <p:cNvSpPr/>
+          <p:nvPr/>
+        </p:nvSpPr>
+        <p:spPr>
+          <a:xfrm>
+            <a:off x="640080" y="4114800"/>
+            <a:ext cx="274320" cy="274320"/>
+          </a:xfrm>
+          <a:prstGeom prst="rect">
+            <a:avLst/>
+          </a:prstGeom>
+          <a:solidFill>
+            <a:srgbClr val="FFFFFF"/>
+          </a:solidFill>
+          <a:ln>
+            <a:solidFill>
+              <a:srgbClr val="333333"/>
+            </a:solidFill>
+          </a:ln>
+        </p:spPr>
+        <p:style>
+          <a:lnRef idx="1">
+            <a:schemeClr val="accent1"/>
+          </a:lnRef>
+          <a:fillRef idx="3">
+            <a:schemeClr val="accent1"/>
+          </a:fillRef>
+          <a:effectRef idx="2">
+            <a:schemeClr val="accent1"/>
+          </a:effectRef>
+          <a:fontRef idx="minor">
+            <a:schemeClr val="lt1"/>
+          </a:fontRef>
+        </p:style>
+        <p:txBody>
+          <a:bodyPr rtlCol="0" anchor="ctr"/>
+          <a:lstStyle/>
+          <a:p>
+            <a:pPr algn="ctr"/>
+          </a:p>
+        </p:txBody>
+      </p:sp>
+      <p:sp>
+        <p:nvSpPr>
+          <p:cNvPr id="23" name="Rectangle 22"/>
+          <p:cNvSpPr/>
+          <p:nvPr/>
+        </p:nvSpPr>
+        <p:spPr>
+          <a:xfrm>
+            <a:off x="640080" y="4114800"/>
+            <a:ext cx="73152" cy="274320"/>
+          </a:xfrm>
+          <a:prstGeom prst="rect">
+            <a:avLst/>
+          </a:prstGeom>
+          <a:solidFill>
+            <a:srgbClr val="269CCB"/>
+          </a:solidFill>
+          <a:ln>
+            <a:noFill/>
+          </a:ln>
+        </p:spPr>
+        <p:style>
+          <a:lnRef idx="1">
+            <a:schemeClr val="accent1"/>
+          </a:lnRef>
+          <a:fillRef idx="3">
+            <a:schemeClr val="accent1"/>
+          </a:fillRef>
+          <a:effectRef idx="2">
+            <a:schemeClr val="accent1"/>
+          </a:effectRef>
+          <a:fontRef idx="minor">
+            <a:schemeClr val="lt1"/>
+          </a:fontRef>
+        </p:style>
+        <p:txBody>
+          <a:bodyPr rtlCol="0" anchor="ctr"/>
+          <a:lstStyle/>
+          <a:p>
+            <a:pPr algn="ctr"/>
+          </a:p>
+        </p:txBody>
+      </p:sp>
+      <p:sp>
+        <p:nvSpPr>
+          <p:cNvPr id="24" name="TextBox 23"/>
+          <p:cNvSpPr txBox="1"/>
+          <p:nvPr/>
+        </p:nvSpPr>
+        <p:spPr>
+          <a:xfrm>
+            <a:off x="1097280" y="4059936"/>
+            <a:ext cx="10362895" cy="402336"/>
+          </a:xfrm>
+          <a:prstGeom prst="rect">
+            <a:avLst/>
+          </a:prstGeom>
+          <a:noFill/>
+        </p:spPr>
+        <p:txBody>
+          <a:bodyPr wrap="square" anchor="ctr"/>
+          <a:lstStyle/>
+          <a:p>
+            <a:r>
+              <a:rPr sz="1500" b="0" i="0">
+                <a:solidFill>
+                  <a:srgbClr val="333333"/>
+                </a:solidFill>
+                <a:latin typeface="Calibri"/>
+              </a:rPr>
+              <a:t>□ ¿«sp_registrar_consulta» inserta la consulta </a:t>
+            </a:r>
+            <a:r>
+              <a:rPr sz="1500" b="1" i="0">
+                <a:solidFill>
+                  <a:srgbClr val="333333"/>
+                </a:solidFill>
+                <a:latin typeface="Calibri"/>
+              </a:rPr>
+              <a:t>y</a:t>
+            </a:r>
+            <a:r>
+              <a:rPr sz="1500" b="0" i="0">
+                <a:solidFill>
+                  <a:srgbClr val="333333"/>
+                </a:solidFill>
+                <a:latin typeface="Calibri"/>
+              </a:rPr>
+              <a:t> deja la cita en «ATENDIDA»?</a:t>
+            </a:r>
+          </a:p>
+        </p:txBody>
+      </p:sp>
+      <p:sp>
+        <p:nvSpPr>
+          <p:cNvPr id="25" name="Rounded Rectangle 24"/>
+          <p:cNvSpPr/>
+          <p:nvPr/>
+        </p:nvSpPr>
+        <p:spPr>
+          <a:xfrm>
+            <a:off x="457200" y="4645152"/>
+            <a:ext cx="11277295" cy="566928"/>
+          </a:xfrm>
+          <a:prstGeom prst="roundRect">
+            <a:avLst>
+              <a:gd name="adj" fmla="val 12000"/>
+            </a:avLst>
+          </a:prstGeom>
+          <a:solidFill>
+            <a:srgbClr val="F2F2F2"/>
+          </a:solidFill>
+          <a:ln>
+            <a:noFill/>
+          </a:ln>
+        </p:spPr>
+        <p:style>
+          <a:lnRef idx="1">
+            <a:schemeClr val="accent1"/>
+          </a:lnRef>
+          <a:fillRef idx="3">
+            <a:schemeClr val="accent1"/>
+          </a:fillRef>
+          <a:effectRef idx="2">
+            <a:schemeClr val="accent1"/>
+          </a:effectRef>
+          <a:fontRef idx="minor">
+            <a:schemeClr val="lt1"/>
+          </a:fontRef>
+        </p:style>
+        <p:txBody>
+          <a:bodyPr rtlCol="0" anchor="ctr"/>
+          <a:lstStyle/>
+          <a:p>
+            <a:pPr algn="ctr"/>
+          </a:p>
+        </p:txBody>
+      </p:sp>
+      <p:sp>
+        <p:nvSpPr>
+          <p:cNvPr id="26" name="Rectangle 25"/>
+          <p:cNvSpPr/>
+          <p:nvPr/>
+        </p:nvSpPr>
+        <p:spPr>
+          <a:xfrm>
+            <a:off x="640080" y="4791456"/>
+            <a:ext cx="274320" cy="274320"/>
+          </a:xfrm>
+          <a:prstGeom prst="rect">
+            <a:avLst/>
+          </a:prstGeom>
+          <a:solidFill>
+            <a:srgbClr val="FFFFFF"/>
+          </a:solidFill>
+          <a:ln>
+            <a:solidFill>
+              <a:srgbClr val="333333"/>
+            </a:solidFill>
+          </a:ln>
+        </p:spPr>
+        <p:style>
+          <a:lnRef idx="1">
+            <a:schemeClr val="accent1"/>
+          </a:lnRef>
+          <a:fillRef idx="3">
+            <a:schemeClr val="accent1"/>
+          </a:fillRef>
+          <a:effectRef idx="2">
+            <a:schemeClr val="accent1"/>
+          </a:effectRef>
+          <a:fontRef idx="minor">
+            <a:schemeClr val="lt1"/>
+          </a:fontRef>
+        </p:style>
+        <p:txBody>
+          <a:bodyPr rtlCol="0" anchor="ctr"/>
+          <a:lstStyle/>
+          <a:p>
+            <a:pPr algn="ctr"/>
+          </a:p>
+        </p:txBody>
+      </p:sp>
+      <p:sp>
+        <p:nvSpPr>
+          <p:cNvPr id="27" name="Rectangle 26"/>
+          <p:cNvSpPr/>
+          <p:nvPr/>
+        </p:nvSpPr>
+        <p:spPr>
+          <a:xfrm>
+            <a:off x="640080" y="4791456"/>
+            <a:ext cx="73152" cy="274320"/>
+          </a:xfrm>
+          <a:prstGeom prst="rect">
+            <a:avLst/>
+          </a:prstGeom>
+          <a:solidFill>
+            <a:srgbClr val="269CCB"/>
+          </a:solidFill>
+          <a:ln>
+            <a:noFill/>
+          </a:ln>
+        </p:spPr>
+        <p:style>
+          <a:lnRef idx="1">
+            <a:schemeClr val="accent1"/>
+          </a:lnRef>
+          <a:fillRef idx="3">
+            <a:schemeClr val="accent1"/>
+          </a:fillRef>
+          <a:effectRef idx="2">
+            <a:schemeClr val="accent1"/>
+          </a:effectRef>
+          <a:fontRef idx="minor">
+            <a:schemeClr val="lt1"/>
+          </a:fontRef>
+        </p:style>
+        <p:txBody>
+          <a:bodyPr rtlCol="0" anchor="ctr"/>
+          <a:lstStyle/>
+          <a:p>
+            <a:pPr algn="ctr"/>
+          </a:p>
+        </p:txBody>
+      </p:sp>
+      <p:sp>
+        <p:nvSpPr>
+          <p:cNvPr id="28" name="TextBox 27"/>
+          <p:cNvSpPr txBox="1"/>
+          <p:nvPr/>
+        </p:nvSpPr>
+        <p:spPr>
+          <a:xfrm>
+            <a:off x="1097280" y="4736592"/>
+            <a:ext cx="10362895" cy="402336"/>
+          </a:xfrm>
+          <a:prstGeom prst="rect">
+            <a:avLst/>
+          </a:prstGeom>
+          <a:noFill/>
+        </p:spPr>
+        <p:txBody>
+          <a:bodyPr wrap="square" anchor="ctr"/>
+          <a:lstStyle/>
+          <a:p>
+            <a:r>
+              <a:rPr sz="1500" b="0" i="0">
+                <a:solidFill>
+                  <a:srgbClr val="333333"/>
+                </a:solidFill>
+                <a:latin typeface="Calibri"/>
+              </a:rPr>
+              <a:t>□ ¿La cerrada la decidiste por </a:t>
+            </a:r>
+            <a:r>
+              <a:rPr sz="1500" b="1" i="0">
+                <a:solidFill>
+                  <a:srgbClr val="333333"/>
+                </a:solidFill>
+                <a:latin typeface="Calibri"/>
+              </a:rPr>
+              <a:t>dónde se invoca</a:t>
+            </a:r>
+            <a:r>
+              <a:rPr sz="1500" b="0" i="0">
+                <a:solidFill>
+                  <a:srgbClr val="333333"/>
+                </a:solidFill>
+                <a:latin typeface="Calibri"/>
+              </a:rPr>
+              <a:t> cada rutina —dentro de un «SELECT» o como sentencia suelta— y no por el «LANGUAGE» que declara?</a:t>
+            </a:r>
+          </a:p>
+        </p:txBody>
+      </p:sp>
+      <p:sp>
+        <p:nvSpPr>
+          <p:cNvPr id="29" name="Rounded Rectangle 28"/>
+          <p:cNvSpPr/>
+          <p:nvPr/>
+        </p:nvSpPr>
+        <p:spPr>
+          <a:xfrm>
+            <a:off x="457200" y="5321808"/>
+            <a:ext cx="11277295" cy="566928"/>
+          </a:xfrm>
+          <a:prstGeom prst="roundRect">
+            <a:avLst>
+              <a:gd name="adj" fmla="val 12000"/>
+            </a:avLst>
+          </a:prstGeom>
+          <a:solidFill>
+            <a:srgbClr val="F2F2F2"/>
+          </a:solidFill>
+          <a:ln>
+            <a:noFill/>
+          </a:ln>
+        </p:spPr>
+        <p:style>
+          <a:lnRef idx="1">
+            <a:schemeClr val="accent1"/>
+          </a:lnRef>
+          <a:fillRef idx="3">
+            <a:schemeClr val="accent1"/>
+          </a:fillRef>
+          <a:effectRef idx="2">
+            <a:schemeClr val="accent1"/>
+          </a:effectRef>
+          <a:fontRef idx="minor">
+            <a:schemeClr val="lt1"/>
+          </a:fontRef>
+        </p:style>
+        <p:txBody>
+          <a:bodyPr rtlCol="0" anchor="ctr"/>
+          <a:lstStyle/>
+          <a:p>
+            <a:pPr algn="ctr"/>
+          </a:p>
+        </p:txBody>
+      </p:sp>
+      <p:sp>
+        <p:nvSpPr>
+          <p:cNvPr id="30" name="Rectangle 29"/>
+          <p:cNvSpPr/>
+          <p:nvPr/>
+        </p:nvSpPr>
+        <p:spPr>
+          <a:xfrm>
+            <a:off x="640080" y="5468112"/>
+            <a:ext cx="274320" cy="274320"/>
+          </a:xfrm>
+          <a:prstGeom prst="rect">
+            <a:avLst/>
+          </a:prstGeom>
+          <a:solidFill>
+            <a:srgbClr val="FFFFFF"/>
+          </a:solidFill>
+          <a:ln>
+            <a:solidFill>
+              <a:srgbClr val="333333"/>
+            </a:solidFill>
+          </a:ln>
+        </p:spPr>
+        <p:style>
+          <a:lnRef idx="1">
+            <a:schemeClr val="accent1"/>
+          </a:lnRef>
+          <a:fillRef idx="3">
+            <a:schemeClr val="accent1"/>
+          </a:fillRef>
+          <a:effectRef idx="2">
+            <a:schemeClr val="accent1"/>
+          </a:effectRef>
+          <a:fontRef idx="minor">
+            <a:schemeClr val="lt1"/>
+          </a:fontRef>
+        </p:style>
+        <p:txBody>
+          <a:bodyPr rtlCol="0" anchor="ctr"/>
+          <a:lstStyle/>
+          <a:p>
+            <a:pPr algn="ctr"/>
+          </a:p>
+        </p:txBody>
+      </p:sp>
+      <p:sp>
+        <p:nvSpPr>
+          <p:cNvPr id="31" name="Rectangle 30"/>
+          <p:cNvSpPr/>
+          <p:nvPr/>
+        </p:nvSpPr>
+        <p:spPr>
+          <a:xfrm>
+            <a:off x="640080" y="5468112"/>
+            <a:ext cx="73152" cy="274320"/>
+          </a:xfrm>
+          <a:prstGeom prst="rect">
+            <a:avLst/>
+          </a:prstGeom>
+          <a:solidFill>
+            <a:srgbClr val="269CCB"/>
+          </a:solidFill>
+          <a:ln>
+            <a:noFill/>
+          </a:ln>
+        </p:spPr>
+        <p:style>
+          <a:lnRef idx="1">
+            <a:schemeClr val="accent1"/>
+          </a:lnRef>
+          <a:fillRef idx="3">
+            <a:schemeClr val="accent1"/>
+          </a:fillRef>
+          <a:effectRef idx="2">
+            <a:schemeClr val="accent1"/>
+          </a:effectRef>
+          <a:fontRef idx="minor">
+            <a:schemeClr val="lt1"/>
+          </a:fontRef>
+        </p:style>
+        <p:txBody>
+          <a:bodyPr rtlCol="0" anchor="ctr"/>
+          <a:lstStyle/>
+          <a:p>
+            <a:pPr algn="ctr"/>
+          </a:p>
+        </p:txBody>
+      </p:sp>
+      <p:sp>
+        <p:nvSpPr>
+          <p:cNvPr id="32" name="TextBox 31"/>
+          <p:cNvSpPr txBox="1"/>
+          <p:nvPr/>
+        </p:nvSpPr>
+        <p:spPr>
+          <a:xfrm>
+            <a:off x="1097280" y="5413248"/>
+            <a:ext cx="10362895" cy="402336"/>
+          </a:xfrm>
+          <a:prstGeom prst="rect">
+            <a:avLst/>
+          </a:prstGeom>
+          <a:noFill/>
+        </p:spPr>
+        <p:txBody>
+          <a:bodyPr wrap="square" anchor="ctr"/>
+          <a:lstStyle/>
+          <a:p>
+            <a:r>
+              <a:rPr sz="1500" b="0" i="0">
+                <a:solidFill>
+                  <a:srgbClr val="333333"/>
+                </a:solidFill>
+                <a:latin typeface="Calibri"/>
+              </a:rPr>
+              <a:t>□ ¿El contrato trae los 6 bloques de </a:t>
+            </a:r>
+            <a:r>
+              <a:rPr sz="1500" b="1" i="0">
+                <a:solidFill>
+                  <a:srgbClr val="333333"/>
+                </a:solidFill>
+                <a:latin typeface="Calibri"/>
+              </a:rPr>
+              <a:t>cada</a:t>
+            </a:r>
+            <a:r>
+              <a:rPr sz="1500" b="0" i="0">
+                <a:solidFill>
+                  <a:srgbClr val="333333"/>
+                </a:solidFill>
+                <a:latin typeface="Calibri"/>
+              </a:rPr>
+              <a:t> procedimiento y las 7 filas de errores?</a:t>
+            </a:r>
+          </a:p>
+        </p:txBody>
+      </p:sp>
+      <p:sp>
+        <p:nvSpPr>
+          <p:cNvPr id="33" name="TextBox 32"/>
           <p:cNvSpPr txBox="1"/>
           <p:nvPr/>
         </p:nvSpPr>
@@ -8821,109 +8982,21 @@
                 </a:solidFill>
                 <a:latin typeface="Calibri"/>
               </a:rPr>
-              <a:t>Para el PI esta semana</a:t>
-            </a:r>
-          </a:p>
-        </p:txBody>
-      </p:sp>
-      <p:sp>
-        <p:nvSpPr>
-          <p:cNvPr id="5" name="Rounded Rectangle 4"/>
-          <p:cNvSpPr/>
-          <p:nvPr/>
-        </p:nvSpPr>
-        <p:spPr>
-          <a:xfrm>
-            <a:off x="457200" y="1261872"/>
-            <a:ext cx="11277295" cy="1051560"/>
-          </a:xfrm>
-          <a:prstGeom prst="roundRect">
-            <a:avLst>
-              <a:gd name="adj" fmla="val 12000"/>
-            </a:avLst>
-          </a:prstGeom>
-          <a:solidFill>
-            <a:srgbClr val="E8F4FA"/>
-          </a:solidFill>
-          <a:ln>
-            <a:noFill/>
-          </a:ln>
-        </p:spPr>
-        <p:style>
-          <a:lnRef idx="1">
-            <a:schemeClr val="accent1"/>
-          </a:lnRef>
-          <a:fillRef idx="3">
-            <a:schemeClr val="accent1"/>
-          </a:fillRef>
-          <a:effectRef idx="2">
-            <a:schemeClr val="accent1"/>
-          </a:effectRef>
-          <a:fontRef idx="minor">
-            <a:schemeClr val="lt1"/>
-          </a:fontRef>
-        </p:style>
-        <p:txBody>
-          <a:bodyPr rtlCol="0" anchor="ctr"/>
-          <a:lstStyle/>
-          <a:p>
-            <a:pPr algn="ctr"/>
-          </a:p>
-        </p:txBody>
-      </p:sp>
-      <p:sp>
-        <p:nvSpPr>
-          <p:cNvPr id="6" name="Rectangle 5"/>
-          <p:cNvSpPr/>
-          <p:nvPr/>
-        </p:nvSpPr>
-        <p:spPr>
-          <a:xfrm>
-            <a:off x="457200" y="1261872"/>
-            <a:ext cx="128016" cy="1051560"/>
-          </a:xfrm>
-          <a:prstGeom prst="rect">
-            <a:avLst/>
-          </a:prstGeom>
-          <a:solidFill>
-            <a:srgbClr val="269CCB"/>
-          </a:solidFill>
-          <a:ln>
-            <a:noFill/>
-          </a:ln>
-        </p:spPr>
-        <p:style>
-          <a:lnRef idx="1">
-            <a:schemeClr val="accent1"/>
-          </a:lnRef>
-          <a:fillRef idx="3">
-            <a:schemeClr val="accent1"/>
-          </a:fillRef>
-          <a:effectRef idx="2">
-            <a:schemeClr val="accent1"/>
-          </a:effectRef>
-          <a:fontRef idx="minor">
-            <a:schemeClr val="lt1"/>
-          </a:fontRef>
-        </p:style>
-        <p:txBody>
-          <a:bodyPr rtlCol="0" anchor="ctr"/>
-          <a:lstStyle/>
-          <a:p>
-            <a:pPr algn="ctr"/>
-          </a:p>
-        </p:txBody>
-      </p:sp>
-      <p:sp>
-        <p:nvSpPr>
-          <p:cNvPr id="7" name="TextBox 6"/>
+              <a:t>Criterios de exito / entregable</a:t>
+            </a:r>
+          </a:p>
+        </p:txBody>
+      </p:sp>
+      <p:sp>
+        <p:nvSpPr>
+          <p:cNvPr id="5" name="TextBox 4"/>
           <p:cNvSpPr txBox="1"/>
           <p:nvPr/>
         </p:nvSpPr>
         <p:spPr>
           <a:xfrm>
-            <a:off x="777240" y="1399031"/>
-            <a:ext cx="10774375" cy="822959"/>
+            <a:off x="457200" y="1170432"/>
+            <a:ext cx="11277295" cy="5230368"/>
           </a:xfrm>
           <a:prstGeom prst="rect">
             <a:avLst/>
@@ -8936,313 +9009,126 @@
           </a:bodyPr>
           <a:lstStyle/>
           <a:p>
-            <a:r>
-              <a:rPr sz="1200" b="1" i="0">
-                <a:solidFill>
-                  <a:srgbClr val="269CCB"/>
-                </a:solidFill>
-                <a:latin typeface="Calibri"/>
-              </a:rPr>
-              <a:t>Info</a:t>
-            </a:r>
-          </a:p>
-          <a:p>
             <a:pPr>
-              <a:spcBef>
-                <a:spcPts val="400"/>
-              </a:spcBef>
+              <a:spcAft>
+                <a:spcPts val="800"/>
+              </a:spcAft>
             </a:pPr>
             <a:r>
-              <a:rPr sz="1400" b="0" i="0">
-                <a:solidFill>
-                  <a:srgbClr val="333333"/>
-                </a:solidFill>
-                <a:latin typeface="Calibri"/>
-              </a:rPr>
-              <a:t>Hito: &gt;=1 procedimiento de negocio (agendar cita / registrar consulta)</a:t>
-            </a:r>
-          </a:p>
-        </p:txBody>
-      </p:sp>
-      <p:sp>
-        <p:nvSpPr>
-          <p:cNvPr id="8" name="Rounded Rectangle 7"/>
-          <p:cNvSpPr/>
-          <p:nvPr/>
-        </p:nvSpPr>
-        <p:spPr>
-          <a:xfrm>
-            <a:off x="457200" y="2478024"/>
-            <a:ext cx="11277295" cy="1051560"/>
-          </a:xfrm>
-          <a:prstGeom prst="roundRect">
-            <a:avLst>
-              <a:gd name="adj" fmla="val 12000"/>
-            </a:avLst>
-          </a:prstGeom>
-          <a:solidFill>
-            <a:srgbClr val="FFF8E1"/>
-          </a:solidFill>
-          <a:ln>
-            <a:noFill/>
-          </a:ln>
-        </p:spPr>
-        <p:style>
-          <a:lnRef idx="1">
-            <a:schemeClr val="accent1"/>
-          </a:lnRef>
-          <a:fillRef idx="3">
-            <a:schemeClr val="accent1"/>
-          </a:fillRef>
-          <a:effectRef idx="2">
-            <a:schemeClr val="accent1"/>
-          </a:effectRef>
-          <a:fontRef idx="minor">
-            <a:schemeClr val="lt1"/>
-          </a:fontRef>
-        </p:style>
-        <p:txBody>
-          <a:bodyPr rtlCol="0" anchor="ctr"/>
-          <a:lstStyle/>
-          <a:p>
-            <a:pPr algn="ctr"/>
-          </a:p>
-        </p:txBody>
-      </p:sp>
-      <p:sp>
-        <p:nvSpPr>
-          <p:cNvPr id="9" name="Rectangle 8"/>
-          <p:cNvSpPr/>
-          <p:nvPr/>
-        </p:nvSpPr>
-        <p:spPr>
-          <a:xfrm>
-            <a:off x="457200" y="2478024"/>
-            <a:ext cx="128016" cy="1051560"/>
-          </a:xfrm>
-          <a:prstGeom prst="rect">
-            <a:avLst/>
-          </a:prstGeom>
-          <a:solidFill>
-            <a:srgbClr val="FFD000"/>
-          </a:solidFill>
-          <a:ln>
-            <a:noFill/>
-          </a:ln>
-        </p:spPr>
-        <p:style>
-          <a:lnRef idx="1">
-            <a:schemeClr val="accent1"/>
-          </a:lnRef>
-          <a:fillRef idx="3">
-            <a:schemeClr val="accent1"/>
-          </a:fillRef>
-          <a:effectRef idx="2">
-            <a:schemeClr val="accent1"/>
-          </a:effectRef>
-          <a:fontRef idx="minor">
-            <a:schemeClr val="lt1"/>
-          </a:fontRef>
-        </p:style>
-        <p:txBody>
-          <a:bodyPr rtlCol="0" anchor="ctr"/>
-          <a:lstStyle/>
-          <a:p>
-            <a:pPr algn="ctr"/>
-          </a:p>
-        </p:txBody>
-      </p:sp>
-      <p:sp>
-        <p:nvSpPr>
-          <p:cNvPr id="10" name="TextBox 9"/>
-          <p:cNvSpPr txBox="1"/>
-          <p:nvPr/>
-        </p:nvSpPr>
-        <p:spPr>
-          <a:xfrm>
-            <a:off x="777240" y="2615184"/>
-            <a:ext cx="10774375" cy="822959"/>
-          </a:xfrm>
-          <a:prstGeom prst="rect">
-            <a:avLst/>
-          </a:prstGeom>
-          <a:noFill/>
-        </p:spPr>
-        <p:txBody>
-          <a:bodyPr wrap="square">
-            <a:spAutoFit/>
-          </a:bodyPr>
-          <a:lstStyle/>
-          <a:p>
-            <a:r>
-              <a:rPr sz="1200" b="1" i="0">
-                <a:solidFill>
-                  <a:srgbClr val="FFD000"/>
-                </a:solidFill>
-                <a:latin typeface="Calibri"/>
-              </a:rPr>
-              <a:t>Aclaración</a:t>
+              <a:rPr sz="2000" b="0" i="0">
+                <a:solidFill>
+                  <a:srgbClr val="333333"/>
+                </a:solidFill>
+                <a:latin typeface="Calibri"/>
+              </a:rPr>
+              <a:t>–   </a:t>
+            </a:r>
+            <a:r>
+              <a:rPr sz="2000" b="1" i="0">
+                <a:solidFill>
+                  <a:srgbClr val="333333"/>
+                </a:solidFill>
+                <a:latin typeface="Calibri"/>
+              </a:rPr>
+              <a:t>Entregable:</a:t>
+            </a:r>
+            <a:r>
+              <a:rPr sz="2000" b="0" i="0">
+                <a:solidFill>
+                  <a:srgbClr val="333333"/>
+                </a:solidFill>
+                <a:latin typeface="Calibri"/>
+              </a:rPr>
+              <a:t> 2 procedimientos en PL/pgSQL corriendo en ExamLab + bateria de pruebas con su tabla resultado_prueba + contrato del proc (6 bloques)</a:t>
             </a:r>
           </a:p>
           <a:p>
             <a:pPr>
-              <a:spcBef>
-                <a:spcPts val="400"/>
-              </a:spcBef>
+              <a:spcAft>
+                <a:spcPts val="800"/>
+              </a:spcAft>
             </a:pPr>
             <a:r>
-              <a:rPr sz="1400" b="0" i="0">
-                <a:solidFill>
-                  <a:srgbClr val="333333"/>
-                </a:solidFill>
-                <a:latin typeface="Calibri"/>
-              </a:rPr>
-              <a:t>Enunciado completo: Clases/Proyecto Integrador/ (VetCare DB).</a:t>
-            </a:r>
-          </a:p>
-        </p:txBody>
-      </p:sp>
-      <p:sp>
-        <p:nvSpPr>
-          <p:cNvPr id="11" name="Rounded Rectangle 10"/>
-          <p:cNvSpPr/>
-          <p:nvPr/>
-        </p:nvSpPr>
-        <p:spPr>
-          <a:xfrm>
-            <a:off x="457200" y="3694176"/>
-            <a:ext cx="11277295" cy="1051560"/>
-          </a:xfrm>
-          <a:prstGeom prst="roundRect">
-            <a:avLst>
-              <a:gd name="adj" fmla="val 12000"/>
-            </a:avLst>
-          </a:prstGeom>
-          <a:solidFill>
-            <a:srgbClr val="FBE4E4"/>
-          </a:solidFill>
-          <a:ln>
-            <a:noFill/>
-          </a:ln>
-        </p:spPr>
-        <p:style>
-          <a:lnRef idx="1">
-            <a:schemeClr val="accent1"/>
-          </a:lnRef>
-          <a:fillRef idx="3">
-            <a:schemeClr val="accent1"/>
-          </a:fillRef>
-          <a:effectRef idx="2">
-            <a:schemeClr val="accent1"/>
-          </a:effectRef>
-          <a:fontRef idx="minor">
-            <a:schemeClr val="lt1"/>
-          </a:fontRef>
-        </p:style>
-        <p:txBody>
-          <a:bodyPr rtlCol="0" anchor="ctr"/>
-          <a:lstStyle/>
-          <a:p>
-            <a:pPr algn="ctr"/>
-          </a:p>
-        </p:txBody>
-      </p:sp>
-      <p:sp>
-        <p:nvSpPr>
-          <p:cNvPr id="12" name="Rectangle 11"/>
-          <p:cNvSpPr/>
-          <p:nvPr/>
-        </p:nvSpPr>
-        <p:spPr>
-          <a:xfrm>
-            <a:off x="457200" y="3694176"/>
-            <a:ext cx="128016" cy="1051560"/>
-          </a:xfrm>
-          <a:prstGeom prst="rect">
-            <a:avLst/>
-          </a:prstGeom>
-          <a:solidFill>
-            <a:srgbClr val="A02030"/>
-          </a:solidFill>
-          <a:ln>
-            <a:noFill/>
-          </a:ln>
-        </p:spPr>
-        <p:style>
-          <a:lnRef idx="1">
-            <a:schemeClr val="accent1"/>
-          </a:lnRef>
-          <a:fillRef idx="3">
-            <a:schemeClr val="accent1"/>
-          </a:fillRef>
-          <a:effectRef idx="2">
-            <a:schemeClr val="accent1"/>
-          </a:effectRef>
-          <a:fontRef idx="minor">
-            <a:schemeClr val="lt1"/>
-          </a:fontRef>
-        </p:style>
-        <p:txBody>
-          <a:bodyPr rtlCol="0" anchor="ctr"/>
-          <a:lstStyle/>
-          <a:p>
-            <a:pPr algn="ctr"/>
-          </a:p>
-        </p:txBody>
-      </p:sp>
-      <p:sp>
-        <p:nvSpPr>
-          <p:cNvPr id="13" name="TextBox 12"/>
-          <p:cNvSpPr txBox="1"/>
-          <p:nvPr/>
-        </p:nvSpPr>
-        <p:spPr>
-          <a:xfrm>
-            <a:off x="777240" y="3831336"/>
-            <a:ext cx="10774375" cy="822959"/>
-          </a:xfrm>
-          <a:prstGeom prst="rect">
-            <a:avLst/>
-          </a:prstGeom>
-          <a:noFill/>
-        </p:spPr>
-        <p:txBody>
-          <a:bodyPr wrap="square">
-            <a:spAutoFit/>
-          </a:bodyPr>
-          <a:lstStyle/>
-          <a:p>
-            <a:r>
-              <a:rPr sz="1200" b="1" i="0">
-                <a:solidFill>
-                  <a:srgbClr val="A02030"/>
-                </a:solidFill>
-                <a:latin typeface="Calibri"/>
-              </a:rPr>
-              <a:t>Atención</a:t>
+              <a:rPr sz="2000" b="0" i="0">
+                <a:solidFill>
+                  <a:srgbClr val="333333"/>
+                </a:solidFill>
+                <a:latin typeface="Calibri"/>
+              </a:rPr>
+              <a:t>–   Evidencia: el SQL y su salida quedan guardados en cada pregunta de ExamLab.</a:t>
             </a:r>
           </a:p>
           <a:p>
             <a:pPr>
-              <a:spcBef>
-                <a:spcPts val="400"/>
-              </a:spcBef>
+              <a:spcAft>
+                <a:spcPts val="800"/>
+              </a:spcAft>
             </a:pPr>
             <a:r>
-              <a:rPr sz="1400" b="0" i="0">
-                <a:solidFill>
-                  <a:srgbClr val="333333"/>
-                </a:solidFill>
-                <a:latin typeface="Calibri"/>
-              </a:rPr>
-              <a:t>Taller de la semana en ExamLab (https://uniaj.examlab.workers.dev/): domingo 23:59 (regla del Acuerdo) cuando aplique.</a:t>
-            </a:r>
-          </a:p>
-        </p:txBody>
-      </p:sp>
-      <p:sp>
-        <p:nvSpPr>
-          <p:cNvPr id="14" name="TextBox 13"/>
+              <a:rPr sz="2000" b="0" i="0">
+                <a:solidFill>
+                  <a:srgbClr val="333333"/>
+                </a:solidFill>
+                <a:latin typeface="Calibri"/>
+              </a:rPr>
+              <a:t>–   Conserva copia en tu carpeta del PI (los .sql que pide el entregable).</a:t>
+            </a:r>
+          </a:p>
+          <a:p>
+            <a:pPr>
+              <a:spcAft>
+                <a:spcPts val="800"/>
+              </a:spcAft>
+            </a:pPr>
+            <a:r>
+              <a:rPr sz="2000" b="0" i="0">
+                <a:solidFill>
+                  <a:srgbClr val="333333"/>
+                </a:solidFill>
+                <a:latin typeface="Calibri"/>
+              </a:rPr>
+              <a:t>–   Actualizar checklist PI (que criterio de rubrica avanzo).</a:t>
+            </a:r>
+          </a:p>
+          <a:p>
+            <a:pPr>
+              <a:spcAft>
+                <a:spcPts val="800"/>
+              </a:spcAft>
+            </a:pPr>
+            <a:r>
+              <a:rPr sz="2000" b="0" i="0">
+                <a:solidFill>
+                  <a:srgbClr val="333333"/>
+                </a:solidFill>
+                <a:latin typeface="Calibri"/>
+              </a:rPr>
+              <a:t>–   </a:t>
+            </a:r>
+            <a:r>
+              <a:rPr sz="2000" b="1" i="0">
+                <a:solidFill>
+                  <a:srgbClr val="333333"/>
+                </a:solidFill>
+                <a:latin typeface="Calibri"/>
+              </a:rPr>
+              <a:t>Entrega en ExamLab</a:t>
+            </a:r>
+            <a:r>
+              <a:rPr sz="2000" b="0" i="0">
+                <a:solidFill>
+                  <a:srgbClr val="333333"/>
+                </a:solidFill>
+                <a:latin typeface="Calibri"/>
+              </a:rPr>
+              <a:t> (https://uniaj.examlab.workers.dev/) — domingo 23:59 cuando aplique taller.</a:t>
+            </a:r>
+          </a:p>
+        </p:txBody>
+      </p:sp>
+      <p:sp>
+        <p:nvSpPr>
+          <p:cNvPr id="6" name="TextBox 5"/>
           <p:cNvSpPr txBox="1"/>
           <p:nvPr/>
         </p:nvSpPr>
@@ -9310,7 +9196,172 @@
         <p:spPr>
           <a:xfrm>
             <a:off x="0" y="0"/>
-            <a:ext cx="12191695" cy="164592"/>
+            <a:ext cx="12191695" cy="960120"/>
+          </a:xfrm>
+          <a:prstGeom prst="rect">
+            <a:avLst/>
+          </a:prstGeom>
+          <a:solidFill>
+            <a:srgbClr val="095292"/>
+          </a:solidFill>
+          <a:ln>
+            <a:noFill/>
+          </a:ln>
+        </p:spPr>
+        <p:style>
+          <a:lnRef idx="1">
+            <a:schemeClr val="accent1"/>
+          </a:lnRef>
+          <a:fillRef idx="3">
+            <a:schemeClr val="accent1"/>
+          </a:fillRef>
+          <a:effectRef idx="2">
+            <a:schemeClr val="accent1"/>
+          </a:effectRef>
+          <a:fontRef idx="minor">
+            <a:schemeClr val="lt1"/>
+          </a:fontRef>
+        </p:style>
+        <p:txBody>
+          <a:bodyPr rtlCol="0" anchor="ctr"/>
+          <a:lstStyle/>
+          <a:p>
+            <a:pPr algn="ctr"/>
+          </a:p>
+        </p:txBody>
+      </p:sp>
+      <p:sp>
+        <p:nvSpPr>
+          <p:cNvPr id="3" name="Rectangle 2"/>
+          <p:cNvSpPr/>
+          <p:nvPr/>
+        </p:nvSpPr>
+        <p:spPr>
+          <a:xfrm>
+            <a:off x="0" y="960120"/>
+            <a:ext cx="12191695" cy="41148"/>
+          </a:xfrm>
+          <a:prstGeom prst="rect">
+            <a:avLst/>
+          </a:prstGeom>
+          <a:solidFill>
+            <a:srgbClr val="FFD000"/>
+          </a:solidFill>
+          <a:ln>
+            <a:noFill/>
+          </a:ln>
+        </p:spPr>
+        <p:style>
+          <a:lnRef idx="1">
+            <a:schemeClr val="accent1"/>
+          </a:lnRef>
+          <a:fillRef idx="3">
+            <a:schemeClr val="accent1"/>
+          </a:fillRef>
+          <a:effectRef idx="2">
+            <a:schemeClr val="accent1"/>
+          </a:effectRef>
+          <a:fontRef idx="minor">
+            <a:schemeClr val="lt1"/>
+          </a:fontRef>
+        </p:style>
+        <p:txBody>
+          <a:bodyPr rtlCol="0" anchor="ctr"/>
+          <a:lstStyle/>
+          <a:p>
+            <a:pPr algn="ctr"/>
+          </a:p>
+        </p:txBody>
+      </p:sp>
+      <p:sp>
+        <p:nvSpPr>
+          <p:cNvPr id="4" name="TextBox 3"/>
+          <p:cNvSpPr txBox="1"/>
+          <p:nvPr/>
+        </p:nvSpPr>
+        <p:spPr>
+          <a:xfrm>
+            <a:off x="457200" y="164592"/>
+            <a:ext cx="11277295" cy="502920"/>
+          </a:xfrm>
+          <a:prstGeom prst="rect">
+            <a:avLst/>
+          </a:prstGeom>
+          <a:noFill/>
+        </p:spPr>
+        <p:txBody>
+          <a:bodyPr wrap="square">
+            <a:spAutoFit/>
+          </a:bodyPr>
+          <a:lstStyle/>
+          <a:p>
+            <a:r>
+              <a:rPr sz="2600" b="1" i="0">
+                <a:solidFill>
+                  <a:srgbClr val="FFFFFF"/>
+                </a:solidFill>
+                <a:latin typeface="Calibri"/>
+              </a:rPr>
+              <a:t>Para el PI esta semana</a:t>
+            </a:r>
+          </a:p>
+        </p:txBody>
+      </p:sp>
+      <p:sp>
+        <p:nvSpPr>
+          <p:cNvPr id="5" name="Rounded Rectangle 4"/>
+          <p:cNvSpPr/>
+          <p:nvPr/>
+        </p:nvSpPr>
+        <p:spPr>
+          <a:xfrm>
+            <a:off x="457200" y="1261872"/>
+            <a:ext cx="11277295" cy="1051560"/>
+          </a:xfrm>
+          <a:prstGeom prst="roundRect">
+            <a:avLst>
+              <a:gd name="adj" fmla="val 12000"/>
+            </a:avLst>
+          </a:prstGeom>
+          <a:solidFill>
+            <a:srgbClr val="E8F4FA"/>
+          </a:solidFill>
+          <a:ln>
+            <a:noFill/>
+          </a:ln>
+        </p:spPr>
+        <p:style>
+          <a:lnRef idx="1">
+            <a:schemeClr val="accent1"/>
+          </a:lnRef>
+          <a:fillRef idx="3">
+            <a:schemeClr val="accent1"/>
+          </a:fillRef>
+          <a:effectRef idx="2">
+            <a:schemeClr val="accent1"/>
+          </a:effectRef>
+          <a:fontRef idx="minor">
+            <a:schemeClr val="lt1"/>
+          </a:fontRef>
+        </p:style>
+        <p:txBody>
+          <a:bodyPr rtlCol="0" anchor="ctr"/>
+          <a:lstStyle/>
+          <a:p>
+            <a:pPr algn="ctr"/>
+          </a:p>
+        </p:txBody>
+      </p:sp>
+      <p:sp>
+        <p:nvSpPr>
+          <p:cNvPr id="6" name="Rectangle 5"/>
+          <p:cNvSpPr/>
+          <p:nvPr/>
+        </p:nvSpPr>
+        <p:spPr>
+          <a:xfrm>
+            <a:off x="457200" y="1261872"/>
+            <a:ext cx="128016" cy="1051560"/>
           </a:xfrm>
           <a:prstGeom prst="rect">
             <a:avLst/>
@@ -9344,73 +9395,16 @@
           </a:p>
         </p:txBody>
       </p:sp>
-      <p:pic>
-        <p:nvPicPr>
-          <p:cNvPr id="3" name="Picture 2" descr="logo_uniajc_color.png"/>
-          <p:cNvPicPr>
-            <a:picLocks noChangeAspect="1"/>
-          </p:cNvPicPr>
-          <p:nvPr/>
-        </p:nvPicPr>
-        <p:blipFill>
-          <a:blip r:embed="rId2"/>
-          <a:stretch>
-            <a:fillRect/>
-          </a:stretch>
-        </p:blipFill>
-        <p:spPr>
-          <a:xfrm>
-            <a:off x="10271455" y="5998464"/>
-            <a:ext cx="1463040" cy="643233"/>
-          </a:xfrm>
-          <a:prstGeom prst="rect">
-            <a:avLst/>
-          </a:prstGeom>
-        </p:spPr>
-      </p:pic>
-      <p:sp>
-        <p:nvSpPr>
-          <p:cNvPr id="4" name="TextBox 3"/>
+      <p:sp>
+        <p:nvSpPr>
+          <p:cNvPr id="7" name="TextBox 6"/>
           <p:cNvSpPr txBox="1"/>
           <p:nvPr/>
         </p:nvSpPr>
         <p:spPr>
           <a:xfrm>
-            <a:off x="457200" y="1737360"/>
-            <a:ext cx="11277295" cy="1097280"/>
-          </a:xfrm>
-          <a:prstGeom prst="rect">
-            <a:avLst/>
-          </a:prstGeom>
-          <a:noFill/>
-        </p:spPr>
-        <p:txBody>
-          <a:bodyPr wrap="square" anchor="ctr"/>
-          <a:lstStyle/>
-          <a:p>
-            <a:pPr algn="ctr"/>
-            <a:r>
-              <a:rPr sz="3400" b="1" i="0">
-                <a:solidFill>
-                  <a:srgbClr val="095292"/>
-                </a:solidFill>
-                <a:latin typeface="Calibri"/>
-              </a:rPr>
-              <a:t>Clase 3 · VetCare avanza</a:t>
-            </a:r>
-          </a:p>
-        </p:txBody>
-      </p:sp>
-      <p:sp>
-        <p:nvSpPr>
-          <p:cNvPr id="5" name="TextBox 4"/>
-          <p:cNvSpPr txBox="1"/>
-          <p:nvPr/>
-        </p:nvSpPr>
-        <p:spPr>
-          <a:xfrm>
-            <a:off x="457200" y="3017520"/>
-            <a:ext cx="11277295" cy="1645920"/>
+            <a:off x="777240" y="1399031"/>
+            <a:ext cx="10774375" cy="822959"/>
           </a:xfrm>
           <a:prstGeom prst="rect">
             <a:avLst/>
@@ -9423,65 +9417,132 @@
           </a:bodyPr>
           <a:lstStyle/>
           <a:p>
-            <a:pPr algn="ctr">
-              <a:spcAft>
-                <a:spcPts val="600"/>
-              </a:spcAft>
+            <a:r>
+              <a:rPr sz="1200" b="1" i="0">
+                <a:solidFill>
+                  <a:srgbClr val="269CCB"/>
+                </a:solidFill>
+                <a:latin typeface="Calibri"/>
+              </a:rPr>
+              <a:t>Info</a:t>
+            </a:r>
+          </a:p>
+          <a:p>
+            <a:pPr>
+              <a:spcBef>
+                <a:spcPts val="400"/>
+              </a:spcBef>
             </a:pPr>
             <a:r>
-              <a:rPr sz="1600" b="0" i="0">
-                <a:solidFill>
-                  <a:srgbClr val="333333"/>
-                </a:solidFill>
-                <a:latin typeface="Calibri"/>
-              </a:rPr>
-              <a:t>&gt;=1 procedimiento de negocio (agendar cita / registrar consulta)</a:t>
-            </a:r>
-          </a:p>
-          <a:p>
-            <a:pPr algn="ctr">
-              <a:spcAft>
-                <a:spcPts val="600"/>
-              </a:spcAft>
-            </a:pPr>
-            <a:r>
-              <a:rPr sz="1600" b="0" i="0">
-                <a:solidFill>
-                  <a:srgbClr val="333333"/>
-                </a:solidFill>
-                <a:latin typeface="Calibri"/>
-              </a:rPr>
-              <a:t>Entregable: 2 procedimientos en PL/pgSQL corriendo en ExamLab + bateria de pruebas con su tabla resultado_prueba + contrato del proc (6 bloques)</a:t>
-            </a:r>
-          </a:p>
-          <a:p>
-            <a:pPr algn="ctr">
-              <a:spcAft>
-                <a:spcPts val="600"/>
-              </a:spcAft>
-            </a:pPr>
-            <a:r>
-              <a:rPr sz="1600" b="0" i="0">
-                <a:solidFill>
-                  <a:srgbClr val="333333"/>
-                </a:solidFill>
-                <a:latin typeface="Calibri"/>
-              </a:rPr>
-              <a:t>Siguiente clase: continuar el hilo del PI segun plan</a:t>
-            </a:r>
-          </a:p>
-        </p:txBody>
-      </p:sp>
-      <p:sp>
-        <p:nvSpPr>
-          <p:cNvPr id="6" name="TextBox 5"/>
+              <a:rPr sz="1400" b="0" i="0">
+                <a:solidFill>
+                  <a:srgbClr val="333333"/>
+                </a:solidFill>
+                <a:latin typeface="Calibri"/>
+              </a:rPr>
+              <a:t>Hito: &gt;=1 procedimiento de negocio (agendar cita / registrar consulta)</a:t>
+            </a:r>
+          </a:p>
+        </p:txBody>
+      </p:sp>
+      <p:sp>
+        <p:nvSpPr>
+          <p:cNvPr id="8" name="Rounded Rectangle 7"/>
+          <p:cNvSpPr/>
+          <p:nvPr/>
+        </p:nvSpPr>
+        <p:spPr>
+          <a:xfrm>
+            <a:off x="457200" y="2478024"/>
+            <a:ext cx="11277295" cy="1051560"/>
+          </a:xfrm>
+          <a:prstGeom prst="roundRect">
+            <a:avLst>
+              <a:gd name="adj" fmla="val 12000"/>
+            </a:avLst>
+          </a:prstGeom>
+          <a:solidFill>
+            <a:srgbClr val="FFF8E1"/>
+          </a:solidFill>
+          <a:ln>
+            <a:noFill/>
+          </a:ln>
+        </p:spPr>
+        <p:style>
+          <a:lnRef idx="1">
+            <a:schemeClr val="accent1"/>
+          </a:lnRef>
+          <a:fillRef idx="3">
+            <a:schemeClr val="accent1"/>
+          </a:fillRef>
+          <a:effectRef idx="2">
+            <a:schemeClr val="accent1"/>
+          </a:effectRef>
+          <a:fontRef idx="minor">
+            <a:schemeClr val="lt1"/>
+          </a:fontRef>
+        </p:style>
+        <p:txBody>
+          <a:bodyPr rtlCol="0" anchor="ctr"/>
+          <a:lstStyle/>
+          <a:p>
+            <a:pPr algn="ctr"/>
+          </a:p>
+        </p:txBody>
+      </p:sp>
+      <p:sp>
+        <p:nvSpPr>
+          <p:cNvPr id="9" name="Rectangle 8"/>
+          <p:cNvSpPr/>
+          <p:nvPr/>
+        </p:nvSpPr>
+        <p:spPr>
+          <a:xfrm>
+            <a:off x="457200" y="2478024"/>
+            <a:ext cx="128016" cy="1051560"/>
+          </a:xfrm>
+          <a:prstGeom prst="rect">
+            <a:avLst/>
+          </a:prstGeom>
+          <a:solidFill>
+            <a:srgbClr val="FFD000"/>
+          </a:solidFill>
+          <a:ln>
+            <a:noFill/>
+          </a:ln>
+        </p:spPr>
+        <p:style>
+          <a:lnRef idx="1">
+            <a:schemeClr val="accent1"/>
+          </a:lnRef>
+          <a:fillRef idx="3">
+            <a:schemeClr val="accent1"/>
+          </a:fillRef>
+          <a:effectRef idx="2">
+            <a:schemeClr val="accent1"/>
+          </a:effectRef>
+          <a:fontRef idx="minor">
+            <a:schemeClr val="lt1"/>
+          </a:fontRef>
+        </p:style>
+        <p:txBody>
+          <a:bodyPr rtlCol="0" anchor="ctr"/>
+          <a:lstStyle/>
+          <a:p>
+            <a:pPr algn="ctr"/>
+          </a:p>
+        </p:txBody>
+      </p:sp>
+      <p:sp>
+        <p:nvSpPr>
+          <p:cNvPr id="10" name="TextBox 9"/>
           <p:cNvSpPr txBox="1"/>
           <p:nvPr/>
         </p:nvSpPr>
         <p:spPr>
           <a:xfrm>
-            <a:off x="457200" y="4754880"/>
-            <a:ext cx="11277295" cy="640080"/>
+            <a:off x="777240" y="2615184"/>
+            <a:ext cx="10774375" cy="822959"/>
           </a:xfrm>
           <a:prstGeom prst="rect">
             <a:avLst/>
@@ -9494,15 +9555,203 @@
           </a:bodyPr>
           <a:lstStyle/>
           <a:p>
+            <a:r>
+              <a:rPr sz="1200" b="1" i="0">
+                <a:solidFill>
+                  <a:srgbClr val="FFD000"/>
+                </a:solidFill>
+                <a:latin typeface="Calibri"/>
+              </a:rPr>
+              <a:t>Aclaración</a:t>
+            </a:r>
+          </a:p>
+          <a:p>
+            <a:pPr>
+              <a:spcBef>
+                <a:spcPts val="400"/>
+              </a:spcBef>
+            </a:pPr>
+            <a:r>
+              <a:rPr sz="1400" b="0" i="0">
+                <a:solidFill>
+                  <a:srgbClr val="333333"/>
+                </a:solidFill>
+                <a:latin typeface="Calibri"/>
+              </a:rPr>
+              <a:t>Enunciado completo: Clases/Proyecto Integrador/ (VetCare DB).</a:t>
+            </a:r>
+          </a:p>
+        </p:txBody>
+      </p:sp>
+      <p:sp>
+        <p:nvSpPr>
+          <p:cNvPr id="11" name="Rounded Rectangle 10"/>
+          <p:cNvSpPr/>
+          <p:nvPr/>
+        </p:nvSpPr>
+        <p:spPr>
+          <a:xfrm>
+            <a:off x="457200" y="3694176"/>
+            <a:ext cx="11277295" cy="1051560"/>
+          </a:xfrm>
+          <a:prstGeom prst="roundRect">
+            <a:avLst>
+              <a:gd name="adj" fmla="val 12000"/>
+            </a:avLst>
+          </a:prstGeom>
+          <a:solidFill>
+            <a:srgbClr val="FBE4E4"/>
+          </a:solidFill>
+          <a:ln>
+            <a:noFill/>
+          </a:ln>
+        </p:spPr>
+        <p:style>
+          <a:lnRef idx="1">
+            <a:schemeClr val="accent1"/>
+          </a:lnRef>
+          <a:fillRef idx="3">
+            <a:schemeClr val="accent1"/>
+          </a:fillRef>
+          <a:effectRef idx="2">
+            <a:schemeClr val="accent1"/>
+          </a:effectRef>
+          <a:fontRef idx="minor">
+            <a:schemeClr val="lt1"/>
+          </a:fontRef>
+        </p:style>
+        <p:txBody>
+          <a:bodyPr rtlCol="0" anchor="ctr"/>
+          <a:lstStyle/>
+          <a:p>
             <a:pPr algn="ctr"/>
-            <a:r>
-              <a:rPr sz="2000" b="1" i="0">
-                <a:solidFill>
-                  <a:srgbClr val="269CCB"/>
-                </a:solidFill>
-                <a:latin typeface="Calibri"/>
-              </a:rPr>
-              <a:t>Teoria breve · practica = PI</a:t>
+          </a:p>
+        </p:txBody>
+      </p:sp>
+      <p:sp>
+        <p:nvSpPr>
+          <p:cNvPr id="12" name="Rectangle 11"/>
+          <p:cNvSpPr/>
+          <p:nvPr/>
+        </p:nvSpPr>
+        <p:spPr>
+          <a:xfrm>
+            <a:off x="457200" y="3694176"/>
+            <a:ext cx="128016" cy="1051560"/>
+          </a:xfrm>
+          <a:prstGeom prst="rect">
+            <a:avLst/>
+          </a:prstGeom>
+          <a:solidFill>
+            <a:srgbClr val="A02030"/>
+          </a:solidFill>
+          <a:ln>
+            <a:noFill/>
+          </a:ln>
+        </p:spPr>
+        <p:style>
+          <a:lnRef idx="1">
+            <a:schemeClr val="accent1"/>
+          </a:lnRef>
+          <a:fillRef idx="3">
+            <a:schemeClr val="accent1"/>
+          </a:fillRef>
+          <a:effectRef idx="2">
+            <a:schemeClr val="accent1"/>
+          </a:effectRef>
+          <a:fontRef idx="minor">
+            <a:schemeClr val="lt1"/>
+          </a:fontRef>
+        </p:style>
+        <p:txBody>
+          <a:bodyPr rtlCol="0" anchor="ctr"/>
+          <a:lstStyle/>
+          <a:p>
+            <a:pPr algn="ctr"/>
+          </a:p>
+        </p:txBody>
+      </p:sp>
+      <p:sp>
+        <p:nvSpPr>
+          <p:cNvPr id="13" name="TextBox 12"/>
+          <p:cNvSpPr txBox="1"/>
+          <p:nvPr/>
+        </p:nvSpPr>
+        <p:spPr>
+          <a:xfrm>
+            <a:off x="777240" y="3831336"/>
+            <a:ext cx="10774375" cy="822959"/>
+          </a:xfrm>
+          <a:prstGeom prst="rect">
+            <a:avLst/>
+          </a:prstGeom>
+          <a:noFill/>
+        </p:spPr>
+        <p:txBody>
+          <a:bodyPr wrap="square">
+            <a:spAutoFit/>
+          </a:bodyPr>
+          <a:lstStyle/>
+          <a:p>
+            <a:r>
+              <a:rPr sz="1200" b="1" i="0">
+                <a:solidFill>
+                  <a:srgbClr val="A02030"/>
+                </a:solidFill>
+                <a:latin typeface="Calibri"/>
+              </a:rPr>
+              <a:t>Atención</a:t>
+            </a:r>
+          </a:p>
+          <a:p>
+            <a:pPr>
+              <a:spcBef>
+                <a:spcPts val="400"/>
+              </a:spcBef>
+            </a:pPr>
+            <a:r>
+              <a:rPr sz="1400" b="0" i="0">
+                <a:solidFill>
+                  <a:srgbClr val="333333"/>
+                </a:solidFill>
+                <a:latin typeface="Calibri"/>
+              </a:rPr>
+              <a:t>Taller de la semana en ExamLab (https://uniaj.examlab.workers.dev/): domingo 23:59 (regla del Acuerdo) cuando aplique.</a:t>
+            </a:r>
+          </a:p>
+        </p:txBody>
+      </p:sp>
+      <p:sp>
+        <p:nvSpPr>
+          <p:cNvPr id="14" name="TextBox 13"/>
+          <p:cNvSpPr txBox="1"/>
+          <p:nvPr/>
+        </p:nvSpPr>
+        <p:spPr>
+          <a:xfrm>
+            <a:off x="11185855" y="6473952"/>
+            <a:ext cx="640080" cy="274320"/>
+          </a:xfrm>
+          <a:prstGeom prst="rect">
+            <a:avLst/>
+          </a:prstGeom>
+          <a:noFill/>
+        </p:spPr>
+        <p:txBody>
+          <a:bodyPr wrap="square">
+            <a:spAutoFit/>
+          </a:bodyPr>
+          <a:lstStyle/>
+          <a:p>
+            <a:pPr algn="r"/>
+            <a:r>
+              <a:rPr sz="1100" b="0" i="0">
+                <a:solidFill>
+                  <a:srgbClr val="666666"/>
+                </a:solidFill>
+                <a:latin typeface="Calibri"/>
+              </a:rPr>
+              <a:t>19</a:t>
             </a:r>
           </a:p>
         </p:txBody>
@@ -9681,7 +9930,7 @@
               </a:spcAft>
             </a:pPr>
             <a:r>
-              <a:rPr sz="1600" b="0" i="0">
+              <a:rPr sz="2000" b="0" i="0">
                 <a:solidFill>
                   <a:srgbClr val="333333"/>
                 </a:solidFill>
@@ -9690,7 +9939,7 @@
               <a:t>–   </a:t>
             </a:r>
             <a:r>
-              <a:rPr sz="1600" b="1" i="0">
+              <a:rPr sz="2000" b="1" i="0">
                 <a:solidFill>
                   <a:srgbClr val="333333"/>
                 </a:solidFill>
@@ -9699,7 +9948,7 @@
               <a:t>Hoy avanzamos el PI en:</a:t>
             </a:r>
             <a:r>
-              <a:rPr sz="1600" b="0" i="0">
+              <a:rPr sz="2000" b="0" i="0">
                 <a:solidFill>
                   <a:srgbClr val="333333"/>
                 </a:solidFill>
@@ -9715,7 +9964,7 @@
               </a:spcAft>
             </a:pPr>
             <a:r>
-              <a:rPr sz="1600" b="0" i="0">
+              <a:rPr sz="2000" b="0" i="0">
                 <a:solidFill>
                   <a:srgbClr val="333333"/>
                 </a:solidFill>
@@ -9724,7 +9973,7 @@
               <a:t>–   Herramienta: </a:t>
             </a:r>
             <a:r>
-              <a:rPr sz="1600" b="1" i="0">
+              <a:rPr sz="2000" b="1" i="0">
                 <a:solidFill>
                   <a:srgbClr val="333333"/>
                 </a:solidFill>
@@ -9733,7 +9982,7 @@
               <a:t>ExamLab (PostgreSQL) + Google Docs</a:t>
             </a:r>
             <a:r>
-              <a:rPr sz="1600" b="0" i="0">
+              <a:rPr sz="2000" b="0" i="0">
                 <a:solidFill>
                   <a:srgbClr val="333333"/>
                 </a:solidFill>
@@ -9742,7 +9991,7 @@
               <a:t> · Bloque </a:t>
             </a:r>
             <a:r>
-              <a:rPr sz="1600" b="1" i="0">
+              <a:rPr sz="2000" b="1" i="0">
                 <a:solidFill>
                   <a:srgbClr val="333333"/>
                 </a:solidFill>
@@ -9751,7 +10000,7 @@
               <a:t>120 min</a:t>
             </a:r>
             <a:r>
-              <a:rPr sz="1600" b="0" i="0">
+              <a:rPr sz="2000" b="0" i="0">
                 <a:solidFill>
                   <a:srgbClr val="333333"/>
                 </a:solidFill>
@@ -9767,7 +10016,7 @@
               </a:spcAft>
             </a:pPr>
             <a:r>
-              <a:rPr sz="1600" b="0" i="0">
+              <a:rPr sz="2000" b="0" i="0">
                 <a:solidFill>
                   <a:srgbClr val="333333"/>
                 </a:solidFill>
@@ -9776,7 +10025,7 @@
               <a:t>–   </a:t>
             </a:r>
             <a:r>
-              <a:rPr sz="1600" b="1" i="0">
+              <a:rPr sz="2000" b="1" i="0">
                 <a:solidFill>
                   <a:srgbClr val="333333"/>
                 </a:solidFill>
@@ -9785,7 +10034,7 @@
               <a:t>Entregable de hoy:</a:t>
             </a:r>
             <a:r>
-              <a:rPr sz="1600" b="0" i="0">
+              <a:rPr sz="2000" b="0" i="0">
                 <a:solidFill>
                   <a:srgbClr val="333333"/>
                 </a:solidFill>
@@ -9801,7 +10050,7 @@
               </a:spcAft>
             </a:pPr>
             <a:r>
-              <a:rPr sz="1600" b="0" i="0">
+              <a:rPr sz="2000" b="0" i="0">
                 <a:solidFill>
                   <a:srgbClr val="333333"/>
                 </a:solidFill>
@@ -9817,7 +10066,7 @@
               </a:spcAft>
             </a:pPr>
             <a:r>
-              <a:rPr sz="1600" b="0" i="0">
+              <a:rPr sz="2000" b="0" i="0">
                 <a:solidFill>
                   <a:srgbClr val="333333"/>
                 </a:solidFill>
@@ -9833,7 +10082,7 @@
               </a:spcAft>
             </a:pPr>
             <a:r>
-              <a:rPr sz="1600" b="0" i="0">
+              <a:rPr sz="2000" b="0" i="0">
                 <a:solidFill>
                   <a:srgbClr val="333333"/>
                 </a:solidFill>
@@ -9875,6 +10124,238 @@
                 <a:latin typeface="Calibri"/>
               </a:rPr>
               <a:t>2</a:t>
+            </a:r>
+          </a:p>
+        </p:txBody>
+      </p:sp>
+    </p:spTree>
+  </p:cSld>
+  <p:clrMapOvr>
+    <a:masterClrMapping/>
+  </p:clrMapOvr>
+</p:sld>
+</file>
+
+<file path=ppt/slides/slide20.xml><?xml version="1.0" encoding="utf-8"?>
+<p:sld xmlns:a="http://schemas.openxmlformats.org/drawingml/2006/main" xmlns:p="http://schemas.openxmlformats.org/presentationml/2006/main" xmlns:r="http://schemas.openxmlformats.org/officeDocument/2006/relationships">
+  <p:cSld>
+    <p:bg>
+      <p:bgPr>
+        <a:solidFill>
+          <a:srgbClr val="FFFFFF"/>
+        </a:solidFill>
+        <a:effectLst/>
+      </p:bgPr>
+    </p:bg>
+    <p:spTree>
+      <p:nvGrpSpPr>
+        <p:cNvPr id="1" name=""/>
+        <p:cNvGrpSpPr/>
+        <p:nvPr/>
+      </p:nvGrpSpPr>
+      <p:grpSpPr/>
+      <p:sp>
+        <p:nvSpPr>
+          <p:cNvPr id="2" name="Rectangle 1"/>
+          <p:cNvSpPr/>
+          <p:nvPr/>
+        </p:nvSpPr>
+        <p:spPr>
+          <a:xfrm>
+            <a:off x="0" y="0"/>
+            <a:ext cx="12191695" cy="164592"/>
+          </a:xfrm>
+          <a:prstGeom prst="rect">
+            <a:avLst/>
+          </a:prstGeom>
+          <a:solidFill>
+            <a:srgbClr val="269CCB"/>
+          </a:solidFill>
+          <a:ln>
+            <a:noFill/>
+          </a:ln>
+        </p:spPr>
+        <p:style>
+          <a:lnRef idx="1">
+            <a:schemeClr val="accent1"/>
+          </a:lnRef>
+          <a:fillRef idx="3">
+            <a:schemeClr val="accent1"/>
+          </a:fillRef>
+          <a:effectRef idx="2">
+            <a:schemeClr val="accent1"/>
+          </a:effectRef>
+          <a:fontRef idx="minor">
+            <a:schemeClr val="lt1"/>
+          </a:fontRef>
+        </p:style>
+        <p:txBody>
+          <a:bodyPr rtlCol="0" anchor="ctr"/>
+          <a:lstStyle/>
+          <a:p>
+            <a:pPr algn="ctr"/>
+          </a:p>
+        </p:txBody>
+      </p:sp>
+      <p:pic>
+        <p:nvPicPr>
+          <p:cNvPr id="3" name="Picture 2" descr="logo_uniajc_color.png"/>
+          <p:cNvPicPr>
+            <a:picLocks noChangeAspect="1"/>
+          </p:cNvPicPr>
+          <p:nvPr/>
+        </p:nvPicPr>
+        <p:blipFill>
+          <a:blip r:embed="rId2"/>
+          <a:stretch>
+            <a:fillRect/>
+          </a:stretch>
+        </p:blipFill>
+        <p:spPr>
+          <a:xfrm>
+            <a:off x="10271455" y="5998464"/>
+            <a:ext cx="1463040" cy="643233"/>
+          </a:xfrm>
+          <a:prstGeom prst="rect">
+            <a:avLst/>
+          </a:prstGeom>
+        </p:spPr>
+      </p:pic>
+      <p:sp>
+        <p:nvSpPr>
+          <p:cNvPr id="4" name="TextBox 3"/>
+          <p:cNvSpPr txBox="1"/>
+          <p:nvPr/>
+        </p:nvSpPr>
+        <p:spPr>
+          <a:xfrm>
+            <a:off x="457200" y="1737360"/>
+            <a:ext cx="11277295" cy="1097280"/>
+          </a:xfrm>
+          <a:prstGeom prst="rect">
+            <a:avLst/>
+          </a:prstGeom>
+          <a:noFill/>
+        </p:spPr>
+        <p:txBody>
+          <a:bodyPr wrap="square" anchor="ctr"/>
+          <a:lstStyle/>
+          <a:p>
+            <a:pPr algn="ctr"/>
+            <a:r>
+              <a:rPr sz="3400" b="1" i="0">
+                <a:solidFill>
+                  <a:srgbClr val="095292"/>
+                </a:solidFill>
+                <a:latin typeface="Calibri"/>
+              </a:rPr>
+              <a:t>Clase 3 · VetCare avanza</a:t>
+            </a:r>
+          </a:p>
+        </p:txBody>
+      </p:sp>
+      <p:sp>
+        <p:nvSpPr>
+          <p:cNvPr id="5" name="TextBox 4"/>
+          <p:cNvSpPr txBox="1"/>
+          <p:nvPr/>
+        </p:nvSpPr>
+        <p:spPr>
+          <a:xfrm>
+            <a:off x="457200" y="3017520"/>
+            <a:ext cx="11277295" cy="1645920"/>
+          </a:xfrm>
+          <a:prstGeom prst="rect">
+            <a:avLst/>
+          </a:prstGeom>
+          <a:noFill/>
+        </p:spPr>
+        <p:txBody>
+          <a:bodyPr wrap="square">
+            <a:spAutoFit/>
+          </a:bodyPr>
+          <a:lstStyle/>
+          <a:p>
+            <a:pPr algn="ctr">
+              <a:spcAft>
+                <a:spcPts val="600"/>
+              </a:spcAft>
+            </a:pPr>
+            <a:r>
+              <a:rPr sz="1600" b="0" i="0">
+                <a:solidFill>
+                  <a:srgbClr val="333333"/>
+                </a:solidFill>
+                <a:latin typeface="Calibri"/>
+              </a:rPr>
+              <a:t>&gt;=1 procedimiento de negocio (agendar cita / registrar consulta)</a:t>
+            </a:r>
+          </a:p>
+          <a:p>
+            <a:pPr algn="ctr">
+              <a:spcAft>
+                <a:spcPts val="600"/>
+              </a:spcAft>
+            </a:pPr>
+            <a:r>
+              <a:rPr sz="1600" b="0" i="0">
+                <a:solidFill>
+                  <a:srgbClr val="333333"/>
+                </a:solidFill>
+                <a:latin typeface="Calibri"/>
+              </a:rPr>
+              <a:t>Entregable: 2 procedimientos en PL/pgSQL corriendo en ExamLab + bateria de pruebas con su tabla resultado_prueba + contrato del proc (6 bloques)</a:t>
+            </a:r>
+          </a:p>
+          <a:p>
+            <a:pPr algn="ctr">
+              <a:spcAft>
+                <a:spcPts val="600"/>
+              </a:spcAft>
+            </a:pPr>
+            <a:r>
+              <a:rPr sz="1600" b="0" i="0">
+                <a:solidFill>
+                  <a:srgbClr val="333333"/>
+                </a:solidFill>
+                <a:latin typeface="Calibri"/>
+              </a:rPr>
+              <a:t>Siguiente clase: continuar el hilo del PI segun plan</a:t>
+            </a:r>
+          </a:p>
+        </p:txBody>
+      </p:sp>
+      <p:sp>
+        <p:nvSpPr>
+          <p:cNvPr id="6" name="TextBox 5"/>
+          <p:cNvSpPr txBox="1"/>
+          <p:nvPr/>
+        </p:nvSpPr>
+        <p:spPr>
+          <a:xfrm>
+            <a:off x="457200" y="4754880"/>
+            <a:ext cx="11277295" cy="640080"/>
+          </a:xfrm>
+          <a:prstGeom prst="rect">
+            <a:avLst/>
+          </a:prstGeom>
+          <a:noFill/>
+        </p:spPr>
+        <p:txBody>
+          <a:bodyPr wrap="square">
+            <a:spAutoFit/>
+          </a:bodyPr>
+          <a:lstStyle/>
+          <a:p>
+            <a:pPr algn="ctr"/>
+            <a:r>
+              <a:rPr sz="2000" b="1" i="0">
+                <a:solidFill>
+                  <a:srgbClr val="269CCB"/>
+                </a:solidFill>
+                <a:latin typeface="Calibri"/>
+              </a:rPr>
+              <a:t>Teoria breve · practica = PI</a:t>
             </a:r>
           </a:p>
         </p:txBody>
@@ -10905,7 +11386,7 @@
               </a:spcAft>
             </a:pPr>
             <a:r>
-              <a:rPr sz="1500" b="0" i="0">
+              <a:rPr sz="2000" b="0" i="0">
                 <a:solidFill>
                   <a:srgbClr val="333333"/>
                 </a:solidFill>
@@ -10921,7 +11402,7 @@
               </a:spcAft>
             </a:pPr>
             <a:r>
-              <a:rPr sz="1500" b="0" i="0">
+              <a:rPr sz="2000" b="0" i="0">
                 <a:solidFill>
                   <a:srgbClr val="333333"/>
                 </a:solidFill>
@@ -10937,7 +11418,7 @@
               </a:spcAft>
             </a:pPr>
             <a:r>
-              <a:rPr sz="1500" b="0" i="0">
+              <a:rPr sz="2000" b="0" i="0">
                 <a:solidFill>
                   <a:srgbClr val="333333"/>
                 </a:solidFill>
@@ -10953,7 +11434,7 @@
               </a:spcAft>
             </a:pPr>
             <a:r>
-              <a:rPr sz="1500" b="0" i="0">
+              <a:rPr sz="2000" b="0" i="0">
                 <a:solidFill>
                   <a:srgbClr val="333333"/>
                 </a:solidFill>
@@ -10969,7 +11450,7 @@
               </a:spcAft>
             </a:pPr>
             <a:r>
-              <a:rPr sz="1500" b="0" i="0">
+              <a:rPr sz="2000" b="0" i="0">
                 <a:solidFill>
                   <a:srgbClr val="333333"/>
                 </a:solidFill>
@@ -12418,7 +12899,7 @@
                 </a:solidFill>
                 <a:latin typeface="Calibri"/>
               </a:rPr>
-              <a:t>Un procedimiento sin bateria no esta terminado. Son 25 de los 100 puntos y se califican por la tabla de resultados, no por el CALL suelto</a:t>
+              <a:t>Un procedimiento sin bateria no esta terminado: son 25 de los 100 puntos</a:t>
             </a:r>
           </a:p>
         </p:txBody>
@@ -12451,7 +12932,7 @@
               </a:spcAft>
             </a:pPr>
             <a:r>
-              <a:rPr sz="1300" b="0" i="0">
+              <a:rPr sz="2000" b="0" i="0">
                 <a:solidFill>
                   <a:srgbClr val="333333"/>
                 </a:solidFill>
@@ -12460,7 +12941,7 @@
               <a:t>–   </a:t>
             </a:r>
             <a:r>
-              <a:rPr sz="1300" b="1" i="0">
+              <a:rPr sz="2000" b="1" i="0">
                 <a:solidFill>
                   <a:srgbClr val="333333"/>
                 </a:solidFill>
@@ -12469,7 +12950,7 @@
               <a:t>Por que un bloque por caso.</a:t>
             </a:r>
             <a:r>
-              <a:rPr sz="1300" b="0" i="0">
+              <a:rPr sz="2000" b="0" i="0">
                 <a:solidFill>
                   <a:srgbClr val="333333"/>
                 </a:solidFill>
@@ -12478,7 +12959,7 @@
               <a:t> Si los cuatro «CALL» van seguidos, el primero que falla </a:t>
             </a:r>
             <a:r>
-              <a:rPr sz="1300" b="1" i="0">
+              <a:rPr sz="2000" b="1" i="0">
                 <a:solidFill>
                   <a:srgbClr val="333333"/>
                 </a:solidFill>
@@ -12487,7 +12968,7 @@
               <a:t>aborta el resto</a:t>
             </a:r>
             <a:r>
-              <a:rPr sz="1300" b="0" i="0">
+              <a:rPr sz="2000" b="0" i="0">
                 <a:solidFill>
                   <a:srgbClr val="333333"/>
                 </a:solidFill>
@@ -12503,7 +12984,7 @@
               </a:spcAft>
             </a:pPr>
             <a:r>
-              <a:rPr sz="1300" b="0" i="0">
+              <a:rPr sz="2000" b="0" i="0">
                 <a:solidFill>
                   <a:srgbClr val="333333"/>
                 </a:solidFill>
@@ -12512,7 +12993,7 @@
               <a:t>–   </a:t>
             </a:r>
             <a:r>
-              <a:rPr sz="1300" b="1" i="0">
+              <a:rPr sz="2000" b="1" i="0">
                 <a:solidFill>
                   <a:srgbClr val="333333"/>
                 </a:solidFill>
@@ -12521,7 +13002,7 @@
               <a:t>El molde de un caso error.</a:t>
             </a:r>
             <a:r>
-              <a:rPr sz="1300" b="0" i="0">
+              <a:rPr sz="2000" b="0" i="0">
                 <a:solidFill>
                   <a:srgbClr val="333333"/>
                 </a:solidFill>
@@ -12537,7 +13018,7 @@
               </a:spcAft>
             </a:pPr>
             <a:r>
-              <a:rPr sz="1300" b="0" i="0">
+              <a:rPr sz="2000" b="0" i="0">
                 <a:solidFill>
                   <a:srgbClr val="333333"/>
                 </a:solidFill>
@@ -12546,129 +13027,7 @@
               <a:t>–   </a:t>
             </a:r>
             <a:r>
-              <a:rPr sz="1300" b="1" i="0">
-                <a:solidFill>
-                  <a:srgbClr val="333333"/>
-                </a:solidFill>
-                <a:latin typeface="Calibri"/>
-              </a:rPr>
-              <a:t>Ojo con la logica invertida, y con «WHEN OTHERS» a secas.</a:t>
-            </a:r>
-            <a:r>
-              <a:rPr sz="1300" b="0" i="0">
-                <a:solidFill>
-                  <a:srgbClr val="333333"/>
-                </a:solidFill>
-                <a:latin typeface="Calibri"/>
-              </a:rPr>
-              <a:t> En un caso error, </a:t>
-            </a:r>
-            <a:r>
-              <a:rPr sz="1300" b="1" i="0">
-                <a:solidFill>
-                  <a:srgbClr val="333333"/>
-                </a:solidFill>
-                <a:latin typeface="Calibri"/>
-              </a:rPr>
-              <a:t>llegar al final sin excepcion es el fallo</a:t>
-            </a:r>
-            <a:r>
-              <a:rPr sz="1300" b="0" i="0">
-                <a:solidFill>
-                  <a:srgbClr val="333333"/>
-                </a:solidFill>
-                <a:latin typeface="Calibri"/>
-              </a:rPr>
-              <a:t>. Y no basta con que falle: hay que verificar </a:t>
-            </a:r>
-            <a:r>
-              <a:rPr sz="1300" b="1" i="0">
-                <a:solidFill>
-                  <a:srgbClr val="333333"/>
-                </a:solidFill>
-                <a:latin typeface="Calibri"/>
-              </a:rPr>
-              <a:t>que falle por lo esperado</a:t>
-            </a:r>
-            <a:r>
-              <a:rPr sz="1300" b="0" i="0">
-                <a:solidFill>
-                  <a:srgbClr val="333333"/>
-                </a:solidFill>
-                <a:latin typeface="Calibri"/>
-              </a:rPr>
-              <a:t> («SQLERRM ILIKE '%inactiva%'»), porque un typo en un nombre de columna tambien lanza excepcion y se reportaria como prueba superada.</a:t>
-            </a:r>
-          </a:p>
-          <a:p>
-            <a:pPr>
-              <a:spcAft>
-                <a:spcPts val="800"/>
-              </a:spcAft>
-            </a:pPr>
-            <a:r>
-              <a:rPr sz="1300" b="0" i="0">
-                <a:solidFill>
-                  <a:srgbClr val="333333"/>
-                </a:solidFill>
-                <a:latin typeface="Calibri"/>
-              </a:rPr>
-              <a:t>–   </a:t>
-            </a:r>
-            <a:r>
-              <a:rPr sz="1300" b="1" i="0">
-                <a:solidFill>
-                  <a:srgbClr val="333333"/>
-                </a:solidFill>
-                <a:latin typeface="Calibri"/>
-              </a:rPr>
-              <a:t>La tabla de resultados.</a:t>
-            </a:r>
-            <a:r>
-              <a:rPr sz="1300" b="0" i="0">
-                <a:solidFill>
-                  <a:srgbClr val="333333"/>
-                </a:solidFill>
-                <a:latin typeface="Calibri"/>
-              </a:rPr>
-              <a:t> «resultado_prueba(id_prueba SERIAL, caso TEXT, esperado TEXT, obtenido TEXT, paso BOOLEAN)», y un «SELECT * ... ORDER BY id_prueba;» con las 4 filas. «paso» admite dos lecturas —«coincidio con lo esperado» o «la operacion se completo»— y las dos valen; lo que se exige es </a:t>
-            </a:r>
-            <a:r>
-              <a:rPr sz="1300" b="1" i="0">
-                <a:solidFill>
-                  <a:srgbClr val="333333"/>
-                </a:solidFill>
-                <a:latin typeface="Calibri"/>
-              </a:rPr>
-              <a:t>usar la misma para las 4 y decir cual</a:t>
-            </a:r>
-            <a:r>
-              <a:rPr sz="1300" b="0" i="0">
-                <a:solidFill>
-                  <a:srgbClr val="333333"/>
-                </a:solidFill>
-                <a:latin typeface="Calibri"/>
-              </a:rPr>
-              <a:t>.</a:t>
-            </a:r>
-          </a:p>
-          <a:p>
-            <a:pPr>
-              <a:spcAft>
-                <a:spcPts val="800"/>
-              </a:spcAft>
-            </a:pPr>
-            <a:r>
-              <a:rPr sz="1300" b="0" i="0">
-                <a:solidFill>
-                  <a:srgbClr val="333333"/>
-                </a:solidFill>
-                <a:latin typeface="Calibri"/>
-              </a:rPr>
-              <a:t>–   </a:t>
-            </a:r>
-            <a:r>
-              <a:rPr sz="1300" b="1" i="0">
+              <a:rPr sz="2000" b="1" i="0">
                 <a:solidFill>
                   <a:srgbClr val="333333"/>
                 </a:solidFill>
@@ -12677,7 +13036,7 @@
               <a:t>Los 4 casos, y la prueba de que si inserto.</a:t>
             </a:r>
             <a:r>
-              <a:rPr sz="1300" b="0" i="0">
+              <a:rPr sz="2000" b="0" i="0">
                 <a:solidFill>
                   <a:srgbClr val="333333"/>
                 </a:solidFill>
@@ -12686,7 +13045,7 @@
               <a:t> 1 caso OK + mascota inexistente + mascota inactiva + franja ocupada. Y un «COUNT(*)» sobre «cita» </a:t>
             </a:r>
             <a:r>
-              <a:rPr sz="1300" b="1" i="0">
+              <a:rPr sz="2000" b="1" i="0">
                 <a:solidFill>
                   <a:srgbClr val="333333"/>
                 </a:solidFill>
@@ -12695,7 +13054,7 @@
               <a:t>antes y despues</a:t>
             </a:r>
             <a:r>
-              <a:rPr sz="1300" b="0" i="0">
+              <a:rPr sz="2000" b="0" i="0">
                 <a:solidFill>
                   <a:srgbClr val="333333"/>
                 </a:solidFill>
@@ -12704,7 +13063,7 @@
               <a:t>: tiene que pasar de </a:t>
             </a:r>
             <a:r>
-              <a:rPr sz="1300" b="1" i="0">
+              <a:rPr sz="2000" b="1" i="0">
                 <a:solidFill>
                   <a:srgbClr val="333333"/>
                 </a:solidFill>
@@ -12713,7 +13072,7 @@
               <a:t>10 a 11</a:t>
             </a:r>
             <a:r>
-              <a:rPr sz="1300" b="0" i="0">
+              <a:rPr sz="2000" b="0" i="0">
                 <a:solidFill>
                   <a:srgbClr val="333333"/>
                 </a:solidFill>
@@ -12900,7 +13259,7 @@
                 </a:solidFill>
                 <a:latin typeface="Calibri"/>
               </a:rPr>
-              <a:t>El contrato del procedimiento: los 6 bloques que consume la app</a:t>
+              <a:t>La columna paso y la trampa de WHEN OTHERS</a:t>
             </a:r>
           </a:p>
         </p:txBody>
@@ -12934,7 +13293,7 @@
                 </a:solidFill>
                 <a:latin typeface="Calibri"/>
               </a:rPr>
-              <a:t>Es el entregable de la pregunta 5, vale 15 puntos, y la plantilla en blanco de los 6 bloques esta en el Taller del PI</a:t>
+              <a:t>Los 25 puntos se califican por esta tabla, no por el CALL suelto</a:t>
             </a:r>
           </a:p>
         </p:txBody>
@@ -12967,7 +13326,7 @@
               </a:spcAft>
             </a:pPr>
             <a:r>
-              <a:rPr sz="1300" b="0" i="0">
+              <a:rPr sz="2000" b="0" i="0">
                 <a:solidFill>
                   <a:srgbClr val="333333"/>
                 </a:solidFill>
@@ -12976,58 +13335,58 @@
               <a:t>–   </a:t>
             </a:r>
             <a:r>
-              <a:rPr sz="1300" b="1" i="0">
-                <a:solidFill>
-                  <a:srgbClr val="333333"/>
-                </a:solidFill>
-                <a:latin typeface="Calibri"/>
-              </a:rPr>
-              <a:t>1. Firma exacta.</a:t>
-            </a:r>
-            <a:r>
-              <a:rPr sz="1300" b="0" i="0">
-                <a:solidFill>
-                  <a:srgbClr val="333333"/>
-                </a:solidFill>
-                <a:latin typeface="Calibri"/>
-              </a:rPr>
-              <a:t> «sp_agendar_cita(p_id_mascota INT, p_id_veterinario INT, p_fecha_hora TIMESTAMP)»: nombre, orden y </a:t>
-            </a:r>
-            <a:r>
-              <a:rPr sz="1300" b="1" i="0">
-                <a:solidFill>
-                  <a:srgbClr val="333333"/>
-                </a:solidFill>
-                <a:latin typeface="Calibri"/>
-              </a:rPr>
-              <a:t>tipo</a:t>
-            </a:r>
-            <a:r>
-              <a:rPr sz="1300" b="0" i="0">
-                <a:solidFill>
-                  <a:srgbClr val="333333"/>
-                </a:solidFill>
-                <a:latin typeface="Calibri"/>
-              </a:rPr>
-              <a:t> de cada parametro. Sin los tipos no es un contrato, es una descripcion. </a:t>
-            </a:r>
-            <a:r>
-              <a:rPr sz="1300" b="1" i="0">
-                <a:solidFill>
-                  <a:srgbClr val="333333"/>
-                </a:solidFill>
-                <a:latin typeface="Calibri"/>
-              </a:rPr>
-              <a:t>2. Como se llama:</a:t>
-            </a:r>
-            <a:r>
-              <a:rPr sz="1300" b="0" i="0">
-                <a:solidFill>
-                  <a:srgbClr val="333333"/>
-                </a:solidFill>
-                <a:latin typeface="Calibri"/>
-              </a:rPr>
-              <a:t> un «CALL» de ejemplo con valores reales, copiable tal cual.</a:t>
+              <a:rPr sz="2000" b="1" i="0">
+                <a:solidFill>
+                  <a:srgbClr val="333333"/>
+                </a:solidFill>
+                <a:latin typeface="Calibri"/>
+              </a:rPr>
+              <a:t>Ojo con la logica invertida, y con «WHEN OTHERS» a secas.</a:t>
+            </a:r>
+            <a:r>
+              <a:rPr sz="2000" b="0" i="0">
+                <a:solidFill>
+                  <a:srgbClr val="333333"/>
+                </a:solidFill>
+                <a:latin typeface="Calibri"/>
+              </a:rPr>
+              <a:t> En un caso error, </a:t>
+            </a:r>
+            <a:r>
+              <a:rPr sz="2000" b="1" i="0">
+                <a:solidFill>
+                  <a:srgbClr val="333333"/>
+                </a:solidFill>
+                <a:latin typeface="Calibri"/>
+              </a:rPr>
+              <a:t>llegar al final sin excepcion es el fallo</a:t>
+            </a:r>
+            <a:r>
+              <a:rPr sz="2000" b="0" i="0">
+                <a:solidFill>
+                  <a:srgbClr val="333333"/>
+                </a:solidFill>
+                <a:latin typeface="Calibri"/>
+              </a:rPr>
+              <a:t>. Y no basta con que falle: hay que verificar </a:t>
+            </a:r>
+            <a:r>
+              <a:rPr sz="2000" b="1" i="0">
+                <a:solidFill>
+                  <a:srgbClr val="333333"/>
+                </a:solidFill>
+                <a:latin typeface="Calibri"/>
+              </a:rPr>
+              <a:t>que falle por lo esperado</a:t>
+            </a:r>
+            <a:r>
+              <a:rPr sz="2000" b="0" i="0">
+                <a:solidFill>
+                  <a:srgbClr val="333333"/>
+                </a:solidFill>
+                <a:latin typeface="Calibri"/>
+              </a:rPr>
+              <a:t> («SQLERRM ILIKE '%inactiva%'»), porque un typo en un nombre de columna tambien lanza excepcion y se reportaria como prueba superada.</a:t>
             </a:r>
           </a:p>
           <a:p>
@@ -13037,7 +13396,7 @@
               </a:spcAft>
             </a:pPr>
             <a:r>
-              <a:rPr sz="1300" b="0" i="0">
+              <a:rPr sz="2000" b="0" i="0">
                 <a:solidFill>
                   <a:srgbClr val="333333"/>
                 </a:solidFill>
@@ -13046,178 +13405,40 @@
               <a:t>–   </a:t>
             </a:r>
             <a:r>
-              <a:rPr sz="1300" b="1" i="0">
-                <a:solidFill>
-                  <a:srgbClr val="333333"/>
-                </a:solidFill>
-                <a:latin typeface="Calibri"/>
-              </a:rPr>
-              <a:t>3. Precondiciones</a:t>
-            </a:r>
-            <a:r>
-              <a:rPr sz="1300" b="0" i="0">
-                <a:solidFill>
-                  <a:srgbClr val="333333"/>
-                </a:solidFill>
-                <a:latin typeface="Calibri"/>
-              </a:rPr>
-              <a:t> — lo que garantiza quien llama: la mascota existe y esta activa, la franja del veterinario esta libre.</a:t>
-            </a:r>
-          </a:p>
-          <a:p>
-            <a:pPr>
-              <a:spcAft>
-                <a:spcPts val="800"/>
-              </a:spcAft>
-            </a:pPr>
-            <a:r>
-              <a:rPr sz="1300" b="0" i="0">
-                <a:solidFill>
-                  <a:srgbClr val="333333"/>
-                </a:solidFill>
-                <a:latin typeface="Calibri"/>
-              </a:rPr>
-              <a:t>–   </a:t>
-            </a:r>
-            <a:r>
-              <a:rPr sz="1300" b="1" i="0">
-                <a:solidFill>
-                  <a:srgbClr val="333333"/>
-                </a:solidFill>
-                <a:latin typeface="Calibri"/>
-              </a:rPr>
-              <a:t>4. Postcondiciones</a:t>
-            </a:r>
-            <a:r>
-              <a:rPr sz="1300" b="0" i="0">
-                <a:solidFill>
-                  <a:srgbClr val="333333"/>
-                </a:solidFill>
-                <a:latin typeface="Calibri"/>
-              </a:rPr>
-              <a:t> — lo que queda cierto si termina bien: una fila nueva en «cita» con estado «PROGRAMADA», y </a:t>
-            </a:r>
-            <a:r>
-              <a:rPr sz="1300" b="1" i="0">
-                <a:solidFill>
-                  <a:srgbClr val="333333"/>
-                </a:solidFill>
-                <a:latin typeface="Calibri"/>
-              </a:rPr>
-              <a:t>ninguna</a:t>
-            </a:r>
-            <a:r>
-              <a:rPr sz="1300" b="0" i="0">
-                <a:solidFill>
-                  <a:srgbClr val="333333"/>
-                </a:solidFill>
-                <a:latin typeface="Calibri"/>
-              </a:rPr>
-              <a:t> si termina mal.</a:t>
-            </a:r>
-          </a:p>
-          <a:p>
-            <a:pPr>
-              <a:spcAft>
-                <a:spcPts val="800"/>
-              </a:spcAft>
-            </a:pPr>
-            <a:r>
-              <a:rPr sz="1300" b="0" i="0">
-                <a:solidFill>
-                  <a:srgbClr val="333333"/>
-                </a:solidFill>
-                <a:latin typeface="Calibri"/>
-              </a:rPr>
-              <a:t>–   </a:t>
-            </a:r>
-            <a:r>
-              <a:rPr sz="1300" b="1" i="0">
-                <a:solidFill>
-                  <a:srgbClr val="333333"/>
-                </a:solidFill>
-                <a:latin typeface="Calibri"/>
-              </a:rPr>
-              <a:t>5. Tabla de errores.</a:t>
-            </a:r>
-            <a:r>
-              <a:rPr sz="1300" b="0" i="0">
-                <a:solidFill>
-                  <a:srgbClr val="333333"/>
-                </a:solidFill>
-                <a:latin typeface="Calibri"/>
-              </a:rPr>
-              <a:t> Una fila por cada «RAISE EXCEPTION», con el </a:t>
-            </a:r>
-            <a:r>
-              <a:rPr sz="1300" b="1" i="0">
-                <a:solidFill>
-                  <a:srgbClr val="333333"/>
-                </a:solidFill>
-                <a:latin typeface="Calibri"/>
-              </a:rPr>
-              <a:t>mensaje literal</a:t>
-            </a:r>
-            <a:r>
-              <a:rPr sz="1300" b="0" i="0">
-                <a:solidFill>
-                  <a:srgbClr val="333333"/>
-                </a:solidFill>
-                <a:latin typeface="Calibri"/>
-              </a:rPr>
-              <a:t> y que debe hacer la app al recibirlo. Es lo que vuelve programable el contrato: sin el texto exacto, la app no puede distinguir un error de otro.</a:t>
-            </a:r>
-          </a:p>
-          <a:p>
-            <a:pPr>
-              <a:spcAft>
-                <a:spcPts val="800"/>
-              </a:spcAft>
-            </a:pPr>
-            <a:r>
-              <a:rPr sz="1300" b="0" i="0">
-                <a:solidFill>
-                  <a:srgbClr val="333333"/>
-                </a:solidFill>
-                <a:latin typeface="Calibri"/>
-              </a:rPr>
-              <a:t>–   </a:t>
-            </a:r>
-            <a:r>
-              <a:rPr sz="1300" b="1" i="0">
-                <a:solidFill>
-                  <a:srgbClr val="333333"/>
-                </a:solidFill>
-                <a:latin typeface="Calibri"/>
-              </a:rPr>
-              <a:t>6. Decision de diseno.</a:t>
-            </a:r>
-            <a:r>
-              <a:rPr sz="1300" b="0" i="0">
-                <a:solidFill>
-                  <a:srgbClr val="333333"/>
-                </a:solidFill>
-                <a:latin typeface="Calibri"/>
-              </a:rPr>
-              <a:t> Por que se aborta en vez de devolver un codigo en un «OUT»: porque abortar </a:t>
-            </a:r>
-            <a:r>
-              <a:rPr sz="1300" b="1" i="0">
-                <a:solidFill>
-                  <a:srgbClr val="333333"/>
-                </a:solidFill>
-                <a:latin typeface="Calibri"/>
-              </a:rPr>
-              <a:t>deshace</a:t>
-            </a:r>
-            <a:r>
-              <a:rPr sz="1300" b="0" i="0">
-                <a:solidFill>
-                  <a:srgbClr val="333333"/>
-                </a:solidFill>
-                <a:latin typeface="Calibri"/>
-              </a:rPr>
-              <a:t> lo hecho, y un codigo que nadie revise deja la cita creada igual.</a:t>
+              <a:rPr sz="2000" b="1" i="0">
+                <a:solidFill>
+                  <a:srgbClr val="333333"/>
+                </a:solidFill>
+                <a:latin typeface="Calibri"/>
+              </a:rPr>
+              <a:t>La tabla de resultados.</a:t>
+            </a:r>
+            <a:r>
+              <a:rPr sz="2000" b="0" i="0">
+                <a:solidFill>
+                  <a:srgbClr val="333333"/>
+                </a:solidFill>
+                <a:latin typeface="Calibri"/>
+              </a:rPr>
+              <a:t> «resultado_prueba(id_prueba SERIAL, caso TEXT, esperado TEXT, obtenido TEXT, paso BOOLEAN)», y un «SELECT * ... ORDER BY id_prueba;» con las 4 filas. «paso» admite dos lecturas —«coincidio con lo esperado» o «la operacion se completo»— y las dos valen; lo que se exige es </a:t>
+            </a:r>
+            <a:r>
+              <a:rPr sz="2000" b="1" i="0">
+                <a:solidFill>
+                  <a:srgbClr val="333333"/>
+                </a:solidFill>
+                <a:latin typeface="Calibri"/>
+              </a:rPr>
+              <a:t>usar la misma para las 4 y decir cual</a:t>
+            </a:r>
+            <a:r>
+              <a:rPr sz="2000" b="0" i="0">
+                <a:solidFill>
+                  <a:srgbClr val="333333"/>
+                </a:solidFill>
+                <a:latin typeface="Calibri"/>
+              </a:rPr>
+              <a:t>.</a:t>
             </a:r>
           </a:p>
         </p:txBody>
@@ -13398,7 +13619,7 @@
                 </a:solidFill>
                 <a:latin typeface="Calibri"/>
               </a:rPr>
-              <a:t>PROCEDURE o FUNCTION: cual se puede usar dentro de un SELECT</a:t>
+              <a:t>El contrato del procedimiento: los 6 bloques que consume la app</a:t>
             </a:r>
           </a:p>
         </p:txBody>
@@ -13432,7 +13653,7 @@
                 </a:solidFill>
                 <a:latin typeface="Calibri"/>
               </a:rPr>
-              <a:t>PROCEDURE y FUNCTION no son sinonimos: si el resultado tiene que entrar en un SELECT, es FUNCTION. Son 10 de los 100 puntos y es la bisagra con la Clase 4</a:t>
+              <a:t>Es el entregable de la pregunta 5, vale 15 puntos, y la plantilla en blanco de los 6 bloques esta en el Taller del PI</a:t>
             </a:r>
           </a:p>
         </p:txBody>
@@ -13465,7 +13686,7 @@
               </a:spcAft>
             </a:pPr>
             <a:r>
-              <a:rPr sz="1300" b="0" i="0">
+              <a:rPr sz="2000" b="0" i="0">
                 <a:solidFill>
                   <a:srgbClr val="333333"/>
                 </a:solidFill>
@@ -13474,40 +13695,58 @@
               <a:t>–   </a:t>
             </a:r>
             <a:r>
-              <a:rPr sz="1300" b="1" i="0">
-                <a:solidFill>
-                  <a:srgbClr val="333333"/>
-                </a:solidFill>
-                <a:latin typeface="Calibri"/>
-              </a:rPr>
-              <a:t>«FUNCTION»: devuelve un valor y se invoca DENTRO de una consulta.</a:t>
-            </a:r>
-            <a:r>
-              <a:rPr sz="1300" b="0" i="0">
-                <a:solidFill>
-                  <a:srgbClr val="333333"/>
-                </a:solidFill>
-                <a:latin typeface="Calibri"/>
-              </a:rPr>
-              <a:t> «CREATE FUNCTION fn_precio(p_especie TEXT) RETURNS NUMERIC LANGUAGE plpgsql AS $fn$ ... RETURN v_precio; ... $fn$;» y se usa «SELECT nombre, fn_precio(especie) FROM mascota;». Es la </a:t>
-            </a:r>
-            <a:r>
-              <a:rPr sz="1300" b="1" i="0">
-                <a:solidFill>
-                  <a:srgbClr val="333333"/>
-                </a:solidFill>
-                <a:latin typeface="Calibri"/>
-              </a:rPr>
-              <a:t>unica de las dos</a:t>
-            </a:r>
-            <a:r>
-              <a:rPr sz="1300" b="0" i="0">
-                <a:solidFill>
-                  <a:srgbClr val="333333"/>
-                </a:solidFill>
-                <a:latin typeface="Calibri"/>
-              </a:rPr>
-              <a:t> que cabe en la lista de columnas de un «SELECT», en un «WHERE» o en un «ORDER BY».</a:t>
+              <a:rPr sz="2000" b="1" i="0">
+                <a:solidFill>
+                  <a:srgbClr val="333333"/>
+                </a:solidFill>
+                <a:latin typeface="Calibri"/>
+              </a:rPr>
+              <a:t>1. Firma exacta.</a:t>
+            </a:r>
+            <a:r>
+              <a:rPr sz="2000" b="0" i="0">
+                <a:solidFill>
+                  <a:srgbClr val="333333"/>
+                </a:solidFill>
+                <a:latin typeface="Calibri"/>
+              </a:rPr>
+              <a:t> «sp_agendar_cita(p_id_mascota INT, p_id_veterinario INT, p_fecha_hora TIMESTAMP)»: nombre, orden y </a:t>
+            </a:r>
+            <a:r>
+              <a:rPr sz="2000" b="1" i="0">
+                <a:solidFill>
+                  <a:srgbClr val="333333"/>
+                </a:solidFill>
+                <a:latin typeface="Calibri"/>
+              </a:rPr>
+              <a:t>tipo</a:t>
+            </a:r>
+            <a:r>
+              <a:rPr sz="2000" b="0" i="0">
+                <a:solidFill>
+                  <a:srgbClr val="333333"/>
+                </a:solidFill>
+                <a:latin typeface="Calibri"/>
+              </a:rPr>
+              <a:t> de cada parametro. Sin los tipos no es un contrato, es una descripcion. </a:t>
+            </a:r>
+            <a:r>
+              <a:rPr sz="2000" b="1" i="0">
+                <a:solidFill>
+                  <a:srgbClr val="333333"/>
+                </a:solidFill>
+                <a:latin typeface="Calibri"/>
+              </a:rPr>
+              <a:t>2. Como se llama:</a:t>
+            </a:r>
+            <a:r>
+              <a:rPr sz="2000" b="0" i="0">
+                <a:solidFill>
+                  <a:srgbClr val="333333"/>
+                </a:solidFill>
+                <a:latin typeface="Calibri"/>
+              </a:rPr>
+              <a:t> un «CALL» de ejemplo con valores reales, copiable tal cual.</a:t>
             </a:r>
           </a:p>
           <a:p>
@@ -13517,7 +13756,7 @@
               </a:spcAft>
             </a:pPr>
             <a:r>
-              <a:rPr sz="1300" b="0" i="0">
+              <a:rPr sz="2000" b="0" i="0">
                 <a:solidFill>
                   <a:srgbClr val="333333"/>
                 </a:solidFill>
@@ -13526,40 +13765,22 @@
               <a:t>–   </a:t>
             </a:r>
             <a:r>
-              <a:rPr sz="1300" b="1" i="0">
-                <a:solidFill>
-                  <a:srgbClr val="333333"/>
-                </a:solidFill>
-                <a:latin typeface="Calibri"/>
-              </a:rPr>
-              <a:t>«PROCEDURE»: ejecuta pasos y se invoca como sentencia suelta.</a:t>
-            </a:r>
-            <a:r>
-              <a:rPr sz="1300" b="0" i="0">
-                <a:solidFill>
-                  <a:srgbClr val="333333"/>
-                </a:solidFill>
-                <a:latin typeface="Calibri"/>
-              </a:rPr>
-              <a:t> «CALL sp_agendar_cita(3, 7, '2026-09-01 10:00');». </a:t>
-            </a:r>
-            <a:r>
-              <a:rPr sz="1300" b="1" i="0">
-                <a:solidFill>
-                  <a:srgbClr val="333333"/>
-                </a:solidFill>
-                <a:latin typeface="Calibri"/>
-              </a:rPr>
-              <a:t>No</a:t>
-            </a:r>
-            <a:r>
-              <a:rPr sz="1300" b="0" i="0">
-                <a:solidFill>
-                  <a:srgbClr val="333333"/>
-                </a:solidFill>
-                <a:latin typeface="Calibri"/>
-              </a:rPr>
-              <a:t> se puede poner en un «SELECT». Si lo intentas, el motor responde «sp_agendar_cita(...) is not a function».</a:t>
+              <a:rPr sz="2000" b="1" i="0">
+                <a:solidFill>
+                  <a:srgbClr val="333333"/>
+                </a:solidFill>
+                <a:latin typeface="Calibri"/>
+              </a:rPr>
+              <a:t>3. Precondiciones</a:t>
+            </a:r>
+            <a:r>
+              <a:rPr sz="2000" b="0" i="0">
+                <a:solidFill>
+                  <a:srgbClr val="333333"/>
+                </a:solidFill>
+                <a:latin typeface="Calibri"/>
+              </a:rPr>
+              <a:t> — lo que garantiza quien llama: la mascota existe y esta activa, la franja del veterinario esta libre.</a:t>
             </a:r>
           </a:p>
           <a:p>
@@ -13569,7 +13790,7 @@
               </a:spcAft>
             </a:pPr>
             <a:r>
-              <a:rPr sz="1300" b="0" i="0">
+              <a:rPr sz="2000" b="0" i="0">
                 <a:solidFill>
                   <a:srgbClr val="333333"/>
                 </a:solidFill>
@@ -13578,22 +13799,40 @@
               <a:t>–   </a:t>
             </a:r>
             <a:r>
-              <a:rPr sz="1300" b="1" i="0">
-                <a:solidFill>
-                  <a:srgbClr val="333333"/>
-                </a:solidFill>
-                <a:latin typeface="Calibri"/>
-              </a:rPr>
-              <a:t>Las dos pueden ser «LANGUAGE plpgsql».</a:t>
-            </a:r>
-            <a:r>
-              <a:rPr sz="1300" b="0" i="0">
-                <a:solidFill>
-                  <a:srgbClr val="333333"/>
-                </a:solidFill>
-                <a:latin typeface="Calibri"/>
-              </a:rPr>
-              <a:t> El lenguaje no decide nada: es falso que una funcion necesite «LANGUAGE sql» para poder retornar un valor. «sp_agendar_cita» y «fn_precio» son las dos «plpgsql».</a:t>
+              <a:rPr sz="2000" b="1" i="0">
+                <a:solidFill>
+                  <a:srgbClr val="333333"/>
+                </a:solidFill>
+                <a:latin typeface="Calibri"/>
+              </a:rPr>
+              <a:t>4. Postcondiciones</a:t>
+            </a:r>
+            <a:r>
+              <a:rPr sz="2000" b="0" i="0">
+                <a:solidFill>
+                  <a:srgbClr val="333333"/>
+                </a:solidFill>
+                <a:latin typeface="Calibri"/>
+              </a:rPr>
+              <a:t> — lo que queda cierto si termina bien: una fila nueva en «cita» con estado «PROGRAMADA», y </a:t>
+            </a:r>
+            <a:r>
+              <a:rPr sz="2000" b="1" i="0">
+                <a:solidFill>
+                  <a:srgbClr val="333333"/>
+                </a:solidFill>
+                <a:latin typeface="Calibri"/>
+              </a:rPr>
+              <a:t>ninguna</a:t>
+            </a:r>
+            <a:r>
+              <a:rPr sz="2000" b="0" i="0">
+                <a:solidFill>
+                  <a:srgbClr val="333333"/>
+                </a:solidFill>
+                <a:latin typeface="Calibri"/>
+              </a:rPr>
+              <a:t> si termina mal.</a:t>
             </a:r>
           </a:p>
           <a:p>
@@ -13603,7 +13842,7 @@
               </a:spcAft>
             </a:pPr>
             <a:r>
-              <a:rPr sz="1300" b="0" i="0">
+              <a:rPr sz="2000" b="0" i="0">
                 <a:solidFill>
                   <a:srgbClr val="333333"/>
                 </a:solidFill>
@@ -13612,40 +13851,40 @@
               <a:t>–   </a:t>
             </a:r>
             <a:r>
-              <a:rPr sz="1300" b="1" i="0">
-                <a:solidFill>
-                  <a:srgbClr val="333333"/>
-                </a:solidFill>
-                <a:latin typeface="Calibri"/>
-              </a:rPr>
-              <a:t>Un «PROCEDURE» si admite parametros «OUT»</a:t>
-            </a:r>
-            <a:r>
-              <a:rPr sz="1300" b="0" i="0">
-                <a:solidFill>
-                  <a:srgbClr val="333333"/>
-                </a:solidFill>
-                <a:latin typeface="Calibri"/>
-              </a:rPr>
-              <a:t> —y aun asi </a:t>
-            </a:r>
-            <a:r>
-              <a:rPr sz="1300" b="1" i="0">
-                <a:solidFill>
-                  <a:srgbClr val="333333"/>
-                </a:solidFill>
-                <a:latin typeface="Calibri"/>
-              </a:rPr>
-              <a:t>sigue sin poder usarse dentro de un «SELECT»</a:t>
-            </a:r>
-            <a:r>
-              <a:rPr sz="1300" b="0" i="0">
-                <a:solidFill>
-                  <a:srgbClr val="333333"/>
-                </a:solidFill>
-                <a:latin typeface="Calibri"/>
-              </a:rPr>
-              <a:t>. Devolver por «OUT» no es lo mismo que ser invocable en una consulta, y no es «la unica forma de retornar un valor».</a:t>
+              <a:rPr sz="2000" b="1" i="0">
+                <a:solidFill>
+                  <a:srgbClr val="333333"/>
+                </a:solidFill>
+                <a:latin typeface="Calibri"/>
+              </a:rPr>
+              <a:t>5. Tabla de errores.</a:t>
+            </a:r>
+            <a:r>
+              <a:rPr sz="2000" b="0" i="0">
+                <a:solidFill>
+                  <a:srgbClr val="333333"/>
+                </a:solidFill>
+                <a:latin typeface="Calibri"/>
+              </a:rPr>
+              <a:t> Una fila por cada «RAISE EXCEPTION», con el </a:t>
+            </a:r>
+            <a:r>
+              <a:rPr sz="2000" b="1" i="0">
+                <a:solidFill>
+                  <a:srgbClr val="333333"/>
+                </a:solidFill>
+                <a:latin typeface="Calibri"/>
+              </a:rPr>
+              <a:t>mensaje literal</a:t>
+            </a:r>
+            <a:r>
+              <a:rPr sz="2000" b="0" i="0">
+                <a:solidFill>
+                  <a:srgbClr val="333333"/>
+                </a:solidFill>
+                <a:latin typeface="Calibri"/>
+              </a:rPr>
+              <a:t> y que debe hacer la app al recibirlo. Es lo que vuelve programable el contrato: sin el texto exacto, la app no puede distinguir un error de otro.</a:t>
             </a:r>
           </a:p>
           <a:p>
@@ -13655,7 +13894,7 @@
               </a:spcAft>
             </a:pPr>
             <a:r>
-              <a:rPr sz="1300" b="0" i="0">
+              <a:rPr sz="2000" b="0" i="0">
                 <a:solidFill>
                   <a:srgbClr val="333333"/>
                 </a:solidFill>
@@ -13664,40 +13903,40 @@
               <a:t>–   </a:t>
             </a:r>
             <a:r>
-              <a:rPr sz="1300" b="1" i="0">
-                <a:solidFill>
-                  <a:srgbClr val="333333"/>
-                </a:solidFill>
-                <a:latin typeface="Calibri"/>
-              </a:rPr>
-              <a:t>Lo que solo puede el procedimiento: manejar la transaccion.</a:t>
-            </a:r>
-            <a:r>
-              <a:rPr sz="1300" b="0" i="0">
-                <a:solidFill>
-                  <a:srgbClr val="333333"/>
-                </a:solidFill>
-                <a:latin typeface="Calibri"/>
-              </a:rPr>
-              <a:t> Un «PROCEDURE» puede hacer «COMMIT» o «ROLLBACK» adentro; una «FUNCTION» corre dentro de la transaccion de quien la llamo. Por eso agendar es procedimiento y </a:t>
-            </a:r>
-            <a:r>
-              <a:rPr sz="1300" b="1" i="0">
-                <a:solidFill>
-                  <a:srgbClr val="333333"/>
-                </a:solidFill>
-                <a:latin typeface="Calibri"/>
-              </a:rPr>
-              <a:t>la tarifa de la Clase 4 sera funcion</a:t>
-            </a:r>
-            <a:r>
-              <a:rPr sz="1300" b="0" i="0">
-                <a:solidFill>
-                  <a:srgbClr val="333333"/>
-                </a:solidFill>
-                <a:latin typeface="Calibri"/>
-              </a:rPr>
-              <a:t>.</a:t>
+              <a:rPr sz="2000" b="1" i="0">
+                <a:solidFill>
+                  <a:srgbClr val="333333"/>
+                </a:solidFill>
+                <a:latin typeface="Calibri"/>
+              </a:rPr>
+              <a:t>6. Decision de diseno.</a:t>
+            </a:r>
+            <a:r>
+              <a:rPr sz="2000" b="0" i="0">
+                <a:solidFill>
+                  <a:srgbClr val="333333"/>
+                </a:solidFill>
+                <a:latin typeface="Calibri"/>
+              </a:rPr>
+              <a:t> Por que se aborta en vez de devolver un codigo en un «OUT»: porque abortar </a:t>
+            </a:r>
+            <a:r>
+              <a:rPr sz="2000" b="1" i="0">
+                <a:solidFill>
+                  <a:srgbClr val="333333"/>
+                </a:solidFill>
+                <a:latin typeface="Calibri"/>
+              </a:rPr>
+              <a:t>deshace</a:t>
+            </a:r>
+            <a:r>
+              <a:rPr sz="2000" b="0" i="0">
+                <a:solidFill>
+                  <a:srgbClr val="333333"/>
+                </a:solidFill>
+                <a:latin typeface="Calibri"/>
+              </a:rPr>
+              <a:t> lo hecho, y un codigo que nadie revise deja la cita creada igual.</a:t>
             </a:r>
           </a:p>
         </p:txBody>

--- a/Bases de Datos II/Clases/Clase 3 - Procedimientos almacenados/Presentacion.pptx
+++ b/Bases de Datos II/Clases/Clase 3 - Procedimientos almacenados/Presentacion.pptx
@@ -3692,7 +3692,7 @@
               </a:spcAft>
             </a:pPr>
             <a:r>
-              <a:rPr sz="2000" b="0" i="0">
+              <a:rPr sz="1900" b="0" i="0">
                 <a:solidFill>
                   <a:srgbClr val="333333"/>
                 </a:solidFill>
@@ -3701,7 +3701,7 @@
               <a:t>–   </a:t>
             </a:r>
             <a:r>
-              <a:rPr sz="2000" b="1" i="0">
+              <a:rPr sz="1900" b="1" i="0">
                 <a:solidFill>
                   <a:srgbClr val="333333"/>
                 </a:solidFill>
@@ -3710,7 +3710,7 @@
               <a:t>«FUNCTION»: devuelve un valor y se invoca DENTRO de una consulta.</a:t>
             </a:r>
             <a:r>
-              <a:rPr sz="2000" b="0" i="0">
+              <a:rPr sz="1900" b="0" i="0">
                 <a:solidFill>
                   <a:srgbClr val="333333"/>
                 </a:solidFill>
@@ -3719,7 +3719,7 @@
               <a:t> «CREATE FUNCTION fn_precio(p_especie TEXT) RETURNS NUMERIC LANGUAGE plpgsql AS $fn$ ... RETURN v_precio; ... $fn$;» y se usa «SELECT nombre, fn_precio(especie) FROM mascota;». Es la </a:t>
             </a:r>
             <a:r>
-              <a:rPr sz="2000" b="1" i="0">
+              <a:rPr sz="1900" b="1" i="0">
                 <a:solidFill>
                   <a:srgbClr val="333333"/>
                 </a:solidFill>
@@ -3728,7 +3728,7 @@
               <a:t>unica de las dos</a:t>
             </a:r>
             <a:r>
-              <a:rPr sz="2000" b="0" i="0">
+              <a:rPr sz="1900" b="0" i="0">
                 <a:solidFill>
                   <a:srgbClr val="333333"/>
                 </a:solidFill>
@@ -3744,7 +3744,7 @@
               </a:spcAft>
             </a:pPr>
             <a:r>
-              <a:rPr sz="2000" b="0" i="0">
+              <a:rPr sz="1900" b="0" i="0">
                 <a:solidFill>
                   <a:srgbClr val="333333"/>
                 </a:solidFill>
@@ -3753,7 +3753,7 @@
               <a:t>–   </a:t>
             </a:r>
             <a:r>
-              <a:rPr sz="2000" b="1" i="0">
+              <a:rPr sz="1900" b="1" i="0">
                 <a:solidFill>
                   <a:srgbClr val="333333"/>
                 </a:solidFill>
@@ -3762,7 +3762,7 @@
               <a:t>«PROCEDURE»: ejecuta pasos y se invoca como sentencia suelta.</a:t>
             </a:r>
             <a:r>
-              <a:rPr sz="2000" b="0" i="0">
+              <a:rPr sz="1900" b="0" i="0">
                 <a:solidFill>
                   <a:srgbClr val="333333"/>
                 </a:solidFill>
@@ -3771,7 +3771,7 @@
               <a:t> «CALL sp_agendar_cita(3, 7, '2026-09-01 10:00');». </a:t>
             </a:r>
             <a:r>
-              <a:rPr sz="2000" b="1" i="0">
+              <a:rPr sz="1900" b="1" i="0">
                 <a:solidFill>
                   <a:srgbClr val="333333"/>
                 </a:solidFill>
@@ -3780,7 +3780,7 @@
               <a:t>No</a:t>
             </a:r>
             <a:r>
-              <a:rPr sz="2000" b="0" i="0">
+              <a:rPr sz="1900" b="0" i="0">
                 <a:solidFill>
                   <a:srgbClr val="333333"/>
                 </a:solidFill>
@@ -3796,7 +3796,7 @@
               </a:spcAft>
             </a:pPr>
             <a:r>
-              <a:rPr sz="2000" b="0" i="0">
+              <a:rPr sz="1900" b="0" i="0">
                 <a:solidFill>
                   <a:srgbClr val="333333"/>
                 </a:solidFill>
@@ -3805,7 +3805,7 @@
               <a:t>–   </a:t>
             </a:r>
             <a:r>
-              <a:rPr sz="2000" b="1" i="0">
+              <a:rPr sz="1900" b="1" i="0">
                 <a:solidFill>
                   <a:srgbClr val="333333"/>
                 </a:solidFill>
@@ -3814,7 +3814,7 @@
               <a:t>Las dos pueden ser «LANGUAGE plpgsql».</a:t>
             </a:r>
             <a:r>
-              <a:rPr sz="2000" b="0" i="0">
+              <a:rPr sz="1900" b="0" i="0">
                 <a:solidFill>
                   <a:srgbClr val="333333"/>
                 </a:solidFill>
@@ -3830,7 +3830,7 @@
               </a:spcAft>
             </a:pPr>
             <a:r>
-              <a:rPr sz="2000" b="0" i="0">
+              <a:rPr sz="1900" b="0" i="0">
                 <a:solidFill>
                   <a:srgbClr val="333333"/>
                 </a:solidFill>
@@ -3839,7 +3839,7 @@
               <a:t>–   </a:t>
             </a:r>
             <a:r>
-              <a:rPr sz="2000" b="1" i="0">
+              <a:rPr sz="1900" b="1" i="0">
                 <a:solidFill>
                   <a:srgbClr val="333333"/>
                 </a:solidFill>
@@ -3848,7 +3848,7 @@
               <a:t>Un «PROCEDURE» si admite parametros «OUT»</a:t>
             </a:r>
             <a:r>
-              <a:rPr sz="2000" b="0" i="0">
+              <a:rPr sz="1900" b="0" i="0">
                 <a:solidFill>
                   <a:srgbClr val="333333"/>
                 </a:solidFill>
@@ -3857,7 +3857,7 @@
               <a:t> —y aun asi </a:t>
             </a:r>
             <a:r>
-              <a:rPr sz="2000" b="1" i="0">
+              <a:rPr sz="1900" b="1" i="0">
                 <a:solidFill>
                   <a:srgbClr val="333333"/>
                 </a:solidFill>
@@ -3866,7 +3866,7 @@
               <a:t>sigue sin poder usarse dentro de un «SELECT»</a:t>
             </a:r>
             <a:r>
-              <a:rPr sz="2000" b="0" i="0">
+              <a:rPr sz="1900" b="0" i="0">
                 <a:solidFill>
                   <a:srgbClr val="333333"/>
                 </a:solidFill>
@@ -3882,7 +3882,7 @@
               </a:spcAft>
             </a:pPr>
             <a:r>
-              <a:rPr sz="2000" b="0" i="0">
+              <a:rPr sz="1900" b="0" i="0">
                 <a:solidFill>
                   <a:srgbClr val="333333"/>
                 </a:solidFill>
@@ -3891,7 +3891,7 @@
               <a:t>–   </a:t>
             </a:r>
             <a:r>
-              <a:rPr sz="2000" b="1" i="0">
+              <a:rPr sz="1900" b="1" i="0">
                 <a:solidFill>
                   <a:srgbClr val="333333"/>
                 </a:solidFill>
@@ -3900,7 +3900,7 @@
               <a:t>Lo que solo puede el procedimiento: manejar la transaccion.</a:t>
             </a:r>
             <a:r>
-              <a:rPr sz="2000" b="0" i="0">
+              <a:rPr sz="1900" b="0" i="0">
                 <a:solidFill>
                   <a:srgbClr val="333333"/>
                 </a:solidFill>
@@ -3909,7 +3909,7 @@
               <a:t> Un «PROCEDURE» puede hacer «COMMIT» o «ROLLBACK» adentro; una «FUNCTION» corre dentro de la transaccion de quien la llamo. Por eso agendar es procedimiento y </a:t>
             </a:r>
             <a:r>
-              <a:rPr sz="2000" b="1" i="0">
+              <a:rPr sz="1900" b="1" i="0">
                 <a:solidFill>
                   <a:srgbClr val="333333"/>
                 </a:solidFill>
@@ -3918,7 +3918,7 @@
               <a:t>la tarifa de la Clase 4 sera funcion</a:t>
             </a:r>
             <a:r>
-              <a:rPr sz="2000" b="0" i="0">
+              <a:rPr sz="1900" b="0" i="0">
                 <a:solidFill>
                   <a:srgbClr val="333333"/>
                 </a:solidFill>
@@ -10638,7 +10638,7 @@
         <p:spPr>
           <a:xfrm>
             <a:off x="502920" y="2587752"/>
-            <a:ext cx="2164019" cy="2560320"/>
+            <a:ext cx="2164019" cy="3310128"/>
           </a:xfrm>
           <a:prstGeom prst="rect">
             <a:avLst/>
@@ -10753,7 +10753,7 @@
         <p:spPr>
           <a:xfrm>
             <a:off x="2758379" y="2587752"/>
-            <a:ext cx="2164019" cy="2560320"/>
+            <a:ext cx="2164019" cy="3310128"/>
           </a:xfrm>
           <a:prstGeom prst="rect">
             <a:avLst/>
@@ -10868,7 +10868,7 @@
         <p:spPr>
           <a:xfrm>
             <a:off x="5013838" y="2587752"/>
-            <a:ext cx="2164019" cy="2560320"/>
+            <a:ext cx="2164019" cy="3310128"/>
           </a:xfrm>
           <a:prstGeom prst="rect">
             <a:avLst/>
@@ -10983,7 +10983,7 @@
         <p:spPr>
           <a:xfrm>
             <a:off x="7269297" y="2587752"/>
-            <a:ext cx="2164019" cy="2560320"/>
+            <a:ext cx="2164019" cy="3310128"/>
           </a:xfrm>
           <a:prstGeom prst="rect">
             <a:avLst/>
@@ -11098,7 +11098,7 @@
         <p:spPr>
           <a:xfrm>
             <a:off x="9524756" y="2587752"/>
-            <a:ext cx="2164019" cy="2560320"/>
+            <a:ext cx="2164019" cy="3310128"/>
           </a:xfrm>
           <a:prstGeom prst="rect">
             <a:avLst/>
@@ -11132,8 +11132,8 @@
         </p:nvSpPr>
         <p:spPr>
           <a:xfrm>
-            <a:off x="457200" y="5943600"/>
-            <a:ext cx="11277295" cy="365760"/>
+            <a:off x="457200" y="5806440"/>
+            <a:ext cx="11277295" cy="640080"/>
           </a:xfrm>
           <a:prstGeom prst="rect">
             <a:avLst/>
@@ -12383,11 +12383,11 @@
           <a:p>
             <a:pPr>
               <a:spcAft>
-                <a:spcPts val="400"/>
+                <a:spcPts val="342"/>
               </a:spcAft>
             </a:pPr>
             <a:r>
-              <a:rPr sz="1400" b="0" i="0">
+              <a:rPr sz="1200" b="0" i="0">
                 <a:solidFill>
                   <a:srgbClr val="FFFFFF"/>
                 </a:solidFill>
@@ -12399,11 +12399,11 @@
           <a:p>
             <a:pPr>
               <a:spcAft>
-                <a:spcPts val="400"/>
+                <a:spcPts val="342"/>
               </a:spcAft>
             </a:pPr>
             <a:r>
-              <a:rPr sz="1400" b="0" i="0">
+              <a:rPr sz="1200" b="0" i="0">
                 <a:solidFill>
                   <a:srgbClr val="FFFFFF"/>
                 </a:solidFill>
@@ -12415,11 +12415,11 @@
           <a:p>
             <a:pPr>
               <a:spcAft>
-                <a:spcPts val="400"/>
+                <a:spcPts val="342"/>
               </a:spcAft>
             </a:pPr>
             <a:r>
-              <a:rPr sz="1400" b="0" i="0">
+              <a:rPr sz="1200" b="0" i="0">
                 <a:solidFill>
                   <a:srgbClr val="FFFFFF"/>
                 </a:solidFill>
@@ -12431,11 +12431,11 @@
           <a:p>
             <a:pPr>
               <a:spcAft>
-                <a:spcPts val="400"/>
+                <a:spcPts val="342"/>
               </a:spcAft>
             </a:pPr>
             <a:r>
-              <a:rPr sz="1400" b="0" i="0">
+              <a:rPr sz="1200" b="0" i="0">
                 <a:solidFill>
                   <a:srgbClr val="FFFFFF"/>
                 </a:solidFill>
@@ -12447,11 +12447,11 @@
           <a:p>
             <a:pPr>
               <a:spcAft>
-                <a:spcPts val="400"/>
+                <a:spcPts val="342"/>
               </a:spcAft>
             </a:pPr>
             <a:r>
-              <a:rPr sz="1400" b="0" i="0">
+              <a:rPr sz="1200" b="0" i="0">
                 <a:solidFill>
                   <a:srgbClr val="FFFFFF"/>
                 </a:solidFill>
@@ -12463,11 +12463,11 @@
           <a:p>
             <a:pPr>
               <a:spcAft>
-                <a:spcPts val="400"/>
+                <a:spcPts val="342"/>
               </a:spcAft>
             </a:pPr>
             <a:r>
-              <a:rPr sz="1400" b="0" i="0">
+              <a:rPr sz="1200" b="0" i="0">
                 <a:solidFill>
                   <a:srgbClr val="FFFFFF"/>
                 </a:solidFill>
@@ -12479,11 +12479,11 @@
           <a:p>
             <a:pPr>
               <a:spcAft>
-                <a:spcPts val="400"/>
+                <a:spcPts val="342"/>
               </a:spcAft>
             </a:pPr>
             <a:r>
-              <a:rPr sz="1400" b="0" i="0">
+              <a:rPr sz="1200" b="0" i="0">
                 <a:solidFill>
                   <a:srgbClr val="FFFFFF"/>
                 </a:solidFill>
@@ -12495,11 +12495,11 @@
           <a:p>
             <a:pPr>
               <a:spcAft>
-                <a:spcPts val="400"/>
+                <a:spcPts val="342"/>
               </a:spcAft>
             </a:pPr>
             <a:r>
-              <a:rPr sz="1400" b="0" i="0">
+              <a:rPr sz="1200" b="0" i="0">
                 <a:solidFill>
                   <a:srgbClr val="FFFFFF"/>
                 </a:solidFill>
@@ -12511,11 +12511,11 @@
           <a:p>
             <a:pPr>
               <a:spcAft>
-                <a:spcPts val="400"/>
+                <a:spcPts val="342"/>
               </a:spcAft>
             </a:pPr>
             <a:r>
-              <a:rPr sz="1400" b="0" i="0">
+              <a:rPr sz="1200" b="0" i="0">
                 <a:solidFill>
                   <a:srgbClr val="FFFFFF"/>
                 </a:solidFill>
@@ -12527,11 +12527,11 @@
           <a:p>
             <a:pPr>
               <a:spcAft>
-                <a:spcPts val="400"/>
+                <a:spcPts val="342"/>
               </a:spcAft>
             </a:pPr>
             <a:r>
-              <a:rPr sz="1400" b="0" i="0">
+              <a:rPr sz="1200" b="0" i="0">
                 <a:solidFill>
                   <a:srgbClr val="FFFFFF"/>
                 </a:solidFill>
@@ -12543,11 +12543,11 @@
           <a:p>
             <a:pPr>
               <a:spcAft>
-                <a:spcPts val="400"/>
+                <a:spcPts val="342"/>
               </a:spcAft>
             </a:pPr>
             <a:r>
-              <a:rPr sz="1400" b="0" i="0">
+              <a:rPr sz="1200" b="0" i="0">
                 <a:solidFill>
                   <a:srgbClr val="FFFFFF"/>
                 </a:solidFill>
@@ -12559,11 +12559,11 @@
           <a:p>
             <a:pPr>
               <a:spcAft>
-                <a:spcPts val="400"/>
+                <a:spcPts val="342"/>
               </a:spcAft>
             </a:pPr>
             <a:r>
-              <a:rPr sz="1400" b="0" i="0">
+              <a:rPr sz="1200" b="0" i="0">
                 <a:solidFill>
                   <a:srgbClr val="FFFFFF"/>
                 </a:solidFill>
@@ -12575,11 +12575,11 @@
           <a:p>
             <a:pPr>
               <a:spcAft>
-                <a:spcPts val="400"/>
+                <a:spcPts val="342"/>
               </a:spcAft>
             </a:pPr>
             <a:r>
-              <a:rPr sz="1400" b="0" i="0">
+              <a:rPr sz="1200" b="0" i="0">
                 <a:solidFill>
                   <a:srgbClr val="FFFFFF"/>
                 </a:solidFill>
@@ -12591,11 +12591,11 @@
           <a:p>
             <a:pPr>
               <a:spcAft>
-                <a:spcPts val="400"/>
+                <a:spcPts val="342"/>
               </a:spcAft>
             </a:pPr>
             <a:r>
-              <a:rPr sz="1400" b="0" i="0">
+              <a:rPr sz="1200" b="0" i="0">
                 <a:solidFill>
                   <a:srgbClr val="FFFFFF"/>
                 </a:solidFill>
@@ -12607,11 +12607,11 @@
           <a:p>
             <a:pPr>
               <a:spcAft>
-                <a:spcPts val="400"/>
+                <a:spcPts val="342"/>
               </a:spcAft>
             </a:pPr>
             <a:r>
-              <a:rPr sz="1400" b="0" i="0">
+              <a:rPr sz="1200" b="0" i="0">
                 <a:solidFill>
                   <a:srgbClr val="FFFFFF"/>
                 </a:solidFill>
@@ -12623,11 +12623,11 @@
           <a:p>
             <a:pPr>
               <a:spcAft>
-                <a:spcPts val="400"/>
+                <a:spcPts val="342"/>
               </a:spcAft>
             </a:pPr>
             <a:r>
-              <a:rPr sz="1400" b="0" i="0">
+              <a:rPr sz="1200" b="0" i="0">
                 <a:solidFill>
                   <a:srgbClr val="FFFFFF"/>
                 </a:solidFill>
@@ -12639,11 +12639,11 @@
           <a:p>
             <a:pPr>
               <a:spcAft>
-                <a:spcPts val="400"/>
+                <a:spcPts val="342"/>
               </a:spcAft>
             </a:pPr>
             <a:r>
-              <a:rPr sz="1400" b="0" i="0">
+              <a:rPr sz="1200" b="0" i="0">
                 <a:solidFill>
                   <a:srgbClr val="FFFFFF"/>
                 </a:solidFill>

--- a/Bases de Datos II/Clases/Clase 3 - Procedimientos almacenados/Presentacion.pptx
+++ b/Bases de Datos II/Clases/Clase 3 - Procedimientos almacenados/Presentacion.pptx
@@ -4162,7 +4162,7 @@
                 </a:solidFill>
                 <a:latin typeface="Calibri"/>
               </a:rPr>
-              <a:t> ExamLab (PostgreSQL) + Google Docs</a:t>
+              <a:t> PostgreSQL en el navegador + Google Docs</a:t>
             </a:r>
           </a:p>
           <a:p>
@@ -4196,7 +4196,7 @@
                 </a:solidFill>
                 <a:latin typeface="Calibri"/>
               </a:rPr>
-              <a:t> sp_agendar_cita en PL/pgSQL dentro de ExamLab: las 3 validaciones con RAISE EXCEPTION y la bateria de bloques DO que las prueba.</a:t>
+              <a:t> sp_agendar_cita en PL/pgSQL dentro de la plataforma del curso: las 3 validaciones con RAISE EXCEPTION y la bateria de bloques DO que las prueba.</a:t>
             </a:r>
           </a:p>
           <a:p>
@@ -4631,7 +4631,7 @@
                 </a:solidFill>
                 <a:latin typeface="Calibri"/>
               </a:rPr>
-              <a:t>ExamLab</a:t>
+              <a:t>la plataforma del curso</a:t>
             </a:r>
           </a:p>
           <a:p>
@@ -5785,7 +5785,7 @@
                 </a:solidFill>
                 <a:latin typeface="Calibri"/>
               </a:rPr>
-              <a:t> Dos procedimientos de negocio en PL/pgSQL corriendo en ExamLab, su batería de pruebas con evidencia, y el contrato de los dos documentado.</a:t>
+              <a:t> Dos procedimientos de negocio en PL/pgSQL corriendo en la plataforma del curso, su batería de pruebas con evidencia, y el contrato de los dos documentado.</a:t>
             </a:r>
           </a:p>
           <a:p>
@@ -6043,7 +6043,7 @@
                 </a:solidFill>
                 <a:latin typeface="Calibri"/>
               </a:rPr>
-              <a:t> Entrega domingo 23:59.</a:t>
+              <a:t> Entrega en la fecha que indique el docente.</a:t>
             </a:r>
           </a:p>
         </p:txBody>
@@ -6403,7 +6403,7 @@
                 </a:solidFill>
                 <a:latin typeface="Calibri"/>
               </a:rPr>
-              <a:t> PostgreSQL dentro de ExamLab. El molde es «CREATE PROCEDURE ... LANGUAGE plpgsql AS $proc$ ... $proc$;» — no hay «IS», ni «VARCHAR2», ni «/» final.</a:t>
+              <a:t> PostgreSQL dentro de la plataforma del curso. El molde es «CREATE PROCEDURE ... LANGUAGE plpgsql AS $proc$ ... $proc$;» — no hay «IS», ni «VARCHAR2», ni «/» final.</a:t>
             </a:r>
           </a:p>
           <a:p>
@@ -6755,7 +6755,7 @@
                 </a:solidFill>
                 <a:latin typeface="Calibri"/>
               </a:rPr>
-              <a:t>Escribir sp_agendar_cita en PL/pgSQL y ejecutarlo en ExamLab (LANGUAGE plpgsql, dollar-quoting, sin sintaxis de Oracle).</a:t>
+              <a:t>Escribir sp_agendar_cita en PL/pgSQL y ejecutarlo en la plataforma del curso (LANGUAGE plpgsql, dollar-quoting, sin sintaxis de Oracle).</a:t>
             </a:r>
           </a:p>
         </p:txBody>
@@ -9039,7 +9039,7 @@
                 </a:solidFill>
                 <a:latin typeface="Calibri"/>
               </a:rPr>
-              <a:t> 2 procedimientos en PL/pgSQL corriendo en ExamLab + bateria de pruebas con su tabla resultado_prueba + contrato del proc (6 bloques)</a:t>
+              <a:t> 2 procedimientos en PL/pgSQL corriendo en la plataforma del curso + bateria de pruebas con su tabla resultado_prueba + contrato del proc (6 bloques)</a:t>
             </a:r>
           </a:p>
           <a:p>
@@ -9055,7 +9055,7 @@
                 </a:solidFill>
                 <a:latin typeface="Calibri"/>
               </a:rPr>
-              <a:t>–   Evidencia: el SQL y su salida quedan guardados en cada pregunta de ExamLab.</a:t>
+              <a:t>–   Evidencia: el SQL y su salida quedan guardados en cada pregunta de la plataforma del curso.</a:t>
             </a:r>
           </a:p>
           <a:p>
@@ -9112,7 +9112,7 @@
                 </a:solidFill>
                 <a:latin typeface="Calibri"/>
               </a:rPr>
-              <a:t>Entrega en ExamLab</a:t>
+              <a:t>Entrega en la plataforma del curso</a:t>
             </a:r>
             <a:r>
               <a:rPr sz="2000" b="0" i="0">
@@ -9121,7 +9121,7 @@
                 </a:solidFill>
                 <a:latin typeface="Calibri"/>
               </a:rPr>
-              <a:t> (https://uniaj.examlab.workers.dev/) — domingo 23:59 cuando aplique taller.</a:t>
+              <a:t> — en la fecha que indique el docente.</a:t>
             </a:r>
           </a:p>
         </p:txBody>
@@ -9716,7 +9716,7 @@
                 </a:solidFill>
                 <a:latin typeface="Calibri"/>
               </a:rPr>
-              <a:t>Taller de la semana en ExamLab (https://uniaj.examlab.workers.dev/): domingo 23:59 (regla del Acuerdo) cuando aplique.</a:t>
+              <a:t>Si el docente asigna taller esta semana, él indica el canal y la fecha.</a:t>
             </a:r>
           </a:p>
         </p:txBody>
@@ -9979,7 +9979,7 @@
                 </a:solidFill>
                 <a:latin typeface="Calibri"/>
               </a:rPr>
-              <a:t>ExamLab (PostgreSQL) + Google Docs</a:t>
+              <a:t>PostgreSQL en el navegador + Google Docs</a:t>
             </a:r>
             <a:r>
               <a:rPr sz="2000" b="0" i="0">
@@ -10040,7 +10040,7 @@
                 </a:solidFill>
                 <a:latin typeface="Calibri"/>
               </a:rPr>
-              <a:t> 2 procedimientos en PL/pgSQL corriendo en ExamLab + bateria de pruebas con su tabla resultado_prueba + contrato del proc (6 bloques)</a:t>
+              <a:t> 2 procedimientos en PL/pgSQL corriendo en la plataforma del curso + bateria de pruebas con su tabla resultado_prueba + contrato del proc (6 bloques)</a:t>
             </a:r>
           </a:p>
           <a:p>
@@ -10304,7 +10304,7 @@
                 </a:solidFill>
                 <a:latin typeface="Calibri"/>
               </a:rPr>
-              <a:t>Entregable: 2 procedimientos en PL/pgSQL corriendo en ExamLab + bateria de pruebas con su tabla resultado_prueba + contrato del proc (6 bloques)</a:t>
+              <a:t>Entregable: 2 procedimientos en PL/pgSQL corriendo en la plataforma del curso + bateria de pruebas con su tabla resultado_prueba + contrato del proc (6 bloques)</a:t>
             </a:r>
           </a:p>
           <a:p>
